--- a/dkw-po-presentation.pptx
+++ b/dkw-po-presentation.pptx
@@ -4,8 +4,17 @@
   <p:sldMasterIdLst>
     <p:sldMasterId id="2147483648" r:id="rId1"/>
   </p:sldMasterIdLst>
+  <p:notesMasterIdLst>
+    <p:notesMasterId r:id="rId6"/>
+  </p:notesMasterIdLst>
+  <p:handoutMasterIdLst>
+    <p:handoutMasterId r:id="rId7"/>
+  </p:handoutMasterIdLst>
   <p:sldIdLst>
     <p:sldId id="256" r:id="rId2"/>
+    <p:sldId id="258" r:id="rId3"/>
+    <p:sldId id="259" r:id="rId4"/>
+    <p:sldId id="260" r:id="rId5"/>
   </p:sldIdLst>
   <p:sldSz cx="12192000" cy="6858000"/>
   <p:notesSz cx="6858000" cy="9144000"/>
@@ -104,7 +113,552 @@
       </a:defRPr>
     </a:lvl9pPr>
   </p:defaultTextStyle>
+  <p:extLst>
+    <p:ext uri="{EFAFB233-063F-42B5-8137-9DF3F51BA10A}">
+      <p15:sldGuideLst xmlns:p15="http://schemas.microsoft.com/office/powerpoint/2012/main"/>
+    </p:ext>
+  </p:extLst>
 </p:presentation>
+</file>
+
+<file path=ppt/handoutMasters/handoutMaster1.xml><?xml version="1.0" encoding="utf-8"?>
+<p:handoutMaster xmlns:a="http://schemas.openxmlformats.org/drawingml/2006/main" xmlns:r="http://schemas.openxmlformats.org/officeDocument/2006/relationships" xmlns:p="http://schemas.openxmlformats.org/presentationml/2006/main">
+  <p:cSld>
+    <p:bg>
+      <p:bgRef idx="1001">
+        <a:schemeClr val="bg1"/>
+      </p:bgRef>
+    </p:bg>
+    <p:spTree>
+      <p:nvGrpSpPr>
+        <p:cNvPr id="1" name=""/>
+        <p:cNvGrpSpPr/>
+        <p:nvPr/>
+      </p:nvGrpSpPr>
+      <p:grpSpPr>
+        <a:xfrm>
+          <a:off x="0" y="0"/>
+          <a:ext cx="0" cy="0"/>
+          <a:chOff x="0" y="0"/>
+          <a:chExt cx="0" cy="0"/>
+        </a:xfrm>
+      </p:grpSpPr>
+      <p:sp>
+        <p:nvSpPr>
+          <p:cNvPr id="2" name="Header Placeholder 1">
+            <a:extLst>
+              <a:ext uri="{FF2B5EF4-FFF2-40B4-BE49-F238E27FC236}">
+                <a16:creationId xmlns:a16="http://schemas.microsoft.com/office/drawing/2014/main" id="{7221F08D-F7C5-9E8C-D733-E26542EB1E94}"/>
+              </a:ext>
+            </a:extLst>
+          </p:cNvPr>
+          <p:cNvSpPr>
+            <a:spLocks noGrp="1"/>
+          </p:cNvSpPr>
+          <p:nvPr>
+            <p:ph type="hdr" sz="quarter"/>
+          </p:nvPr>
+        </p:nvSpPr>
+        <p:spPr>
+          <a:xfrm>
+            <a:off x="0" y="0"/>
+            <a:ext cx="2971800" cy="458788"/>
+          </a:xfrm>
+          <a:prstGeom prst="rect">
+            <a:avLst/>
+          </a:prstGeom>
+        </p:spPr>
+        <p:txBody>
+          <a:bodyPr vert="horz" lIns="91440" tIns="45720" rIns="91440" bIns="45720" rtlCol="0"/>
+          <a:lstStyle>
+            <a:lvl1pPr algn="l">
+              <a:defRPr sz="1200"/>
+            </a:lvl1pPr>
+          </a:lstStyle>
+          <a:p>
+            <a:endParaRPr lang="en-US"/>
+          </a:p>
+        </p:txBody>
+      </p:sp>
+      <p:sp>
+        <p:nvSpPr>
+          <p:cNvPr id="3" name="Date Placeholder 2">
+            <a:extLst>
+              <a:ext uri="{FF2B5EF4-FFF2-40B4-BE49-F238E27FC236}">
+                <a16:creationId xmlns:a16="http://schemas.microsoft.com/office/drawing/2014/main" id="{4D3AF510-B094-B121-4ECD-AEAEC4317884}"/>
+              </a:ext>
+            </a:extLst>
+          </p:cNvPr>
+          <p:cNvSpPr>
+            <a:spLocks noGrp="1"/>
+          </p:cNvSpPr>
+          <p:nvPr>
+            <p:ph type="dt" sz="quarter" idx="1"/>
+          </p:nvPr>
+        </p:nvSpPr>
+        <p:spPr>
+          <a:xfrm>
+            <a:off x="3884613" y="0"/>
+            <a:ext cx="2971800" cy="458788"/>
+          </a:xfrm>
+          <a:prstGeom prst="rect">
+            <a:avLst/>
+          </a:prstGeom>
+        </p:spPr>
+        <p:txBody>
+          <a:bodyPr vert="horz" lIns="91440" tIns="45720" rIns="91440" bIns="45720" rtlCol="0"/>
+          <a:lstStyle>
+            <a:lvl1pPr algn="r">
+              <a:defRPr sz="1200"/>
+            </a:lvl1pPr>
+          </a:lstStyle>
+          <a:p>
+            <a:fld id="{0CFD9757-4B1A-0E4F-89E3-8F5F12898BA4}" type="datetimeFigureOut">
+              <a:rPr lang="en-US" smtClean="0"/>
+              <a:t>11/20/25</a:t>
+            </a:fld>
+            <a:endParaRPr lang="en-US"/>
+          </a:p>
+        </p:txBody>
+      </p:sp>
+      <p:sp>
+        <p:nvSpPr>
+          <p:cNvPr id="4" name="Footer Placeholder 3">
+            <a:extLst>
+              <a:ext uri="{FF2B5EF4-FFF2-40B4-BE49-F238E27FC236}">
+                <a16:creationId xmlns:a16="http://schemas.microsoft.com/office/drawing/2014/main" id="{6C386E4D-012B-813C-231A-32D3D7FD8AE1}"/>
+              </a:ext>
+            </a:extLst>
+          </p:cNvPr>
+          <p:cNvSpPr>
+            <a:spLocks noGrp="1"/>
+          </p:cNvSpPr>
+          <p:nvPr>
+            <p:ph type="ftr" sz="quarter" idx="2"/>
+          </p:nvPr>
+        </p:nvSpPr>
+        <p:spPr>
+          <a:xfrm>
+            <a:off x="0" y="8685213"/>
+            <a:ext cx="2971800" cy="458787"/>
+          </a:xfrm>
+          <a:prstGeom prst="rect">
+            <a:avLst/>
+          </a:prstGeom>
+        </p:spPr>
+        <p:txBody>
+          <a:bodyPr vert="horz" lIns="91440" tIns="45720" rIns="91440" bIns="45720" rtlCol="0" anchor="b"/>
+          <a:lstStyle>
+            <a:lvl1pPr algn="l">
+              <a:defRPr sz="1200"/>
+            </a:lvl1pPr>
+          </a:lstStyle>
+          <a:p>
+            <a:endParaRPr lang="en-US"/>
+          </a:p>
+        </p:txBody>
+      </p:sp>
+      <p:sp>
+        <p:nvSpPr>
+          <p:cNvPr id="5" name="Slide Number Placeholder 4">
+            <a:extLst>
+              <a:ext uri="{FF2B5EF4-FFF2-40B4-BE49-F238E27FC236}">
+                <a16:creationId xmlns:a16="http://schemas.microsoft.com/office/drawing/2014/main" id="{0361C1C1-AF8F-98B7-0CB9-FAC9EF57859A}"/>
+              </a:ext>
+            </a:extLst>
+          </p:cNvPr>
+          <p:cNvSpPr>
+            <a:spLocks noGrp="1"/>
+          </p:cNvSpPr>
+          <p:nvPr>
+            <p:ph type="sldNum" sz="quarter" idx="3"/>
+          </p:nvPr>
+        </p:nvSpPr>
+        <p:spPr>
+          <a:xfrm>
+            <a:off x="3884613" y="8685213"/>
+            <a:ext cx="2971800" cy="458787"/>
+          </a:xfrm>
+          <a:prstGeom prst="rect">
+            <a:avLst/>
+          </a:prstGeom>
+        </p:spPr>
+        <p:txBody>
+          <a:bodyPr vert="horz" lIns="91440" tIns="45720" rIns="91440" bIns="45720" rtlCol="0" anchor="b"/>
+          <a:lstStyle>
+            <a:lvl1pPr algn="r">
+              <a:defRPr sz="1200"/>
+            </a:lvl1pPr>
+          </a:lstStyle>
+          <a:p>
+            <a:fld id="{5B8EE53C-49CA-8349-AD45-AC98A67B6AA0}" type="slidenum">
+              <a:rPr lang="en-US" smtClean="0"/>
+              <a:t>‹#›</a:t>
+            </a:fld>
+            <a:endParaRPr lang="en-US"/>
+          </a:p>
+        </p:txBody>
+      </p:sp>
+    </p:spTree>
+    <p:extLst>
+      <p:ext uri="{BB962C8B-B14F-4D97-AF65-F5344CB8AC3E}">
+        <p14:creationId xmlns:p14="http://schemas.microsoft.com/office/powerpoint/2010/main" val="1988112645"/>
+      </p:ext>
+    </p:extLst>
+  </p:cSld>
+  <p:clrMap bg1="lt1" tx1="dk1" bg2="lt2" tx2="dk2" accent1="accent1" accent2="accent2" accent3="accent3" accent4="accent4" accent5="accent5" accent6="accent6" hlink="hlink" folHlink="folHlink"/>
+  <p:hf hdr="0" dt="0"/>
+</p:handoutMaster>
+</file>
+
+<file path=ppt/notesMasters/notesMaster1.xml><?xml version="1.0" encoding="utf-8"?>
+<p:notesMaster xmlns:a="http://schemas.openxmlformats.org/drawingml/2006/main" xmlns:r="http://schemas.openxmlformats.org/officeDocument/2006/relationships" xmlns:p="http://schemas.openxmlformats.org/presentationml/2006/main">
+  <p:cSld>
+    <p:bg>
+      <p:bgRef idx="1001">
+        <a:schemeClr val="bg1"/>
+      </p:bgRef>
+    </p:bg>
+    <p:spTree>
+      <p:nvGrpSpPr>
+        <p:cNvPr id="1" name=""/>
+        <p:cNvGrpSpPr/>
+        <p:nvPr/>
+      </p:nvGrpSpPr>
+      <p:grpSpPr>
+        <a:xfrm>
+          <a:off x="0" y="0"/>
+          <a:ext cx="0" cy="0"/>
+          <a:chOff x="0" y="0"/>
+          <a:chExt cx="0" cy="0"/>
+        </a:xfrm>
+      </p:grpSpPr>
+      <p:sp>
+        <p:nvSpPr>
+          <p:cNvPr id="2" name="Header Placeholder 1"/>
+          <p:cNvSpPr>
+            <a:spLocks noGrp="1"/>
+          </p:cNvSpPr>
+          <p:nvPr>
+            <p:ph type="hdr" sz="quarter"/>
+          </p:nvPr>
+        </p:nvSpPr>
+        <p:spPr>
+          <a:xfrm>
+            <a:off x="0" y="0"/>
+            <a:ext cx="2971800" cy="458788"/>
+          </a:xfrm>
+          <a:prstGeom prst="rect">
+            <a:avLst/>
+          </a:prstGeom>
+        </p:spPr>
+        <p:txBody>
+          <a:bodyPr vert="horz" lIns="91440" tIns="45720" rIns="91440" bIns="45720" rtlCol="0"/>
+          <a:lstStyle>
+            <a:lvl1pPr algn="l">
+              <a:defRPr sz="1200"/>
+            </a:lvl1pPr>
+          </a:lstStyle>
+          <a:p>
+            <a:endParaRPr lang="en-US"/>
+          </a:p>
+        </p:txBody>
+      </p:sp>
+      <p:sp>
+        <p:nvSpPr>
+          <p:cNvPr id="3" name="Date Placeholder 2"/>
+          <p:cNvSpPr>
+            <a:spLocks noGrp="1"/>
+          </p:cNvSpPr>
+          <p:nvPr>
+            <p:ph type="dt" idx="1"/>
+          </p:nvPr>
+        </p:nvSpPr>
+        <p:spPr>
+          <a:xfrm>
+            <a:off x="3884613" y="0"/>
+            <a:ext cx="2971800" cy="458788"/>
+          </a:xfrm>
+          <a:prstGeom prst="rect">
+            <a:avLst/>
+          </a:prstGeom>
+        </p:spPr>
+        <p:txBody>
+          <a:bodyPr vert="horz" lIns="91440" tIns="45720" rIns="91440" bIns="45720" rtlCol="0"/>
+          <a:lstStyle>
+            <a:lvl1pPr algn="r">
+              <a:defRPr sz="1200"/>
+            </a:lvl1pPr>
+          </a:lstStyle>
+          <a:p>
+            <a:fld id="{9B4CEB37-F9F0-454B-AC5E-47C8AC4823F6}" type="datetimeFigureOut">
+              <a:rPr lang="en-US" smtClean="0"/>
+              <a:t>11/20/25</a:t>
+            </a:fld>
+            <a:endParaRPr lang="en-US"/>
+          </a:p>
+        </p:txBody>
+      </p:sp>
+      <p:sp>
+        <p:nvSpPr>
+          <p:cNvPr id="4" name="Slide Image Placeholder 3"/>
+          <p:cNvSpPr>
+            <a:spLocks noGrp="1" noRot="1" noChangeAspect="1"/>
+          </p:cNvSpPr>
+          <p:nvPr>
+            <p:ph type="sldImg" idx="2"/>
+          </p:nvPr>
+        </p:nvSpPr>
+        <p:spPr>
+          <a:xfrm>
+            <a:off x="685800" y="1143000"/>
+            <a:ext cx="5486400" cy="3086100"/>
+          </a:xfrm>
+          <a:prstGeom prst="rect">
+            <a:avLst/>
+          </a:prstGeom>
+          <a:noFill/>
+          <a:ln w="12700">
+            <a:solidFill>
+              <a:prstClr val="black"/>
+            </a:solidFill>
+          </a:ln>
+        </p:spPr>
+        <p:txBody>
+          <a:bodyPr vert="horz" lIns="91440" tIns="45720" rIns="91440" bIns="45720" rtlCol="0" anchor="ctr"/>
+          <a:lstStyle/>
+          <a:p>
+            <a:endParaRPr lang="en-US"/>
+          </a:p>
+        </p:txBody>
+      </p:sp>
+      <p:sp>
+        <p:nvSpPr>
+          <p:cNvPr id="5" name="Notes Placeholder 4"/>
+          <p:cNvSpPr>
+            <a:spLocks noGrp="1"/>
+          </p:cNvSpPr>
+          <p:nvPr>
+            <p:ph type="body" sz="quarter" idx="3"/>
+          </p:nvPr>
+        </p:nvSpPr>
+        <p:spPr>
+          <a:xfrm>
+            <a:off x="685800" y="4400550"/>
+            <a:ext cx="5486400" cy="3600450"/>
+          </a:xfrm>
+          <a:prstGeom prst="rect">
+            <a:avLst/>
+          </a:prstGeom>
+        </p:spPr>
+        <p:txBody>
+          <a:bodyPr vert="horz" lIns="91440" tIns="45720" rIns="91440" bIns="45720" rtlCol="0"/>
+          <a:lstStyle/>
+          <a:p>
+            <a:pPr lvl="0"/>
+            <a:r>
+              <a:rPr lang="en-US"/>
+              <a:t>Click to edit Master text styles</a:t>
+            </a:r>
+          </a:p>
+          <a:p>
+            <a:pPr lvl="1"/>
+            <a:r>
+              <a:rPr lang="en-US"/>
+              <a:t>Second level</a:t>
+            </a:r>
+          </a:p>
+          <a:p>
+            <a:pPr lvl="2"/>
+            <a:r>
+              <a:rPr lang="en-US"/>
+              <a:t>Third level</a:t>
+            </a:r>
+          </a:p>
+          <a:p>
+            <a:pPr lvl="3"/>
+            <a:r>
+              <a:rPr lang="en-US"/>
+              <a:t>Fourth level</a:t>
+            </a:r>
+          </a:p>
+          <a:p>
+            <a:pPr lvl="4"/>
+            <a:r>
+              <a:rPr lang="en-US"/>
+              <a:t>Fifth level</a:t>
+            </a:r>
+          </a:p>
+        </p:txBody>
+      </p:sp>
+      <p:sp>
+        <p:nvSpPr>
+          <p:cNvPr id="6" name="Footer Placeholder 5"/>
+          <p:cNvSpPr>
+            <a:spLocks noGrp="1"/>
+          </p:cNvSpPr>
+          <p:nvPr>
+            <p:ph type="ftr" sz="quarter" idx="4"/>
+          </p:nvPr>
+        </p:nvSpPr>
+        <p:spPr>
+          <a:xfrm>
+            <a:off x="0" y="8685213"/>
+            <a:ext cx="2971800" cy="458787"/>
+          </a:xfrm>
+          <a:prstGeom prst="rect">
+            <a:avLst/>
+          </a:prstGeom>
+        </p:spPr>
+        <p:txBody>
+          <a:bodyPr vert="horz" lIns="91440" tIns="45720" rIns="91440" bIns="45720" rtlCol="0" anchor="b"/>
+          <a:lstStyle>
+            <a:lvl1pPr algn="l">
+              <a:defRPr sz="1200"/>
+            </a:lvl1pPr>
+          </a:lstStyle>
+          <a:p>
+            <a:endParaRPr lang="en-US"/>
+          </a:p>
+        </p:txBody>
+      </p:sp>
+      <p:sp>
+        <p:nvSpPr>
+          <p:cNvPr id="7" name="Slide Number Placeholder 6"/>
+          <p:cNvSpPr>
+            <a:spLocks noGrp="1"/>
+          </p:cNvSpPr>
+          <p:nvPr>
+            <p:ph type="sldNum" sz="quarter" idx="5"/>
+          </p:nvPr>
+        </p:nvSpPr>
+        <p:spPr>
+          <a:xfrm>
+            <a:off x="3884613" y="8685213"/>
+            <a:ext cx="2971800" cy="458787"/>
+          </a:xfrm>
+          <a:prstGeom prst="rect">
+            <a:avLst/>
+          </a:prstGeom>
+        </p:spPr>
+        <p:txBody>
+          <a:bodyPr vert="horz" lIns="91440" tIns="45720" rIns="91440" bIns="45720" rtlCol="0" anchor="b"/>
+          <a:lstStyle>
+            <a:lvl1pPr algn="r">
+              <a:defRPr sz="1200"/>
+            </a:lvl1pPr>
+          </a:lstStyle>
+          <a:p>
+            <a:fld id="{03AA6449-B4E2-C645-848C-300099813942}" type="slidenum">
+              <a:rPr lang="en-US" smtClean="0"/>
+              <a:t>‹#›</a:t>
+            </a:fld>
+            <a:endParaRPr lang="en-US"/>
+          </a:p>
+        </p:txBody>
+      </p:sp>
+    </p:spTree>
+    <p:extLst>
+      <p:ext uri="{BB962C8B-B14F-4D97-AF65-F5344CB8AC3E}">
+        <p14:creationId xmlns:p14="http://schemas.microsoft.com/office/powerpoint/2010/main" val="750624392"/>
+      </p:ext>
+    </p:extLst>
+  </p:cSld>
+  <p:clrMap bg1="lt1" tx1="dk1" bg2="lt2" tx2="dk2" accent1="accent1" accent2="accent2" accent3="accent3" accent4="accent4" accent5="accent5" accent6="accent6" hlink="hlink" folHlink="folHlink"/>
+  <p:hf hdr="0" dt="0"/>
+  <p:notesStyle>
+    <a:lvl1pPr marL="0" algn="l" defTabSz="914400" rtl="0" eaLnBrk="1" latinLnBrk="0" hangingPunct="1">
+      <a:defRPr sz="1200" kern="1200">
+        <a:solidFill>
+          <a:schemeClr val="tx1"/>
+        </a:solidFill>
+        <a:latin typeface="+mn-lt"/>
+        <a:ea typeface="+mn-ea"/>
+        <a:cs typeface="+mn-cs"/>
+      </a:defRPr>
+    </a:lvl1pPr>
+    <a:lvl2pPr marL="457200" algn="l" defTabSz="914400" rtl="0" eaLnBrk="1" latinLnBrk="0" hangingPunct="1">
+      <a:defRPr sz="1200" kern="1200">
+        <a:solidFill>
+          <a:schemeClr val="tx1"/>
+        </a:solidFill>
+        <a:latin typeface="+mn-lt"/>
+        <a:ea typeface="+mn-ea"/>
+        <a:cs typeface="+mn-cs"/>
+      </a:defRPr>
+    </a:lvl2pPr>
+    <a:lvl3pPr marL="914400" algn="l" defTabSz="914400" rtl="0" eaLnBrk="1" latinLnBrk="0" hangingPunct="1">
+      <a:defRPr sz="1200" kern="1200">
+        <a:solidFill>
+          <a:schemeClr val="tx1"/>
+        </a:solidFill>
+        <a:latin typeface="+mn-lt"/>
+        <a:ea typeface="+mn-ea"/>
+        <a:cs typeface="+mn-cs"/>
+      </a:defRPr>
+    </a:lvl3pPr>
+    <a:lvl4pPr marL="1371600" algn="l" defTabSz="914400" rtl="0" eaLnBrk="1" latinLnBrk="0" hangingPunct="1">
+      <a:defRPr sz="1200" kern="1200">
+        <a:solidFill>
+          <a:schemeClr val="tx1"/>
+        </a:solidFill>
+        <a:latin typeface="+mn-lt"/>
+        <a:ea typeface="+mn-ea"/>
+        <a:cs typeface="+mn-cs"/>
+      </a:defRPr>
+    </a:lvl4pPr>
+    <a:lvl5pPr marL="1828800" algn="l" defTabSz="914400" rtl="0" eaLnBrk="1" latinLnBrk="0" hangingPunct="1">
+      <a:defRPr sz="1200" kern="1200">
+        <a:solidFill>
+          <a:schemeClr val="tx1"/>
+        </a:solidFill>
+        <a:latin typeface="+mn-lt"/>
+        <a:ea typeface="+mn-ea"/>
+        <a:cs typeface="+mn-cs"/>
+      </a:defRPr>
+    </a:lvl5pPr>
+    <a:lvl6pPr marL="2286000" algn="l" defTabSz="914400" rtl="0" eaLnBrk="1" latinLnBrk="0" hangingPunct="1">
+      <a:defRPr sz="1200" kern="1200">
+        <a:solidFill>
+          <a:schemeClr val="tx1"/>
+        </a:solidFill>
+        <a:latin typeface="+mn-lt"/>
+        <a:ea typeface="+mn-ea"/>
+        <a:cs typeface="+mn-cs"/>
+      </a:defRPr>
+    </a:lvl6pPr>
+    <a:lvl7pPr marL="2743200" algn="l" defTabSz="914400" rtl="0" eaLnBrk="1" latinLnBrk="0" hangingPunct="1">
+      <a:defRPr sz="1200" kern="1200">
+        <a:solidFill>
+          <a:schemeClr val="tx1"/>
+        </a:solidFill>
+        <a:latin typeface="+mn-lt"/>
+        <a:ea typeface="+mn-ea"/>
+        <a:cs typeface="+mn-cs"/>
+      </a:defRPr>
+    </a:lvl7pPr>
+    <a:lvl8pPr marL="3200400" algn="l" defTabSz="914400" rtl="0" eaLnBrk="1" latinLnBrk="0" hangingPunct="1">
+      <a:defRPr sz="1200" kern="1200">
+        <a:solidFill>
+          <a:schemeClr val="tx1"/>
+        </a:solidFill>
+        <a:latin typeface="+mn-lt"/>
+        <a:ea typeface="+mn-ea"/>
+        <a:cs typeface="+mn-cs"/>
+      </a:defRPr>
+    </a:lvl8pPr>
+    <a:lvl9pPr marL="3657600" algn="l" defTabSz="914400" rtl="0" eaLnBrk="1" latinLnBrk="0" hangingPunct="1">
+      <a:defRPr sz="1200" kern="1200">
+        <a:solidFill>
+          <a:schemeClr val="tx1"/>
+        </a:solidFill>
+        <a:latin typeface="+mn-lt"/>
+        <a:ea typeface="+mn-ea"/>
+        <a:cs typeface="+mn-cs"/>
+      </a:defRPr>
+    </a:lvl9pPr>
+  </p:notesStyle>
+</p:notesMaster>
 </file>
 
 <file path=ppt/slideLayouts/slideLayout1.xml><?xml version="1.0" encoding="utf-8"?>
@@ -252,9 +806,9 @@
           <a:bodyPr/>
           <a:lstStyle/>
           <a:p>
-            <a:fld id="{91C689E5-3379-C745-B1EE-BFD2D27C1BCC}" type="datetimeFigureOut">
+            <a:fld id="{6C935C2D-25BC-6348-9FCD-01C420686923}" type="datetime1">
               <a:rPr lang="en-US" smtClean="0"/>
-              <a:t>11/17/25</a:t>
+              <a:t>11/20/25</a:t>
             </a:fld>
             <a:endParaRPr lang="en-US"/>
           </a:p>
@@ -281,7 +835,10 @@
           <a:bodyPr/>
           <a:lstStyle/>
           <a:p>
-            <a:endParaRPr lang="en-US"/>
+            <a:r>
+              <a:rPr lang="en-US"/>
+              <a:t>Myoung-jae Lee (1999). Median treatment effect in randomized trials.</a:t>
+            </a:r>
           </a:p>
         </p:txBody>
       </p:sp>
@@ -450,9 +1007,9 @@
           <a:bodyPr/>
           <a:lstStyle/>
           <a:p>
-            <a:fld id="{91C689E5-3379-C745-B1EE-BFD2D27C1BCC}" type="datetimeFigureOut">
+            <a:fld id="{80F351FB-B12E-264E-A1F2-9008F389C6D7}" type="datetime1">
               <a:rPr lang="en-US" smtClean="0"/>
-              <a:t>11/17/25</a:t>
+              <a:t>11/20/25</a:t>
             </a:fld>
             <a:endParaRPr lang="en-US"/>
           </a:p>
@@ -479,7 +1036,10 @@
           <a:bodyPr/>
           <a:lstStyle/>
           <a:p>
-            <a:endParaRPr lang="en-US"/>
+            <a:r>
+              <a:rPr lang="en-US"/>
+              <a:t>Myoung-jae Lee (1999). Median treatment effect in randomized trials.</a:t>
+            </a:r>
           </a:p>
         </p:txBody>
       </p:sp>
@@ -658,9 +1218,9 @@
           <a:bodyPr/>
           <a:lstStyle/>
           <a:p>
-            <a:fld id="{91C689E5-3379-C745-B1EE-BFD2D27C1BCC}" type="datetimeFigureOut">
+            <a:fld id="{F3045A88-7A71-6B4A-BAD6-4D43FC141478}" type="datetime1">
               <a:rPr lang="en-US" smtClean="0"/>
-              <a:t>11/17/25</a:t>
+              <a:t>11/20/25</a:t>
             </a:fld>
             <a:endParaRPr lang="en-US"/>
           </a:p>
@@ -687,7 +1247,10 @@
           <a:bodyPr/>
           <a:lstStyle/>
           <a:p>
-            <a:endParaRPr lang="en-US"/>
+            <a:r>
+              <a:rPr lang="en-US"/>
+              <a:t>Myoung-jae Lee (1999). Median treatment effect in randomized trials.</a:t>
+            </a:r>
           </a:p>
         </p:txBody>
       </p:sp>
@@ -856,9 +1419,9 @@
           <a:bodyPr/>
           <a:lstStyle/>
           <a:p>
-            <a:fld id="{91C689E5-3379-C745-B1EE-BFD2D27C1BCC}" type="datetimeFigureOut">
+            <a:fld id="{F58CF829-0FC5-9A46-A9B0-BB904E9F57AA}" type="datetime1">
               <a:rPr lang="en-US" smtClean="0"/>
-              <a:t>11/17/25</a:t>
+              <a:t>11/20/25</a:t>
             </a:fld>
             <a:endParaRPr lang="en-US"/>
           </a:p>
@@ -885,7 +1448,10 @@
           <a:bodyPr/>
           <a:lstStyle/>
           <a:p>
-            <a:endParaRPr lang="en-US"/>
+            <a:r>
+              <a:rPr lang="en-US"/>
+              <a:t>Myoung-jae Lee (1999). Median treatment effect in randomized trials.</a:t>
+            </a:r>
           </a:p>
         </p:txBody>
       </p:sp>
@@ -1131,9 +1697,9 @@
           <a:bodyPr/>
           <a:lstStyle/>
           <a:p>
-            <a:fld id="{91C689E5-3379-C745-B1EE-BFD2D27C1BCC}" type="datetimeFigureOut">
+            <a:fld id="{4D95A3AB-9979-134F-8518-C53AF5C431E4}" type="datetime1">
               <a:rPr lang="en-US" smtClean="0"/>
-              <a:t>11/17/25</a:t>
+              <a:t>11/20/25</a:t>
             </a:fld>
             <a:endParaRPr lang="en-US"/>
           </a:p>
@@ -1160,7 +1726,10 @@
           <a:bodyPr/>
           <a:lstStyle/>
           <a:p>
-            <a:endParaRPr lang="en-US"/>
+            <a:r>
+              <a:rPr lang="en-US"/>
+              <a:t>Myoung-jae Lee (1999). Median treatment effect in randomized trials.</a:t>
+            </a:r>
           </a:p>
         </p:txBody>
       </p:sp>
@@ -1396,9 +1965,9 @@
           <a:bodyPr/>
           <a:lstStyle/>
           <a:p>
-            <a:fld id="{91C689E5-3379-C745-B1EE-BFD2D27C1BCC}" type="datetimeFigureOut">
+            <a:fld id="{6FBA39C1-72D3-C444-A5B2-5721424EE3C4}" type="datetime1">
               <a:rPr lang="en-US" smtClean="0"/>
-              <a:t>11/17/25</a:t>
+              <a:t>11/20/25</a:t>
             </a:fld>
             <a:endParaRPr lang="en-US"/>
           </a:p>
@@ -1425,7 +1994,10 @@
           <a:bodyPr/>
           <a:lstStyle/>
           <a:p>
-            <a:endParaRPr lang="en-US"/>
+            <a:r>
+              <a:rPr lang="en-US"/>
+              <a:t>Myoung-jae Lee (1999). Median treatment effect in randomized trials.</a:t>
+            </a:r>
           </a:p>
         </p:txBody>
       </p:sp>
@@ -1808,9 +2380,9 @@
           <a:bodyPr/>
           <a:lstStyle/>
           <a:p>
-            <a:fld id="{91C689E5-3379-C745-B1EE-BFD2D27C1BCC}" type="datetimeFigureOut">
+            <a:fld id="{B079ADD5-AD5F-2B44-9B64-69B53A301C41}" type="datetime1">
               <a:rPr lang="en-US" smtClean="0"/>
-              <a:t>11/17/25</a:t>
+              <a:t>11/20/25</a:t>
             </a:fld>
             <a:endParaRPr lang="en-US"/>
           </a:p>
@@ -1837,7 +2409,10 @@
           <a:bodyPr/>
           <a:lstStyle/>
           <a:p>
-            <a:endParaRPr lang="en-US"/>
+            <a:r>
+              <a:rPr lang="en-US"/>
+              <a:t>Myoung-jae Lee (1999). Median treatment effect in randomized trials.</a:t>
+            </a:r>
           </a:p>
         </p:txBody>
       </p:sp>
@@ -1949,9 +2524,9 @@
           <a:bodyPr/>
           <a:lstStyle/>
           <a:p>
-            <a:fld id="{91C689E5-3379-C745-B1EE-BFD2D27C1BCC}" type="datetimeFigureOut">
+            <a:fld id="{008CC3C2-47D6-C545-9BF9-9C67612E3DE8}" type="datetime1">
               <a:rPr lang="en-US" smtClean="0"/>
-              <a:t>11/17/25</a:t>
+              <a:t>11/20/25</a:t>
             </a:fld>
             <a:endParaRPr lang="en-US"/>
           </a:p>
@@ -1978,7 +2553,10 @@
           <a:bodyPr/>
           <a:lstStyle/>
           <a:p>
-            <a:endParaRPr lang="en-US"/>
+            <a:r>
+              <a:rPr lang="en-US"/>
+              <a:t>Myoung-jae Lee (1999). Median treatment effect in randomized trials.</a:t>
+            </a:r>
           </a:p>
         </p:txBody>
       </p:sp>
@@ -2062,9 +2640,9 @@
           <a:bodyPr/>
           <a:lstStyle/>
           <a:p>
-            <a:fld id="{91C689E5-3379-C745-B1EE-BFD2D27C1BCC}" type="datetimeFigureOut">
+            <a:fld id="{7E136773-7117-C745-8694-71B5BEF890AE}" type="datetime1">
               <a:rPr lang="en-US" smtClean="0"/>
-              <a:t>11/17/25</a:t>
+              <a:t>11/20/25</a:t>
             </a:fld>
             <a:endParaRPr lang="en-US"/>
           </a:p>
@@ -2091,7 +2669,10 @@
           <a:bodyPr/>
           <a:lstStyle/>
           <a:p>
-            <a:endParaRPr lang="en-US"/>
+            <a:r>
+              <a:rPr lang="en-US"/>
+              <a:t>Myoung-jae Lee (1999). Median treatment effect in randomized trials.</a:t>
+            </a:r>
           </a:p>
         </p:txBody>
       </p:sp>
@@ -2373,9 +2954,9 @@
           <a:bodyPr/>
           <a:lstStyle/>
           <a:p>
-            <a:fld id="{91C689E5-3379-C745-B1EE-BFD2D27C1BCC}" type="datetimeFigureOut">
+            <a:fld id="{B4CE4088-1C49-4D48-B368-FB1D6A0DDE0B}" type="datetime1">
               <a:rPr lang="en-US" smtClean="0"/>
-              <a:t>11/17/25</a:t>
+              <a:t>11/20/25</a:t>
             </a:fld>
             <a:endParaRPr lang="en-US"/>
           </a:p>
@@ -2402,7 +2983,10 @@
           <a:bodyPr/>
           <a:lstStyle/>
           <a:p>
-            <a:endParaRPr lang="en-US"/>
+            <a:r>
+              <a:rPr lang="en-US"/>
+              <a:t>Myoung-jae Lee (1999). Median treatment effect in randomized trials.</a:t>
+            </a:r>
           </a:p>
         </p:txBody>
       </p:sp>
@@ -2661,9 +3245,9 @@
           <a:bodyPr/>
           <a:lstStyle/>
           <a:p>
-            <a:fld id="{91C689E5-3379-C745-B1EE-BFD2D27C1BCC}" type="datetimeFigureOut">
+            <a:fld id="{66077C39-9F95-5C41-B456-EE66E3D13203}" type="datetime1">
               <a:rPr lang="en-US" smtClean="0"/>
-              <a:t>11/17/25</a:t>
+              <a:t>11/20/25</a:t>
             </a:fld>
             <a:endParaRPr lang="en-US"/>
           </a:p>
@@ -2690,7 +3274,10 @@
           <a:bodyPr/>
           <a:lstStyle/>
           <a:p>
-            <a:endParaRPr lang="en-US"/>
+            <a:r>
+              <a:rPr lang="en-US"/>
+              <a:t>Myoung-jae Lee (1999). Median treatment effect in randomized trials.</a:t>
+            </a:r>
           </a:p>
         </p:txBody>
       </p:sp>
@@ -2902,9 +3489,9 @@
             </a:lvl1pPr>
           </a:lstStyle>
           <a:p>
-            <a:fld id="{91C689E5-3379-C745-B1EE-BFD2D27C1BCC}" type="datetimeFigureOut">
+            <a:fld id="{81C78E8C-1719-0A42-B5DF-249DDC5C22D3}" type="datetime1">
               <a:rPr lang="en-US" smtClean="0"/>
-              <a:t>11/17/25</a:t>
+              <a:t>11/20/25</a:t>
             </a:fld>
             <a:endParaRPr lang="en-US"/>
           </a:p>
@@ -2949,7 +3536,10 @@
             </a:lvl1pPr>
           </a:lstStyle>
           <a:p>
-            <a:endParaRPr lang="en-US"/>
+            <a:r>
+              <a:rPr lang="en-US"/>
+              <a:t>Myoung-jae Lee (1999). Median treatment effect in randomized trials.</a:t>
+            </a:r>
           </a:p>
         </p:txBody>
       </p:sp>
@@ -3021,6 +3611,7 @@
     <p:sldLayoutId id="2147483658" r:id="rId10"/>
     <p:sldLayoutId id="2147483659" r:id="rId11"/>
   </p:sldLayoutIdLst>
+  <p:hf hdr="0" dt="0"/>
   <p:txStyles>
     <p:titleStyle>
       <a:lvl1pPr algn="l" defTabSz="914400" rtl="0" eaLnBrk="1" latinLnBrk="0" hangingPunct="1">
@@ -3377,10 +3968,2511 @@
           </a:p>
         </p:txBody>
       </p:sp>
+      <p:sp>
+        <p:nvSpPr>
+          <p:cNvPr id="4" name="Footer Placeholder 3">
+            <a:extLst>
+              <a:ext uri="{FF2B5EF4-FFF2-40B4-BE49-F238E27FC236}">
+                <a16:creationId xmlns:a16="http://schemas.microsoft.com/office/drawing/2014/main" id="{1B813EA1-3993-7F73-6D4B-0C85EB926783}"/>
+              </a:ext>
+            </a:extLst>
+          </p:cNvPr>
+          <p:cNvSpPr>
+            <a:spLocks noGrp="1"/>
+          </p:cNvSpPr>
+          <p:nvPr>
+            <p:ph type="ftr" sz="quarter" idx="11"/>
+          </p:nvPr>
+        </p:nvSpPr>
+        <p:spPr/>
+        <p:txBody>
+          <a:bodyPr/>
+          <a:lstStyle/>
+          <a:p>
+            <a:r>
+              <a:rPr lang="en-US"/>
+              <a:t>Myoung-jae Lee (1999). Median treatment effect in randomized trials.</a:t>
+            </a:r>
+          </a:p>
+        </p:txBody>
+      </p:sp>
+      <p:sp>
+        <p:nvSpPr>
+          <p:cNvPr id="5" name="Slide Number Placeholder 4">
+            <a:extLst>
+              <a:ext uri="{FF2B5EF4-FFF2-40B4-BE49-F238E27FC236}">
+                <a16:creationId xmlns:a16="http://schemas.microsoft.com/office/drawing/2014/main" id="{F40D1CD4-0C79-806B-9B48-27FBA90E251A}"/>
+              </a:ext>
+            </a:extLst>
+          </p:cNvPr>
+          <p:cNvSpPr>
+            <a:spLocks noGrp="1"/>
+          </p:cNvSpPr>
+          <p:nvPr>
+            <p:ph type="sldNum" sz="quarter" idx="12"/>
+          </p:nvPr>
+        </p:nvSpPr>
+        <p:spPr/>
+        <p:txBody>
+          <a:bodyPr/>
+          <a:lstStyle/>
+          <a:p>
+            <a:fld id="{B9021C99-F081-FD4B-9146-F8976D51EC28}" type="slidenum">
+              <a:rPr lang="en-US" smtClean="0"/>
+              <a:t>1</a:t>
+            </a:fld>
+            <a:endParaRPr lang="en-US"/>
+          </a:p>
+        </p:txBody>
+      </p:sp>
     </p:spTree>
     <p:extLst>
       <p:ext uri="{BB962C8B-B14F-4D97-AF65-F5344CB8AC3E}">
         <p14:creationId xmlns:p14="http://schemas.microsoft.com/office/powerpoint/2010/main" val="2572491766"/>
+      </p:ext>
+    </p:extLst>
+  </p:cSld>
+  <p:clrMapOvr>
+    <a:masterClrMapping/>
+  </p:clrMapOvr>
+</p:sld>
+</file>
+
+<file path=ppt/slides/slide2.xml><?xml version="1.0" encoding="utf-8"?>
+<p:sld xmlns:a="http://schemas.openxmlformats.org/drawingml/2006/main" xmlns:r="http://schemas.openxmlformats.org/officeDocument/2006/relationships" xmlns:p="http://schemas.openxmlformats.org/presentationml/2006/main">
+  <p:cSld>
+    <p:spTree>
+      <p:nvGrpSpPr>
+        <p:cNvPr id="1" name=""/>
+        <p:cNvGrpSpPr/>
+        <p:nvPr/>
+      </p:nvGrpSpPr>
+      <p:grpSpPr>
+        <a:xfrm>
+          <a:off x="0" y="0"/>
+          <a:ext cx="0" cy="0"/>
+          <a:chOff x="0" y="0"/>
+          <a:chExt cx="0" cy="0"/>
+        </a:xfrm>
+      </p:grpSpPr>
+      <p:sp>
+        <p:nvSpPr>
+          <p:cNvPr id="2" name="Title 1">
+            <a:extLst>
+              <a:ext uri="{FF2B5EF4-FFF2-40B4-BE49-F238E27FC236}">
+                <a16:creationId xmlns:a16="http://schemas.microsoft.com/office/drawing/2014/main" id="{20D27A3B-37BA-00D3-F17A-44381482AB5B}"/>
+              </a:ext>
+            </a:extLst>
+          </p:cNvPr>
+          <p:cNvSpPr>
+            <a:spLocks noGrp="1"/>
+          </p:cNvSpPr>
+          <p:nvPr>
+            <p:ph type="title"/>
+          </p:nvPr>
+        </p:nvSpPr>
+        <p:spPr/>
+        <p:txBody>
+          <a:bodyPr/>
+          <a:lstStyle/>
+          <a:p>
+            <a:r>
+              <a:rPr lang="en-US" dirty="0"/>
+              <a:t>Beyond Averages: Treatment Heterogeneity</a:t>
+            </a:r>
+          </a:p>
+        </p:txBody>
+      </p:sp>
+      <mc:AlternateContent xmlns:mc="http://schemas.openxmlformats.org/markup-compatibility/2006">
+        <mc:Choice xmlns:a14="http://schemas.microsoft.com/office/drawing/2010/main" Requires="a14">
+          <p:sp>
+            <p:nvSpPr>
+              <p:cNvPr id="3" name="Content Placeholder 2">
+                <a:extLst>
+                  <a:ext uri="{FF2B5EF4-FFF2-40B4-BE49-F238E27FC236}">
+                    <a16:creationId xmlns:a16="http://schemas.microsoft.com/office/drawing/2014/main" id="{82F8F8BB-751C-E61A-46A3-939E78E03D39}"/>
+                  </a:ext>
+                </a:extLst>
+              </p:cNvPr>
+              <p:cNvSpPr>
+                <a:spLocks noGrp="1"/>
+              </p:cNvSpPr>
+              <p:nvPr>
+                <p:ph sz="half" idx="1"/>
+              </p:nvPr>
+            </p:nvSpPr>
+            <p:spPr>
+              <a:xfrm>
+                <a:off x="838199" y="1825625"/>
+                <a:ext cx="10163176" cy="4351338"/>
+              </a:xfrm>
+            </p:spPr>
+            <p:txBody>
+              <a:bodyPr/>
+              <a:lstStyle/>
+              <a:p>
+                <a:pPr marL="0" indent="0">
+                  <a:buNone/>
+                </a:pPr>
+                <a:r>
+                  <a:rPr lang="en-US" dirty="0"/>
+                  <a:t>We often work with</a:t>
+                </a:r>
+              </a:p>
+              <a:p>
+                <a:pPr marL="0" indent="0" algn="ctr">
+                  <a:buNone/>
+                </a:pPr>
+                <a14:m>
+                  <m:oMathPara xmlns:m="http://schemas.openxmlformats.org/officeDocument/2006/math">
+                    <m:oMathParaPr>
+                      <m:jc m:val="centerGroup"/>
+                    </m:oMathParaPr>
+                    <m:oMath xmlns:m="http://schemas.openxmlformats.org/officeDocument/2006/math">
+                      <m:r>
+                        <a:rPr lang="en-US" i="1" dirty="0">
+                          <a:latin typeface="Cambria Math" panose="02040503050406030204" pitchFamily="18" charset="0"/>
+                        </a:rPr>
+                        <m:t>𝜏</m:t>
+                      </m:r>
+                      <m:r>
+                        <a:rPr lang="en-US" i="1" dirty="0">
+                          <a:latin typeface="Cambria Math" panose="02040503050406030204" pitchFamily="18" charset="0"/>
+                        </a:rPr>
+                        <m:t>=</m:t>
+                      </m:r>
+                      <m:r>
+                        <a:rPr lang="en-US" i="1" dirty="0">
+                          <a:latin typeface="Cambria Math" panose="02040503050406030204" pitchFamily="18" charset="0"/>
+                        </a:rPr>
+                        <m:t>𝐸</m:t>
+                      </m:r>
+                      <m:d>
+                        <m:dPr>
+                          <m:begChr m:val="["/>
+                          <m:endChr m:val="]"/>
+                          <m:ctrlPr>
+                            <a:rPr lang="en-US" i="1" dirty="0">
+                              <a:latin typeface="Cambria Math" panose="02040503050406030204" pitchFamily="18" charset="0"/>
+                            </a:rPr>
+                          </m:ctrlPr>
+                        </m:dPr>
+                        <m:e>
+                          <m:r>
+                            <a:rPr lang="en-US" i="1" dirty="0">
+                              <a:latin typeface="Cambria Math" panose="02040503050406030204" pitchFamily="18" charset="0"/>
+                            </a:rPr>
+                            <m:t>𝑌</m:t>
+                          </m:r>
+                          <m:d>
+                            <m:dPr>
+                              <m:ctrlPr>
+                                <a:rPr lang="en-US" i="1" dirty="0">
+                                  <a:latin typeface="Cambria Math" panose="02040503050406030204" pitchFamily="18" charset="0"/>
+                                </a:rPr>
+                              </m:ctrlPr>
+                            </m:dPr>
+                            <m:e>
+                              <m:r>
+                                <a:rPr lang="en-US" i="1" dirty="0">
+                                  <a:latin typeface="Cambria Math" panose="02040503050406030204" pitchFamily="18" charset="0"/>
+                                </a:rPr>
+                                <m:t>1</m:t>
+                              </m:r>
+                            </m:e>
+                          </m:d>
+                          <m:r>
+                            <a:rPr lang="en-US" i="1" dirty="0">
+                              <a:latin typeface="Cambria Math" panose="02040503050406030204" pitchFamily="18" charset="0"/>
+                            </a:rPr>
+                            <m:t>–</m:t>
+                          </m:r>
+                          <m:r>
+                            <a:rPr lang="en-US" i="1" dirty="0">
+                              <a:latin typeface="Cambria Math" panose="02040503050406030204" pitchFamily="18" charset="0"/>
+                            </a:rPr>
+                            <m:t>𝑌</m:t>
+                          </m:r>
+                          <m:d>
+                            <m:dPr>
+                              <m:ctrlPr>
+                                <a:rPr lang="en-US" i="1" dirty="0">
+                                  <a:latin typeface="Cambria Math" panose="02040503050406030204" pitchFamily="18" charset="0"/>
+                                </a:rPr>
+                              </m:ctrlPr>
+                            </m:dPr>
+                            <m:e>
+                              <m:r>
+                                <a:rPr lang="en-US" i="1" dirty="0">
+                                  <a:latin typeface="Cambria Math" panose="02040503050406030204" pitchFamily="18" charset="0"/>
+                                </a:rPr>
+                                <m:t>0</m:t>
+                              </m:r>
+                            </m:e>
+                          </m:d>
+                        </m:e>
+                      </m:d>
+                      <m:r>
+                        <a:rPr lang="en-US" b="0" i="1" dirty="0" smtClean="0">
+                          <a:latin typeface="Cambria Math" panose="02040503050406030204" pitchFamily="18" charset="0"/>
+                        </a:rPr>
+                        <m:t>.</m:t>
+                      </m:r>
+                    </m:oMath>
+                  </m:oMathPara>
+                </a14:m>
+                <a:endParaRPr lang="en-US" dirty="0"/>
+              </a:p>
+              <a:p>
+                <a:pPr marL="0" indent="0">
+                  <a:buNone/>
+                </a:pPr>
+                <a:r>
+                  <a:rPr lang="en-US" dirty="0"/>
+                  <a:t>“The linearity of the mean functional is in fact a gigantic step”</a:t>
+                </a:r>
+                <a:r>
+                  <a:rPr lang="en-US" baseline="30000" dirty="0"/>
+                  <a:t>1</a:t>
+                </a:r>
+                <a:endParaRPr lang="en-US" i="1" dirty="0">
+                  <a:latin typeface="Cambria Math" panose="02040503050406030204" pitchFamily="18" charset="0"/>
+                </a:endParaRPr>
+              </a:p>
+              <a:p>
+                <a:pPr marL="0" indent="0" algn="ctr">
+                  <a:buNone/>
+                </a:pPr>
+                <a:endParaRPr lang="en-US" i="1" dirty="0">
+                  <a:latin typeface="Cambria Math" panose="02040503050406030204" pitchFamily="18" charset="0"/>
+                </a:endParaRPr>
+              </a:p>
+              <a:p>
+                <a:pPr marL="0" indent="0" algn="ctr">
+                  <a:buNone/>
+                </a:pPr>
+                <a14:m>
+                  <m:oMathPara xmlns:m="http://schemas.openxmlformats.org/officeDocument/2006/math">
+                    <m:oMathParaPr>
+                      <m:jc m:val="centerGroup"/>
+                    </m:oMathParaPr>
+                    <m:oMath xmlns:m="http://schemas.openxmlformats.org/officeDocument/2006/math">
+                      <m:r>
+                        <a:rPr lang="en-US" i="1" dirty="0">
+                          <a:latin typeface="Cambria Math" panose="02040503050406030204" pitchFamily="18" charset="0"/>
+                        </a:rPr>
+                        <m:t>𝜏</m:t>
+                      </m:r>
+                      <m:r>
+                        <a:rPr lang="en-US" i="1" dirty="0">
+                          <a:latin typeface="Cambria Math" panose="02040503050406030204" pitchFamily="18" charset="0"/>
+                        </a:rPr>
+                        <m:t>=</m:t>
+                      </m:r>
+                      <m:r>
+                        <a:rPr lang="en-US" i="1" dirty="0">
+                          <a:latin typeface="Cambria Math" panose="02040503050406030204" pitchFamily="18" charset="0"/>
+                        </a:rPr>
+                        <m:t>𝐸</m:t>
+                      </m:r>
+                      <m:d>
+                        <m:dPr>
+                          <m:begChr m:val="["/>
+                          <m:endChr m:val="]"/>
+                          <m:ctrlPr>
+                            <a:rPr lang="en-US" i="1" dirty="0">
+                              <a:latin typeface="Cambria Math" panose="02040503050406030204" pitchFamily="18" charset="0"/>
+                            </a:rPr>
+                          </m:ctrlPr>
+                        </m:dPr>
+                        <m:e>
+                          <m:r>
+                            <a:rPr lang="en-US" i="1" dirty="0">
+                              <a:latin typeface="Cambria Math" panose="02040503050406030204" pitchFamily="18" charset="0"/>
+                            </a:rPr>
+                            <m:t>𝑌</m:t>
+                          </m:r>
+                          <m:d>
+                            <m:dPr>
+                              <m:ctrlPr>
+                                <a:rPr lang="en-US" i="1" dirty="0">
+                                  <a:latin typeface="Cambria Math" panose="02040503050406030204" pitchFamily="18" charset="0"/>
+                                </a:rPr>
+                              </m:ctrlPr>
+                            </m:dPr>
+                            <m:e>
+                              <m:r>
+                                <a:rPr lang="en-US" i="1" dirty="0">
+                                  <a:latin typeface="Cambria Math" panose="02040503050406030204" pitchFamily="18" charset="0"/>
+                                </a:rPr>
+                                <m:t>1</m:t>
+                              </m:r>
+                            </m:e>
+                          </m:d>
+                          <m:r>
+                            <a:rPr lang="en-US" b="0" i="1" dirty="0" smtClean="0">
+                              <a:latin typeface="Cambria Math" panose="02040503050406030204" pitchFamily="18" charset="0"/>
+                            </a:rPr>
+                            <m:t>]</m:t>
+                          </m:r>
+                          <m:r>
+                            <a:rPr lang="en-US" i="1" dirty="0">
+                              <a:latin typeface="Cambria Math" panose="02040503050406030204" pitchFamily="18" charset="0"/>
+                            </a:rPr>
+                            <m:t>–</m:t>
+                          </m:r>
+                          <m:r>
+                            <m:rPr>
+                              <m:sty m:val="p"/>
+                            </m:rPr>
+                            <a:rPr lang="en-US" b="0" i="1" dirty="0" smtClean="0">
+                              <a:latin typeface="Cambria Math" panose="02040503050406030204" pitchFamily="18" charset="0"/>
+                            </a:rPr>
+                            <m:t>E</m:t>
+                          </m:r>
+                          <m:r>
+                            <a:rPr lang="en-US" b="0" i="1" dirty="0" smtClean="0">
+                              <a:latin typeface="Cambria Math" panose="02040503050406030204" pitchFamily="18" charset="0"/>
+                            </a:rPr>
+                            <m:t>[</m:t>
+                          </m:r>
+                          <m:r>
+                            <a:rPr lang="en-US" i="1" dirty="0">
+                              <a:latin typeface="Cambria Math" panose="02040503050406030204" pitchFamily="18" charset="0"/>
+                            </a:rPr>
+                            <m:t>𝑌</m:t>
+                          </m:r>
+                          <m:d>
+                            <m:dPr>
+                              <m:ctrlPr>
+                                <a:rPr lang="en-US" i="1" dirty="0">
+                                  <a:latin typeface="Cambria Math" panose="02040503050406030204" pitchFamily="18" charset="0"/>
+                                </a:rPr>
+                              </m:ctrlPr>
+                            </m:dPr>
+                            <m:e>
+                              <m:r>
+                                <a:rPr lang="en-US" i="1" dirty="0">
+                                  <a:latin typeface="Cambria Math" panose="02040503050406030204" pitchFamily="18" charset="0"/>
+                                </a:rPr>
+                                <m:t>0</m:t>
+                              </m:r>
+                            </m:e>
+                          </m:d>
+                        </m:e>
+                      </m:d>
+                      <m:r>
+                        <a:rPr lang="en-US" i="1" dirty="0">
+                          <a:latin typeface="Cambria Math" panose="02040503050406030204" pitchFamily="18" charset="0"/>
+                        </a:rPr>
+                        <m:t>.</m:t>
+                      </m:r>
+                    </m:oMath>
+                  </m:oMathPara>
+                </a14:m>
+                <a:endParaRPr lang="en-US" dirty="0"/>
+              </a:p>
+              <a:p>
+                <a:pPr marL="0" indent="0">
+                  <a:buNone/>
+                </a:pPr>
+                <a:r>
+                  <a:rPr lang="en-US" dirty="0"/>
+                  <a:t>Expected value (averages) come with disadvantages.</a:t>
+                </a:r>
+              </a:p>
+            </p:txBody>
+          </p:sp>
+        </mc:Choice>
+        <mc:Fallback>
+          <p:sp>
+            <p:nvSpPr>
+              <p:cNvPr id="3" name="Content Placeholder 2">
+                <a:extLst>
+                  <a:ext uri="{FF2B5EF4-FFF2-40B4-BE49-F238E27FC236}">
+                    <a16:creationId xmlns:a16="http://schemas.microsoft.com/office/drawing/2014/main" id="{82F8F8BB-751C-E61A-46A3-939E78E03D39}"/>
+                  </a:ext>
+                </a:extLst>
+              </p:cNvPr>
+              <p:cNvSpPr>
+                <a:spLocks noGrp="1" noRot="1" noChangeAspect="1" noMove="1" noResize="1" noEditPoints="1" noAdjustHandles="1" noChangeArrowheads="1" noChangeShapeType="1" noTextEdit="1"/>
+              </p:cNvSpPr>
+              <p:nvPr>
+                <p:ph sz="half" idx="1"/>
+              </p:nvPr>
+            </p:nvSpPr>
+            <p:spPr>
+              <a:xfrm>
+                <a:off x="838199" y="1825625"/>
+                <a:ext cx="10163176" cy="4351338"/>
+              </a:xfrm>
+              <a:blipFill>
+                <a:blip r:embed="rId2"/>
+                <a:stretch>
+                  <a:fillRect l="-1122" t="-2326"/>
+                </a:stretch>
+              </a:blipFill>
+            </p:spPr>
+            <p:txBody>
+              <a:bodyPr/>
+              <a:lstStyle/>
+              <a:p>
+                <a:r>
+                  <a:rPr lang="en-US">
+                    <a:noFill/>
+                  </a:rPr>
+                  <a:t> </a:t>
+                </a:r>
+              </a:p>
+            </p:txBody>
+          </p:sp>
+        </mc:Fallback>
+      </mc:AlternateContent>
+      <p:sp>
+        <p:nvSpPr>
+          <p:cNvPr id="5" name="Footer Placeholder 4">
+            <a:extLst>
+              <a:ext uri="{FF2B5EF4-FFF2-40B4-BE49-F238E27FC236}">
+                <a16:creationId xmlns:a16="http://schemas.microsoft.com/office/drawing/2014/main" id="{006041CD-122B-9929-8E69-3787FCD0D9B4}"/>
+              </a:ext>
+            </a:extLst>
+          </p:cNvPr>
+          <p:cNvSpPr>
+            <a:spLocks noGrp="1"/>
+          </p:cNvSpPr>
+          <p:nvPr>
+            <p:ph type="ftr" sz="quarter" idx="11"/>
+          </p:nvPr>
+        </p:nvSpPr>
+        <p:spPr/>
+        <p:txBody>
+          <a:bodyPr/>
+          <a:lstStyle/>
+          <a:p>
+            <a:r>
+              <a:rPr lang="en-US" dirty="0"/>
+              <a:t>1 Myoung-jae Lee (1999). Median treatment effect in randomized trials.</a:t>
+            </a:r>
+          </a:p>
+        </p:txBody>
+      </p:sp>
+      <p:sp>
+        <p:nvSpPr>
+          <p:cNvPr id="6" name="Slide Number Placeholder 5">
+            <a:extLst>
+              <a:ext uri="{FF2B5EF4-FFF2-40B4-BE49-F238E27FC236}">
+                <a16:creationId xmlns:a16="http://schemas.microsoft.com/office/drawing/2014/main" id="{003F9CB8-134E-3ED4-DFA6-EF3E33FB4911}"/>
+              </a:ext>
+            </a:extLst>
+          </p:cNvPr>
+          <p:cNvSpPr>
+            <a:spLocks noGrp="1"/>
+          </p:cNvSpPr>
+          <p:nvPr>
+            <p:ph type="sldNum" sz="quarter" idx="12"/>
+          </p:nvPr>
+        </p:nvSpPr>
+        <p:spPr/>
+        <p:txBody>
+          <a:bodyPr/>
+          <a:lstStyle/>
+          <a:p>
+            <a:fld id="{B9021C99-F081-FD4B-9146-F8976D51EC28}" type="slidenum">
+              <a:rPr lang="en-US" smtClean="0"/>
+              <a:t>2</a:t>
+            </a:fld>
+            <a:endParaRPr lang="en-US"/>
+          </a:p>
+        </p:txBody>
+      </p:sp>
+    </p:spTree>
+    <p:extLst>
+      <p:ext uri="{BB962C8B-B14F-4D97-AF65-F5344CB8AC3E}">
+        <p14:creationId xmlns:p14="http://schemas.microsoft.com/office/powerpoint/2010/main" val="73136900"/>
+      </p:ext>
+    </p:extLst>
+  </p:cSld>
+  <p:clrMapOvr>
+    <a:masterClrMapping/>
+  </p:clrMapOvr>
+</p:sld>
+</file>
+
+<file path=ppt/slides/slide3.xml><?xml version="1.0" encoding="utf-8"?>
+<p:sld xmlns:a="http://schemas.openxmlformats.org/drawingml/2006/main" xmlns:r="http://schemas.openxmlformats.org/officeDocument/2006/relationships" xmlns:p="http://schemas.openxmlformats.org/presentationml/2006/main">
+  <p:cSld>
+    <p:spTree>
+      <p:nvGrpSpPr>
+        <p:cNvPr id="1" name=""/>
+        <p:cNvGrpSpPr/>
+        <p:nvPr/>
+      </p:nvGrpSpPr>
+      <p:grpSpPr>
+        <a:xfrm>
+          <a:off x="0" y="0"/>
+          <a:ext cx="0" cy="0"/>
+          <a:chOff x="0" y="0"/>
+          <a:chExt cx="0" cy="0"/>
+        </a:xfrm>
+      </p:grpSpPr>
+      <p:sp>
+        <p:nvSpPr>
+          <p:cNvPr id="2" name="Title 1">
+            <a:extLst>
+              <a:ext uri="{FF2B5EF4-FFF2-40B4-BE49-F238E27FC236}">
+                <a16:creationId xmlns:a16="http://schemas.microsoft.com/office/drawing/2014/main" id="{247DFBF7-A692-1EC8-7205-95F886CA18FA}"/>
+              </a:ext>
+            </a:extLst>
+          </p:cNvPr>
+          <p:cNvSpPr>
+            <a:spLocks noGrp="1"/>
+          </p:cNvSpPr>
+          <p:nvPr>
+            <p:ph type="title"/>
+          </p:nvPr>
+        </p:nvSpPr>
+        <p:spPr/>
+        <p:txBody>
+          <a:bodyPr/>
+          <a:lstStyle/>
+          <a:p>
+            <a:r>
+              <a:rPr lang="en-US" dirty="0"/>
+              <a:t>Everyone Benefits But Not On Average</a:t>
+            </a:r>
+          </a:p>
+        </p:txBody>
+      </p:sp>
+      <mc:AlternateContent xmlns:mc="http://schemas.openxmlformats.org/markup-compatibility/2006">
+        <mc:Choice xmlns:a14="http://schemas.microsoft.com/office/drawing/2010/main" Requires="a14">
+          <p:graphicFrame>
+            <p:nvGraphicFramePr>
+              <p:cNvPr id="6" name="Content Placeholder 5">
+                <a:extLst>
+                  <a:ext uri="{FF2B5EF4-FFF2-40B4-BE49-F238E27FC236}">
+                    <a16:creationId xmlns:a16="http://schemas.microsoft.com/office/drawing/2014/main" id="{9C3EFB2A-DD1F-726A-E860-E7F26549CB42}"/>
+                  </a:ext>
+                </a:extLst>
+              </p:cNvPr>
+              <p:cNvGraphicFramePr>
+                <a:graphicFrameLocks noGrp="1"/>
+              </p:cNvGraphicFramePr>
+              <p:nvPr>
+                <p:ph idx="1"/>
+                <p:extLst>
+                  <p:ext uri="{D42A27DB-BD31-4B8C-83A1-F6EECF244321}">
+                    <p14:modId xmlns:p14="http://schemas.microsoft.com/office/powerpoint/2010/main" val="3988702154"/>
+                  </p:ext>
+                </p:extLst>
+              </p:nvPr>
+            </p:nvGraphicFramePr>
+            <p:xfrm>
+              <a:off x="838199" y="1685515"/>
+              <a:ext cx="11077575" cy="2603498"/>
+            </p:xfrm>
+            <a:graphic>
+              <a:graphicData uri="http://schemas.openxmlformats.org/drawingml/2006/table">
+                <a:tbl>
+                  <a:tblPr firstRow="1" bandRow="1">
+                    <a:tableStyleId>{5C22544A-7EE6-4342-B048-85BDC9FD1C3A}</a:tableStyleId>
+                  </a:tblPr>
+                  <a:tblGrid>
+                    <a:gridCol w="927234">
+                      <a:extLst>
+                        <a:ext uri="{9D8B030D-6E8A-4147-A177-3AD203B41FA5}">
+                          <a16:colId xmlns:a16="http://schemas.microsoft.com/office/drawing/2014/main" val="191740655"/>
+                        </a:ext>
+                      </a:extLst>
+                    </a:gridCol>
+                    <a:gridCol w="1942253">
+                      <a:extLst>
+                        <a:ext uri="{9D8B030D-6E8A-4147-A177-3AD203B41FA5}">
+                          <a16:colId xmlns:a16="http://schemas.microsoft.com/office/drawing/2014/main" val="3598971456"/>
+                        </a:ext>
+                      </a:extLst>
+                    </a:gridCol>
+                    <a:gridCol w="3818667">
+                      <a:extLst>
+                        <a:ext uri="{9D8B030D-6E8A-4147-A177-3AD203B41FA5}">
+                          <a16:colId xmlns:a16="http://schemas.microsoft.com/office/drawing/2014/main" val="208397520"/>
+                        </a:ext>
+                      </a:extLst>
+                    </a:gridCol>
+                    <a:gridCol w="2831081">
+                      <a:extLst>
+                        <a:ext uri="{9D8B030D-6E8A-4147-A177-3AD203B41FA5}">
+                          <a16:colId xmlns:a16="http://schemas.microsoft.com/office/drawing/2014/main" val="1960270943"/>
+                        </a:ext>
+                      </a:extLst>
+                    </a:gridCol>
+                    <a:gridCol w="1558340">
+                      <a:extLst>
+                        <a:ext uri="{9D8B030D-6E8A-4147-A177-3AD203B41FA5}">
+                          <a16:colId xmlns:a16="http://schemas.microsoft.com/office/drawing/2014/main" val="3921827867"/>
+                        </a:ext>
+                      </a:extLst>
+                    </a:gridCol>
+                  </a:tblGrid>
+                  <a:tr h="668108">
+                    <a:tc>
+                      <a:txBody>
+                        <a:bodyPr/>
+                        <a:lstStyle/>
+                        <a:p>
+                          <a:r>
+                            <a:rPr lang="en-US" dirty="0"/>
+                            <a:t>Unit</a:t>
+                          </a:r>
+                        </a:p>
+                      </a:txBody>
+                      <a:tcPr/>
+                    </a:tc>
+                    <a:tc>
+                      <a:txBody>
+                        <a:bodyPr/>
+                        <a:lstStyle/>
+                        <a:p>
+                          <a:r>
+                            <a:rPr lang="en-US" dirty="0"/>
+                            <a:t>Treatment</a:t>
+                          </a:r>
+                          <a:r>
+                            <a:rPr lang="en-US" baseline="0" dirty="0"/>
+                            <a:t> </a:t>
+                          </a:r>
+                          <a14:m>
+                            <m:oMath xmlns:m="http://schemas.openxmlformats.org/officeDocument/2006/math">
+                              <m:sSub>
+                                <m:sSubPr>
+                                  <m:ctrlPr>
+                                    <a:rPr lang="en-US" i="1" baseline="0" dirty="0" smtClean="0">
+                                      <a:latin typeface="Cambria Math" panose="02040503050406030204" pitchFamily="18" charset="0"/>
+                                    </a:rPr>
+                                  </m:ctrlPr>
+                                </m:sSubPr>
+                                <m:e>
+                                  <m:r>
+                                    <a:rPr lang="en-US" i="1" baseline="0" dirty="0" smtClean="0">
+                                      <a:latin typeface="Cambria Math" panose="02040503050406030204" pitchFamily="18" charset="0"/>
+                                    </a:rPr>
+                                    <m:t>𝑍</m:t>
+                                  </m:r>
+                                </m:e>
+                                <m:sub>
+                                  <m:r>
+                                    <a:rPr lang="en-US" i="1" baseline="0" dirty="0" smtClean="0">
+                                      <a:latin typeface="Cambria Math" panose="02040503050406030204" pitchFamily="18" charset="0"/>
+                                    </a:rPr>
+                                    <m:t>𝑖</m:t>
+                                  </m:r>
+                                </m:sub>
+                              </m:sSub>
+                            </m:oMath>
+                          </a14:m>
+                          <a:endParaRPr lang="en-US" dirty="0"/>
+                        </a:p>
+                      </a:txBody>
+                      <a:tcPr/>
+                    </a:tc>
+                    <a:tc>
+                      <a:txBody>
+                        <a:bodyPr/>
+                        <a:lstStyle/>
+                        <a:p>
+                          <a:r>
+                            <a:rPr lang="en-US" dirty="0"/>
+                            <a:t>Control Outcome </a:t>
+                          </a:r>
+                          <a14:m>
+                            <m:oMath xmlns:m="http://schemas.openxmlformats.org/officeDocument/2006/math">
+                              <m:sSub>
+                                <m:sSubPr>
+                                  <m:ctrlPr>
+                                    <a:rPr lang="en-US" i="1" dirty="0" smtClean="0">
+                                      <a:latin typeface="Cambria Math" panose="02040503050406030204" pitchFamily="18" charset="0"/>
+                                    </a:rPr>
+                                  </m:ctrlPr>
+                                </m:sSubPr>
+                                <m:e>
+                                  <m:r>
+                                    <a:rPr lang="en-US" i="1" dirty="0" smtClean="0">
+                                      <a:latin typeface="Cambria Math" panose="02040503050406030204" pitchFamily="18" charset="0"/>
+                                    </a:rPr>
+                                    <m:t>𝑌</m:t>
+                                  </m:r>
+                                </m:e>
+                                <m:sub>
+                                  <m:r>
+                                    <a:rPr lang="en-US" i="1" dirty="0" smtClean="0">
+                                      <a:latin typeface="Cambria Math" panose="02040503050406030204" pitchFamily="18" charset="0"/>
+                                    </a:rPr>
+                                    <m:t>𝑖</m:t>
+                                  </m:r>
+                                </m:sub>
+                              </m:sSub>
+                              <m:d>
+                                <m:dPr>
+                                  <m:ctrlPr>
+                                    <a:rPr lang="en-US" i="1" dirty="0" smtClean="0">
+                                      <a:latin typeface="Cambria Math" panose="02040503050406030204" pitchFamily="18" charset="0"/>
+                                    </a:rPr>
+                                  </m:ctrlPr>
+                                </m:dPr>
+                                <m:e>
+                                  <m:r>
+                                    <a:rPr lang="en-US" i="1" dirty="0" smtClean="0">
+                                      <a:latin typeface="Cambria Math" panose="02040503050406030204" pitchFamily="18" charset="0"/>
+                                    </a:rPr>
+                                    <m:t>0</m:t>
+                                  </m:r>
+                                </m:e>
+                              </m:d>
+                            </m:oMath>
+                          </a14:m>
+                          <a:endParaRPr lang="en-US" dirty="0"/>
+                        </a:p>
+                      </a:txBody>
+                      <a:tcPr/>
+                    </a:tc>
+                    <a:tc>
+                      <a:txBody>
+                        <a:bodyPr/>
+                        <a:lstStyle/>
+                        <a:p>
+                          <a:r>
+                            <a:rPr lang="en-US" dirty="0"/>
+                            <a:t>Treated Outcome </a:t>
+                          </a:r>
+                          <a14:m>
+                            <m:oMath xmlns:m="http://schemas.openxmlformats.org/officeDocument/2006/math">
+                              <m:sSub>
+                                <m:sSubPr>
+                                  <m:ctrlPr>
+                                    <a:rPr lang="en-US" i="1" dirty="0" smtClean="0">
+                                      <a:latin typeface="Cambria Math" panose="02040503050406030204" pitchFamily="18" charset="0"/>
+                                    </a:rPr>
+                                  </m:ctrlPr>
+                                </m:sSubPr>
+                                <m:e>
+                                  <m:r>
+                                    <a:rPr lang="en-US" i="1" dirty="0" smtClean="0">
+                                      <a:latin typeface="Cambria Math" panose="02040503050406030204" pitchFamily="18" charset="0"/>
+                                    </a:rPr>
+                                    <m:t>𝑌</m:t>
+                                  </m:r>
+                                </m:e>
+                                <m:sub>
+                                  <m:r>
+                                    <a:rPr lang="en-US" i="1" dirty="0" smtClean="0">
+                                      <a:latin typeface="Cambria Math" panose="02040503050406030204" pitchFamily="18" charset="0"/>
+                                    </a:rPr>
+                                    <m:t>𝑖</m:t>
+                                  </m:r>
+                                </m:sub>
+                              </m:sSub>
+                              <m:d>
+                                <m:dPr>
+                                  <m:ctrlPr>
+                                    <a:rPr lang="en-US" i="1" dirty="0" smtClean="0">
+                                      <a:latin typeface="Cambria Math" panose="02040503050406030204" pitchFamily="18" charset="0"/>
+                                    </a:rPr>
+                                  </m:ctrlPr>
+                                </m:dPr>
+                                <m:e>
+                                  <m:r>
+                                    <a:rPr lang="en-US" i="1" dirty="0" smtClean="0">
+                                      <a:latin typeface="Cambria Math" panose="02040503050406030204" pitchFamily="18" charset="0"/>
+                                    </a:rPr>
+                                    <m:t>1</m:t>
+                                  </m:r>
+                                </m:e>
+                              </m:d>
+                            </m:oMath>
+                          </a14:m>
+                          <a:endParaRPr lang="en-US" dirty="0"/>
+                        </a:p>
+                      </a:txBody>
+                      <a:tcPr/>
+                    </a:tc>
+                    <a:tc>
+                      <a:txBody>
+                        <a:bodyPr/>
+                        <a:lstStyle/>
+                        <a:p>
+                          <a:r>
+                            <a:rPr lang="en-US" dirty="0"/>
+                            <a:t>Observed </a:t>
+                          </a:r>
+                          <a14:m>
+                            <m:oMath xmlns:m="http://schemas.openxmlformats.org/officeDocument/2006/math">
+                              <m:sSub>
+                                <m:sSubPr>
+                                  <m:ctrlPr>
+                                    <a:rPr lang="en-US" i="1" dirty="0" smtClean="0">
+                                      <a:latin typeface="Cambria Math" panose="02040503050406030204" pitchFamily="18" charset="0"/>
+                                    </a:rPr>
+                                  </m:ctrlPr>
+                                </m:sSubPr>
+                                <m:e>
+                                  <m:r>
+                                    <a:rPr lang="en-US" i="1" dirty="0" smtClean="0">
+                                      <a:latin typeface="Cambria Math" panose="02040503050406030204" pitchFamily="18" charset="0"/>
+                                    </a:rPr>
+                                    <m:t>𝑌</m:t>
+                                  </m:r>
+                                </m:e>
+                                <m:sub>
+                                  <m:r>
+                                    <a:rPr lang="en-US" i="1" dirty="0" smtClean="0">
+                                      <a:latin typeface="Cambria Math" panose="02040503050406030204" pitchFamily="18" charset="0"/>
+                                    </a:rPr>
+                                    <m:t>𝑖</m:t>
+                                  </m:r>
+                                </m:sub>
+                              </m:sSub>
+                            </m:oMath>
+                          </a14:m>
+                          <a:endParaRPr lang="en-US" dirty="0"/>
+                        </a:p>
+                      </a:txBody>
+                      <a:tcPr/>
+                    </a:tc>
+                    <a:extLst>
+                      <a:ext uri="{0D108BD9-81ED-4DB2-BD59-A6C34878D82A}">
+                        <a16:rowId xmlns:a16="http://schemas.microsoft.com/office/drawing/2014/main" val="2089696527"/>
+                      </a:ext>
+                    </a:extLst>
+                  </a:tr>
+                  <a:tr h="387078">
+                    <a:tc>
+                      <a:txBody>
+                        <a:bodyPr/>
+                        <a:lstStyle/>
+                        <a:p>
+                          <a:r>
+                            <a:rPr lang="en-US" dirty="0"/>
+                            <a:t>1</a:t>
+                          </a:r>
+                        </a:p>
+                      </a:txBody>
+                      <a:tcPr/>
+                    </a:tc>
+                    <a:tc>
+                      <a:txBody>
+                        <a:bodyPr/>
+                        <a:lstStyle/>
+                        <a:p>
+                          <a:r>
+                            <a:rPr lang="en-US" dirty="0"/>
+                            <a:t>1</a:t>
+                          </a:r>
+                        </a:p>
+                      </a:txBody>
+                      <a:tcPr/>
+                    </a:tc>
+                    <a:tc>
+                      <a:txBody>
+                        <a:bodyPr/>
+                        <a:lstStyle/>
+                        <a:p>
+                          <a:r>
+                            <a:rPr lang="en-US" dirty="0"/>
+                            <a:t>5</a:t>
+                          </a:r>
+                        </a:p>
+                      </a:txBody>
+                      <a:tcPr/>
+                    </a:tc>
+                    <a:tc>
+                      <a:txBody>
+                        <a:bodyPr/>
+                        <a:lstStyle/>
+                        <a:p>
+                          <a:r>
+                            <a:rPr lang="en-US" dirty="0"/>
+                            <a:t>7</a:t>
+                          </a:r>
+                        </a:p>
+                      </a:txBody>
+                      <a:tcPr/>
+                    </a:tc>
+                    <a:tc>
+                      <a:txBody>
+                        <a:bodyPr/>
+                        <a:lstStyle/>
+                        <a:p>
+                          <a:r>
+                            <a:rPr lang="en-US" dirty="0"/>
+                            <a:t>5</a:t>
+                          </a:r>
+                        </a:p>
+                      </a:txBody>
+                      <a:tcPr/>
+                    </a:tc>
+                    <a:extLst>
+                      <a:ext uri="{0D108BD9-81ED-4DB2-BD59-A6C34878D82A}">
+                        <a16:rowId xmlns:a16="http://schemas.microsoft.com/office/drawing/2014/main" val="1421886197"/>
+                      </a:ext>
+                    </a:extLst>
+                  </a:tr>
+                  <a:tr h="387078">
+                    <a:tc>
+                      <a:txBody>
+                        <a:bodyPr/>
+                        <a:lstStyle/>
+                        <a:p>
+                          <a:r>
+                            <a:rPr lang="en-US" dirty="0"/>
+                            <a:t>2</a:t>
+                          </a:r>
+                        </a:p>
+                      </a:txBody>
+                      <a:tcPr/>
+                    </a:tc>
+                    <a:tc>
+                      <a:txBody>
+                        <a:bodyPr/>
+                        <a:lstStyle/>
+                        <a:p>
+                          <a:r>
+                            <a:rPr lang="en-US" dirty="0"/>
+                            <a:t>0</a:t>
+                          </a:r>
+                        </a:p>
+                      </a:txBody>
+                      <a:tcPr/>
+                    </a:tc>
+                    <a:tc>
+                      <a:txBody>
+                        <a:bodyPr/>
+                        <a:lstStyle/>
+                        <a:p>
+                          <a:r>
+                            <a:rPr lang="en-US" dirty="0"/>
+                            <a:t>3</a:t>
+                          </a:r>
+                        </a:p>
+                      </a:txBody>
+                      <a:tcPr/>
+                    </a:tc>
+                    <a:tc>
+                      <a:txBody>
+                        <a:bodyPr/>
+                        <a:lstStyle/>
+                        <a:p>
+                          <a:r>
+                            <a:rPr lang="en-US" dirty="0"/>
+                            <a:t>5</a:t>
+                          </a:r>
+                        </a:p>
+                      </a:txBody>
+                      <a:tcPr/>
+                    </a:tc>
+                    <a:tc>
+                      <a:txBody>
+                        <a:bodyPr/>
+                        <a:lstStyle/>
+                        <a:p>
+                          <a:r>
+                            <a:rPr lang="en-US" dirty="0"/>
+                            <a:t>3</a:t>
+                          </a:r>
+                        </a:p>
+                      </a:txBody>
+                      <a:tcPr/>
+                    </a:tc>
+                    <a:extLst>
+                      <a:ext uri="{0D108BD9-81ED-4DB2-BD59-A6C34878D82A}">
+                        <a16:rowId xmlns:a16="http://schemas.microsoft.com/office/drawing/2014/main" val="3720208771"/>
+                      </a:ext>
+                    </a:extLst>
+                  </a:tr>
+                  <a:tr h="387078">
+                    <a:tc>
+                      <a:txBody>
+                        <a:bodyPr/>
+                        <a:lstStyle/>
+                        <a:p>
+                          <a:r>
+                            <a:rPr lang="en-US" dirty="0"/>
+                            <a:t>3</a:t>
+                          </a:r>
+                        </a:p>
+                      </a:txBody>
+                      <a:tcPr/>
+                    </a:tc>
+                    <a:tc>
+                      <a:txBody>
+                        <a:bodyPr/>
+                        <a:lstStyle/>
+                        <a:p>
+                          <a:r>
+                            <a:rPr lang="en-US" dirty="0"/>
+                            <a:t>1</a:t>
+                          </a:r>
+                        </a:p>
+                      </a:txBody>
+                      <a:tcPr/>
+                    </a:tc>
+                    <a:tc>
+                      <a:txBody>
+                        <a:bodyPr/>
+                        <a:lstStyle/>
+                        <a:p>
+                          <a:r>
+                            <a:rPr lang="en-US" dirty="0"/>
+                            <a:t>6</a:t>
+                          </a:r>
+                        </a:p>
+                      </a:txBody>
+                      <a:tcPr/>
+                    </a:tc>
+                    <a:tc>
+                      <a:txBody>
+                        <a:bodyPr/>
+                        <a:lstStyle/>
+                        <a:p>
+                          <a:r>
+                            <a:rPr lang="en-US" dirty="0"/>
+                            <a:t>8</a:t>
+                          </a:r>
+                        </a:p>
+                      </a:txBody>
+                      <a:tcPr/>
+                    </a:tc>
+                    <a:tc>
+                      <a:txBody>
+                        <a:bodyPr/>
+                        <a:lstStyle/>
+                        <a:p>
+                          <a:r>
+                            <a:rPr lang="en-US" dirty="0"/>
+                            <a:t>6</a:t>
+                          </a:r>
+                        </a:p>
+                      </a:txBody>
+                      <a:tcPr/>
+                    </a:tc>
+                    <a:extLst>
+                      <a:ext uri="{0D108BD9-81ED-4DB2-BD59-A6C34878D82A}">
+                        <a16:rowId xmlns:a16="http://schemas.microsoft.com/office/drawing/2014/main" val="1548578453"/>
+                      </a:ext>
+                    </a:extLst>
+                  </a:tr>
+                  <a:tr h="387078">
+                    <a:tc>
+                      <a:txBody>
+                        <a:bodyPr/>
+                        <a:lstStyle/>
+                        <a:p>
+                          <a:r>
+                            <a:rPr lang="en-US" dirty="0"/>
+                            <a:t>4</a:t>
+                          </a:r>
+                        </a:p>
+                      </a:txBody>
+                      <a:tcPr/>
+                    </a:tc>
+                    <a:tc>
+                      <a:txBody>
+                        <a:bodyPr/>
+                        <a:lstStyle/>
+                        <a:p>
+                          <a:r>
+                            <a:rPr lang="en-US" dirty="0"/>
+                            <a:t>1</a:t>
+                          </a:r>
+                        </a:p>
+                      </a:txBody>
+                      <a:tcPr/>
+                    </a:tc>
+                    <a:tc>
+                      <a:txBody>
+                        <a:bodyPr/>
+                        <a:lstStyle/>
+                        <a:p>
+                          <a:r>
+                            <a:rPr lang="en-US" dirty="0"/>
+                            <a:t>2</a:t>
+                          </a:r>
+                        </a:p>
+                      </a:txBody>
+                      <a:tcPr/>
+                    </a:tc>
+                    <a:tc>
+                      <a:txBody>
+                        <a:bodyPr/>
+                        <a:lstStyle/>
+                        <a:p>
+                          <a:r>
+                            <a:rPr lang="en-US" dirty="0"/>
+                            <a:t>4</a:t>
+                          </a:r>
+                        </a:p>
+                      </a:txBody>
+                      <a:tcPr/>
+                    </a:tc>
+                    <a:tc>
+                      <a:txBody>
+                        <a:bodyPr/>
+                        <a:lstStyle/>
+                        <a:p>
+                          <a:r>
+                            <a:rPr lang="en-US" dirty="0"/>
+                            <a:t>2</a:t>
+                          </a:r>
+                        </a:p>
+                      </a:txBody>
+                      <a:tcPr/>
+                    </a:tc>
+                    <a:extLst>
+                      <a:ext uri="{0D108BD9-81ED-4DB2-BD59-A6C34878D82A}">
+                        <a16:rowId xmlns:a16="http://schemas.microsoft.com/office/drawing/2014/main" val="1077476271"/>
+                      </a:ext>
+                    </a:extLst>
+                  </a:tr>
+                  <a:tr h="387078">
+                    <a:tc>
+                      <a:txBody>
+                        <a:bodyPr/>
+                        <a:lstStyle/>
+                        <a:p>
+                          <a:r>
+                            <a:rPr lang="en-US" dirty="0"/>
+                            <a:t>5</a:t>
+                          </a:r>
+                        </a:p>
+                      </a:txBody>
+                      <a:tcPr/>
+                    </a:tc>
+                    <a:tc>
+                      <a:txBody>
+                        <a:bodyPr/>
+                        <a:lstStyle/>
+                        <a:p>
+                          <a:r>
+                            <a:rPr lang="en-US" dirty="0"/>
+                            <a:t>0</a:t>
+                          </a:r>
+                        </a:p>
+                      </a:txBody>
+                      <a:tcPr/>
+                    </a:tc>
+                    <a:tc>
+                      <a:txBody>
+                        <a:bodyPr/>
+                        <a:lstStyle/>
+                        <a:p>
+                          <a:r>
+                            <a:rPr lang="en-US" dirty="0"/>
+                            <a:t>9</a:t>
+                          </a:r>
+                        </a:p>
+                      </a:txBody>
+                      <a:tcPr/>
+                    </a:tc>
+                    <a:tc>
+                      <a:txBody>
+                        <a:bodyPr/>
+                        <a:lstStyle/>
+                        <a:p>
+                          <a:r>
+                            <a:rPr lang="en-US" dirty="0"/>
+                            <a:t>10</a:t>
+                          </a:r>
+                        </a:p>
+                      </a:txBody>
+                      <a:tcPr/>
+                    </a:tc>
+                    <a:tc>
+                      <a:txBody>
+                        <a:bodyPr/>
+                        <a:lstStyle/>
+                        <a:p>
+                          <a:r>
+                            <a:rPr lang="en-US" dirty="0"/>
+                            <a:t>9</a:t>
+                          </a:r>
+                        </a:p>
+                      </a:txBody>
+                      <a:tcPr/>
+                    </a:tc>
+                    <a:extLst>
+                      <a:ext uri="{0D108BD9-81ED-4DB2-BD59-A6C34878D82A}">
+                        <a16:rowId xmlns:a16="http://schemas.microsoft.com/office/drawing/2014/main" val="4183004880"/>
+                      </a:ext>
+                    </a:extLst>
+                  </a:tr>
+                </a:tbl>
+              </a:graphicData>
+            </a:graphic>
+          </p:graphicFrame>
+        </mc:Choice>
+        <mc:Fallback>
+          <p:graphicFrame>
+            <p:nvGraphicFramePr>
+              <p:cNvPr id="6" name="Content Placeholder 5">
+                <a:extLst>
+                  <a:ext uri="{FF2B5EF4-FFF2-40B4-BE49-F238E27FC236}">
+                    <a16:creationId xmlns:a16="http://schemas.microsoft.com/office/drawing/2014/main" id="{9C3EFB2A-DD1F-726A-E860-E7F26549CB42}"/>
+                  </a:ext>
+                </a:extLst>
+              </p:cNvPr>
+              <p:cNvGraphicFramePr>
+                <a:graphicFrameLocks noGrp="1"/>
+              </p:cNvGraphicFramePr>
+              <p:nvPr>
+                <p:ph idx="1"/>
+                <p:extLst>
+                  <p:ext uri="{D42A27DB-BD31-4B8C-83A1-F6EECF244321}">
+                    <p14:modId xmlns:p14="http://schemas.microsoft.com/office/powerpoint/2010/main" val="3988702154"/>
+                  </p:ext>
+                </p:extLst>
+              </p:nvPr>
+            </p:nvGraphicFramePr>
+            <p:xfrm>
+              <a:off x="838199" y="1685515"/>
+              <a:ext cx="11077575" cy="2603498"/>
+            </p:xfrm>
+            <a:graphic>
+              <a:graphicData uri="http://schemas.openxmlformats.org/drawingml/2006/table">
+                <a:tbl>
+                  <a:tblPr firstRow="1" bandRow="1">
+                    <a:tableStyleId>{5C22544A-7EE6-4342-B048-85BDC9FD1C3A}</a:tableStyleId>
+                  </a:tblPr>
+                  <a:tblGrid>
+                    <a:gridCol w="927234">
+                      <a:extLst>
+                        <a:ext uri="{9D8B030D-6E8A-4147-A177-3AD203B41FA5}">
+                          <a16:colId xmlns:a16="http://schemas.microsoft.com/office/drawing/2014/main" val="191740655"/>
+                        </a:ext>
+                      </a:extLst>
+                    </a:gridCol>
+                    <a:gridCol w="1942253">
+                      <a:extLst>
+                        <a:ext uri="{9D8B030D-6E8A-4147-A177-3AD203B41FA5}">
+                          <a16:colId xmlns:a16="http://schemas.microsoft.com/office/drawing/2014/main" val="3598971456"/>
+                        </a:ext>
+                      </a:extLst>
+                    </a:gridCol>
+                    <a:gridCol w="3818667">
+                      <a:extLst>
+                        <a:ext uri="{9D8B030D-6E8A-4147-A177-3AD203B41FA5}">
+                          <a16:colId xmlns:a16="http://schemas.microsoft.com/office/drawing/2014/main" val="208397520"/>
+                        </a:ext>
+                      </a:extLst>
+                    </a:gridCol>
+                    <a:gridCol w="2831081">
+                      <a:extLst>
+                        <a:ext uri="{9D8B030D-6E8A-4147-A177-3AD203B41FA5}">
+                          <a16:colId xmlns:a16="http://schemas.microsoft.com/office/drawing/2014/main" val="1960270943"/>
+                        </a:ext>
+                      </a:extLst>
+                    </a:gridCol>
+                    <a:gridCol w="1558340">
+                      <a:extLst>
+                        <a:ext uri="{9D8B030D-6E8A-4147-A177-3AD203B41FA5}">
+                          <a16:colId xmlns:a16="http://schemas.microsoft.com/office/drawing/2014/main" val="3921827867"/>
+                        </a:ext>
+                      </a:extLst>
+                    </a:gridCol>
+                  </a:tblGrid>
+                  <a:tr h="668108">
+                    <a:tc>
+                      <a:txBody>
+                        <a:bodyPr/>
+                        <a:lstStyle/>
+                        <a:p>
+                          <a:r>
+                            <a:rPr lang="en-US" dirty="0"/>
+                            <a:t>Unit</a:t>
+                          </a:r>
+                        </a:p>
+                      </a:txBody>
+                      <a:tcPr/>
+                    </a:tc>
+                    <a:tc>
+                      <a:txBody>
+                        <a:bodyPr/>
+                        <a:lstStyle/>
+                        <a:p>
+                          <a:endParaRPr lang="en-US"/>
+                        </a:p>
+                      </a:txBody>
+                      <a:tcPr>
+                        <a:blipFill>
+                          <a:blip r:embed="rId2"/>
+                          <a:stretch>
+                            <a:fillRect l="-47712" t="-3774" r="-424837" b="-301887"/>
+                          </a:stretch>
+                        </a:blipFill>
+                      </a:tcPr>
+                    </a:tc>
+                    <a:tc>
+                      <a:txBody>
+                        <a:bodyPr/>
+                        <a:lstStyle/>
+                        <a:p>
+                          <a:endParaRPr lang="en-US"/>
+                        </a:p>
+                      </a:txBody>
+                      <a:tcPr>
+                        <a:blipFill>
+                          <a:blip r:embed="rId2"/>
+                          <a:stretch>
+                            <a:fillRect l="-74834" t="-3774" r="-115232" b="-301887"/>
+                          </a:stretch>
+                        </a:blipFill>
+                      </a:tcPr>
+                    </a:tc>
+                    <a:tc>
+                      <a:txBody>
+                        <a:bodyPr/>
+                        <a:lstStyle/>
+                        <a:p>
+                          <a:endParaRPr lang="en-US"/>
+                        </a:p>
+                      </a:txBody>
+                      <a:tcPr>
+                        <a:blipFill>
+                          <a:blip r:embed="rId2"/>
+                          <a:stretch>
+                            <a:fillRect l="-236771" t="-3774" r="-56054" b="-301887"/>
+                          </a:stretch>
+                        </a:blipFill>
+                      </a:tcPr>
+                    </a:tc>
+                    <a:tc>
+                      <a:txBody>
+                        <a:bodyPr/>
+                        <a:lstStyle/>
+                        <a:p>
+                          <a:endParaRPr lang="en-US"/>
+                        </a:p>
+                      </a:txBody>
+                      <a:tcPr>
+                        <a:blipFill>
+                          <a:blip r:embed="rId2"/>
+                          <a:stretch>
+                            <a:fillRect l="-610569" t="-3774" r="-1626" b="-301887"/>
+                          </a:stretch>
+                        </a:blipFill>
+                      </a:tcPr>
+                    </a:tc>
+                    <a:extLst>
+                      <a:ext uri="{0D108BD9-81ED-4DB2-BD59-A6C34878D82A}">
+                        <a16:rowId xmlns:a16="http://schemas.microsoft.com/office/drawing/2014/main" val="2089696527"/>
+                      </a:ext>
+                    </a:extLst>
+                  </a:tr>
+                  <a:tr h="387078">
+                    <a:tc>
+                      <a:txBody>
+                        <a:bodyPr/>
+                        <a:lstStyle/>
+                        <a:p>
+                          <a:r>
+                            <a:rPr lang="en-US" dirty="0"/>
+                            <a:t>1</a:t>
+                          </a:r>
+                        </a:p>
+                      </a:txBody>
+                      <a:tcPr/>
+                    </a:tc>
+                    <a:tc>
+                      <a:txBody>
+                        <a:bodyPr/>
+                        <a:lstStyle/>
+                        <a:p>
+                          <a:r>
+                            <a:rPr lang="en-US" dirty="0"/>
+                            <a:t>1</a:t>
+                          </a:r>
+                        </a:p>
+                      </a:txBody>
+                      <a:tcPr/>
+                    </a:tc>
+                    <a:tc>
+                      <a:txBody>
+                        <a:bodyPr/>
+                        <a:lstStyle/>
+                        <a:p>
+                          <a:r>
+                            <a:rPr lang="en-US" dirty="0"/>
+                            <a:t>5</a:t>
+                          </a:r>
+                        </a:p>
+                      </a:txBody>
+                      <a:tcPr/>
+                    </a:tc>
+                    <a:tc>
+                      <a:txBody>
+                        <a:bodyPr/>
+                        <a:lstStyle/>
+                        <a:p>
+                          <a:r>
+                            <a:rPr lang="en-US" dirty="0"/>
+                            <a:t>7</a:t>
+                          </a:r>
+                        </a:p>
+                      </a:txBody>
+                      <a:tcPr/>
+                    </a:tc>
+                    <a:tc>
+                      <a:txBody>
+                        <a:bodyPr/>
+                        <a:lstStyle/>
+                        <a:p>
+                          <a:r>
+                            <a:rPr lang="en-US" dirty="0"/>
+                            <a:t>5</a:t>
+                          </a:r>
+                        </a:p>
+                      </a:txBody>
+                      <a:tcPr/>
+                    </a:tc>
+                    <a:extLst>
+                      <a:ext uri="{0D108BD9-81ED-4DB2-BD59-A6C34878D82A}">
+                        <a16:rowId xmlns:a16="http://schemas.microsoft.com/office/drawing/2014/main" val="1421886197"/>
+                      </a:ext>
+                    </a:extLst>
+                  </a:tr>
+                  <a:tr h="387078">
+                    <a:tc>
+                      <a:txBody>
+                        <a:bodyPr/>
+                        <a:lstStyle/>
+                        <a:p>
+                          <a:r>
+                            <a:rPr lang="en-US" dirty="0"/>
+                            <a:t>2</a:t>
+                          </a:r>
+                        </a:p>
+                      </a:txBody>
+                      <a:tcPr/>
+                    </a:tc>
+                    <a:tc>
+                      <a:txBody>
+                        <a:bodyPr/>
+                        <a:lstStyle/>
+                        <a:p>
+                          <a:r>
+                            <a:rPr lang="en-US" dirty="0"/>
+                            <a:t>0</a:t>
+                          </a:r>
+                        </a:p>
+                      </a:txBody>
+                      <a:tcPr/>
+                    </a:tc>
+                    <a:tc>
+                      <a:txBody>
+                        <a:bodyPr/>
+                        <a:lstStyle/>
+                        <a:p>
+                          <a:r>
+                            <a:rPr lang="en-US" dirty="0"/>
+                            <a:t>3</a:t>
+                          </a:r>
+                        </a:p>
+                      </a:txBody>
+                      <a:tcPr/>
+                    </a:tc>
+                    <a:tc>
+                      <a:txBody>
+                        <a:bodyPr/>
+                        <a:lstStyle/>
+                        <a:p>
+                          <a:r>
+                            <a:rPr lang="en-US" dirty="0"/>
+                            <a:t>5</a:t>
+                          </a:r>
+                        </a:p>
+                      </a:txBody>
+                      <a:tcPr/>
+                    </a:tc>
+                    <a:tc>
+                      <a:txBody>
+                        <a:bodyPr/>
+                        <a:lstStyle/>
+                        <a:p>
+                          <a:r>
+                            <a:rPr lang="en-US" dirty="0"/>
+                            <a:t>3</a:t>
+                          </a:r>
+                        </a:p>
+                      </a:txBody>
+                      <a:tcPr/>
+                    </a:tc>
+                    <a:extLst>
+                      <a:ext uri="{0D108BD9-81ED-4DB2-BD59-A6C34878D82A}">
+                        <a16:rowId xmlns:a16="http://schemas.microsoft.com/office/drawing/2014/main" val="3720208771"/>
+                      </a:ext>
+                    </a:extLst>
+                  </a:tr>
+                  <a:tr h="387078">
+                    <a:tc>
+                      <a:txBody>
+                        <a:bodyPr/>
+                        <a:lstStyle/>
+                        <a:p>
+                          <a:r>
+                            <a:rPr lang="en-US" dirty="0"/>
+                            <a:t>3</a:t>
+                          </a:r>
+                        </a:p>
+                      </a:txBody>
+                      <a:tcPr/>
+                    </a:tc>
+                    <a:tc>
+                      <a:txBody>
+                        <a:bodyPr/>
+                        <a:lstStyle/>
+                        <a:p>
+                          <a:r>
+                            <a:rPr lang="en-US" dirty="0"/>
+                            <a:t>1</a:t>
+                          </a:r>
+                        </a:p>
+                      </a:txBody>
+                      <a:tcPr/>
+                    </a:tc>
+                    <a:tc>
+                      <a:txBody>
+                        <a:bodyPr/>
+                        <a:lstStyle/>
+                        <a:p>
+                          <a:r>
+                            <a:rPr lang="en-US" dirty="0"/>
+                            <a:t>6</a:t>
+                          </a:r>
+                        </a:p>
+                      </a:txBody>
+                      <a:tcPr/>
+                    </a:tc>
+                    <a:tc>
+                      <a:txBody>
+                        <a:bodyPr/>
+                        <a:lstStyle/>
+                        <a:p>
+                          <a:r>
+                            <a:rPr lang="en-US" dirty="0"/>
+                            <a:t>8</a:t>
+                          </a:r>
+                        </a:p>
+                      </a:txBody>
+                      <a:tcPr/>
+                    </a:tc>
+                    <a:tc>
+                      <a:txBody>
+                        <a:bodyPr/>
+                        <a:lstStyle/>
+                        <a:p>
+                          <a:r>
+                            <a:rPr lang="en-US" dirty="0"/>
+                            <a:t>6</a:t>
+                          </a:r>
+                        </a:p>
+                      </a:txBody>
+                      <a:tcPr/>
+                    </a:tc>
+                    <a:extLst>
+                      <a:ext uri="{0D108BD9-81ED-4DB2-BD59-A6C34878D82A}">
+                        <a16:rowId xmlns:a16="http://schemas.microsoft.com/office/drawing/2014/main" val="1548578453"/>
+                      </a:ext>
+                    </a:extLst>
+                  </a:tr>
+                  <a:tr h="387078">
+                    <a:tc>
+                      <a:txBody>
+                        <a:bodyPr/>
+                        <a:lstStyle/>
+                        <a:p>
+                          <a:r>
+                            <a:rPr lang="en-US" dirty="0"/>
+                            <a:t>4</a:t>
+                          </a:r>
+                        </a:p>
+                      </a:txBody>
+                      <a:tcPr/>
+                    </a:tc>
+                    <a:tc>
+                      <a:txBody>
+                        <a:bodyPr/>
+                        <a:lstStyle/>
+                        <a:p>
+                          <a:r>
+                            <a:rPr lang="en-US" dirty="0"/>
+                            <a:t>1</a:t>
+                          </a:r>
+                        </a:p>
+                      </a:txBody>
+                      <a:tcPr/>
+                    </a:tc>
+                    <a:tc>
+                      <a:txBody>
+                        <a:bodyPr/>
+                        <a:lstStyle/>
+                        <a:p>
+                          <a:r>
+                            <a:rPr lang="en-US" dirty="0"/>
+                            <a:t>2</a:t>
+                          </a:r>
+                        </a:p>
+                      </a:txBody>
+                      <a:tcPr/>
+                    </a:tc>
+                    <a:tc>
+                      <a:txBody>
+                        <a:bodyPr/>
+                        <a:lstStyle/>
+                        <a:p>
+                          <a:r>
+                            <a:rPr lang="en-US" dirty="0"/>
+                            <a:t>4</a:t>
+                          </a:r>
+                        </a:p>
+                      </a:txBody>
+                      <a:tcPr/>
+                    </a:tc>
+                    <a:tc>
+                      <a:txBody>
+                        <a:bodyPr/>
+                        <a:lstStyle/>
+                        <a:p>
+                          <a:r>
+                            <a:rPr lang="en-US" dirty="0"/>
+                            <a:t>2</a:t>
+                          </a:r>
+                        </a:p>
+                      </a:txBody>
+                      <a:tcPr/>
+                    </a:tc>
+                    <a:extLst>
+                      <a:ext uri="{0D108BD9-81ED-4DB2-BD59-A6C34878D82A}">
+                        <a16:rowId xmlns:a16="http://schemas.microsoft.com/office/drawing/2014/main" val="1077476271"/>
+                      </a:ext>
+                    </a:extLst>
+                  </a:tr>
+                  <a:tr h="387078">
+                    <a:tc>
+                      <a:txBody>
+                        <a:bodyPr/>
+                        <a:lstStyle/>
+                        <a:p>
+                          <a:r>
+                            <a:rPr lang="en-US" dirty="0"/>
+                            <a:t>5</a:t>
+                          </a:r>
+                        </a:p>
+                      </a:txBody>
+                      <a:tcPr/>
+                    </a:tc>
+                    <a:tc>
+                      <a:txBody>
+                        <a:bodyPr/>
+                        <a:lstStyle/>
+                        <a:p>
+                          <a:r>
+                            <a:rPr lang="en-US" dirty="0"/>
+                            <a:t>0</a:t>
+                          </a:r>
+                        </a:p>
+                      </a:txBody>
+                      <a:tcPr/>
+                    </a:tc>
+                    <a:tc>
+                      <a:txBody>
+                        <a:bodyPr/>
+                        <a:lstStyle/>
+                        <a:p>
+                          <a:r>
+                            <a:rPr lang="en-US" dirty="0"/>
+                            <a:t>9</a:t>
+                          </a:r>
+                        </a:p>
+                      </a:txBody>
+                      <a:tcPr/>
+                    </a:tc>
+                    <a:tc>
+                      <a:txBody>
+                        <a:bodyPr/>
+                        <a:lstStyle/>
+                        <a:p>
+                          <a:r>
+                            <a:rPr lang="en-US" dirty="0"/>
+                            <a:t>10</a:t>
+                          </a:r>
+                        </a:p>
+                      </a:txBody>
+                      <a:tcPr/>
+                    </a:tc>
+                    <a:tc>
+                      <a:txBody>
+                        <a:bodyPr/>
+                        <a:lstStyle/>
+                        <a:p>
+                          <a:r>
+                            <a:rPr lang="en-US" dirty="0"/>
+                            <a:t>9</a:t>
+                          </a:r>
+                        </a:p>
+                      </a:txBody>
+                      <a:tcPr/>
+                    </a:tc>
+                    <a:extLst>
+                      <a:ext uri="{0D108BD9-81ED-4DB2-BD59-A6C34878D82A}">
+                        <a16:rowId xmlns:a16="http://schemas.microsoft.com/office/drawing/2014/main" val="4183004880"/>
+                      </a:ext>
+                    </a:extLst>
+                  </a:tr>
+                </a:tbl>
+              </a:graphicData>
+            </a:graphic>
+          </p:graphicFrame>
+        </mc:Fallback>
+      </mc:AlternateContent>
+      <p:sp>
+        <p:nvSpPr>
+          <p:cNvPr id="5" name="Slide Number Placeholder 4">
+            <a:extLst>
+              <a:ext uri="{FF2B5EF4-FFF2-40B4-BE49-F238E27FC236}">
+                <a16:creationId xmlns:a16="http://schemas.microsoft.com/office/drawing/2014/main" id="{98EBA29C-A51D-3668-C82D-30A441C54F62}"/>
+              </a:ext>
+            </a:extLst>
+          </p:cNvPr>
+          <p:cNvSpPr>
+            <a:spLocks noGrp="1"/>
+          </p:cNvSpPr>
+          <p:nvPr>
+            <p:ph type="sldNum" sz="quarter" idx="12"/>
+          </p:nvPr>
+        </p:nvSpPr>
+        <p:spPr/>
+        <p:txBody>
+          <a:bodyPr/>
+          <a:lstStyle/>
+          <a:p>
+            <a:fld id="{B9021C99-F081-FD4B-9146-F8976D51EC28}" type="slidenum">
+              <a:rPr lang="en-US" smtClean="0"/>
+              <a:t>3</a:t>
+            </a:fld>
+            <a:endParaRPr lang="en-US"/>
+          </a:p>
+        </p:txBody>
+      </p:sp>
+      <mc:AlternateContent xmlns:mc="http://schemas.openxmlformats.org/markup-compatibility/2006">
+        <mc:Choice xmlns:a14="http://schemas.microsoft.com/office/drawing/2010/main" Requires="a14">
+          <p:sp>
+            <p:nvSpPr>
+              <p:cNvPr id="8" name="TextBox 7">
+                <a:extLst>
+                  <a:ext uri="{FF2B5EF4-FFF2-40B4-BE49-F238E27FC236}">
+                    <a16:creationId xmlns:a16="http://schemas.microsoft.com/office/drawing/2014/main" id="{05EEE0AC-0A9B-FE66-6C7A-4AD249BA97B3}"/>
+                  </a:ext>
+                </a:extLst>
+              </p:cNvPr>
+              <p:cNvSpPr txBox="1"/>
+              <p:nvPr/>
+            </p:nvSpPr>
+            <p:spPr>
+              <a:xfrm>
+                <a:off x="585787" y="4429123"/>
+                <a:ext cx="6491288" cy="910570"/>
+              </a:xfrm>
+              <a:prstGeom prst="rect">
+                <a:avLst/>
+              </a:prstGeom>
+              <a:noFill/>
+            </p:spPr>
+            <p:txBody>
+              <a:bodyPr wrap="square" rtlCol="0">
+                <a:spAutoFit/>
+              </a:bodyPr>
+              <a:lstStyle/>
+              <a:p>
+                <a14:m>
+                  <m:oMathPara xmlns:m="http://schemas.openxmlformats.org/officeDocument/2006/math">
+                    <m:oMathParaPr>
+                      <m:jc m:val="centerGroup"/>
+                    </m:oMathParaPr>
+                    <m:oMath xmlns:m="http://schemas.openxmlformats.org/officeDocument/2006/math">
+                      <m:acc>
+                        <m:accPr>
+                          <m:chr m:val="̂"/>
+                          <m:ctrlPr>
+                            <a:rPr lang="en-US" sz="2800" i="1" dirty="0" smtClean="0">
+                              <a:latin typeface="Cambria Math" panose="02040503050406030204" pitchFamily="18" charset="0"/>
+                            </a:rPr>
+                          </m:ctrlPr>
+                        </m:accPr>
+                        <m:e>
+                          <m:r>
+                            <a:rPr lang="en-US" sz="2800" i="1" dirty="0" smtClean="0">
+                              <a:latin typeface="Cambria Math" panose="02040503050406030204" pitchFamily="18" charset="0"/>
+                            </a:rPr>
+                            <m:t>𝜏</m:t>
+                          </m:r>
+                        </m:e>
+                      </m:acc>
+                      <m:r>
+                        <a:rPr lang="en-US" sz="2800" i="1" dirty="0" smtClean="0">
+                          <a:latin typeface="Cambria Math" panose="02040503050406030204" pitchFamily="18" charset="0"/>
+                        </a:rPr>
+                        <m:t>=</m:t>
+                      </m:r>
+                      <m:f>
+                        <m:fPr>
+                          <m:ctrlPr>
+                            <a:rPr lang="en-US" sz="2800" i="1" dirty="0" smtClean="0">
+                              <a:latin typeface="Cambria Math" panose="02040503050406030204" pitchFamily="18" charset="0"/>
+                            </a:rPr>
+                          </m:ctrlPr>
+                        </m:fPr>
+                        <m:num>
+                          <m:r>
+                            <a:rPr lang="en-US" sz="2800" i="1" dirty="0" smtClean="0">
+                              <a:latin typeface="Cambria Math" panose="02040503050406030204" pitchFamily="18" charset="0"/>
+                            </a:rPr>
+                            <m:t>1</m:t>
+                          </m:r>
+                        </m:num>
+                        <m:den>
+                          <m:r>
+                            <a:rPr lang="en-US" sz="2800" i="1" dirty="0" smtClean="0">
+                              <a:latin typeface="Cambria Math" panose="02040503050406030204" pitchFamily="18" charset="0"/>
+                            </a:rPr>
+                            <m:t>3</m:t>
+                          </m:r>
+                        </m:den>
+                      </m:f>
+                      <m:d>
+                        <m:dPr>
+                          <m:ctrlPr>
+                            <a:rPr lang="en-US" sz="2800" i="1" dirty="0" smtClean="0">
+                              <a:latin typeface="Cambria Math" panose="02040503050406030204" pitchFamily="18" charset="0"/>
+                            </a:rPr>
+                          </m:ctrlPr>
+                        </m:dPr>
+                        <m:e>
+                          <m:r>
+                            <a:rPr lang="en-US" sz="2800" i="1" dirty="0" smtClean="0">
+                              <a:latin typeface="Cambria Math" panose="02040503050406030204" pitchFamily="18" charset="0"/>
+                            </a:rPr>
+                            <m:t>5+6+2</m:t>
+                          </m:r>
+                        </m:e>
+                      </m:d>
+                      <m:r>
+                        <a:rPr lang="en-US" sz="2800" i="1" dirty="0" smtClean="0">
+                          <a:latin typeface="Cambria Math" panose="02040503050406030204" pitchFamily="18" charset="0"/>
+                        </a:rPr>
+                        <m:t>−</m:t>
+                      </m:r>
+                      <m:f>
+                        <m:fPr>
+                          <m:ctrlPr>
+                            <a:rPr lang="en-US" sz="2800" i="1" dirty="0" smtClean="0">
+                              <a:latin typeface="Cambria Math" panose="02040503050406030204" pitchFamily="18" charset="0"/>
+                            </a:rPr>
+                          </m:ctrlPr>
+                        </m:fPr>
+                        <m:num>
+                          <m:r>
+                            <a:rPr lang="en-US" sz="2800" i="1" dirty="0" smtClean="0">
+                              <a:latin typeface="Cambria Math" panose="02040503050406030204" pitchFamily="18" charset="0"/>
+                            </a:rPr>
+                            <m:t>1</m:t>
+                          </m:r>
+                        </m:num>
+                        <m:den>
+                          <m:r>
+                            <a:rPr lang="en-US" sz="2800" i="1" dirty="0" smtClean="0">
+                              <a:latin typeface="Cambria Math" panose="02040503050406030204" pitchFamily="18" charset="0"/>
+                            </a:rPr>
+                            <m:t>2</m:t>
+                          </m:r>
+                        </m:den>
+                      </m:f>
+                      <m:d>
+                        <m:dPr>
+                          <m:ctrlPr>
+                            <a:rPr lang="en-US" sz="2800" i="1" dirty="0" smtClean="0">
+                              <a:latin typeface="Cambria Math" panose="02040503050406030204" pitchFamily="18" charset="0"/>
+                            </a:rPr>
+                          </m:ctrlPr>
+                        </m:dPr>
+                        <m:e>
+                          <m:r>
+                            <a:rPr lang="en-US" sz="2800" i="1" dirty="0" smtClean="0">
+                              <a:latin typeface="Cambria Math" panose="02040503050406030204" pitchFamily="18" charset="0"/>
+                            </a:rPr>
+                            <m:t>3+9</m:t>
+                          </m:r>
+                        </m:e>
+                      </m:d>
+                      <m:r>
+                        <a:rPr lang="en-US" sz="2800" b="0" i="1" dirty="0" smtClean="0">
+                          <a:latin typeface="Cambria Math" panose="02040503050406030204" pitchFamily="18" charset="0"/>
+                        </a:rPr>
+                        <m:t> = −</m:t>
+                      </m:r>
+                      <m:f>
+                        <m:fPr>
+                          <m:ctrlPr>
+                            <a:rPr lang="en-US" sz="2800" b="0" i="1" dirty="0" smtClean="0">
+                              <a:latin typeface="Cambria Math" panose="02040503050406030204" pitchFamily="18" charset="0"/>
+                            </a:rPr>
+                          </m:ctrlPr>
+                        </m:fPr>
+                        <m:num>
+                          <m:r>
+                            <a:rPr lang="en-US" sz="2800" b="0" i="1" dirty="0" smtClean="0">
+                              <a:latin typeface="Cambria Math" panose="02040503050406030204" pitchFamily="18" charset="0"/>
+                            </a:rPr>
+                            <m:t>5</m:t>
+                          </m:r>
+                        </m:num>
+                        <m:den>
+                          <m:r>
+                            <a:rPr lang="en-US" sz="2800" b="0" i="1" dirty="0" smtClean="0">
+                              <a:latin typeface="Cambria Math" panose="02040503050406030204" pitchFamily="18" charset="0"/>
+                            </a:rPr>
+                            <m:t>3</m:t>
+                          </m:r>
+                        </m:den>
+                      </m:f>
+                    </m:oMath>
+                  </m:oMathPara>
+                </a14:m>
+              </a:p>
+            </p:txBody>
+          </p:sp>
+        </mc:Choice>
+        <mc:Fallback>
+          <p:sp>
+            <p:nvSpPr>
+              <p:cNvPr id="8" name="TextBox 7">
+                <a:extLst>
+                  <a:ext uri="{FF2B5EF4-FFF2-40B4-BE49-F238E27FC236}">
+                    <a16:creationId xmlns:a16="http://schemas.microsoft.com/office/drawing/2014/main" id="{05EEE0AC-0A9B-FE66-6C7A-4AD249BA97B3}"/>
+                  </a:ext>
+                </a:extLst>
+              </p:cNvPr>
+              <p:cNvSpPr txBox="1">
+                <a:spLocks noRot="1" noChangeAspect="1" noMove="1" noResize="1" noEditPoints="1" noAdjustHandles="1" noChangeArrowheads="1" noChangeShapeType="1" noTextEdit="1"/>
+              </p:cNvSpPr>
+              <p:nvPr/>
+            </p:nvSpPr>
+            <p:spPr>
+              <a:xfrm>
+                <a:off x="585787" y="4429123"/>
+                <a:ext cx="6491288" cy="910570"/>
+              </a:xfrm>
+              <a:prstGeom prst="rect">
+                <a:avLst/>
+              </a:prstGeom>
+              <a:blipFill>
+                <a:blip r:embed="rId3"/>
+                <a:stretch>
+                  <a:fillRect b="-6849"/>
+                </a:stretch>
+              </a:blipFill>
+            </p:spPr>
+            <p:txBody>
+              <a:bodyPr/>
+              <a:lstStyle/>
+              <a:p>
+                <a:r>
+                  <a:rPr lang="en-US">
+                    <a:noFill/>
+                  </a:rPr>
+                  <a:t> </a:t>
+                </a:r>
+              </a:p>
+            </p:txBody>
+          </p:sp>
+        </mc:Fallback>
+      </mc:AlternateContent>
+      <mc:AlternateContent xmlns:mc="http://schemas.openxmlformats.org/markup-compatibility/2006">
+        <mc:Choice xmlns:a14="http://schemas.microsoft.com/office/drawing/2010/main" Requires="a14">
+          <p:sp>
+            <p:nvSpPr>
+              <p:cNvPr id="9" name="TextBox 8">
+                <a:extLst>
+                  <a:ext uri="{FF2B5EF4-FFF2-40B4-BE49-F238E27FC236}">
+                    <a16:creationId xmlns:a16="http://schemas.microsoft.com/office/drawing/2014/main" id="{1E79BC49-E015-7A5B-512E-2E376C2D8A4E}"/>
+                  </a:ext>
+                </a:extLst>
+              </p:cNvPr>
+              <p:cNvSpPr txBox="1"/>
+              <p:nvPr/>
+            </p:nvSpPr>
+            <p:spPr>
+              <a:xfrm>
+                <a:off x="7077075" y="4649265"/>
+                <a:ext cx="5114925" cy="523220"/>
+              </a:xfrm>
+              <a:prstGeom prst="rect">
+                <a:avLst/>
+              </a:prstGeom>
+              <a:noFill/>
+            </p:spPr>
+            <p:txBody>
+              <a:bodyPr wrap="square" rtlCol="0">
+                <a:spAutoFit/>
+              </a:bodyPr>
+              <a:lstStyle/>
+              <a:p>
+                <a:r>
+                  <a:rPr lang="en-US" sz="2800" dirty="0"/>
+                  <a:t>but </a:t>
+                </a:r>
+                <a14:m>
+                  <m:oMath xmlns:m="http://schemas.openxmlformats.org/officeDocument/2006/math">
+                    <m:sSub>
+                      <m:sSubPr>
+                        <m:ctrlPr>
+                          <a:rPr lang="en-US" sz="2800" i="1" dirty="0" smtClean="0">
+                            <a:latin typeface="Cambria Math" panose="02040503050406030204" pitchFamily="18" charset="0"/>
+                          </a:rPr>
+                        </m:ctrlPr>
+                      </m:sSubPr>
+                      <m:e>
+                        <m:r>
+                          <a:rPr lang="en-US" sz="2800" i="1" dirty="0" smtClean="0">
+                            <a:latin typeface="Cambria Math" panose="02040503050406030204" pitchFamily="18" charset="0"/>
+                          </a:rPr>
+                          <m:t>𝜏</m:t>
+                        </m:r>
+                      </m:e>
+                      <m:sub>
+                        <m:r>
+                          <a:rPr lang="en-US" sz="2800" i="1" dirty="0" err="1" smtClean="0">
+                            <a:latin typeface="Cambria Math" panose="02040503050406030204" pitchFamily="18" charset="0"/>
+                          </a:rPr>
+                          <m:t>𝑖</m:t>
+                        </m:r>
+                      </m:sub>
+                    </m:sSub>
+                    <m:r>
+                      <a:rPr lang="en-US" sz="2800" i="1" dirty="0" smtClean="0">
+                        <a:latin typeface="Cambria Math" panose="02040503050406030204" pitchFamily="18" charset="0"/>
+                      </a:rPr>
+                      <m:t>&gt;0∀</m:t>
+                    </m:r>
+                    <m:r>
+                      <a:rPr lang="en-US" sz="2800" i="1" dirty="0" err="1" smtClean="0">
+                        <a:latin typeface="Cambria Math" panose="02040503050406030204" pitchFamily="18" charset="0"/>
+                      </a:rPr>
+                      <m:t>𝑖</m:t>
+                    </m:r>
+                  </m:oMath>
+                </a14:m>
+                <a:endParaRPr lang="en-US" sz="2800" dirty="0"/>
+              </a:p>
+            </p:txBody>
+          </p:sp>
+        </mc:Choice>
+        <mc:Fallback>
+          <p:sp>
+            <p:nvSpPr>
+              <p:cNvPr id="9" name="TextBox 8">
+                <a:extLst>
+                  <a:ext uri="{FF2B5EF4-FFF2-40B4-BE49-F238E27FC236}">
+                    <a16:creationId xmlns:a16="http://schemas.microsoft.com/office/drawing/2014/main" id="{1E79BC49-E015-7A5B-512E-2E376C2D8A4E}"/>
+                  </a:ext>
+                </a:extLst>
+              </p:cNvPr>
+              <p:cNvSpPr txBox="1">
+                <a:spLocks noRot="1" noChangeAspect="1" noMove="1" noResize="1" noEditPoints="1" noAdjustHandles="1" noChangeArrowheads="1" noChangeShapeType="1" noTextEdit="1"/>
+              </p:cNvSpPr>
+              <p:nvPr/>
+            </p:nvSpPr>
+            <p:spPr>
+              <a:xfrm>
+                <a:off x="7077075" y="4649265"/>
+                <a:ext cx="5114925" cy="523220"/>
+              </a:xfrm>
+              <a:prstGeom prst="rect">
+                <a:avLst/>
+              </a:prstGeom>
+              <a:blipFill>
+                <a:blip r:embed="rId4"/>
+                <a:stretch>
+                  <a:fillRect l="-2475" t="-14286" b="-30952"/>
+                </a:stretch>
+              </a:blipFill>
+            </p:spPr>
+            <p:txBody>
+              <a:bodyPr/>
+              <a:lstStyle/>
+              <a:p>
+                <a:r>
+                  <a:rPr lang="en-US">
+                    <a:noFill/>
+                  </a:rPr>
+                  <a:t> </a:t>
+                </a:r>
+              </a:p>
+            </p:txBody>
+          </p:sp>
+        </mc:Fallback>
+      </mc:AlternateContent>
+    </p:spTree>
+    <p:extLst>
+      <p:ext uri="{BB962C8B-B14F-4D97-AF65-F5344CB8AC3E}">
+        <p14:creationId xmlns:p14="http://schemas.microsoft.com/office/powerpoint/2010/main" val="30481442"/>
+      </p:ext>
+    </p:extLst>
+  </p:cSld>
+  <p:clrMapOvr>
+    <a:masterClrMapping/>
+  </p:clrMapOvr>
+</p:sld>
+</file>
+
+<file path=ppt/slides/slide4.xml><?xml version="1.0" encoding="utf-8"?>
+<p:sld xmlns:a="http://schemas.openxmlformats.org/drawingml/2006/main" xmlns:r="http://schemas.openxmlformats.org/officeDocument/2006/relationships" xmlns:p="http://schemas.openxmlformats.org/presentationml/2006/main">
+  <p:cSld>
+    <p:spTree>
+      <p:nvGrpSpPr>
+        <p:cNvPr id="1" name=""/>
+        <p:cNvGrpSpPr/>
+        <p:nvPr/>
+      </p:nvGrpSpPr>
+      <p:grpSpPr>
+        <a:xfrm>
+          <a:off x="0" y="0"/>
+          <a:ext cx="0" cy="0"/>
+          <a:chOff x="0" y="0"/>
+          <a:chExt cx="0" cy="0"/>
+        </a:xfrm>
+      </p:grpSpPr>
+      <p:sp>
+        <p:nvSpPr>
+          <p:cNvPr id="2" name="Title 1">
+            <a:extLst>
+              <a:ext uri="{FF2B5EF4-FFF2-40B4-BE49-F238E27FC236}">
+                <a16:creationId xmlns:a16="http://schemas.microsoft.com/office/drawing/2014/main" id="{922D4D9A-F0FC-D95F-8B79-99304C29AB04}"/>
+              </a:ext>
+            </a:extLst>
+          </p:cNvPr>
+          <p:cNvSpPr>
+            <a:spLocks noGrp="1"/>
+          </p:cNvSpPr>
+          <p:nvPr>
+            <p:ph type="title"/>
+          </p:nvPr>
+        </p:nvSpPr>
+        <p:spPr/>
+        <p:txBody>
+          <a:bodyPr/>
+          <a:lstStyle/>
+          <a:p>
+            <a:r>
+              <a:rPr lang="en-US" dirty="0"/>
+              <a:t>Individual Treatment Effects</a:t>
+            </a:r>
+          </a:p>
+        </p:txBody>
+      </p:sp>
+      <mc:AlternateContent xmlns:mc="http://schemas.openxmlformats.org/markup-compatibility/2006">
+        <mc:Choice xmlns:a14="http://schemas.microsoft.com/office/drawing/2010/main" Requires="a14">
+          <p:sp>
+            <p:nvSpPr>
+              <p:cNvPr id="3" name="Content Placeholder 2">
+                <a:extLst>
+                  <a:ext uri="{FF2B5EF4-FFF2-40B4-BE49-F238E27FC236}">
+                    <a16:creationId xmlns:a16="http://schemas.microsoft.com/office/drawing/2014/main" id="{D5D95CDC-4FA0-EDC2-3480-6235F5BA79A7}"/>
+                  </a:ext>
+                </a:extLst>
+              </p:cNvPr>
+              <p:cNvSpPr>
+                <a:spLocks noGrp="1"/>
+              </p:cNvSpPr>
+              <p:nvPr>
+                <p:ph idx="1"/>
+              </p:nvPr>
+            </p:nvSpPr>
+            <p:spPr/>
+            <p:txBody>
+              <a:bodyPr/>
+              <a:lstStyle/>
+              <a:p>
+                <a:pPr marL="0" indent="0">
+                  <a:buNone/>
+                </a:pPr>
+                <a:r>
+                  <a:rPr lang="en-US" dirty="0"/>
+                  <a:t>Let’s work with the individual treatment effects:</a:t>
+                </a:r>
+              </a:p>
+              <a:p>
+                <a:pPr marL="0" indent="0" algn="ctr">
+                  <a:buNone/>
+                </a:pPr>
+                <a14:m>
+                  <m:oMathPara xmlns:m="http://schemas.openxmlformats.org/officeDocument/2006/math">
+                    <m:oMathParaPr>
+                      <m:jc m:val="centerGroup"/>
+                    </m:oMathParaPr>
+                    <m:oMath xmlns:m="http://schemas.openxmlformats.org/officeDocument/2006/math">
+                      <m:sSub>
+                        <m:sSubPr>
+                          <m:ctrlPr>
+                            <a:rPr lang="en-US" i="1" dirty="0" smtClean="0">
+                              <a:latin typeface="Cambria Math" panose="02040503050406030204" pitchFamily="18" charset="0"/>
+                            </a:rPr>
+                          </m:ctrlPr>
+                        </m:sSubPr>
+                        <m:e>
+                          <m:r>
+                            <a:rPr lang="en-US" i="1" dirty="0" smtClean="0">
+                              <a:latin typeface="Cambria Math" panose="02040503050406030204" pitchFamily="18" charset="0"/>
+                            </a:rPr>
+                            <m:t>𝜏</m:t>
+                          </m:r>
+                        </m:e>
+                        <m:sub>
+                          <m:r>
+                            <a:rPr lang="en-US" i="1" dirty="0" err="1" smtClean="0">
+                              <a:latin typeface="Cambria Math" panose="02040503050406030204" pitchFamily="18" charset="0"/>
+                            </a:rPr>
+                            <m:t>𝑖</m:t>
+                          </m:r>
+                        </m:sub>
+                      </m:sSub>
+                      <m:r>
+                        <a:rPr lang="en-US" b="0" i="1" dirty="0" smtClean="0">
+                          <a:latin typeface="Cambria Math" panose="02040503050406030204" pitchFamily="18" charset="0"/>
+                        </a:rPr>
+                        <m:t>:</m:t>
+                      </m:r>
+                      <m:r>
+                        <a:rPr lang="en-US" i="1" dirty="0" smtClean="0">
+                          <a:latin typeface="Cambria Math" panose="02040503050406030204" pitchFamily="18" charset="0"/>
+                        </a:rPr>
+                        <m:t>=</m:t>
+                      </m:r>
+                      <m:sSub>
+                        <m:sSubPr>
+                          <m:ctrlPr>
+                            <a:rPr lang="en-US" i="1" dirty="0" err="1" smtClean="0">
+                              <a:latin typeface="Cambria Math" panose="02040503050406030204" pitchFamily="18" charset="0"/>
+                            </a:rPr>
+                          </m:ctrlPr>
+                        </m:sSubPr>
+                        <m:e>
+                          <m:r>
+                            <a:rPr lang="en-US" i="1" dirty="0" err="1" smtClean="0">
+                              <a:latin typeface="Cambria Math" panose="02040503050406030204" pitchFamily="18" charset="0"/>
+                            </a:rPr>
+                            <m:t>𝑌</m:t>
+                          </m:r>
+                        </m:e>
+                        <m:sub>
+                          <m:r>
+                            <a:rPr lang="en-US" i="1" dirty="0" err="1" smtClean="0">
+                              <a:latin typeface="Cambria Math" panose="02040503050406030204" pitchFamily="18" charset="0"/>
+                            </a:rPr>
+                            <m:t>𝑖</m:t>
+                          </m:r>
+                        </m:sub>
+                      </m:sSub>
+                      <m:d>
+                        <m:dPr>
+                          <m:ctrlPr>
+                            <a:rPr lang="en-US" i="1" dirty="0" smtClean="0">
+                              <a:latin typeface="Cambria Math" panose="02040503050406030204" pitchFamily="18" charset="0"/>
+                            </a:rPr>
+                          </m:ctrlPr>
+                        </m:dPr>
+                        <m:e>
+                          <m:r>
+                            <a:rPr lang="en-US" i="1" dirty="0" smtClean="0">
+                              <a:latin typeface="Cambria Math" panose="02040503050406030204" pitchFamily="18" charset="0"/>
+                            </a:rPr>
+                            <m:t>1</m:t>
+                          </m:r>
+                        </m:e>
+                      </m:d>
+                      <m:r>
+                        <a:rPr lang="en-US" i="1" dirty="0" smtClean="0">
+                          <a:latin typeface="Cambria Math" panose="02040503050406030204" pitchFamily="18" charset="0"/>
+                        </a:rPr>
+                        <m:t>–</m:t>
+                      </m:r>
+                      <m:sSub>
+                        <m:sSubPr>
+                          <m:ctrlPr>
+                            <a:rPr lang="en-US" i="1" dirty="0" err="1" smtClean="0">
+                              <a:latin typeface="Cambria Math" panose="02040503050406030204" pitchFamily="18" charset="0"/>
+                            </a:rPr>
+                          </m:ctrlPr>
+                        </m:sSubPr>
+                        <m:e>
+                          <m:r>
+                            <a:rPr lang="en-US" i="1" dirty="0" err="1" smtClean="0">
+                              <a:latin typeface="Cambria Math" panose="02040503050406030204" pitchFamily="18" charset="0"/>
+                            </a:rPr>
+                            <m:t>𝑌</m:t>
+                          </m:r>
+                        </m:e>
+                        <m:sub>
+                          <m:r>
+                            <a:rPr lang="en-US" i="1" dirty="0" err="1" smtClean="0">
+                              <a:latin typeface="Cambria Math" panose="02040503050406030204" pitchFamily="18" charset="0"/>
+                            </a:rPr>
+                            <m:t>𝑖</m:t>
+                          </m:r>
+                        </m:sub>
+                      </m:sSub>
+                      <m:d>
+                        <m:dPr>
+                          <m:ctrlPr>
+                            <a:rPr lang="en-US" i="1" dirty="0" smtClean="0">
+                              <a:latin typeface="Cambria Math" panose="02040503050406030204" pitchFamily="18" charset="0"/>
+                            </a:rPr>
+                          </m:ctrlPr>
+                        </m:dPr>
+                        <m:e>
+                          <m:r>
+                            <a:rPr lang="en-US" i="1" dirty="0" smtClean="0">
+                              <a:latin typeface="Cambria Math" panose="02040503050406030204" pitchFamily="18" charset="0"/>
+                            </a:rPr>
+                            <m:t>0</m:t>
+                          </m:r>
+                        </m:e>
+                      </m:d>
+                      <m:r>
+                        <a:rPr lang="en-US" b="0" i="1" dirty="0" smtClean="0">
+                          <a:latin typeface="Cambria Math" panose="02040503050406030204" pitchFamily="18" charset="0"/>
+                        </a:rPr>
+                        <m:t>.</m:t>
+                      </m:r>
+                    </m:oMath>
+                  </m:oMathPara>
+                </a14:m>
+                <a:endParaRPr lang="en-US" dirty="0"/>
+              </a:p>
+              <a:p>
+                <a:pPr marL="0" indent="0">
+                  <a:buNone/>
+                </a:pPr>
+                <a:r>
+                  <a:rPr lang="en-US" dirty="0"/>
+                  <a:t>These statistical objects are not identifiable, meaning we cannot know what they are from </a:t>
+                </a:r>
+                <a:r>
+                  <a:rPr lang="en-US"/>
+                  <a:t>the observed data.</a:t>
+                </a:r>
+                <a:endParaRPr lang="en-US" dirty="0"/>
+              </a:p>
+            </p:txBody>
+          </p:sp>
+        </mc:Choice>
+        <mc:Fallback>
+          <p:sp>
+            <p:nvSpPr>
+              <p:cNvPr id="3" name="Content Placeholder 2">
+                <a:extLst>
+                  <a:ext uri="{FF2B5EF4-FFF2-40B4-BE49-F238E27FC236}">
+                    <a16:creationId xmlns:a16="http://schemas.microsoft.com/office/drawing/2014/main" id="{D5D95CDC-4FA0-EDC2-3480-6235F5BA79A7}"/>
+                  </a:ext>
+                </a:extLst>
+              </p:cNvPr>
+              <p:cNvSpPr>
+                <a:spLocks noGrp="1" noRot="1" noChangeAspect="1" noMove="1" noResize="1" noEditPoints="1" noAdjustHandles="1" noChangeArrowheads="1" noChangeShapeType="1" noTextEdit="1"/>
+              </p:cNvSpPr>
+              <p:nvPr>
+                <p:ph idx="1"/>
+              </p:nvPr>
+            </p:nvSpPr>
+            <p:spPr>
+              <a:blipFill>
+                <a:blip r:embed="rId2"/>
+                <a:stretch>
+                  <a:fillRect l="-1206" t="-2326"/>
+                </a:stretch>
+              </a:blipFill>
+            </p:spPr>
+            <p:txBody>
+              <a:bodyPr/>
+              <a:lstStyle/>
+              <a:p>
+                <a:r>
+                  <a:rPr lang="en-US">
+                    <a:noFill/>
+                  </a:rPr>
+                  <a:t> </a:t>
+                </a:r>
+              </a:p>
+            </p:txBody>
+          </p:sp>
+        </mc:Fallback>
+      </mc:AlternateContent>
+      <p:sp>
+        <p:nvSpPr>
+          <p:cNvPr id="4" name="Footer Placeholder 3">
+            <a:extLst>
+              <a:ext uri="{FF2B5EF4-FFF2-40B4-BE49-F238E27FC236}">
+                <a16:creationId xmlns:a16="http://schemas.microsoft.com/office/drawing/2014/main" id="{8634002B-6ED2-D7F6-3F0C-3E5DEC5884B9}"/>
+              </a:ext>
+            </a:extLst>
+          </p:cNvPr>
+          <p:cNvSpPr>
+            <a:spLocks noGrp="1"/>
+          </p:cNvSpPr>
+          <p:nvPr>
+            <p:ph type="ftr" sz="quarter" idx="11"/>
+          </p:nvPr>
+        </p:nvSpPr>
+        <p:spPr/>
+        <p:txBody>
+          <a:bodyPr/>
+          <a:lstStyle/>
+          <a:p>
+            <a:r>
+              <a:rPr lang="en-US"/>
+              <a:t>Myoung-jae Lee (1999). Median treatment effect in randomized trials.</a:t>
+            </a:r>
+          </a:p>
+        </p:txBody>
+      </p:sp>
+      <p:sp>
+        <p:nvSpPr>
+          <p:cNvPr id="5" name="Slide Number Placeholder 4">
+            <a:extLst>
+              <a:ext uri="{FF2B5EF4-FFF2-40B4-BE49-F238E27FC236}">
+                <a16:creationId xmlns:a16="http://schemas.microsoft.com/office/drawing/2014/main" id="{963EC4C2-77BE-EB7C-5D7A-D0F227F7B45B}"/>
+              </a:ext>
+            </a:extLst>
+          </p:cNvPr>
+          <p:cNvSpPr>
+            <a:spLocks noGrp="1"/>
+          </p:cNvSpPr>
+          <p:nvPr>
+            <p:ph type="sldNum" sz="quarter" idx="12"/>
+          </p:nvPr>
+        </p:nvSpPr>
+        <p:spPr/>
+        <p:txBody>
+          <a:bodyPr/>
+          <a:lstStyle/>
+          <a:p>
+            <a:fld id="{B9021C99-F081-FD4B-9146-F8976D51EC28}" type="slidenum">
+              <a:rPr lang="en-US" smtClean="0"/>
+              <a:t>4</a:t>
+            </a:fld>
+            <a:endParaRPr lang="en-US"/>
+          </a:p>
+        </p:txBody>
+      </p:sp>
+    </p:spTree>
+    <p:extLst>
+      <p:ext uri="{BB962C8B-B14F-4D97-AF65-F5344CB8AC3E}">
+        <p14:creationId xmlns:p14="http://schemas.microsoft.com/office/powerpoint/2010/main" val="2440165868"/>
       </p:ext>
     </p:extLst>
   </p:cSld>
@@ -3703,4 +6795,634 @@
     </a:ext>
   </a:extLst>
 </a:theme>
+</file>
+
+<file path=ppt/theme/theme2.xml><?xml version="1.0" encoding="utf-8"?>
+<a:theme xmlns:a="http://schemas.openxmlformats.org/drawingml/2006/main" name="Office Theme">
+  <a:themeElements>
+    <a:clrScheme name="Office">
+      <a:dk1>
+        <a:sysClr val="windowText" lastClr="000000"/>
+      </a:dk1>
+      <a:lt1>
+        <a:sysClr val="window" lastClr="FFFFFF"/>
+      </a:lt1>
+      <a:dk2>
+        <a:srgbClr val="0E2841"/>
+      </a:dk2>
+      <a:lt2>
+        <a:srgbClr val="E8E8E8"/>
+      </a:lt2>
+      <a:accent1>
+        <a:srgbClr val="156082"/>
+      </a:accent1>
+      <a:accent2>
+        <a:srgbClr val="E97132"/>
+      </a:accent2>
+      <a:accent3>
+        <a:srgbClr val="196B24"/>
+      </a:accent3>
+      <a:accent4>
+        <a:srgbClr val="0F9ED5"/>
+      </a:accent4>
+      <a:accent5>
+        <a:srgbClr val="A02B93"/>
+      </a:accent5>
+      <a:accent6>
+        <a:srgbClr val="4EA72E"/>
+      </a:accent6>
+      <a:hlink>
+        <a:srgbClr val="467886"/>
+      </a:hlink>
+      <a:folHlink>
+        <a:srgbClr val="96607D"/>
+      </a:folHlink>
+    </a:clrScheme>
+    <a:fontScheme name="Office">
+      <a:majorFont>
+        <a:latin typeface="Aptos Display" panose="02110004020202020204"/>
+        <a:ea typeface=""/>
+        <a:cs typeface=""/>
+        <a:font script="Jpan" typeface="游ゴシック Light"/>
+        <a:font script="Hang" typeface="맑은 고딕"/>
+        <a:font script="Hans" typeface="等线 Light"/>
+        <a:font script="Hant" typeface="新細明體"/>
+        <a:font script="Arab" typeface="Times New Roman"/>
+        <a:font script="Hebr" typeface="Times New Roman"/>
+        <a:font script="Thai" typeface="Angsana New"/>
+        <a:font script="Ethi" typeface="Nyala"/>
+        <a:font script="Beng" typeface="Vrinda"/>
+        <a:font script="Gujr" typeface="Shruti"/>
+        <a:font script="Khmr" typeface="MoolBoran"/>
+        <a:font script="Knda" typeface="Tunga"/>
+        <a:font script="Guru" typeface="Raavi"/>
+        <a:font script="Cans" typeface="Euphemia"/>
+        <a:font script="Cher" typeface="Plantagenet Cherokee"/>
+        <a:font script="Yiii" typeface="Microsoft Yi Baiti"/>
+        <a:font script="Tibt" typeface="Microsoft Himalaya"/>
+        <a:font script="Thaa" typeface="MV Boli"/>
+        <a:font script="Deva" typeface="Mangal"/>
+        <a:font script="Telu" typeface="Gautami"/>
+        <a:font script="Taml" typeface="Latha"/>
+        <a:font script="Syrc" typeface="Estrangelo Edessa"/>
+        <a:font script="Orya" typeface="Kalinga"/>
+        <a:font script="Mlym" typeface="Kartika"/>
+        <a:font script="Laoo" typeface="DokChampa"/>
+        <a:font script="Sinh" typeface="Iskoola Pota"/>
+        <a:font script="Mong" typeface="Mongolian Baiti"/>
+        <a:font script="Viet" typeface="Times New Roman"/>
+        <a:font script="Uigh" typeface="Microsoft Uighur"/>
+        <a:font script="Geor" typeface="Sylfaen"/>
+        <a:font script="Armn" typeface="Arial"/>
+        <a:font script="Bugi" typeface="Leelawadee UI"/>
+        <a:font script="Bopo" typeface="Microsoft JhengHei"/>
+        <a:font script="Java" typeface="Javanese Text"/>
+        <a:font script="Lisu" typeface="Segoe UI"/>
+        <a:font script="Mymr" typeface="Myanmar Text"/>
+        <a:font script="Nkoo" typeface="Ebrima"/>
+        <a:font script="Olck" typeface="Nirmala UI"/>
+        <a:font script="Osma" typeface="Ebrima"/>
+        <a:font script="Phag" typeface="Phagspa"/>
+        <a:font script="Syrn" typeface="Estrangelo Edessa"/>
+        <a:font script="Syrj" typeface="Estrangelo Edessa"/>
+        <a:font script="Syre" typeface="Estrangelo Edessa"/>
+        <a:font script="Sora" typeface="Nirmala UI"/>
+        <a:font script="Tale" typeface="Microsoft Tai Le"/>
+        <a:font script="Talu" typeface="Microsoft New Tai Lue"/>
+        <a:font script="Tfng" typeface="Ebrima"/>
+      </a:majorFont>
+      <a:minorFont>
+        <a:latin typeface="Aptos" panose="02110004020202020204"/>
+        <a:ea typeface=""/>
+        <a:cs typeface=""/>
+        <a:font script="Jpan" typeface="游ゴシック"/>
+        <a:font script="Hang" typeface="맑은 고딕"/>
+        <a:font script="Hans" typeface="等线"/>
+        <a:font script="Hant" typeface="新細明體"/>
+        <a:font script="Arab" typeface="Arial"/>
+        <a:font script="Hebr" typeface="Arial"/>
+        <a:font script="Thai" typeface="Cordia New"/>
+        <a:font script="Ethi" typeface="Nyala"/>
+        <a:font script="Beng" typeface="Vrinda"/>
+        <a:font script="Gujr" typeface="Shruti"/>
+        <a:font script="Khmr" typeface="DaunPenh"/>
+        <a:font script="Knda" typeface="Tunga"/>
+        <a:font script="Guru" typeface="Raavi"/>
+        <a:font script="Cans" typeface="Euphemia"/>
+        <a:font script="Cher" typeface="Plantagenet Cherokee"/>
+        <a:font script="Yiii" typeface="Microsoft Yi Baiti"/>
+        <a:font script="Tibt" typeface="Microsoft Himalaya"/>
+        <a:font script="Thaa" typeface="MV Boli"/>
+        <a:font script="Deva" typeface="Mangal"/>
+        <a:font script="Telu" typeface="Gautami"/>
+        <a:font script="Taml" typeface="Latha"/>
+        <a:font script="Syrc" typeface="Estrangelo Edessa"/>
+        <a:font script="Orya" typeface="Kalinga"/>
+        <a:font script="Mlym" typeface="Kartika"/>
+        <a:font script="Laoo" typeface="DokChampa"/>
+        <a:font script="Sinh" typeface="Iskoola Pota"/>
+        <a:font script="Mong" typeface="Mongolian Baiti"/>
+        <a:font script="Viet" typeface="Arial"/>
+        <a:font script="Uigh" typeface="Microsoft Uighur"/>
+        <a:font script="Geor" typeface="Sylfaen"/>
+        <a:font script="Armn" typeface="Arial"/>
+        <a:font script="Bugi" typeface="Leelawadee UI"/>
+        <a:font script="Bopo" typeface="Microsoft JhengHei"/>
+        <a:font script="Java" typeface="Javanese Text"/>
+        <a:font script="Lisu" typeface="Segoe UI"/>
+        <a:font script="Mymr" typeface="Myanmar Text"/>
+        <a:font script="Nkoo" typeface="Ebrima"/>
+        <a:font script="Olck" typeface="Nirmala UI"/>
+        <a:font script="Osma" typeface="Ebrima"/>
+        <a:font script="Phag" typeface="Phagspa"/>
+        <a:font script="Syrn" typeface="Estrangelo Edessa"/>
+        <a:font script="Syrj" typeface="Estrangelo Edessa"/>
+        <a:font script="Syre" typeface="Estrangelo Edessa"/>
+        <a:font script="Sora" typeface="Nirmala UI"/>
+        <a:font script="Tale" typeface="Microsoft Tai Le"/>
+        <a:font script="Talu" typeface="Microsoft New Tai Lue"/>
+        <a:font script="Tfng" typeface="Ebrima"/>
+      </a:minorFont>
+    </a:fontScheme>
+    <a:fmtScheme name="Office">
+      <a:fillStyleLst>
+        <a:solidFill>
+          <a:schemeClr val="phClr"/>
+        </a:solidFill>
+        <a:gradFill rotWithShape="1">
+          <a:gsLst>
+            <a:gs pos="0">
+              <a:schemeClr val="phClr">
+                <a:lumMod val="110000"/>
+                <a:satMod val="105000"/>
+                <a:tint val="67000"/>
+              </a:schemeClr>
+            </a:gs>
+            <a:gs pos="50000">
+              <a:schemeClr val="phClr">
+                <a:lumMod val="105000"/>
+                <a:satMod val="103000"/>
+                <a:tint val="73000"/>
+              </a:schemeClr>
+            </a:gs>
+            <a:gs pos="100000">
+              <a:schemeClr val="phClr">
+                <a:lumMod val="105000"/>
+                <a:satMod val="109000"/>
+                <a:tint val="81000"/>
+              </a:schemeClr>
+            </a:gs>
+          </a:gsLst>
+          <a:lin ang="5400000" scaled="0"/>
+        </a:gradFill>
+        <a:gradFill rotWithShape="1">
+          <a:gsLst>
+            <a:gs pos="0">
+              <a:schemeClr val="phClr">
+                <a:satMod val="103000"/>
+                <a:lumMod val="102000"/>
+                <a:tint val="94000"/>
+              </a:schemeClr>
+            </a:gs>
+            <a:gs pos="50000">
+              <a:schemeClr val="phClr">
+                <a:satMod val="110000"/>
+                <a:lumMod val="100000"/>
+                <a:shade val="100000"/>
+              </a:schemeClr>
+            </a:gs>
+            <a:gs pos="100000">
+              <a:schemeClr val="phClr">
+                <a:lumMod val="99000"/>
+                <a:satMod val="120000"/>
+                <a:shade val="78000"/>
+              </a:schemeClr>
+            </a:gs>
+          </a:gsLst>
+          <a:lin ang="5400000" scaled="0"/>
+        </a:gradFill>
+      </a:fillStyleLst>
+      <a:lnStyleLst>
+        <a:ln w="12700" cap="flat" cmpd="sng" algn="ctr">
+          <a:solidFill>
+            <a:schemeClr val="phClr"/>
+          </a:solidFill>
+          <a:prstDash val="solid"/>
+          <a:miter lim="800000"/>
+        </a:ln>
+        <a:ln w="19050" cap="flat" cmpd="sng" algn="ctr">
+          <a:solidFill>
+            <a:schemeClr val="phClr"/>
+          </a:solidFill>
+          <a:prstDash val="solid"/>
+          <a:miter lim="800000"/>
+        </a:ln>
+        <a:ln w="25400" cap="flat" cmpd="sng" algn="ctr">
+          <a:solidFill>
+            <a:schemeClr val="phClr"/>
+          </a:solidFill>
+          <a:prstDash val="solid"/>
+          <a:miter lim="800000"/>
+        </a:ln>
+      </a:lnStyleLst>
+      <a:effectStyleLst>
+        <a:effectStyle>
+          <a:effectLst/>
+        </a:effectStyle>
+        <a:effectStyle>
+          <a:effectLst/>
+        </a:effectStyle>
+        <a:effectStyle>
+          <a:effectLst>
+            <a:outerShdw blurRad="57150" dist="19050" dir="5400000" algn="ctr" rotWithShape="0">
+              <a:srgbClr val="000000">
+                <a:alpha val="63000"/>
+              </a:srgbClr>
+            </a:outerShdw>
+          </a:effectLst>
+        </a:effectStyle>
+      </a:effectStyleLst>
+      <a:bgFillStyleLst>
+        <a:solidFill>
+          <a:schemeClr val="phClr"/>
+        </a:solidFill>
+        <a:solidFill>
+          <a:schemeClr val="phClr">
+            <a:tint val="95000"/>
+            <a:satMod val="170000"/>
+          </a:schemeClr>
+        </a:solidFill>
+        <a:gradFill rotWithShape="1">
+          <a:gsLst>
+            <a:gs pos="0">
+              <a:schemeClr val="phClr">
+                <a:tint val="93000"/>
+                <a:satMod val="150000"/>
+                <a:shade val="98000"/>
+                <a:lumMod val="102000"/>
+              </a:schemeClr>
+            </a:gs>
+            <a:gs pos="50000">
+              <a:schemeClr val="phClr">
+                <a:tint val="98000"/>
+                <a:satMod val="130000"/>
+                <a:shade val="90000"/>
+                <a:lumMod val="103000"/>
+              </a:schemeClr>
+            </a:gs>
+            <a:gs pos="100000">
+              <a:schemeClr val="phClr">
+                <a:shade val="63000"/>
+                <a:satMod val="120000"/>
+              </a:schemeClr>
+            </a:gs>
+          </a:gsLst>
+          <a:lin ang="5400000" scaled="0"/>
+        </a:gradFill>
+      </a:bgFillStyleLst>
+    </a:fmtScheme>
+  </a:themeElements>
+  <a:objectDefaults>
+    <a:lnDef>
+      <a:spPr/>
+      <a:bodyPr/>
+      <a:lstStyle/>
+      <a:style>
+        <a:lnRef idx="2">
+          <a:schemeClr val="accent1"/>
+        </a:lnRef>
+        <a:fillRef idx="0">
+          <a:schemeClr val="accent1"/>
+        </a:fillRef>
+        <a:effectRef idx="1">
+          <a:schemeClr val="accent1"/>
+        </a:effectRef>
+        <a:fontRef idx="minor">
+          <a:schemeClr val="tx1"/>
+        </a:fontRef>
+      </a:style>
+    </a:lnDef>
+  </a:objectDefaults>
+  <a:extraClrSchemeLst/>
+  <a:extLst>
+    <a:ext uri="{05A4C25C-085E-4340-85A3-A5531E510DB2}">
+      <thm15:themeFamily xmlns:thm15="http://schemas.microsoft.com/office/thememl/2012/main" name="Office Theme" id="{2E142A2C-CD16-42D6-873A-C26D2A0506FA}" vid="{1BDDFF52-6CD6-40A5-AB3C-68EB2F1E4D0A}"/>
+    </a:ext>
+  </a:extLst>
+</a:theme>
+</file>
+
+<file path=ppt/theme/theme3.xml><?xml version="1.0" encoding="utf-8"?>
+<a:theme xmlns:a="http://schemas.openxmlformats.org/drawingml/2006/main" name="Office Theme">
+  <a:themeElements>
+    <a:clrScheme name="Office">
+      <a:dk1>
+        <a:sysClr val="windowText" lastClr="000000"/>
+      </a:dk1>
+      <a:lt1>
+        <a:sysClr val="window" lastClr="FFFFFF"/>
+      </a:lt1>
+      <a:dk2>
+        <a:srgbClr val="0E2841"/>
+      </a:dk2>
+      <a:lt2>
+        <a:srgbClr val="E8E8E8"/>
+      </a:lt2>
+      <a:accent1>
+        <a:srgbClr val="156082"/>
+      </a:accent1>
+      <a:accent2>
+        <a:srgbClr val="E97132"/>
+      </a:accent2>
+      <a:accent3>
+        <a:srgbClr val="196B24"/>
+      </a:accent3>
+      <a:accent4>
+        <a:srgbClr val="0F9ED5"/>
+      </a:accent4>
+      <a:accent5>
+        <a:srgbClr val="A02B93"/>
+      </a:accent5>
+      <a:accent6>
+        <a:srgbClr val="4EA72E"/>
+      </a:accent6>
+      <a:hlink>
+        <a:srgbClr val="467886"/>
+      </a:hlink>
+      <a:folHlink>
+        <a:srgbClr val="96607D"/>
+      </a:folHlink>
+    </a:clrScheme>
+    <a:fontScheme name="Office">
+      <a:majorFont>
+        <a:latin typeface="Aptos Display" panose="02110004020202020204"/>
+        <a:ea typeface=""/>
+        <a:cs typeface=""/>
+        <a:font script="Jpan" typeface="游ゴシック Light"/>
+        <a:font script="Hang" typeface="맑은 고딕"/>
+        <a:font script="Hans" typeface="等线 Light"/>
+        <a:font script="Hant" typeface="新細明體"/>
+        <a:font script="Arab" typeface="Times New Roman"/>
+        <a:font script="Hebr" typeface="Times New Roman"/>
+        <a:font script="Thai" typeface="Angsana New"/>
+        <a:font script="Ethi" typeface="Nyala"/>
+        <a:font script="Beng" typeface="Vrinda"/>
+        <a:font script="Gujr" typeface="Shruti"/>
+        <a:font script="Khmr" typeface="MoolBoran"/>
+        <a:font script="Knda" typeface="Tunga"/>
+        <a:font script="Guru" typeface="Raavi"/>
+        <a:font script="Cans" typeface="Euphemia"/>
+        <a:font script="Cher" typeface="Plantagenet Cherokee"/>
+        <a:font script="Yiii" typeface="Microsoft Yi Baiti"/>
+        <a:font script="Tibt" typeface="Microsoft Himalaya"/>
+        <a:font script="Thaa" typeface="MV Boli"/>
+        <a:font script="Deva" typeface="Mangal"/>
+        <a:font script="Telu" typeface="Gautami"/>
+        <a:font script="Taml" typeface="Latha"/>
+        <a:font script="Syrc" typeface="Estrangelo Edessa"/>
+        <a:font script="Orya" typeface="Kalinga"/>
+        <a:font script="Mlym" typeface="Kartika"/>
+        <a:font script="Laoo" typeface="DokChampa"/>
+        <a:font script="Sinh" typeface="Iskoola Pota"/>
+        <a:font script="Mong" typeface="Mongolian Baiti"/>
+        <a:font script="Viet" typeface="Times New Roman"/>
+        <a:font script="Uigh" typeface="Microsoft Uighur"/>
+        <a:font script="Geor" typeface="Sylfaen"/>
+        <a:font script="Armn" typeface="Arial"/>
+        <a:font script="Bugi" typeface="Leelawadee UI"/>
+        <a:font script="Bopo" typeface="Microsoft JhengHei"/>
+        <a:font script="Java" typeface="Javanese Text"/>
+        <a:font script="Lisu" typeface="Segoe UI"/>
+        <a:font script="Mymr" typeface="Myanmar Text"/>
+        <a:font script="Nkoo" typeface="Ebrima"/>
+        <a:font script="Olck" typeface="Nirmala UI"/>
+        <a:font script="Osma" typeface="Ebrima"/>
+        <a:font script="Phag" typeface="Phagspa"/>
+        <a:font script="Syrn" typeface="Estrangelo Edessa"/>
+        <a:font script="Syrj" typeface="Estrangelo Edessa"/>
+        <a:font script="Syre" typeface="Estrangelo Edessa"/>
+        <a:font script="Sora" typeface="Nirmala UI"/>
+        <a:font script="Tale" typeface="Microsoft Tai Le"/>
+        <a:font script="Talu" typeface="Microsoft New Tai Lue"/>
+        <a:font script="Tfng" typeface="Ebrima"/>
+      </a:majorFont>
+      <a:minorFont>
+        <a:latin typeface="Aptos" panose="02110004020202020204"/>
+        <a:ea typeface=""/>
+        <a:cs typeface=""/>
+        <a:font script="Jpan" typeface="游ゴシック"/>
+        <a:font script="Hang" typeface="맑은 고딕"/>
+        <a:font script="Hans" typeface="等线"/>
+        <a:font script="Hant" typeface="新細明體"/>
+        <a:font script="Arab" typeface="Arial"/>
+        <a:font script="Hebr" typeface="Arial"/>
+        <a:font script="Thai" typeface="Cordia New"/>
+        <a:font script="Ethi" typeface="Nyala"/>
+        <a:font script="Beng" typeface="Vrinda"/>
+        <a:font script="Gujr" typeface="Shruti"/>
+        <a:font script="Khmr" typeface="DaunPenh"/>
+        <a:font script="Knda" typeface="Tunga"/>
+        <a:font script="Guru" typeface="Raavi"/>
+        <a:font script="Cans" typeface="Euphemia"/>
+        <a:font script="Cher" typeface="Plantagenet Cherokee"/>
+        <a:font script="Yiii" typeface="Microsoft Yi Baiti"/>
+        <a:font script="Tibt" typeface="Microsoft Himalaya"/>
+        <a:font script="Thaa" typeface="MV Boli"/>
+        <a:font script="Deva" typeface="Mangal"/>
+        <a:font script="Telu" typeface="Gautami"/>
+        <a:font script="Taml" typeface="Latha"/>
+        <a:font script="Syrc" typeface="Estrangelo Edessa"/>
+        <a:font script="Orya" typeface="Kalinga"/>
+        <a:font script="Mlym" typeface="Kartika"/>
+        <a:font script="Laoo" typeface="DokChampa"/>
+        <a:font script="Sinh" typeface="Iskoola Pota"/>
+        <a:font script="Mong" typeface="Mongolian Baiti"/>
+        <a:font script="Viet" typeface="Arial"/>
+        <a:font script="Uigh" typeface="Microsoft Uighur"/>
+        <a:font script="Geor" typeface="Sylfaen"/>
+        <a:font script="Armn" typeface="Arial"/>
+        <a:font script="Bugi" typeface="Leelawadee UI"/>
+        <a:font script="Bopo" typeface="Microsoft JhengHei"/>
+        <a:font script="Java" typeface="Javanese Text"/>
+        <a:font script="Lisu" typeface="Segoe UI"/>
+        <a:font script="Mymr" typeface="Myanmar Text"/>
+        <a:font script="Nkoo" typeface="Ebrima"/>
+        <a:font script="Olck" typeface="Nirmala UI"/>
+        <a:font script="Osma" typeface="Ebrima"/>
+        <a:font script="Phag" typeface="Phagspa"/>
+        <a:font script="Syrn" typeface="Estrangelo Edessa"/>
+        <a:font script="Syrj" typeface="Estrangelo Edessa"/>
+        <a:font script="Syre" typeface="Estrangelo Edessa"/>
+        <a:font script="Sora" typeface="Nirmala UI"/>
+        <a:font script="Tale" typeface="Microsoft Tai Le"/>
+        <a:font script="Talu" typeface="Microsoft New Tai Lue"/>
+        <a:font script="Tfng" typeface="Ebrima"/>
+      </a:minorFont>
+    </a:fontScheme>
+    <a:fmtScheme name="Office">
+      <a:fillStyleLst>
+        <a:solidFill>
+          <a:schemeClr val="phClr"/>
+        </a:solidFill>
+        <a:gradFill rotWithShape="1">
+          <a:gsLst>
+            <a:gs pos="0">
+              <a:schemeClr val="phClr">
+                <a:lumMod val="110000"/>
+                <a:satMod val="105000"/>
+                <a:tint val="67000"/>
+              </a:schemeClr>
+            </a:gs>
+            <a:gs pos="50000">
+              <a:schemeClr val="phClr">
+                <a:lumMod val="105000"/>
+                <a:satMod val="103000"/>
+                <a:tint val="73000"/>
+              </a:schemeClr>
+            </a:gs>
+            <a:gs pos="100000">
+              <a:schemeClr val="phClr">
+                <a:lumMod val="105000"/>
+                <a:satMod val="109000"/>
+                <a:tint val="81000"/>
+              </a:schemeClr>
+            </a:gs>
+          </a:gsLst>
+          <a:lin ang="5400000" scaled="0"/>
+        </a:gradFill>
+        <a:gradFill rotWithShape="1">
+          <a:gsLst>
+            <a:gs pos="0">
+              <a:schemeClr val="phClr">
+                <a:satMod val="103000"/>
+                <a:lumMod val="102000"/>
+                <a:tint val="94000"/>
+              </a:schemeClr>
+            </a:gs>
+            <a:gs pos="50000">
+              <a:schemeClr val="phClr">
+                <a:satMod val="110000"/>
+                <a:lumMod val="100000"/>
+                <a:shade val="100000"/>
+              </a:schemeClr>
+            </a:gs>
+            <a:gs pos="100000">
+              <a:schemeClr val="phClr">
+                <a:lumMod val="99000"/>
+                <a:satMod val="120000"/>
+                <a:shade val="78000"/>
+              </a:schemeClr>
+            </a:gs>
+          </a:gsLst>
+          <a:lin ang="5400000" scaled="0"/>
+        </a:gradFill>
+      </a:fillStyleLst>
+      <a:lnStyleLst>
+        <a:ln w="12700" cap="flat" cmpd="sng" algn="ctr">
+          <a:solidFill>
+            <a:schemeClr val="phClr"/>
+          </a:solidFill>
+          <a:prstDash val="solid"/>
+          <a:miter lim="800000"/>
+        </a:ln>
+        <a:ln w="19050" cap="flat" cmpd="sng" algn="ctr">
+          <a:solidFill>
+            <a:schemeClr val="phClr"/>
+          </a:solidFill>
+          <a:prstDash val="solid"/>
+          <a:miter lim="800000"/>
+        </a:ln>
+        <a:ln w="25400" cap="flat" cmpd="sng" algn="ctr">
+          <a:solidFill>
+            <a:schemeClr val="phClr"/>
+          </a:solidFill>
+          <a:prstDash val="solid"/>
+          <a:miter lim="800000"/>
+        </a:ln>
+      </a:lnStyleLst>
+      <a:effectStyleLst>
+        <a:effectStyle>
+          <a:effectLst/>
+        </a:effectStyle>
+        <a:effectStyle>
+          <a:effectLst/>
+        </a:effectStyle>
+        <a:effectStyle>
+          <a:effectLst>
+            <a:outerShdw blurRad="57150" dist="19050" dir="5400000" algn="ctr" rotWithShape="0">
+              <a:srgbClr val="000000">
+                <a:alpha val="63000"/>
+              </a:srgbClr>
+            </a:outerShdw>
+          </a:effectLst>
+        </a:effectStyle>
+      </a:effectStyleLst>
+      <a:bgFillStyleLst>
+        <a:solidFill>
+          <a:schemeClr val="phClr"/>
+        </a:solidFill>
+        <a:solidFill>
+          <a:schemeClr val="phClr">
+            <a:tint val="95000"/>
+            <a:satMod val="170000"/>
+          </a:schemeClr>
+        </a:solidFill>
+        <a:gradFill rotWithShape="1">
+          <a:gsLst>
+            <a:gs pos="0">
+              <a:schemeClr val="phClr">
+                <a:tint val="93000"/>
+                <a:satMod val="150000"/>
+                <a:shade val="98000"/>
+                <a:lumMod val="102000"/>
+              </a:schemeClr>
+            </a:gs>
+            <a:gs pos="50000">
+              <a:schemeClr val="phClr">
+                <a:tint val="98000"/>
+                <a:satMod val="130000"/>
+                <a:shade val="90000"/>
+                <a:lumMod val="103000"/>
+              </a:schemeClr>
+            </a:gs>
+            <a:gs pos="100000">
+              <a:schemeClr val="phClr">
+                <a:shade val="63000"/>
+                <a:satMod val="120000"/>
+              </a:schemeClr>
+            </a:gs>
+          </a:gsLst>
+          <a:lin ang="5400000" scaled="0"/>
+        </a:gradFill>
+      </a:bgFillStyleLst>
+    </a:fmtScheme>
+  </a:themeElements>
+  <a:objectDefaults>
+    <a:lnDef>
+      <a:spPr/>
+      <a:bodyPr/>
+      <a:lstStyle/>
+      <a:style>
+        <a:lnRef idx="2">
+          <a:schemeClr val="accent1"/>
+        </a:lnRef>
+        <a:fillRef idx="0">
+          <a:schemeClr val="accent1"/>
+        </a:fillRef>
+        <a:effectRef idx="1">
+          <a:schemeClr val="accent1"/>
+        </a:effectRef>
+        <a:fontRef idx="minor">
+          <a:schemeClr val="tx1"/>
+        </a:fontRef>
+      </a:style>
+    </a:lnDef>
+  </a:objectDefaults>
+  <a:extraClrSchemeLst/>
+  <a:extLst>
+    <a:ext uri="{05A4C25C-085E-4340-85A3-A5531E510DB2}">
+      <thm15:themeFamily xmlns:thm15="http://schemas.microsoft.com/office/thememl/2012/main" name="Office Theme" id="{2E142A2C-CD16-42D6-873A-C26D2A0506FA}" vid="{1BDDFF52-6CD6-40A5-AB3C-68EB2F1E4D0A}"/>
+    </a:ext>
+  </a:extLst>
+</a:theme>
 </file>
--- a/dkw-po-presentation.pptx
+++ b/dkw-po-presentation.pptx
@@ -5,16 +5,25 @@
     <p:sldMasterId id="2147483648" r:id="rId1"/>
   </p:sldMasterIdLst>
   <p:notesMasterIdLst>
-    <p:notesMasterId r:id="rId6"/>
+    <p:notesMasterId r:id="rId15"/>
   </p:notesMasterIdLst>
   <p:handoutMasterIdLst>
-    <p:handoutMasterId r:id="rId7"/>
+    <p:handoutMasterId r:id="rId16"/>
   </p:handoutMasterIdLst>
   <p:sldIdLst>
     <p:sldId id="256" r:id="rId2"/>
     <p:sldId id="258" r:id="rId3"/>
     <p:sldId id="259" r:id="rId4"/>
     <p:sldId id="260" r:id="rId5"/>
+    <p:sldId id="262" r:id="rId6"/>
+    <p:sldId id="261" r:id="rId7"/>
+    <p:sldId id="264" r:id="rId8"/>
+    <p:sldId id="266" r:id="rId9"/>
+    <p:sldId id="267" r:id="rId10"/>
+    <p:sldId id="268" r:id="rId11"/>
+    <p:sldId id="263" r:id="rId12"/>
+    <p:sldId id="269" r:id="rId13"/>
+    <p:sldId id="270" r:id="rId14"/>
   </p:sldIdLst>
   <p:sldSz cx="12192000" cy="6858000"/>
   <p:notesSz cx="6858000" cy="9144000"/>
@@ -215,7 +224,7 @@
           <a:p>
             <a:fld id="{0CFD9757-4B1A-0E4F-89E3-8F5F12898BA4}" type="datetimeFigureOut">
               <a:rPr lang="en-US" smtClean="0"/>
-              <a:t>11/20/25</a:t>
+              <a:t>11/24/25</a:t>
             </a:fld>
             <a:endParaRPr lang="en-US"/>
           </a:p>
@@ -393,7 +402,7 @@
           <a:p>
             <a:fld id="{9B4CEB37-F9F0-454B-AC5E-47C8AC4823F6}" type="datetimeFigureOut">
               <a:rPr lang="en-US" smtClean="0"/>
-              <a:t>11/20/25</a:t>
+              <a:t>11/24/25</a:t>
             </a:fld>
             <a:endParaRPr lang="en-US"/>
           </a:p>
@@ -661,6 +670,215 @@
 </p:notesMaster>
 </file>
 
+<file path=ppt/notesSlides/notesSlide1.xml><?xml version="1.0" encoding="utf-8"?>
+<p:notes xmlns:a="http://schemas.openxmlformats.org/drawingml/2006/main" xmlns:r="http://schemas.openxmlformats.org/officeDocument/2006/relationships" xmlns:p="http://schemas.openxmlformats.org/presentationml/2006/main">
+  <p:cSld>
+    <p:spTree>
+      <p:nvGrpSpPr>
+        <p:cNvPr id="1" name=""/>
+        <p:cNvGrpSpPr/>
+        <p:nvPr/>
+      </p:nvGrpSpPr>
+      <p:grpSpPr>
+        <a:xfrm>
+          <a:off x="0" y="0"/>
+          <a:ext cx="0" cy="0"/>
+          <a:chOff x="0" y="0"/>
+          <a:chExt cx="0" cy="0"/>
+        </a:xfrm>
+      </p:grpSpPr>
+      <p:sp>
+        <p:nvSpPr>
+          <p:cNvPr id="2" name="Slide Image Placeholder 1"/>
+          <p:cNvSpPr>
+            <a:spLocks noGrp="1" noRot="1" noChangeAspect="1"/>
+          </p:cNvSpPr>
+          <p:nvPr>
+            <p:ph type="sldImg"/>
+          </p:nvPr>
+        </p:nvSpPr>
+        <p:spPr/>
+      </p:sp>
+      <p:sp>
+        <p:nvSpPr>
+          <p:cNvPr id="3" name="Notes Placeholder 2"/>
+          <p:cNvSpPr>
+            <a:spLocks noGrp="1"/>
+          </p:cNvSpPr>
+          <p:nvPr>
+            <p:ph type="body" idx="1"/>
+          </p:nvPr>
+        </p:nvSpPr>
+        <p:spPr/>
+        <p:txBody>
+          <a:bodyPr/>
+          <a:lstStyle/>
+          <a:p>
+            <a:endParaRPr lang="en-US" dirty="0"/>
+          </a:p>
+        </p:txBody>
+      </p:sp>
+      <p:sp>
+        <p:nvSpPr>
+          <p:cNvPr id="4" name="Footer Placeholder 3"/>
+          <p:cNvSpPr>
+            <a:spLocks noGrp="1"/>
+          </p:cNvSpPr>
+          <p:nvPr>
+            <p:ph type="ftr" sz="quarter" idx="4"/>
+          </p:nvPr>
+        </p:nvSpPr>
+        <p:spPr/>
+        <p:txBody>
+          <a:bodyPr/>
+          <a:lstStyle/>
+          <a:p>
+            <a:endParaRPr lang="en-US"/>
+          </a:p>
+        </p:txBody>
+      </p:sp>
+      <p:sp>
+        <p:nvSpPr>
+          <p:cNvPr id="5" name="Slide Number Placeholder 4"/>
+          <p:cNvSpPr>
+            <a:spLocks noGrp="1"/>
+          </p:cNvSpPr>
+          <p:nvPr>
+            <p:ph type="sldNum" sz="quarter" idx="5"/>
+          </p:nvPr>
+        </p:nvSpPr>
+        <p:spPr/>
+        <p:txBody>
+          <a:bodyPr/>
+          <a:lstStyle/>
+          <a:p>
+            <a:fld id="{03AA6449-B4E2-C645-848C-300099813942}" type="slidenum">
+              <a:rPr lang="en-US" smtClean="0"/>
+              <a:t>11</a:t>
+            </a:fld>
+            <a:endParaRPr lang="en-US"/>
+          </a:p>
+        </p:txBody>
+      </p:sp>
+    </p:spTree>
+    <p:extLst>
+      <p:ext uri="{BB962C8B-B14F-4D97-AF65-F5344CB8AC3E}">
+        <p14:creationId xmlns:p14="http://schemas.microsoft.com/office/powerpoint/2010/main" val="1179485643"/>
+      </p:ext>
+    </p:extLst>
+  </p:cSld>
+  <p:clrMapOvr>
+    <a:masterClrMapping/>
+  </p:clrMapOvr>
+</p:notes>
+</file>
+
+<file path=ppt/notesSlides/notesSlide2.xml><?xml version="1.0" encoding="utf-8"?>
+<p:notes xmlns:a="http://schemas.openxmlformats.org/drawingml/2006/main" xmlns:r="http://schemas.openxmlformats.org/officeDocument/2006/relationships" xmlns:p="http://schemas.openxmlformats.org/presentationml/2006/main">
+  <p:cSld>
+    <p:spTree>
+      <p:nvGrpSpPr>
+        <p:cNvPr id="1" name=""/>
+        <p:cNvGrpSpPr/>
+        <p:nvPr/>
+      </p:nvGrpSpPr>
+      <p:grpSpPr>
+        <a:xfrm>
+          <a:off x="0" y="0"/>
+          <a:ext cx="0" cy="0"/>
+          <a:chOff x="0" y="0"/>
+          <a:chExt cx="0" cy="0"/>
+        </a:xfrm>
+      </p:grpSpPr>
+      <p:sp>
+        <p:nvSpPr>
+          <p:cNvPr id="2" name="Slide Image Placeholder 1"/>
+          <p:cNvSpPr>
+            <a:spLocks noGrp="1" noRot="1" noChangeAspect="1"/>
+          </p:cNvSpPr>
+          <p:nvPr>
+            <p:ph type="sldImg"/>
+          </p:nvPr>
+        </p:nvSpPr>
+        <p:spPr/>
+      </p:sp>
+      <p:sp>
+        <p:nvSpPr>
+          <p:cNvPr id="3" name="Notes Placeholder 2"/>
+          <p:cNvSpPr>
+            <a:spLocks noGrp="1"/>
+          </p:cNvSpPr>
+          <p:nvPr>
+            <p:ph type="body" idx="1"/>
+          </p:nvPr>
+        </p:nvSpPr>
+        <p:spPr/>
+        <p:txBody>
+          <a:bodyPr/>
+          <a:lstStyle/>
+          <a:p>
+            <a:r>
+              <a:rPr lang="en-US" dirty="0"/>
+              <a:t>Do animations</a:t>
+            </a:r>
+          </a:p>
+        </p:txBody>
+      </p:sp>
+      <p:sp>
+        <p:nvSpPr>
+          <p:cNvPr id="4" name="Footer Placeholder 3"/>
+          <p:cNvSpPr>
+            <a:spLocks noGrp="1"/>
+          </p:cNvSpPr>
+          <p:nvPr>
+            <p:ph type="ftr" sz="quarter" idx="4"/>
+          </p:nvPr>
+        </p:nvSpPr>
+        <p:spPr/>
+        <p:txBody>
+          <a:bodyPr/>
+          <a:lstStyle/>
+          <a:p>
+            <a:endParaRPr lang="en-US"/>
+          </a:p>
+        </p:txBody>
+      </p:sp>
+      <p:sp>
+        <p:nvSpPr>
+          <p:cNvPr id="5" name="Slide Number Placeholder 4"/>
+          <p:cNvSpPr>
+            <a:spLocks noGrp="1"/>
+          </p:cNvSpPr>
+          <p:nvPr>
+            <p:ph type="sldNum" sz="quarter" idx="5"/>
+          </p:nvPr>
+        </p:nvSpPr>
+        <p:spPr/>
+        <p:txBody>
+          <a:bodyPr/>
+          <a:lstStyle/>
+          <a:p>
+            <a:fld id="{03AA6449-B4E2-C645-848C-300099813942}" type="slidenum">
+              <a:rPr lang="en-US" smtClean="0"/>
+              <a:t>13</a:t>
+            </a:fld>
+            <a:endParaRPr lang="en-US"/>
+          </a:p>
+        </p:txBody>
+      </p:sp>
+    </p:spTree>
+    <p:extLst>
+      <p:ext uri="{BB962C8B-B14F-4D97-AF65-F5344CB8AC3E}">
+        <p14:creationId xmlns:p14="http://schemas.microsoft.com/office/powerpoint/2010/main" val="4262510375"/>
+      </p:ext>
+    </p:extLst>
+  </p:cSld>
+  <p:clrMapOvr>
+    <a:masterClrMapping/>
+  </p:clrMapOvr>
+</p:notes>
+</file>
+
 <file path=ppt/slideLayouts/slideLayout1.xml><?xml version="1.0" encoding="utf-8"?>
 <p:sldLayout xmlns:a="http://schemas.openxmlformats.org/drawingml/2006/main" xmlns:r="http://schemas.openxmlformats.org/officeDocument/2006/relationships" xmlns:p="http://schemas.openxmlformats.org/presentationml/2006/main" type="title" preserve="1">
   <p:cSld name="Title Slide">
@@ -808,7 +1026,7 @@
           <a:p>
             <a:fld id="{6C935C2D-25BC-6348-9FCD-01C420686923}" type="datetime1">
               <a:rPr lang="en-US" smtClean="0"/>
-              <a:t>11/20/25</a:t>
+              <a:t>11/24/25</a:t>
             </a:fld>
             <a:endParaRPr lang="en-US"/>
           </a:p>
@@ -1009,7 +1227,7 @@
           <a:p>
             <a:fld id="{80F351FB-B12E-264E-A1F2-9008F389C6D7}" type="datetime1">
               <a:rPr lang="en-US" smtClean="0"/>
-              <a:t>11/20/25</a:t>
+              <a:t>11/24/25</a:t>
             </a:fld>
             <a:endParaRPr lang="en-US"/>
           </a:p>
@@ -1220,7 +1438,7 @@
           <a:p>
             <a:fld id="{F3045A88-7A71-6B4A-BAD6-4D43FC141478}" type="datetime1">
               <a:rPr lang="en-US" smtClean="0"/>
-              <a:t>11/20/25</a:t>
+              <a:t>11/24/25</a:t>
             </a:fld>
             <a:endParaRPr lang="en-US"/>
           </a:p>
@@ -1421,7 +1639,7 @@
           <a:p>
             <a:fld id="{F58CF829-0FC5-9A46-A9B0-BB904E9F57AA}" type="datetime1">
               <a:rPr lang="en-US" smtClean="0"/>
-              <a:t>11/20/25</a:t>
+              <a:t>11/24/25</a:t>
             </a:fld>
             <a:endParaRPr lang="en-US"/>
           </a:p>
@@ -1699,7 +1917,7 @@
           <a:p>
             <a:fld id="{4D95A3AB-9979-134F-8518-C53AF5C431E4}" type="datetime1">
               <a:rPr lang="en-US" smtClean="0"/>
-              <a:t>11/20/25</a:t>
+              <a:t>11/24/25</a:t>
             </a:fld>
             <a:endParaRPr lang="en-US"/>
           </a:p>
@@ -1967,7 +2185,7 @@
           <a:p>
             <a:fld id="{6FBA39C1-72D3-C444-A5B2-5721424EE3C4}" type="datetime1">
               <a:rPr lang="en-US" smtClean="0"/>
-              <a:t>11/20/25</a:t>
+              <a:t>11/24/25</a:t>
             </a:fld>
             <a:endParaRPr lang="en-US"/>
           </a:p>
@@ -2382,7 +2600,7 @@
           <a:p>
             <a:fld id="{B079ADD5-AD5F-2B44-9B64-69B53A301C41}" type="datetime1">
               <a:rPr lang="en-US" smtClean="0"/>
-              <a:t>11/20/25</a:t>
+              <a:t>11/24/25</a:t>
             </a:fld>
             <a:endParaRPr lang="en-US"/>
           </a:p>
@@ -2526,7 +2744,7 @@
           <a:p>
             <a:fld id="{008CC3C2-47D6-C545-9BF9-9C67612E3DE8}" type="datetime1">
               <a:rPr lang="en-US" smtClean="0"/>
-              <a:t>11/20/25</a:t>
+              <a:t>11/24/25</a:t>
             </a:fld>
             <a:endParaRPr lang="en-US"/>
           </a:p>
@@ -2642,7 +2860,7 @@
           <a:p>
             <a:fld id="{7E136773-7117-C745-8694-71B5BEF890AE}" type="datetime1">
               <a:rPr lang="en-US" smtClean="0"/>
-              <a:t>11/20/25</a:t>
+              <a:t>11/24/25</a:t>
             </a:fld>
             <a:endParaRPr lang="en-US"/>
           </a:p>
@@ -2956,7 +3174,7 @@
           <a:p>
             <a:fld id="{B4CE4088-1C49-4D48-B368-FB1D6A0DDE0B}" type="datetime1">
               <a:rPr lang="en-US" smtClean="0"/>
-              <a:t>11/20/25</a:t>
+              <a:t>11/24/25</a:t>
             </a:fld>
             <a:endParaRPr lang="en-US"/>
           </a:p>
@@ -3247,7 +3465,7 @@
           <a:p>
             <a:fld id="{66077C39-9F95-5C41-B456-EE66E3D13203}" type="datetime1">
               <a:rPr lang="en-US" smtClean="0"/>
-              <a:t>11/20/25</a:t>
+              <a:t>11/24/25</a:t>
             </a:fld>
             <a:endParaRPr lang="en-US"/>
           </a:p>
@@ -3491,7 +3709,7 @@
           <a:p>
             <a:fld id="{81C78E8C-1719-0A42-B5DF-249DDC5C22D3}" type="datetime1">
               <a:rPr lang="en-US" smtClean="0"/>
-              <a:t>11/20/25</a:t>
+              <a:t>11/24/25</a:t>
             </a:fld>
             <a:endParaRPr lang="en-US"/>
           </a:p>
@@ -4038,6 +4256,2171 @@
 </p:sld>
 </file>
 
+<file path=ppt/slides/slide10.xml><?xml version="1.0" encoding="utf-8"?>
+<p:sld xmlns:a="http://schemas.openxmlformats.org/drawingml/2006/main" xmlns:r="http://schemas.openxmlformats.org/officeDocument/2006/relationships" xmlns:p="http://schemas.openxmlformats.org/presentationml/2006/main">
+  <p:cSld>
+    <p:spTree>
+      <p:nvGrpSpPr>
+        <p:cNvPr id="1" name=""/>
+        <p:cNvGrpSpPr/>
+        <p:nvPr/>
+      </p:nvGrpSpPr>
+      <p:grpSpPr>
+        <a:xfrm>
+          <a:off x="0" y="0"/>
+          <a:ext cx="0" cy="0"/>
+          <a:chOff x="0" y="0"/>
+          <a:chExt cx="0" cy="0"/>
+        </a:xfrm>
+      </p:grpSpPr>
+      <p:sp>
+        <p:nvSpPr>
+          <p:cNvPr id="2" name="Title 1">
+            <a:extLst>
+              <a:ext uri="{FF2B5EF4-FFF2-40B4-BE49-F238E27FC236}">
+                <a16:creationId xmlns:a16="http://schemas.microsoft.com/office/drawing/2014/main" id="{C8C5C53D-EFA1-4E16-6509-C012C8B57B84}"/>
+              </a:ext>
+            </a:extLst>
+          </p:cNvPr>
+          <p:cNvSpPr>
+            <a:spLocks noGrp="1"/>
+          </p:cNvSpPr>
+          <p:nvPr>
+            <p:ph type="title"/>
+          </p:nvPr>
+        </p:nvSpPr>
+        <p:spPr/>
+        <p:txBody>
+          <a:bodyPr/>
+          <a:lstStyle/>
+          <a:p>
+            <a:r>
+              <a:rPr lang="en-US" dirty="0"/>
+              <a:t>Conditional Average Treatment Effect</a:t>
+            </a:r>
+          </a:p>
+        </p:txBody>
+      </p:sp>
+      <p:sp>
+        <p:nvSpPr>
+          <p:cNvPr id="3" name="Content Placeholder 2">
+            <a:extLst>
+              <a:ext uri="{FF2B5EF4-FFF2-40B4-BE49-F238E27FC236}">
+                <a16:creationId xmlns:a16="http://schemas.microsoft.com/office/drawing/2014/main" id="{F8EC9D93-9709-F144-96CE-A20D5F1FF8C1}"/>
+              </a:ext>
+            </a:extLst>
+          </p:cNvPr>
+          <p:cNvSpPr>
+            <a:spLocks noGrp="1"/>
+          </p:cNvSpPr>
+          <p:nvPr>
+            <p:ph sz="half" idx="1"/>
+          </p:nvPr>
+        </p:nvSpPr>
+        <p:spPr>
+          <a:xfrm>
+            <a:off x="838200" y="3182938"/>
+            <a:ext cx="5181600" cy="3013075"/>
+          </a:xfrm>
+        </p:spPr>
+        <p:txBody>
+          <a:bodyPr>
+            <a:normAutofit lnSpcReduction="10000"/>
+          </a:bodyPr>
+          <a:lstStyle/>
+          <a:p>
+            <a:pPr marL="0" indent="0">
+              <a:buNone/>
+            </a:pPr>
+            <a:r>
+              <a:rPr lang="en-US" dirty="0" err="1"/>
+              <a:t>Metalearner</a:t>
+            </a:r>
+            <a:r>
+              <a:rPr lang="en-US" dirty="0"/>
+              <a:t> </a:t>
+            </a:r>
+          </a:p>
+          <a:p>
+            <a:r>
+              <a:rPr lang="en-US" dirty="0"/>
+              <a:t>S-learner [Hill 2011, Green-Kern 2012]</a:t>
+            </a:r>
+          </a:p>
+          <a:p>
+            <a:r>
+              <a:rPr lang="en-US" dirty="0"/>
+              <a:t>T-learner</a:t>
+            </a:r>
+          </a:p>
+          <a:p>
+            <a:r>
+              <a:rPr lang="en-US" dirty="0"/>
+              <a:t>X-learner</a:t>
+            </a:r>
+          </a:p>
+          <a:p>
+            <a:r>
+              <a:rPr lang="en-US" dirty="0"/>
+              <a:t>R-learner</a:t>
+            </a:r>
+          </a:p>
+        </p:txBody>
+      </p:sp>
+      <p:sp>
+        <p:nvSpPr>
+          <p:cNvPr id="4" name="Content Placeholder 3">
+            <a:extLst>
+              <a:ext uri="{FF2B5EF4-FFF2-40B4-BE49-F238E27FC236}">
+                <a16:creationId xmlns:a16="http://schemas.microsoft.com/office/drawing/2014/main" id="{45B2A12C-3845-0393-0B56-FF86DAB0348A}"/>
+              </a:ext>
+            </a:extLst>
+          </p:cNvPr>
+          <p:cNvSpPr>
+            <a:spLocks noGrp="1"/>
+          </p:cNvSpPr>
+          <p:nvPr>
+            <p:ph sz="half" idx="2"/>
+          </p:nvPr>
+        </p:nvSpPr>
+        <p:spPr>
+          <a:xfrm>
+            <a:off x="6172202" y="3182938"/>
+            <a:ext cx="5181600" cy="1460500"/>
+          </a:xfrm>
+        </p:spPr>
+        <p:txBody>
+          <a:bodyPr>
+            <a:normAutofit lnSpcReduction="10000"/>
+          </a:bodyPr>
+          <a:lstStyle/>
+          <a:p>
+            <a:pPr marL="0" indent="0">
+              <a:buNone/>
+            </a:pPr>
+            <a:r>
+              <a:rPr lang="en-US" dirty="0"/>
+              <a:t>Tree-based methods</a:t>
+            </a:r>
+          </a:p>
+          <a:p>
+            <a:r>
+              <a:rPr lang="en-US" dirty="0"/>
+              <a:t>Causal tree</a:t>
+            </a:r>
+          </a:p>
+          <a:p>
+            <a:r>
+              <a:rPr lang="en-US" dirty="0"/>
+              <a:t>Causal Forest</a:t>
+            </a:r>
+          </a:p>
+          <a:p>
+            <a:pPr marL="0" indent="0">
+              <a:buNone/>
+            </a:pPr>
+            <a:endParaRPr lang="en-US" dirty="0"/>
+          </a:p>
+          <a:p>
+            <a:endParaRPr lang="en-US" dirty="0"/>
+          </a:p>
+        </p:txBody>
+      </p:sp>
+      <p:sp>
+        <p:nvSpPr>
+          <p:cNvPr id="6" name="Slide Number Placeholder 5">
+            <a:extLst>
+              <a:ext uri="{FF2B5EF4-FFF2-40B4-BE49-F238E27FC236}">
+                <a16:creationId xmlns:a16="http://schemas.microsoft.com/office/drawing/2014/main" id="{A43D7A08-5D6D-AF27-37EE-BACF1CBDE421}"/>
+              </a:ext>
+            </a:extLst>
+          </p:cNvPr>
+          <p:cNvSpPr>
+            <a:spLocks noGrp="1"/>
+          </p:cNvSpPr>
+          <p:nvPr>
+            <p:ph type="sldNum" sz="quarter" idx="12"/>
+          </p:nvPr>
+        </p:nvSpPr>
+        <p:spPr/>
+        <p:txBody>
+          <a:bodyPr/>
+          <a:lstStyle/>
+          <a:p>
+            <a:fld id="{B9021C99-F081-FD4B-9146-F8976D51EC28}" type="slidenum">
+              <a:rPr lang="en-US" smtClean="0"/>
+              <a:t>10</a:t>
+            </a:fld>
+            <a:endParaRPr lang="en-US"/>
+          </a:p>
+        </p:txBody>
+      </p:sp>
+      <mc:AlternateContent xmlns:mc="http://schemas.openxmlformats.org/markup-compatibility/2006">
+        <mc:Choice xmlns:a14="http://schemas.microsoft.com/office/drawing/2010/main" Requires="a14">
+          <p:sp>
+            <p:nvSpPr>
+              <p:cNvPr id="7" name="TextBox 6">
+                <a:extLst>
+                  <a:ext uri="{FF2B5EF4-FFF2-40B4-BE49-F238E27FC236}">
+                    <a16:creationId xmlns:a16="http://schemas.microsoft.com/office/drawing/2014/main" id="{22E98AE1-51DF-A9B1-0F07-FA7B743251EA}"/>
+                  </a:ext>
+                </a:extLst>
+              </p:cNvPr>
+              <p:cNvSpPr txBox="1"/>
+              <p:nvPr/>
+            </p:nvSpPr>
+            <p:spPr>
+              <a:xfrm>
+                <a:off x="852488" y="1343026"/>
+                <a:ext cx="8658225" cy="369332"/>
+              </a:xfrm>
+              <a:prstGeom prst="rect">
+                <a:avLst/>
+              </a:prstGeom>
+              <a:noFill/>
+            </p:spPr>
+            <p:txBody>
+              <a:bodyPr wrap="square" rtlCol="0">
+                <a:spAutoFit/>
+              </a:bodyPr>
+              <a:lstStyle/>
+              <a:p>
+                <a:r>
+                  <a:rPr lang="en-US" dirty="0"/>
+                  <a:t>“Estimate </a:t>
+                </a:r>
+                <a14:m>
+                  <m:oMath xmlns:m="http://schemas.openxmlformats.org/officeDocument/2006/math">
+                    <m:acc>
+                      <m:accPr>
+                        <m:chr m:val="̂"/>
+                        <m:ctrlPr>
+                          <a:rPr lang="en-US" i="1" dirty="0" smtClean="0">
+                            <a:latin typeface="Cambria Math" panose="02040503050406030204" pitchFamily="18" charset="0"/>
+                          </a:rPr>
+                        </m:ctrlPr>
+                      </m:accPr>
+                      <m:e>
+                        <m:r>
+                          <a:rPr lang="en-US" i="1" dirty="0" smtClean="0">
+                            <a:latin typeface="Cambria Math" panose="02040503050406030204" pitchFamily="18" charset="0"/>
+                          </a:rPr>
+                          <m:t>𝜏</m:t>
+                        </m:r>
+                      </m:e>
+                    </m:acc>
+                    <m:d>
+                      <m:dPr>
+                        <m:ctrlPr>
+                          <a:rPr lang="en-US" i="1" dirty="0" smtClean="0">
+                            <a:latin typeface="Cambria Math" panose="02040503050406030204" pitchFamily="18" charset="0"/>
+                          </a:rPr>
+                        </m:ctrlPr>
+                      </m:dPr>
+                      <m:e>
+                        <m:r>
+                          <a:rPr lang="en-US" i="1" dirty="0" smtClean="0">
+                            <a:latin typeface="Cambria Math" panose="02040503050406030204" pitchFamily="18" charset="0"/>
+                          </a:rPr>
+                          <m:t>𝑥</m:t>
+                        </m:r>
+                      </m:e>
+                    </m:d>
+                  </m:oMath>
+                </a14:m>
+                <a:r>
+                  <a:rPr lang="en-US" dirty="0"/>
+                  <a:t>from samples, use </a:t>
+                </a:r>
+                <a14:m>
+                  <m:oMath xmlns:m="http://schemas.openxmlformats.org/officeDocument/2006/math">
+                    <m:acc>
+                      <m:accPr>
+                        <m:chr m:val="̂"/>
+                        <m:ctrlPr>
+                          <a:rPr lang="en-US" i="1" dirty="0" smtClean="0">
+                            <a:latin typeface="Cambria Math" panose="02040503050406030204" pitchFamily="18" charset="0"/>
+                          </a:rPr>
+                        </m:ctrlPr>
+                      </m:accPr>
+                      <m:e>
+                        <m:r>
+                          <a:rPr lang="en-US" i="1" dirty="0" smtClean="0">
+                            <a:latin typeface="Cambria Math" panose="02040503050406030204" pitchFamily="18" charset="0"/>
+                          </a:rPr>
+                          <m:t>𝜏</m:t>
+                        </m:r>
+                      </m:e>
+                    </m:acc>
+                    <m:d>
+                      <m:dPr>
+                        <m:ctrlPr>
+                          <a:rPr lang="en-US" i="1" dirty="0" smtClean="0">
+                            <a:latin typeface="Cambria Math" panose="02040503050406030204" pitchFamily="18" charset="0"/>
+                          </a:rPr>
+                        </m:ctrlPr>
+                      </m:dPr>
+                      <m:e>
+                        <m:r>
+                          <a:rPr lang="en-US" i="1" dirty="0" smtClean="0">
+                            <a:latin typeface="Cambria Math" panose="02040503050406030204" pitchFamily="18" charset="0"/>
+                          </a:rPr>
+                          <m:t>𝑥</m:t>
+                        </m:r>
+                      </m:e>
+                    </m:d>
+                  </m:oMath>
+                </a14:m>
+                <a:r>
+                  <a:rPr lang="en-US" dirty="0"/>
+                  <a:t> to identify subgroups” – Bin Yu</a:t>
+                </a:r>
+              </a:p>
+            </p:txBody>
+          </p:sp>
+        </mc:Choice>
+        <mc:Fallback>
+          <p:sp>
+            <p:nvSpPr>
+              <p:cNvPr id="7" name="TextBox 6">
+                <a:extLst>
+                  <a:ext uri="{FF2B5EF4-FFF2-40B4-BE49-F238E27FC236}">
+                    <a16:creationId xmlns:a16="http://schemas.microsoft.com/office/drawing/2014/main" id="{22E98AE1-51DF-A9B1-0F07-FA7B743251EA}"/>
+                  </a:ext>
+                </a:extLst>
+              </p:cNvPr>
+              <p:cNvSpPr txBox="1">
+                <a:spLocks noRot="1" noChangeAspect="1" noMove="1" noResize="1" noEditPoints="1" noAdjustHandles="1" noChangeArrowheads="1" noChangeShapeType="1" noTextEdit="1"/>
+              </p:cNvSpPr>
+              <p:nvPr/>
+            </p:nvSpPr>
+            <p:spPr>
+              <a:xfrm>
+                <a:off x="852488" y="1343026"/>
+                <a:ext cx="8658225" cy="369332"/>
+              </a:xfrm>
+              <a:prstGeom prst="rect">
+                <a:avLst/>
+              </a:prstGeom>
+              <a:blipFill>
+                <a:blip r:embed="rId2"/>
+                <a:stretch>
+                  <a:fillRect l="-733" t="-6667" b="-26667"/>
+                </a:stretch>
+              </a:blipFill>
+            </p:spPr>
+            <p:txBody>
+              <a:bodyPr/>
+              <a:lstStyle/>
+              <a:p>
+                <a:r>
+                  <a:rPr lang="en-US">
+                    <a:noFill/>
+                  </a:rPr>
+                  <a:t> </a:t>
+                </a:r>
+              </a:p>
+            </p:txBody>
+          </p:sp>
+        </mc:Fallback>
+      </mc:AlternateContent>
+    </p:spTree>
+    <p:extLst>
+      <p:ext uri="{BB962C8B-B14F-4D97-AF65-F5344CB8AC3E}">
+        <p14:creationId xmlns:p14="http://schemas.microsoft.com/office/powerpoint/2010/main" val="2027682271"/>
+      </p:ext>
+    </p:extLst>
+  </p:cSld>
+  <p:clrMapOvr>
+    <a:masterClrMapping/>
+  </p:clrMapOvr>
+</p:sld>
+</file>
+
+<file path=ppt/slides/slide11.xml><?xml version="1.0" encoding="utf-8"?>
+<p:sld xmlns:a="http://schemas.openxmlformats.org/drawingml/2006/main" xmlns:r="http://schemas.openxmlformats.org/officeDocument/2006/relationships" xmlns:p="http://schemas.openxmlformats.org/presentationml/2006/main">
+  <p:cSld>
+    <p:spTree>
+      <p:nvGrpSpPr>
+        <p:cNvPr id="1" name=""/>
+        <p:cNvGrpSpPr/>
+        <p:nvPr/>
+      </p:nvGrpSpPr>
+      <p:grpSpPr>
+        <a:xfrm>
+          <a:off x="0" y="0"/>
+          <a:ext cx="0" cy="0"/>
+          <a:chOff x="0" y="0"/>
+          <a:chExt cx="0" cy="0"/>
+        </a:xfrm>
+      </p:grpSpPr>
+      <p:sp>
+        <p:nvSpPr>
+          <p:cNvPr id="2" name="Title 1">
+            <a:extLst>
+              <a:ext uri="{FF2B5EF4-FFF2-40B4-BE49-F238E27FC236}">
+                <a16:creationId xmlns:a16="http://schemas.microsoft.com/office/drawing/2014/main" id="{86DF0619-7D68-2FC3-4F5A-652B0D3F2661}"/>
+              </a:ext>
+            </a:extLst>
+          </p:cNvPr>
+          <p:cNvSpPr>
+            <a:spLocks noGrp="1"/>
+          </p:cNvSpPr>
+          <p:nvPr>
+            <p:ph type="title"/>
+          </p:nvPr>
+        </p:nvSpPr>
+        <p:spPr/>
+        <p:txBody>
+          <a:bodyPr/>
+          <a:lstStyle/>
+          <a:p>
+            <a:r>
+              <a:rPr lang="en-US" dirty="0" err="1"/>
+              <a:t>Dvoretky</a:t>
+            </a:r>
+            <a:r>
+              <a:rPr lang="en-US" dirty="0"/>
+              <a:t>-Kiefer-Wolfowitz Inequality</a:t>
+            </a:r>
+          </a:p>
+        </p:txBody>
+      </p:sp>
+      <mc:AlternateContent xmlns:mc="http://schemas.openxmlformats.org/markup-compatibility/2006">
+        <mc:Choice xmlns:a14="http://schemas.microsoft.com/office/drawing/2010/main" Requires="a14">
+          <p:sp>
+            <p:nvSpPr>
+              <p:cNvPr id="3" name="Content Placeholder 2">
+                <a:extLst>
+                  <a:ext uri="{FF2B5EF4-FFF2-40B4-BE49-F238E27FC236}">
+                    <a16:creationId xmlns:a16="http://schemas.microsoft.com/office/drawing/2014/main" id="{E09FCCA7-269A-8104-0368-B38DFD41C5E4}"/>
+                  </a:ext>
+                </a:extLst>
+              </p:cNvPr>
+              <p:cNvSpPr>
+                <a:spLocks noGrp="1"/>
+              </p:cNvSpPr>
+              <p:nvPr>
+                <p:ph idx="1"/>
+              </p:nvPr>
+            </p:nvSpPr>
+            <p:spPr/>
+            <p:txBody>
+              <a:bodyPr/>
+              <a:lstStyle/>
+              <a:p>
+                <a:pPr marL="0" indent="0">
+                  <a:buNone/>
+                </a:pPr>
+                <a:r>
+                  <a:rPr lang="en-US" dirty="0"/>
+                  <a:t>The major workhorse for this work.</a:t>
+                </a:r>
+              </a:p>
+              <a:p>
+                <a:pPr marL="0" indent="0">
+                  <a:buNone/>
+                </a:pPr>
+                <a:r>
+                  <a:rPr lang="en-US" dirty="0"/>
+                  <a:t>We want a simultaneous interval of the distribution function.</a:t>
+                </a:r>
+              </a:p>
+              <a:p>
+                <a:pPr marL="0" indent="0">
+                  <a:buNone/>
+                </a:pPr>
+                <a:r>
+                  <a:rPr lang="en-US" dirty="0"/>
+                  <a:t>For empirical distribution function</a:t>
+                </a:r>
+              </a:p>
+              <a:p>
+                <a:pPr marL="0" indent="0" algn="ctr">
+                  <a:buNone/>
+                </a:pPr>
+                <a14:m>
+                  <m:oMath xmlns:m="http://schemas.openxmlformats.org/officeDocument/2006/math">
+                    <m:acc>
+                      <m:accPr>
+                        <m:chr m:val="̂"/>
+                        <m:ctrlPr>
+                          <a:rPr lang="en-US" i="1" dirty="0" smtClean="0">
+                            <a:latin typeface="Cambria Math" panose="02040503050406030204" pitchFamily="18" charset="0"/>
+                          </a:rPr>
+                        </m:ctrlPr>
+                      </m:accPr>
+                      <m:e>
+                        <m:r>
+                          <a:rPr lang="en-US" i="1" dirty="0" smtClean="0">
+                            <a:latin typeface="Cambria Math" panose="02040503050406030204" pitchFamily="18" charset="0"/>
+                          </a:rPr>
+                          <m:t>𝐹</m:t>
+                        </m:r>
+                      </m:e>
+                    </m:acc>
+                    <m:d>
+                      <m:dPr>
+                        <m:ctrlPr>
+                          <a:rPr lang="en-US" i="1" dirty="0" smtClean="0">
+                            <a:latin typeface="Cambria Math" panose="02040503050406030204" pitchFamily="18" charset="0"/>
+                          </a:rPr>
+                        </m:ctrlPr>
+                      </m:dPr>
+                      <m:e>
+                        <m:r>
+                          <a:rPr lang="en-US" i="1" dirty="0" smtClean="0">
+                            <a:latin typeface="Cambria Math" panose="02040503050406030204" pitchFamily="18" charset="0"/>
+                          </a:rPr>
+                          <m:t>𝑥</m:t>
+                        </m:r>
+                      </m:e>
+                    </m:d>
+                    <m:r>
+                      <a:rPr lang="en-US" i="1" dirty="0" smtClean="0">
+                        <a:latin typeface="Cambria Math" panose="02040503050406030204" pitchFamily="18" charset="0"/>
+                      </a:rPr>
+                      <m:t>=</m:t>
+                    </m:r>
+                    <m:f>
+                      <m:fPr>
+                        <m:ctrlPr>
+                          <a:rPr lang="en-US" i="1" dirty="0" smtClean="0">
+                            <a:latin typeface="Cambria Math" panose="02040503050406030204" pitchFamily="18" charset="0"/>
+                          </a:rPr>
+                        </m:ctrlPr>
+                      </m:fPr>
+                      <m:num>
+                        <m:r>
+                          <a:rPr lang="en-US" i="1" dirty="0" smtClean="0">
+                            <a:latin typeface="Cambria Math" panose="02040503050406030204" pitchFamily="18" charset="0"/>
+                          </a:rPr>
+                          <m:t>1</m:t>
+                        </m:r>
+                      </m:num>
+                      <m:den>
+                        <m:r>
+                          <a:rPr lang="en-US" i="1" dirty="0" smtClean="0">
+                            <a:latin typeface="Cambria Math" panose="02040503050406030204" pitchFamily="18" charset="0"/>
+                          </a:rPr>
+                          <m:t>𝑛</m:t>
+                        </m:r>
+                      </m:den>
+                    </m:f>
+                    <m:nary>
+                      <m:naryPr>
+                        <m:chr m:val="∑"/>
+                        <m:ctrlPr>
+                          <a:rPr lang="en-US" b="0" i="1" dirty="0" smtClean="0">
+                            <a:latin typeface="Cambria Math" panose="02040503050406030204" pitchFamily="18" charset="0"/>
+                          </a:rPr>
+                        </m:ctrlPr>
+                      </m:naryPr>
+                      <m:sub>
+                        <m:r>
+                          <a:rPr lang="en-US" b="0" i="1" dirty="0" smtClean="0">
+                            <a:latin typeface="Cambria Math" panose="02040503050406030204" pitchFamily="18" charset="0"/>
+                          </a:rPr>
+                          <m:t>𝑖</m:t>
+                        </m:r>
+                        <m:r>
+                          <a:rPr lang="en-US" b="0" i="1" dirty="0" smtClean="0">
+                            <a:latin typeface="Cambria Math" panose="02040503050406030204" pitchFamily="18" charset="0"/>
+                          </a:rPr>
+                          <m:t>=1</m:t>
+                        </m:r>
+                      </m:sub>
+                      <m:sup>
+                        <m:r>
+                          <a:rPr lang="en-US" b="0" i="1" dirty="0" smtClean="0">
+                            <a:latin typeface="Cambria Math" panose="02040503050406030204" pitchFamily="18" charset="0"/>
+                          </a:rPr>
+                          <m:t>𝑛</m:t>
+                        </m:r>
+                      </m:sup>
+                      <m:e>
+                        <m:r>
+                          <a:rPr lang="en-US" b="0" i="1" dirty="0" smtClean="0">
+                            <a:latin typeface="Cambria Math" panose="02040503050406030204" pitchFamily="18" charset="0"/>
+                          </a:rPr>
+                          <m:t>1</m:t>
+                        </m:r>
+                        <m:r>
+                          <m:rPr>
+                            <m:lit/>
+                          </m:rPr>
+                          <a:rPr lang="en-US" b="0" i="1" dirty="0" smtClean="0">
+                            <a:latin typeface="Cambria Math" panose="02040503050406030204" pitchFamily="18" charset="0"/>
+                          </a:rPr>
+                          <m:t>{</m:t>
+                        </m:r>
+                        <m:sSub>
+                          <m:sSubPr>
+                            <m:ctrlPr>
+                              <a:rPr lang="en-US" b="0" i="1" dirty="0" smtClean="0">
+                                <a:latin typeface="Cambria Math" panose="02040503050406030204" pitchFamily="18" charset="0"/>
+                              </a:rPr>
+                            </m:ctrlPr>
+                          </m:sSubPr>
+                          <m:e>
+                            <m:r>
+                              <a:rPr lang="en-US" b="0" i="1" dirty="0" smtClean="0">
+                                <a:latin typeface="Cambria Math" panose="02040503050406030204" pitchFamily="18" charset="0"/>
+                              </a:rPr>
+                              <m:t>𝑋</m:t>
+                            </m:r>
+                          </m:e>
+                          <m:sub>
+                            <m:r>
+                              <a:rPr lang="en-US" b="0" i="1" dirty="0" smtClean="0">
+                                <a:latin typeface="Cambria Math" panose="02040503050406030204" pitchFamily="18" charset="0"/>
+                              </a:rPr>
+                              <m:t>𝑖</m:t>
+                            </m:r>
+                          </m:sub>
+                        </m:sSub>
+                        <m:r>
+                          <a:rPr lang="en-US" b="0" i="1" dirty="0" smtClean="0">
+                            <a:latin typeface="Cambria Math" panose="02040503050406030204" pitchFamily="18" charset="0"/>
+                          </a:rPr>
+                          <m:t>≤</m:t>
+                        </m:r>
+                        <m:r>
+                          <a:rPr lang="en-US" b="0" i="1" dirty="0" smtClean="0">
+                            <a:latin typeface="Cambria Math" panose="02040503050406030204" pitchFamily="18" charset="0"/>
+                          </a:rPr>
+                          <m:t>𝑥</m:t>
+                        </m:r>
+                        <m:r>
+                          <m:rPr>
+                            <m:lit/>
+                          </m:rPr>
+                          <a:rPr lang="en-US" b="0" i="1" dirty="0" smtClean="0">
+                            <a:latin typeface="Cambria Math" panose="02040503050406030204" pitchFamily="18" charset="0"/>
+                          </a:rPr>
+                          <m:t>}</m:t>
+                        </m:r>
+                      </m:e>
+                    </m:nary>
+                  </m:oMath>
+                </a14:m>
+                <a:r>
+                  <a:rPr lang="en-US" dirty="0"/>
+                  <a:t>,</a:t>
+                </a:r>
+              </a:p>
+              <a:p>
+                <a:pPr marL="0" indent="0">
+                  <a:buNone/>
+                </a:pPr>
+                <a:endParaRPr lang="en-US" dirty="0"/>
+              </a:p>
+              <a:p>
+                <a:pPr marL="0" indent="0" algn="ctr">
+                  <a:buNone/>
+                </a:pPr>
+                <a14:m>
+                  <m:oMathPara xmlns:m="http://schemas.openxmlformats.org/officeDocument/2006/math">
+                    <m:oMathParaPr>
+                      <m:jc m:val="centerGroup"/>
+                    </m:oMathParaPr>
+                    <m:oMath xmlns:m="http://schemas.openxmlformats.org/officeDocument/2006/math">
+                      <m:func>
+                        <m:funcPr>
+                          <m:ctrlPr>
+                            <a:rPr lang="en-US" i="1" dirty="0" smtClean="0">
+                              <a:latin typeface="Cambria Math" panose="02040503050406030204" pitchFamily="18" charset="0"/>
+                            </a:rPr>
+                          </m:ctrlPr>
+                        </m:funcPr>
+                        <m:fName>
+                          <m:r>
+                            <m:rPr>
+                              <m:sty m:val="p"/>
+                            </m:rPr>
+                            <a:rPr lang="en-US" i="0" dirty="0" err="1" smtClean="0">
+                              <a:latin typeface="Cambria Math" panose="02040503050406030204" pitchFamily="18" charset="0"/>
+                            </a:rPr>
+                            <m:t>Pr</m:t>
+                          </m:r>
+                        </m:fName>
+                        <m:e>
+                          <m:func>
+                            <m:funcPr>
+                              <m:ctrlPr>
+                                <a:rPr lang="en-US" i="1" dirty="0" smtClean="0">
+                                  <a:latin typeface="Cambria Math" panose="02040503050406030204" pitchFamily="18" charset="0"/>
+                                </a:rPr>
+                              </m:ctrlPr>
+                            </m:funcPr>
+                            <m:fName>
+                              <m:limLow>
+                                <m:limLowPr>
+                                  <m:ctrlPr>
+                                    <a:rPr lang="en-US" i="1" dirty="0" smtClean="0">
+                                      <a:latin typeface="Cambria Math" panose="02040503050406030204" pitchFamily="18" charset="0"/>
+                                    </a:rPr>
+                                  </m:ctrlPr>
+                                </m:limLowPr>
+                                <m:e>
+                                  <m:r>
+                                    <m:rPr>
+                                      <m:sty m:val="p"/>
+                                    </m:rPr>
+                                    <a:rPr lang="en-US" i="0" dirty="0">
+                                      <a:latin typeface="Cambria Math" panose="02040503050406030204" pitchFamily="18" charset="0"/>
+                                    </a:rPr>
+                                    <m:t>sup</m:t>
+                                  </m:r>
+                                </m:e>
+                                <m:lim>
+                                  <m:r>
+                                    <a:rPr lang="en-US" i="1" dirty="0">
+                                      <a:latin typeface="Cambria Math" panose="02040503050406030204" pitchFamily="18" charset="0"/>
+                                    </a:rPr>
+                                    <m:t>𝑥</m:t>
+                                  </m:r>
+                                  <m:r>
+                                    <a:rPr lang="en-US" i="1" dirty="0">
+                                      <a:latin typeface="Cambria Math" panose="02040503050406030204" pitchFamily="18" charset="0"/>
+                                    </a:rPr>
+                                    <m:t>∈</m:t>
+                                  </m:r>
+                                  <m:r>
+                                    <a:rPr lang="en-US" i="1" dirty="0">
+                                      <a:latin typeface="Cambria Math" panose="02040503050406030204" pitchFamily="18" charset="0"/>
+                                    </a:rPr>
+                                    <m:t>𝑅</m:t>
+                                  </m:r>
+                                </m:lim>
+                              </m:limLow>
+                            </m:fName>
+                            <m:e>
+                              <m:d>
+                                <m:dPr>
+                                  <m:begChr m:val="|"/>
+                                  <m:endChr m:val="|"/>
+                                  <m:ctrlPr>
+                                    <a:rPr lang="en-US" i="1" dirty="0">
+                                      <a:latin typeface="Cambria Math" panose="02040503050406030204" pitchFamily="18" charset="0"/>
+                                    </a:rPr>
+                                  </m:ctrlPr>
+                                </m:dPr>
+                                <m:e>
+                                  <m:acc>
+                                    <m:accPr>
+                                      <m:chr m:val="̂"/>
+                                      <m:ctrlPr>
+                                        <a:rPr lang="en-US" i="1" dirty="0">
+                                          <a:latin typeface="Cambria Math" panose="02040503050406030204" pitchFamily="18" charset="0"/>
+                                        </a:rPr>
+                                      </m:ctrlPr>
+                                    </m:accPr>
+                                    <m:e>
+                                      <m:r>
+                                        <a:rPr lang="en-US" i="1" dirty="0" smtClean="0">
+                                          <a:latin typeface="Cambria Math" panose="02040503050406030204" pitchFamily="18" charset="0"/>
+                                        </a:rPr>
+                                        <m:t>𝐹</m:t>
+                                      </m:r>
+                                    </m:e>
+                                  </m:acc>
+                                  <m:d>
+                                    <m:dPr>
+                                      <m:ctrlPr>
+                                        <a:rPr lang="en-US" i="1" dirty="0" smtClean="0">
+                                          <a:latin typeface="Cambria Math" panose="02040503050406030204" pitchFamily="18" charset="0"/>
+                                        </a:rPr>
+                                      </m:ctrlPr>
+                                    </m:dPr>
+                                    <m:e>
+                                      <m:r>
+                                        <a:rPr lang="en-US" i="1" dirty="0">
+                                          <a:latin typeface="Cambria Math" panose="02040503050406030204" pitchFamily="18" charset="0"/>
+                                        </a:rPr>
+                                        <m:t>𝑥</m:t>
+                                      </m:r>
+                                    </m:e>
+                                  </m:d>
+                                  <m:r>
+                                    <a:rPr lang="en-US" i="1" dirty="0">
+                                      <a:latin typeface="Cambria Math" panose="02040503050406030204" pitchFamily="18" charset="0"/>
+                                    </a:rPr>
+                                    <m:t>−</m:t>
+                                  </m:r>
+                                  <m:r>
+                                    <a:rPr lang="en-US" i="1" dirty="0" smtClean="0">
+                                      <a:latin typeface="Cambria Math" panose="02040503050406030204" pitchFamily="18" charset="0"/>
+                                    </a:rPr>
+                                    <m:t>𝐹</m:t>
+                                  </m:r>
+                                  <m:d>
+                                    <m:dPr>
+                                      <m:ctrlPr>
+                                        <a:rPr lang="en-US" i="1" dirty="0" smtClean="0">
+                                          <a:latin typeface="Cambria Math" panose="02040503050406030204" pitchFamily="18" charset="0"/>
+                                        </a:rPr>
+                                      </m:ctrlPr>
+                                    </m:dPr>
+                                    <m:e>
+                                      <m:r>
+                                        <a:rPr lang="en-US" i="1" dirty="0">
+                                          <a:latin typeface="Cambria Math" panose="02040503050406030204" pitchFamily="18" charset="0"/>
+                                        </a:rPr>
+                                        <m:t>𝑥</m:t>
+                                      </m:r>
+                                    </m:e>
+                                  </m:d>
+                                </m:e>
+                              </m:d>
+                            </m:e>
+                          </m:func>
+                          <m:r>
+                            <a:rPr lang="en-US" i="1" dirty="0">
+                              <a:latin typeface="Cambria Math" panose="02040503050406030204" pitchFamily="18" charset="0"/>
+                            </a:rPr>
+                            <m:t>&gt;</m:t>
+                          </m:r>
+                          <m:r>
+                            <a:rPr lang="en-US" i="1" dirty="0" smtClean="0">
+                              <a:latin typeface="Cambria Math" panose="02040503050406030204" pitchFamily="18" charset="0"/>
+                            </a:rPr>
+                            <m:t>𝜖</m:t>
+                          </m:r>
+                        </m:e>
+                      </m:func>
+                      <m:r>
+                        <a:rPr lang="en-US" i="1" dirty="0">
+                          <a:latin typeface="Cambria Math" panose="02040503050406030204" pitchFamily="18" charset="0"/>
+                        </a:rPr>
+                        <m:t>≤</m:t>
+                      </m:r>
+                      <m:r>
+                        <a:rPr lang="en-US" i="1" dirty="0" smtClean="0">
+                          <a:latin typeface="Cambria Math" panose="02040503050406030204" pitchFamily="18" charset="0"/>
+                        </a:rPr>
+                        <m:t>𝐶</m:t>
+                      </m:r>
+                      <m:r>
+                        <m:rPr>
+                          <m:sty m:val="p"/>
+                        </m:rPr>
+                        <a:rPr lang="en-US" b="0" i="1" dirty="0" smtClean="0">
+                          <a:latin typeface="Cambria Math" panose="02040503050406030204" pitchFamily="18" charset="0"/>
+                        </a:rPr>
+                        <m:t>exp</m:t>
+                      </m:r>
+                      <m:r>
+                        <a:rPr lang="en-US" b="0" i="1" dirty="0" smtClean="0">
+                          <a:latin typeface="Cambria Math" panose="02040503050406030204" pitchFamily="18" charset="0"/>
+                        </a:rPr>
+                        <m:t>(−</m:t>
+                      </m:r>
+                      <m:r>
+                        <a:rPr lang="en-US" i="1" dirty="0" smtClean="0">
+                          <a:latin typeface="Cambria Math" panose="02040503050406030204" pitchFamily="18" charset="0"/>
+                        </a:rPr>
+                        <m:t>𝑐𝑛</m:t>
+                      </m:r>
+                      <m:sSup>
+                        <m:sSupPr>
+                          <m:ctrlPr>
+                            <a:rPr lang="en-US" b="0" i="1" dirty="0" smtClean="0">
+                              <a:latin typeface="Cambria Math" panose="02040503050406030204" pitchFamily="18" charset="0"/>
+                            </a:rPr>
+                          </m:ctrlPr>
+                        </m:sSupPr>
+                        <m:e>
+                          <m:r>
+                            <a:rPr lang="en-US" b="0" i="1" dirty="0" smtClean="0">
+                              <a:latin typeface="Cambria Math" panose="02040503050406030204" pitchFamily="18" charset="0"/>
+                            </a:rPr>
+                            <m:t>𝜖</m:t>
+                          </m:r>
+                        </m:e>
+                        <m:sup>
+                          <m:r>
+                            <a:rPr lang="en-US" b="0" i="1" dirty="0" smtClean="0">
+                              <a:latin typeface="Cambria Math" panose="02040503050406030204" pitchFamily="18" charset="0"/>
+                            </a:rPr>
+                            <m:t>2</m:t>
+                          </m:r>
+                        </m:sup>
+                      </m:sSup>
+                      <m:r>
+                        <a:rPr lang="en-US" b="0" i="1" dirty="0" smtClean="0">
+                          <a:latin typeface="Cambria Math" panose="02040503050406030204" pitchFamily="18" charset="0"/>
+                        </a:rPr>
+                        <m:t>)</m:t>
+                      </m:r>
+                      <m:r>
+                        <a:rPr lang="en-US" i="1" dirty="0" smtClean="0">
+                          <a:latin typeface="Cambria Math" panose="02040503050406030204" pitchFamily="18" charset="0"/>
+                        </a:rPr>
+                        <m:t>.</m:t>
+                      </m:r>
+                    </m:oMath>
+                  </m:oMathPara>
+                </a14:m>
+              </a:p>
+            </p:txBody>
+          </p:sp>
+        </mc:Choice>
+        <mc:Fallback>
+          <p:sp>
+            <p:nvSpPr>
+              <p:cNvPr id="3" name="Content Placeholder 2">
+                <a:extLst>
+                  <a:ext uri="{FF2B5EF4-FFF2-40B4-BE49-F238E27FC236}">
+                    <a16:creationId xmlns:a16="http://schemas.microsoft.com/office/drawing/2014/main" id="{E09FCCA7-269A-8104-0368-B38DFD41C5E4}"/>
+                  </a:ext>
+                </a:extLst>
+              </p:cNvPr>
+              <p:cNvSpPr>
+                <a:spLocks noGrp="1" noRot="1" noChangeAspect="1" noMove="1" noResize="1" noEditPoints="1" noAdjustHandles="1" noChangeArrowheads="1" noChangeShapeType="1" noTextEdit="1"/>
+              </p:cNvSpPr>
+              <p:nvPr>
+                <p:ph idx="1"/>
+              </p:nvPr>
+            </p:nvSpPr>
+            <p:spPr>
+              <a:blipFill>
+                <a:blip r:embed="rId3"/>
+                <a:stretch>
+                  <a:fillRect l="-1206" t="-2326"/>
+                </a:stretch>
+              </a:blipFill>
+            </p:spPr>
+            <p:txBody>
+              <a:bodyPr/>
+              <a:lstStyle/>
+              <a:p>
+                <a:r>
+                  <a:rPr lang="en-US">
+                    <a:noFill/>
+                  </a:rPr>
+                  <a:t> </a:t>
+                </a:r>
+              </a:p>
+            </p:txBody>
+          </p:sp>
+        </mc:Fallback>
+      </mc:AlternateContent>
+      <p:sp>
+        <p:nvSpPr>
+          <p:cNvPr id="5" name="Slide Number Placeholder 4">
+            <a:extLst>
+              <a:ext uri="{FF2B5EF4-FFF2-40B4-BE49-F238E27FC236}">
+                <a16:creationId xmlns:a16="http://schemas.microsoft.com/office/drawing/2014/main" id="{993BF20F-84C0-99E7-A1A5-3CFE243453DF}"/>
+              </a:ext>
+            </a:extLst>
+          </p:cNvPr>
+          <p:cNvSpPr>
+            <a:spLocks noGrp="1"/>
+          </p:cNvSpPr>
+          <p:nvPr>
+            <p:ph type="sldNum" sz="quarter" idx="12"/>
+          </p:nvPr>
+        </p:nvSpPr>
+        <p:spPr/>
+        <p:txBody>
+          <a:bodyPr/>
+          <a:lstStyle/>
+          <a:p>
+            <a:fld id="{B9021C99-F081-FD4B-9146-F8976D51EC28}" type="slidenum">
+              <a:rPr lang="en-US" smtClean="0"/>
+              <a:t>11</a:t>
+            </a:fld>
+            <a:endParaRPr lang="en-US"/>
+          </a:p>
+        </p:txBody>
+      </p:sp>
+    </p:spTree>
+    <p:extLst>
+      <p:ext uri="{BB962C8B-B14F-4D97-AF65-F5344CB8AC3E}">
+        <p14:creationId xmlns:p14="http://schemas.microsoft.com/office/powerpoint/2010/main" val="1195623600"/>
+      </p:ext>
+    </p:extLst>
+  </p:cSld>
+  <p:clrMapOvr>
+    <a:masterClrMapping/>
+  </p:clrMapOvr>
+</p:sld>
+</file>
+
+<file path=ppt/slides/slide12.xml><?xml version="1.0" encoding="utf-8"?>
+<p:sld xmlns:a="http://schemas.openxmlformats.org/drawingml/2006/main" xmlns:r="http://schemas.openxmlformats.org/officeDocument/2006/relationships" xmlns:p="http://schemas.openxmlformats.org/presentationml/2006/main">
+  <p:cSld>
+    <p:spTree>
+      <p:nvGrpSpPr>
+        <p:cNvPr id="1" name=""/>
+        <p:cNvGrpSpPr/>
+        <p:nvPr/>
+      </p:nvGrpSpPr>
+      <p:grpSpPr>
+        <a:xfrm>
+          <a:off x="0" y="0"/>
+          <a:ext cx="0" cy="0"/>
+          <a:chOff x="0" y="0"/>
+          <a:chExt cx="0" cy="0"/>
+        </a:xfrm>
+      </p:grpSpPr>
+      <p:sp>
+        <p:nvSpPr>
+          <p:cNvPr id="2" name="Title 1">
+            <a:extLst>
+              <a:ext uri="{FF2B5EF4-FFF2-40B4-BE49-F238E27FC236}">
+                <a16:creationId xmlns:a16="http://schemas.microsoft.com/office/drawing/2014/main" id="{8C142D9F-9F73-E725-D1DB-AE5FA41423FC}"/>
+              </a:ext>
+            </a:extLst>
+          </p:cNvPr>
+          <p:cNvSpPr>
+            <a:spLocks noGrp="1"/>
+          </p:cNvSpPr>
+          <p:nvPr>
+            <p:ph type="title"/>
+          </p:nvPr>
+        </p:nvSpPr>
+        <p:spPr/>
+        <p:txBody>
+          <a:bodyPr/>
+          <a:lstStyle/>
+          <a:p>
+            <a:r>
+              <a:rPr lang="en-US" dirty="0"/>
+              <a:t>Makarov Bounds</a:t>
+            </a:r>
+          </a:p>
+        </p:txBody>
+      </p:sp>
+      <mc:AlternateContent xmlns:mc="http://schemas.openxmlformats.org/markup-compatibility/2006">
+        <mc:Choice xmlns:a14="http://schemas.microsoft.com/office/drawing/2010/main" Requires="a14">
+          <p:sp>
+            <p:nvSpPr>
+              <p:cNvPr id="3" name="Content Placeholder 2">
+                <a:extLst>
+                  <a:ext uri="{FF2B5EF4-FFF2-40B4-BE49-F238E27FC236}">
+                    <a16:creationId xmlns:a16="http://schemas.microsoft.com/office/drawing/2014/main" id="{BB6188A1-E347-47A1-8F9C-2DDF4A9D7E53}"/>
+                  </a:ext>
+                </a:extLst>
+              </p:cNvPr>
+              <p:cNvSpPr>
+                <a:spLocks noGrp="1"/>
+              </p:cNvSpPr>
+              <p:nvPr>
+                <p:ph idx="1"/>
+              </p:nvPr>
+            </p:nvSpPr>
+            <p:spPr/>
+            <p:txBody>
+              <a:bodyPr>
+                <a:normAutofit lnSpcReduction="10000"/>
+              </a:bodyPr>
+              <a:lstStyle/>
+              <a:p>
+                <a:pPr marL="0" indent="0">
+                  <a:buNone/>
+                </a:pPr>
+                <a:r>
+                  <a:rPr lang="en-US" dirty="0"/>
+                  <a:t>We don’t know the distribution function of </a:t>
+                </a:r>
+                <a14:m>
+                  <m:oMath xmlns:m="http://schemas.openxmlformats.org/officeDocument/2006/math">
+                    <m:r>
+                      <m:rPr>
+                        <m:lit/>
+                      </m:rPr>
+                      <a:rPr lang="en-US" i="1" dirty="0" smtClean="0">
+                        <a:latin typeface="Cambria Math" panose="02040503050406030204" pitchFamily="18" charset="0"/>
+                      </a:rPr>
+                      <m:t>{</m:t>
+                    </m:r>
+                    <m:sSub>
+                      <m:sSubPr>
+                        <m:ctrlPr>
+                          <a:rPr lang="en-US" i="1" dirty="0" err="1" smtClean="0">
+                            <a:latin typeface="Cambria Math" panose="02040503050406030204" pitchFamily="18" charset="0"/>
+                          </a:rPr>
+                        </m:ctrlPr>
+                      </m:sSubPr>
+                      <m:e>
+                        <m:r>
+                          <a:rPr lang="en-US" i="1" dirty="0" smtClean="0">
+                            <a:latin typeface="Cambria Math" panose="02040503050406030204" pitchFamily="18" charset="0"/>
+                          </a:rPr>
+                          <m:t>𝜏</m:t>
+                        </m:r>
+                      </m:e>
+                      <m:sub>
+                        <m:r>
+                          <a:rPr lang="en-US" i="1" dirty="0" err="1" smtClean="0">
+                            <a:latin typeface="Cambria Math" panose="02040503050406030204" pitchFamily="18" charset="0"/>
+                          </a:rPr>
+                          <m:t>𝑖</m:t>
+                        </m:r>
+                      </m:sub>
+                    </m:sSub>
+                    <m:sSubSup>
+                      <m:sSubSupPr>
+                        <m:ctrlPr>
+                          <a:rPr lang="en-US" i="1" dirty="0" smtClean="0">
+                            <a:latin typeface="Cambria Math" panose="02040503050406030204" pitchFamily="18" charset="0"/>
+                          </a:rPr>
+                        </m:ctrlPr>
+                      </m:sSubSupPr>
+                      <m:e>
+                        <m:r>
+                          <m:rPr>
+                            <m:lit/>
+                          </m:rPr>
+                          <a:rPr lang="en-US" i="1" dirty="0" smtClean="0">
+                            <a:latin typeface="Cambria Math" panose="02040503050406030204" pitchFamily="18" charset="0"/>
+                          </a:rPr>
+                          <m:t>}</m:t>
+                        </m:r>
+                      </m:e>
+                      <m:sub>
+                        <m:r>
+                          <a:rPr lang="en-US" i="1" dirty="0" err="1" smtClean="0">
+                            <a:latin typeface="Cambria Math" panose="02040503050406030204" pitchFamily="18" charset="0"/>
+                          </a:rPr>
+                          <m:t>𝑖</m:t>
+                        </m:r>
+                        <m:r>
+                          <a:rPr lang="en-US" i="1" dirty="0" smtClean="0">
+                            <a:latin typeface="Cambria Math" panose="02040503050406030204" pitchFamily="18" charset="0"/>
+                          </a:rPr>
+                          <m:t>=1</m:t>
+                        </m:r>
+                      </m:sub>
+                      <m:sup>
+                        <m:r>
+                          <a:rPr lang="en-US" i="1" dirty="0" smtClean="0">
+                            <a:latin typeface="Cambria Math" panose="02040503050406030204" pitchFamily="18" charset="0"/>
+                          </a:rPr>
+                          <m:t>𝑛</m:t>
+                        </m:r>
+                      </m:sup>
+                    </m:sSubSup>
+                  </m:oMath>
+                </a14:m>
+                <a:r>
+                  <a:rPr lang="en-US" dirty="0"/>
+                  <a:t>, </a:t>
+                </a:r>
+                <a14:m>
+                  <m:oMath xmlns:m="http://schemas.openxmlformats.org/officeDocument/2006/math">
+                    <m:sSub>
+                      <m:sSubPr>
+                        <m:ctrlPr>
+                          <a:rPr lang="en-US" i="1" dirty="0" smtClean="0">
+                            <a:latin typeface="Cambria Math" panose="02040503050406030204" pitchFamily="18" charset="0"/>
+                          </a:rPr>
+                        </m:ctrlPr>
+                      </m:sSubPr>
+                      <m:e>
+                        <m:r>
+                          <a:rPr lang="en-US" i="1" dirty="0" smtClean="0">
+                            <a:latin typeface="Cambria Math" panose="02040503050406030204" pitchFamily="18" charset="0"/>
+                          </a:rPr>
+                          <m:t>𝐺</m:t>
+                        </m:r>
+                      </m:e>
+                      <m:sub>
+                        <m:r>
+                          <a:rPr lang="en-US" i="1" dirty="0" smtClean="0">
+                            <a:latin typeface="Cambria Math" panose="02040503050406030204" pitchFamily="18" charset="0"/>
+                          </a:rPr>
+                          <m:t>𝑛</m:t>
+                        </m:r>
+                      </m:sub>
+                    </m:sSub>
+                    <m:d>
+                      <m:dPr>
+                        <m:ctrlPr>
+                          <a:rPr lang="en-US" i="1" dirty="0" smtClean="0">
+                            <a:latin typeface="Cambria Math" panose="02040503050406030204" pitchFamily="18" charset="0"/>
+                          </a:rPr>
+                        </m:ctrlPr>
+                      </m:dPr>
+                      <m:e>
+                        <m:r>
+                          <a:rPr lang="en-US" i="1" dirty="0" smtClean="0">
+                            <a:latin typeface="Cambria Math" panose="02040503050406030204" pitchFamily="18" charset="0"/>
+                          </a:rPr>
+                          <m:t>𝑡</m:t>
+                        </m:r>
+                      </m:e>
+                    </m:d>
+                  </m:oMath>
+                </a14:m>
+                <a:r>
+                  <a:rPr lang="en-US" dirty="0"/>
+                  <a:t>, but it cannot be anything. </a:t>
+                </a:r>
+              </a:p>
+              <a:p>
+                <a:pPr marL="0" indent="0">
+                  <a:buNone/>
+                </a:pPr>
+                <a:r>
+                  <a:rPr lang="en-US" dirty="0"/>
+                  <a:t>Consider the distribution functions of the two potential outcomes</a:t>
+                </a:r>
+              </a:p>
+              <a:p>
+                <a:pPr marL="0" indent="0" algn="ctr">
+                  <a:buNone/>
+                </a:pPr>
+                <a14:m>
+                  <m:oMath xmlns:m="http://schemas.openxmlformats.org/officeDocument/2006/math">
+                    <m:sSubSup>
+                      <m:sSubSupPr>
+                        <m:ctrlPr>
+                          <a:rPr lang="en-US" i="1" dirty="0" smtClean="0">
+                            <a:latin typeface="Cambria Math" panose="02040503050406030204" pitchFamily="18" charset="0"/>
+                          </a:rPr>
+                        </m:ctrlPr>
+                      </m:sSubSupPr>
+                      <m:e>
+                        <m:r>
+                          <a:rPr lang="en-US" i="1" dirty="0" smtClean="0">
+                            <a:latin typeface="Cambria Math" panose="02040503050406030204" pitchFamily="18" charset="0"/>
+                          </a:rPr>
+                          <m:t>𝐹</m:t>
+                        </m:r>
+                      </m:e>
+                      <m:sub>
+                        <m:r>
+                          <a:rPr lang="en-US" i="1" dirty="0" smtClean="0">
+                            <a:latin typeface="Cambria Math" panose="02040503050406030204" pitchFamily="18" charset="0"/>
+                          </a:rPr>
+                          <m:t>𝑛</m:t>
+                        </m:r>
+                      </m:sub>
+                      <m:sup>
+                        <m:d>
+                          <m:dPr>
+                            <m:ctrlPr>
+                              <a:rPr lang="en-US" i="1" dirty="0" smtClean="0">
+                                <a:latin typeface="Cambria Math" panose="02040503050406030204" pitchFamily="18" charset="0"/>
+                              </a:rPr>
+                            </m:ctrlPr>
+                          </m:dPr>
+                          <m:e>
+                            <m:r>
+                              <a:rPr lang="en-US" i="1" dirty="0" smtClean="0">
+                                <a:latin typeface="Cambria Math" panose="02040503050406030204" pitchFamily="18" charset="0"/>
+                              </a:rPr>
+                              <m:t>𝑗</m:t>
+                            </m:r>
+                          </m:e>
+                        </m:d>
+                      </m:sup>
+                    </m:sSubSup>
+                    <m:r>
+                      <a:rPr lang="en-US" b="0" i="1" dirty="0" smtClean="0">
+                        <a:latin typeface="Cambria Math" panose="02040503050406030204" pitchFamily="18" charset="0"/>
+                      </a:rPr>
+                      <m:t>(</m:t>
+                    </m:r>
+                    <m:r>
+                      <m:rPr>
+                        <m:sty m:val="p"/>
+                      </m:rPr>
+                      <a:rPr lang="en-US" b="0" i="1" dirty="0" smtClean="0">
+                        <a:latin typeface="Cambria Math" panose="02040503050406030204" pitchFamily="18" charset="0"/>
+                      </a:rPr>
+                      <m:t>x</m:t>
+                    </m:r>
+                    <m:r>
+                      <a:rPr lang="en-US" b="0" i="1" dirty="0" smtClean="0">
+                        <a:latin typeface="Cambria Math" panose="02040503050406030204" pitchFamily="18" charset="0"/>
+                      </a:rPr>
+                      <m:t>)=</m:t>
+                    </m:r>
+                    <m:f>
+                      <m:fPr>
+                        <m:ctrlPr>
+                          <a:rPr lang="en-US" i="1" dirty="0" smtClean="0">
+                            <a:latin typeface="Cambria Math" panose="02040503050406030204" pitchFamily="18" charset="0"/>
+                          </a:rPr>
+                        </m:ctrlPr>
+                      </m:fPr>
+                      <m:num>
+                        <m:r>
+                          <a:rPr lang="en-US" i="1" dirty="0" smtClean="0">
+                            <a:latin typeface="Cambria Math" panose="02040503050406030204" pitchFamily="18" charset="0"/>
+                          </a:rPr>
+                          <m:t>1</m:t>
+                        </m:r>
+                      </m:num>
+                      <m:den>
+                        <m:r>
+                          <a:rPr lang="en-US" i="1" dirty="0" smtClean="0">
+                            <a:latin typeface="Cambria Math" panose="02040503050406030204" pitchFamily="18" charset="0"/>
+                          </a:rPr>
+                          <m:t>𝑛</m:t>
+                        </m:r>
+                      </m:den>
+                    </m:f>
+                    <m:nary>
+                      <m:naryPr>
+                        <m:chr m:val="∑"/>
+                        <m:ctrlPr>
+                          <a:rPr lang="en-US" i="1" dirty="0" smtClean="0">
+                            <a:latin typeface="Cambria Math" panose="02040503050406030204" pitchFamily="18" charset="0"/>
+                          </a:rPr>
+                        </m:ctrlPr>
+                      </m:naryPr>
+                      <m:sub>
+                        <m:r>
+                          <a:rPr lang="en-US" i="1" dirty="0" err="1" smtClean="0">
+                            <a:latin typeface="Cambria Math" panose="02040503050406030204" pitchFamily="18" charset="0"/>
+                          </a:rPr>
+                          <m:t>𝑖</m:t>
+                        </m:r>
+                        <m:r>
+                          <a:rPr lang="en-US" i="1" dirty="0" smtClean="0">
+                            <a:latin typeface="Cambria Math" panose="02040503050406030204" pitchFamily="18" charset="0"/>
+                          </a:rPr>
+                          <m:t>=1</m:t>
+                        </m:r>
+                      </m:sub>
+                      <m:sup>
+                        <m:r>
+                          <a:rPr lang="en-US" i="1" dirty="0" smtClean="0">
+                            <a:latin typeface="Cambria Math" panose="02040503050406030204" pitchFamily="18" charset="0"/>
+                          </a:rPr>
+                          <m:t>𝑛</m:t>
+                        </m:r>
+                      </m:sup>
+                      <m:e>
+                        <m:r>
+                          <a:rPr lang="en-US" b="0" i="1" dirty="0" smtClean="0">
+                            <a:latin typeface="Cambria Math" panose="02040503050406030204" pitchFamily="18" charset="0"/>
+                          </a:rPr>
+                          <m:t>1</m:t>
+                        </m:r>
+                        <m:r>
+                          <m:rPr>
+                            <m:lit/>
+                          </m:rPr>
+                          <a:rPr lang="en-US" b="0" i="1" dirty="0" smtClean="0">
+                            <a:latin typeface="Cambria Math" panose="02040503050406030204" pitchFamily="18" charset="0"/>
+                          </a:rPr>
+                          <m:t>{</m:t>
+                        </m:r>
+                        <m:sSub>
+                          <m:sSubPr>
+                            <m:ctrlPr>
+                              <a:rPr lang="en-US" b="0" i="1" dirty="0" smtClean="0">
+                                <a:latin typeface="Cambria Math" panose="02040503050406030204" pitchFamily="18" charset="0"/>
+                              </a:rPr>
+                            </m:ctrlPr>
+                          </m:sSubPr>
+                          <m:e>
+                            <m:r>
+                              <a:rPr lang="en-US" b="0" i="1" dirty="0" smtClean="0">
+                                <a:latin typeface="Cambria Math" panose="02040503050406030204" pitchFamily="18" charset="0"/>
+                              </a:rPr>
+                              <m:t>𝑌</m:t>
+                            </m:r>
+                          </m:e>
+                          <m:sub>
+                            <m:r>
+                              <a:rPr lang="en-US" b="0" i="1" dirty="0" smtClean="0">
+                                <a:latin typeface="Cambria Math" panose="02040503050406030204" pitchFamily="18" charset="0"/>
+                              </a:rPr>
+                              <m:t>𝑖</m:t>
+                            </m:r>
+                          </m:sub>
+                        </m:sSub>
+                        <m:d>
+                          <m:dPr>
+                            <m:ctrlPr>
+                              <a:rPr lang="en-US" b="0" i="1" dirty="0" smtClean="0">
+                                <a:latin typeface="Cambria Math" panose="02040503050406030204" pitchFamily="18" charset="0"/>
+                              </a:rPr>
+                            </m:ctrlPr>
+                          </m:dPr>
+                          <m:e>
+                            <m:r>
+                              <a:rPr lang="en-US" b="0" i="1" dirty="0" smtClean="0">
+                                <a:latin typeface="Cambria Math" panose="02040503050406030204" pitchFamily="18" charset="0"/>
+                              </a:rPr>
+                              <m:t>𝑗</m:t>
+                            </m:r>
+                          </m:e>
+                        </m:d>
+                        <m:r>
+                          <a:rPr lang="en-US" b="0" i="1" dirty="0" smtClean="0">
+                            <a:latin typeface="Cambria Math" panose="02040503050406030204" pitchFamily="18" charset="0"/>
+                          </a:rPr>
+                          <m:t>≤</m:t>
+                        </m:r>
+                        <m:r>
+                          <a:rPr lang="en-US" b="0" i="1" dirty="0" smtClean="0">
+                            <a:latin typeface="Cambria Math" panose="02040503050406030204" pitchFamily="18" charset="0"/>
+                          </a:rPr>
+                          <m:t>𝑥</m:t>
+                        </m:r>
+                        <m:r>
+                          <m:rPr>
+                            <m:lit/>
+                          </m:rPr>
+                          <a:rPr lang="en-US" b="0" i="1" dirty="0" smtClean="0">
+                            <a:latin typeface="Cambria Math" panose="02040503050406030204" pitchFamily="18" charset="0"/>
+                          </a:rPr>
+                          <m:t>}</m:t>
+                        </m:r>
+                      </m:e>
+                    </m:nary>
+                  </m:oMath>
+                </a14:m>
+                <a:r>
+                  <a:rPr lang="en-US" dirty="0"/>
+                  <a:t>.</a:t>
+                </a:r>
+              </a:p>
+              <a:p>
+                <a:pPr marL="0" indent="0">
+                  <a:buNone/>
+                </a:pPr>
+                <a:r>
+                  <a:rPr lang="en-US" dirty="0"/>
+                  <a:t>Call</a:t>
+                </a:r>
+              </a:p>
+              <a:p>
+                <a:pPr marL="0" indent="0" algn="ctr">
+                  <a:buNone/>
+                </a:pPr>
+                <a14:m>
+                  <m:oMathPara xmlns:m="http://schemas.openxmlformats.org/officeDocument/2006/math">
+                    <m:oMathParaPr>
+                      <m:jc m:val="centerGroup"/>
+                    </m:oMathParaPr>
+                    <m:oMath xmlns:m="http://schemas.openxmlformats.org/officeDocument/2006/math">
+                      <m:r>
+                        <m:rPr>
+                          <m:sty m:val="p"/>
+                        </m:rPr>
+                        <a:rPr lang="en-US" i="0" dirty="0" smtClean="0">
+                          <a:latin typeface="Cambria Math" panose="02040503050406030204" pitchFamily="18" charset="0"/>
+                        </a:rPr>
+                        <m:t>Δ</m:t>
+                      </m:r>
+                      <m:d>
+                        <m:dPr>
+                          <m:ctrlPr>
+                            <a:rPr lang="en-US" i="1" dirty="0" smtClean="0">
+                              <a:latin typeface="Cambria Math" panose="02040503050406030204" pitchFamily="18" charset="0"/>
+                            </a:rPr>
+                          </m:ctrlPr>
+                        </m:dPr>
+                        <m:e>
+                          <m:r>
+                            <a:rPr lang="en-US" i="1" dirty="0" err="1" smtClean="0">
+                              <a:latin typeface="Cambria Math" panose="02040503050406030204" pitchFamily="18" charset="0"/>
+                            </a:rPr>
+                            <m:t>𝑥</m:t>
+                          </m:r>
+                          <m:r>
+                            <a:rPr lang="en-US" i="1" dirty="0" err="1" smtClean="0">
+                              <a:latin typeface="Cambria Math" panose="02040503050406030204" pitchFamily="18" charset="0"/>
+                            </a:rPr>
+                            <m:t>,</m:t>
+                          </m:r>
+                          <m:r>
+                            <a:rPr lang="en-US" i="1" dirty="0" err="1" smtClean="0">
+                              <a:latin typeface="Cambria Math" panose="02040503050406030204" pitchFamily="18" charset="0"/>
+                            </a:rPr>
+                            <m:t>𝑡</m:t>
+                          </m:r>
+                        </m:e>
+                      </m:d>
+                      <m:r>
+                        <a:rPr lang="en-US" i="1" dirty="0" smtClean="0">
+                          <a:latin typeface="Cambria Math" panose="02040503050406030204" pitchFamily="18" charset="0"/>
+                        </a:rPr>
+                        <m:t>=</m:t>
+                      </m:r>
+                      <m:sSubSup>
+                        <m:sSubSupPr>
+                          <m:ctrlPr>
+                            <a:rPr lang="en-US" i="1" dirty="0" err="1" smtClean="0">
+                              <a:latin typeface="Cambria Math" panose="02040503050406030204" pitchFamily="18" charset="0"/>
+                            </a:rPr>
+                          </m:ctrlPr>
+                        </m:sSubSupPr>
+                        <m:e>
+                          <m:r>
+                            <a:rPr lang="en-US" i="1" dirty="0" err="1" smtClean="0">
+                              <a:latin typeface="Cambria Math" panose="02040503050406030204" pitchFamily="18" charset="0"/>
+                            </a:rPr>
+                            <m:t>𝐹</m:t>
+                          </m:r>
+                        </m:e>
+                        <m:sub>
+                          <m:r>
+                            <a:rPr lang="en-US" i="1" dirty="0" err="1" smtClean="0">
+                              <a:latin typeface="Cambria Math" panose="02040503050406030204" pitchFamily="18" charset="0"/>
+                            </a:rPr>
+                            <m:t>𝑛</m:t>
+                          </m:r>
+                        </m:sub>
+                        <m:sup>
+                          <m:d>
+                            <m:dPr>
+                              <m:ctrlPr>
+                                <a:rPr lang="en-US" i="1" dirty="0" smtClean="0">
+                                  <a:latin typeface="Cambria Math" panose="02040503050406030204" pitchFamily="18" charset="0"/>
+                                </a:rPr>
+                              </m:ctrlPr>
+                            </m:dPr>
+                            <m:e>
+                              <m:r>
+                                <a:rPr lang="en-US" i="1" dirty="0" smtClean="0">
+                                  <a:latin typeface="Cambria Math" panose="02040503050406030204" pitchFamily="18" charset="0"/>
+                                </a:rPr>
+                                <m:t>1</m:t>
+                              </m:r>
+                            </m:e>
+                          </m:d>
+                        </m:sup>
+                      </m:sSubSup>
+                      <m:d>
+                        <m:dPr>
+                          <m:ctrlPr>
+                            <a:rPr lang="en-US" i="1" dirty="0" smtClean="0">
+                              <a:latin typeface="Cambria Math" panose="02040503050406030204" pitchFamily="18" charset="0"/>
+                            </a:rPr>
+                          </m:ctrlPr>
+                        </m:dPr>
+                        <m:e>
+                          <m:r>
+                            <a:rPr lang="en-US" i="1" dirty="0" smtClean="0">
+                              <a:latin typeface="Cambria Math" panose="02040503050406030204" pitchFamily="18" charset="0"/>
+                            </a:rPr>
+                            <m:t>𝑥</m:t>
+                          </m:r>
+                        </m:e>
+                      </m:d>
+                      <m:r>
+                        <a:rPr lang="en-US" i="1" dirty="0" smtClean="0">
+                          <a:latin typeface="Cambria Math" panose="02040503050406030204" pitchFamily="18" charset="0"/>
+                        </a:rPr>
+                        <m:t>–</m:t>
+                      </m:r>
+                      <m:sSubSup>
+                        <m:sSubSupPr>
+                          <m:ctrlPr>
+                            <a:rPr lang="en-US" i="1" dirty="0" err="1" smtClean="0">
+                              <a:latin typeface="Cambria Math" panose="02040503050406030204" pitchFamily="18" charset="0"/>
+                            </a:rPr>
+                          </m:ctrlPr>
+                        </m:sSubSupPr>
+                        <m:e>
+                          <m:r>
+                            <a:rPr lang="en-US" i="1" dirty="0" err="1" smtClean="0">
+                              <a:latin typeface="Cambria Math" panose="02040503050406030204" pitchFamily="18" charset="0"/>
+                            </a:rPr>
+                            <m:t>𝐹</m:t>
+                          </m:r>
+                        </m:e>
+                        <m:sub>
+                          <m:r>
+                            <a:rPr lang="en-US" i="1" dirty="0" err="1" smtClean="0">
+                              <a:latin typeface="Cambria Math" panose="02040503050406030204" pitchFamily="18" charset="0"/>
+                            </a:rPr>
+                            <m:t>𝑛</m:t>
+                          </m:r>
+                        </m:sub>
+                        <m:sup>
+                          <m:d>
+                            <m:dPr>
+                              <m:ctrlPr>
+                                <a:rPr lang="en-US" i="1" dirty="0" smtClean="0">
+                                  <a:latin typeface="Cambria Math" panose="02040503050406030204" pitchFamily="18" charset="0"/>
+                                </a:rPr>
+                              </m:ctrlPr>
+                            </m:dPr>
+                            <m:e>
+                              <m:r>
+                                <a:rPr lang="en-US" i="1" dirty="0" smtClean="0">
+                                  <a:latin typeface="Cambria Math" panose="02040503050406030204" pitchFamily="18" charset="0"/>
+                                </a:rPr>
+                                <m:t>0</m:t>
+                              </m:r>
+                            </m:e>
+                          </m:d>
+                        </m:sup>
+                      </m:sSubSup>
+                      <m:d>
+                        <m:dPr>
+                          <m:ctrlPr>
+                            <a:rPr lang="en-US" i="1" dirty="0" smtClean="0">
+                              <a:latin typeface="Cambria Math" panose="02040503050406030204" pitchFamily="18" charset="0"/>
+                            </a:rPr>
+                          </m:ctrlPr>
+                        </m:dPr>
+                        <m:e>
+                          <m:r>
+                            <a:rPr lang="en-US" i="1" dirty="0" smtClean="0">
+                              <a:latin typeface="Cambria Math" panose="02040503050406030204" pitchFamily="18" charset="0"/>
+                            </a:rPr>
+                            <m:t>𝑥</m:t>
+                          </m:r>
+                          <m:r>
+                            <a:rPr lang="en-US" i="1" dirty="0" smtClean="0">
+                              <a:latin typeface="Cambria Math" panose="02040503050406030204" pitchFamily="18" charset="0"/>
+                            </a:rPr>
+                            <m:t>−</m:t>
+                          </m:r>
+                          <m:r>
+                            <a:rPr lang="en-US" i="1" dirty="0" smtClean="0">
+                              <a:latin typeface="Cambria Math" panose="02040503050406030204" pitchFamily="18" charset="0"/>
+                            </a:rPr>
+                            <m:t>𝑡</m:t>
+                          </m:r>
+                        </m:e>
+                      </m:d>
+                      <m:r>
+                        <a:rPr lang="en-US" b="0" i="1" dirty="0" smtClean="0">
+                          <a:latin typeface="Cambria Math" panose="02040503050406030204" pitchFamily="18" charset="0"/>
+                        </a:rPr>
+                        <m:t>,</m:t>
+                      </m:r>
+                    </m:oMath>
+                  </m:oMathPara>
+                </a14:m>
+                <a:endParaRPr lang="en-US" b="0" dirty="0"/>
+              </a:p>
+              <a:p>
+                <a:pPr marL="0" indent="0">
+                  <a:buNone/>
+                </a:pPr>
+                <a:r>
+                  <a:rPr lang="en-US" dirty="0"/>
+                  <a:t>then</a:t>
+                </a:r>
+              </a:p>
+              <a:p>
+                <a:pPr marL="0" indent="0">
+                  <a:buNone/>
+                </a:pPr>
+                <a:endParaRPr lang="en-US" dirty="0"/>
+              </a:p>
+              <a:p>
+                <a:pPr marL="0" indent="0">
+                  <a:buNone/>
+                </a:pPr>
+                <a14:m>
+                  <m:oMathPara xmlns:m="http://schemas.openxmlformats.org/officeDocument/2006/math">
+                    <m:oMathParaPr>
+                      <m:jc m:val="centerGroup"/>
+                    </m:oMathParaPr>
+                    <m:oMath xmlns:m="http://schemas.openxmlformats.org/officeDocument/2006/math">
+                      <m:sSub>
+                        <m:sSubPr>
+                          <m:ctrlPr>
+                            <a:rPr lang="en-US" i="1" dirty="0" smtClean="0">
+                              <a:latin typeface="Cambria Math" panose="02040503050406030204" pitchFamily="18" charset="0"/>
+                            </a:rPr>
+                          </m:ctrlPr>
+                        </m:sSubPr>
+                        <m:e>
+                          <m:r>
+                            <a:rPr lang="en-US" i="1" dirty="0" smtClean="0">
+                              <a:latin typeface="Cambria Math" panose="02040503050406030204" pitchFamily="18" charset="0"/>
+                            </a:rPr>
+                            <m:t>𝐺</m:t>
+                          </m:r>
+                        </m:e>
+                        <m:sub>
+                          <m:r>
+                            <a:rPr lang="en-US" i="1" dirty="0" smtClean="0">
+                              <a:latin typeface="Cambria Math" panose="02040503050406030204" pitchFamily="18" charset="0"/>
+                            </a:rPr>
+                            <m:t>𝑛</m:t>
+                          </m:r>
+                        </m:sub>
+                      </m:sSub>
+                      <m:d>
+                        <m:dPr>
+                          <m:ctrlPr>
+                            <a:rPr lang="en-US" i="1" dirty="0" smtClean="0">
+                              <a:latin typeface="Cambria Math" panose="02040503050406030204" pitchFamily="18" charset="0"/>
+                            </a:rPr>
+                          </m:ctrlPr>
+                        </m:dPr>
+                        <m:e>
+                          <m:r>
+                            <a:rPr lang="en-US" i="1" dirty="0">
+                              <a:latin typeface="Cambria Math" panose="02040503050406030204" pitchFamily="18" charset="0"/>
+                            </a:rPr>
+                            <m:t>𝑡</m:t>
+                          </m:r>
+                        </m:e>
+                      </m:d>
+                      <m:r>
+                        <a:rPr lang="en-US" i="1" dirty="0">
+                          <a:latin typeface="Cambria Math" panose="02040503050406030204" pitchFamily="18" charset="0"/>
+                        </a:rPr>
+                        <m:t>∈</m:t>
+                      </m:r>
+                      <m:d>
+                        <m:dPr>
+                          <m:ctrlPr>
+                            <a:rPr lang="en-US" i="1" dirty="0" smtClean="0">
+                              <a:latin typeface="Cambria Math" panose="02040503050406030204" pitchFamily="18" charset="0"/>
+                            </a:rPr>
+                          </m:ctrlPr>
+                        </m:dPr>
+                        <m:e>
+                          <m:func>
+                            <m:funcPr>
+                              <m:ctrlPr>
+                                <a:rPr lang="en-US" i="1" dirty="0" smtClean="0">
+                                  <a:latin typeface="Cambria Math" panose="02040503050406030204" pitchFamily="18" charset="0"/>
+                                </a:rPr>
+                              </m:ctrlPr>
+                            </m:funcPr>
+                            <m:fName>
+                              <m:limLow>
+                                <m:limLowPr>
+                                  <m:ctrlPr>
+                                    <a:rPr lang="en-US" i="1" dirty="0">
+                                      <a:latin typeface="Cambria Math" panose="02040503050406030204" pitchFamily="18" charset="0"/>
+                                    </a:rPr>
+                                  </m:ctrlPr>
+                                </m:limLowPr>
+                                <m:e>
+                                  <m:r>
+                                    <m:rPr>
+                                      <m:sty m:val="p"/>
+                                    </m:rPr>
+                                    <a:rPr lang="en-US" i="0" dirty="0">
+                                      <a:latin typeface="Cambria Math" panose="02040503050406030204" pitchFamily="18" charset="0"/>
+                                    </a:rPr>
+                                    <m:t>sup</m:t>
+                                  </m:r>
+                                </m:e>
+                                <m:lim>
+                                  <m:r>
+                                    <a:rPr lang="en-US" i="1" dirty="0">
+                                      <a:latin typeface="Cambria Math" panose="02040503050406030204" pitchFamily="18" charset="0"/>
+                                    </a:rPr>
+                                    <m:t>𝑥</m:t>
+                                  </m:r>
+                                </m:lim>
+                              </m:limLow>
+                            </m:fName>
+                            <m:e>
+                              <m:r>
+                                <m:rPr>
+                                  <m:sty m:val="p"/>
+                                </m:rPr>
+                                <a:rPr lang="en-US" b="0" i="1" dirty="0" smtClean="0">
+                                  <a:latin typeface="Cambria Math" panose="02040503050406030204" pitchFamily="18" charset="0"/>
+                                </a:rPr>
+                                <m:t>Δ</m:t>
+                              </m:r>
+                              <m:r>
+                                <a:rPr lang="en-US" b="0" i="1" dirty="0" smtClean="0">
+                                  <a:latin typeface="Cambria Math" panose="02040503050406030204" pitchFamily="18" charset="0"/>
+                                </a:rPr>
+                                <m:t>(</m:t>
+                              </m:r>
+                              <m:r>
+                                <m:rPr>
+                                  <m:sty m:val="p"/>
+                                </m:rPr>
+                                <a:rPr lang="en-US" b="0" i="1" dirty="0" smtClean="0">
+                                  <a:latin typeface="Cambria Math" panose="02040503050406030204" pitchFamily="18" charset="0"/>
+                                </a:rPr>
+                                <m:t>x</m:t>
+                              </m:r>
+                              <m:r>
+                                <a:rPr lang="en-US" b="0" i="1" dirty="0" smtClean="0">
+                                  <a:latin typeface="Cambria Math" panose="02040503050406030204" pitchFamily="18" charset="0"/>
+                                </a:rPr>
+                                <m:t>,</m:t>
+                              </m:r>
+                              <m:r>
+                                <m:rPr>
+                                  <m:sty m:val="p"/>
+                                </m:rPr>
+                                <a:rPr lang="en-US" b="0" i="1" dirty="0" smtClean="0">
+                                  <a:latin typeface="Cambria Math" panose="02040503050406030204" pitchFamily="18" charset="0"/>
+                                </a:rPr>
+                                <m:t>t</m:t>
+                              </m:r>
+                              <m:r>
+                                <a:rPr lang="en-US" b="0" i="1" dirty="0" smtClean="0">
+                                  <a:latin typeface="Cambria Math" panose="02040503050406030204" pitchFamily="18" charset="0"/>
+                                </a:rPr>
+                                <m:t>)</m:t>
+                              </m:r>
+                            </m:e>
+                          </m:func>
+                          <m:r>
+                            <a:rPr lang="en-US" i="1" dirty="0">
+                              <a:latin typeface="Cambria Math" panose="02040503050406030204" pitchFamily="18" charset="0"/>
+                            </a:rPr>
+                            <m:t>∨0,</m:t>
+                          </m:r>
+                          <m:func>
+                            <m:funcPr>
+                              <m:ctrlPr>
+                                <a:rPr lang="en-US" i="1" dirty="0" smtClean="0">
+                                  <a:latin typeface="Cambria Math" panose="02040503050406030204" pitchFamily="18" charset="0"/>
+                                </a:rPr>
+                              </m:ctrlPr>
+                            </m:funcPr>
+                            <m:fName>
+                              <m:limLow>
+                                <m:limLowPr>
+                                  <m:ctrlPr>
+                                    <a:rPr lang="en-US" i="1" dirty="0" err="1">
+                                      <a:latin typeface="Cambria Math" panose="02040503050406030204" pitchFamily="18" charset="0"/>
+                                    </a:rPr>
+                                  </m:ctrlPr>
+                                </m:limLowPr>
+                                <m:e>
+                                  <m:r>
+                                    <m:rPr>
+                                      <m:sty m:val="p"/>
+                                    </m:rPr>
+                                    <a:rPr lang="en-US" i="0" dirty="0" err="1">
+                                      <a:latin typeface="Cambria Math" panose="02040503050406030204" pitchFamily="18" charset="0"/>
+                                    </a:rPr>
+                                    <m:t>inf</m:t>
+                                  </m:r>
+                                </m:e>
+                                <m:lim>
+                                  <m:r>
+                                    <a:rPr lang="en-US" i="1" dirty="0" err="1">
+                                      <a:latin typeface="Cambria Math" panose="02040503050406030204" pitchFamily="18" charset="0"/>
+                                    </a:rPr>
+                                    <m:t>𝑥</m:t>
+                                  </m:r>
+                                </m:lim>
+                              </m:limLow>
+                            </m:fName>
+                            <m:e>
+                              <m:r>
+                                <m:rPr>
+                                  <m:sty m:val="p"/>
+                                </m:rPr>
+                                <a:rPr lang="en-US" b="0" i="1" dirty="0" smtClean="0">
+                                  <a:latin typeface="Cambria Math" panose="02040503050406030204" pitchFamily="18" charset="0"/>
+                                </a:rPr>
+                                <m:t>Δ</m:t>
+                              </m:r>
+                              <m:r>
+                                <a:rPr lang="en-US" b="0" i="1" dirty="0" smtClean="0">
+                                  <a:latin typeface="Cambria Math" panose="02040503050406030204" pitchFamily="18" charset="0"/>
+                                </a:rPr>
+                                <m:t>(</m:t>
+                              </m:r>
+                              <m:r>
+                                <m:rPr>
+                                  <m:sty m:val="p"/>
+                                </m:rPr>
+                                <a:rPr lang="en-US" b="0" i="1" dirty="0" smtClean="0">
+                                  <a:latin typeface="Cambria Math" panose="02040503050406030204" pitchFamily="18" charset="0"/>
+                                </a:rPr>
+                                <m:t>x</m:t>
+                              </m:r>
+                              <m:r>
+                                <a:rPr lang="en-US" b="0" i="1" dirty="0" smtClean="0">
+                                  <a:latin typeface="Cambria Math" panose="02040503050406030204" pitchFamily="18" charset="0"/>
+                                </a:rPr>
+                                <m:t>,</m:t>
+                              </m:r>
+                              <m:r>
+                                <m:rPr>
+                                  <m:sty m:val="p"/>
+                                </m:rPr>
+                                <a:rPr lang="en-US" b="0" i="1" dirty="0" smtClean="0">
+                                  <a:latin typeface="Cambria Math" panose="02040503050406030204" pitchFamily="18" charset="0"/>
+                                </a:rPr>
+                                <m:t>t</m:t>
+                              </m:r>
+                              <m:r>
+                                <a:rPr lang="en-US" b="0" i="1" dirty="0" smtClean="0">
+                                  <a:latin typeface="Cambria Math" panose="02040503050406030204" pitchFamily="18" charset="0"/>
+                                </a:rPr>
+                                <m:t>)</m:t>
+                              </m:r>
+                            </m:e>
+                          </m:func>
+                          <m:r>
+                            <a:rPr lang="en-US" i="1" dirty="0">
+                              <a:latin typeface="Cambria Math" panose="02040503050406030204" pitchFamily="18" charset="0"/>
+                            </a:rPr>
+                            <m:t>+1∧1</m:t>
+                          </m:r>
+                        </m:e>
+                      </m:d>
+                      <m:r>
+                        <a:rPr lang="en-US" b="0" i="1" dirty="0" smtClean="0">
+                          <a:latin typeface="Cambria Math" panose="02040503050406030204" pitchFamily="18" charset="0"/>
+                        </a:rPr>
+                        <m:t>.</m:t>
+                      </m:r>
+                    </m:oMath>
+                  </m:oMathPara>
+                </a14:m>
+              </a:p>
+            </p:txBody>
+          </p:sp>
+        </mc:Choice>
+        <mc:Fallback>
+          <p:sp>
+            <p:nvSpPr>
+              <p:cNvPr id="3" name="Content Placeholder 2">
+                <a:extLst>
+                  <a:ext uri="{FF2B5EF4-FFF2-40B4-BE49-F238E27FC236}">
+                    <a16:creationId xmlns:a16="http://schemas.microsoft.com/office/drawing/2014/main" id="{BB6188A1-E347-47A1-8F9C-2DDF4A9D7E53}"/>
+                  </a:ext>
+                </a:extLst>
+              </p:cNvPr>
+              <p:cNvSpPr>
+                <a:spLocks noGrp="1" noRot="1" noChangeAspect="1" noMove="1" noResize="1" noEditPoints="1" noAdjustHandles="1" noChangeArrowheads="1" noChangeShapeType="1" noTextEdit="1"/>
+              </p:cNvSpPr>
+              <p:nvPr>
+                <p:ph idx="1"/>
+              </p:nvPr>
+            </p:nvSpPr>
+            <p:spPr>
+              <a:blipFill>
+                <a:blip r:embed="rId2"/>
+                <a:stretch>
+                  <a:fillRect l="-1206" t="-3198"/>
+                </a:stretch>
+              </a:blipFill>
+            </p:spPr>
+            <p:txBody>
+              <a:bodyPr/>
+              <a:lstStyle/>
+              <a:p>
+                <a:r>
+                  <a:rPr lang="en-US">
+                    <a:noFill/>
+                  </a:rPr>
+                  <a:t> </a:t>
+                </a:r>
+              </a:p>
+            </p:txBody>
+          </p:sp>
+        </mc:Fallback>
+      </mc:AlternateContent>
+      <p:sp>
+        <p:nvSpPr>
+          <p:cNvPr id="5" name="Slide Number Placeholder 4">
+            <a:extLst>
+              <a:ext uri="{FF2B5EF4-FFF2-40B4-BE49-F238E27FC236}">
+                <a16:creationId xmlns:a16="http://schemas.microsoft.com/office/drawing/2014/main" id="{B3C63849-FB6C-AE2E-9E48-A48664207BAF}"/>
+              </a:ext>
+            </a:extLst>
+          </p:cNvPr>
+          <p:cNvSpPr>
+            <a:spLocks noGrp="1"/>
+          </p:cNvSpPr>
+          <p:nvPr>
+            <p:ph type="sldNum" sz="quarter" idx="12"/>
+          </p:nvPr>
+        </p:nvSpPr>
+        <p:spPr/>
+        <p:txBody>
+          <a:bodyPr/>
+          <a:lstStyle/>
+          <a:p>
+            <a:fld id="{B9021C99-F081-FD4B-9146-F8976D51EC28}" type="slidenum">
+              <a:rPr lang="en-US" smtClean="0"/>
+              <a:t>12</a:t>
+            </a:fld>
+            <a:endParaRPr lang="en-US"/>
+          </a:p>
+        </p:txBody>
+      </p:sp>
+    </p:spTree>
+    <p:extLst>
+      <p:ext uri="{BB962C8B-B14F-4D97-AF65-F5344CB8AC3E}">
+        <p14:creationId xmlns:p14="http://schemas.microsoft.com/office/powerpoint/2010/main" val="720273347"/>
+      </p:ext>
+    </p:extLst>
+  </p:cSld>
+  <p:clrMapOvr>
+    <a:masterClrMapping/>
+  </p:clrMapOvr>
+</p:sld>
+</file>
+
+<file path=ppt/slides/slide13.xml><?xml version="1.0" encoding="utf-8"?>
+<p:sld xmlns:a="http://schemas.openxmlformats.org/drawingml/2006/main" xmlns:r="http://schemas.openxmlformats.org/officeDocument/2006/relationships" xmlns:p="http://schemas.openxmlformats.org/presentationml/2006/main">
+  <p:cSld>
+    <p:spTree>
+      <p:nvGrpSpPr>
+        <p:cNvPr id="1" name=""/>
+        <p:cNvGrpSpPr/>
+        <p:nvPr/>
+      </p:nvGrpSpPr>
+      <p:grpSpPr>
+        <a:xfrm>
+          <a:off x="0" y="0"/>
+          <a:ext cx="0" cy="0"/>
+          <a:chOff x="0" y="0"/>
+          <a:chExt cx="0" cy="0"/>
+        </a:xfrm>
+      </p:grpSpPr>
+      <p:sp>
+        <p:nvSpPr>
+          <p:cNvPr id="2" name="Title 1">
+            <a:extLst>
+              <a:ext uri="{FF2B5EF4-FFF2-40B4-BE49-F238E27FC236}">
+                <a16:creationId xmlns:a16="http://schemas.microsoft.com/office/drawing/2014/main" id="{534EDD69-67D9-9266-4598-07607F8A4859}"/>
+              </a:ext>
+            </a:extLst>
+          </p:cNvPr>
+          <p:cNvSpPr>
+            <a:spLocks noGrp="1"/>
+          </p:cNvSpPr>
+          <p:nvPr>
+            <p:ph type="title"/>
+          </p:nvPr>
+        </p:nvSpPr>
+        <p:spPr/>
+        <p:txBody>
+          <a:bodyPr/>
+          <a:lstStyle/>
+          <a:p>
+            <a:r>
+              <a:rPr lang="en-US" dirty="0"/>
+              <a:t>Intuition of Method</a:t>
+            </a:r>
+          </a:p>
+        </p:txBody>
+      </p:sp>
+      <p:sp>
+        <p:nvSpPr>
+          <p:cNvPr id="3" name="Content Placeholder 2">
+            <a:extLst>
+              <a:ext uri="{FF2B5EF4-FFF2-40B4-BE49-F238E27FC236}">
+                <a16:creationId xmlns:a16="http://schemas.microsoft.com/office/drawing/2014/main" id="{A8C02912-4675-A4AA-0E2E-A5B9E14F1817}"/>
+              </a:ext>
+            </a:extLst>
+          </p:cNvPr>
+          <p:cNvSpPr>
+            <a:spLocks noGrp="1"/>
+          </p:cNvSpPr>
+          <p:nvPr>
+            <p:ph idx="1"/>
+          </p:nvPr>
+        </p:nvSpPr>
+        <p:spPr/>
+        <p:txBody>
+          <a:bodyPr/>
+          <a:lstStyle/>
+          <a:p>
+            <a:pPr marL="0" indent="0">
+              <a:buNone/>
+            </a:pPr>
+            <a:r>
+              <a:rPr lang="en-US" dirty="0"/>
+              <a:t>If we knew the marginal distribution function, we could partially identify the treatment effect distribution.</a:t>
+            </a:r>
+          </a:p>
+          <a:p>
+            <a:pPr marL="0" indent="0">
+              <a:buNone/>
+            </a:pPr>
+            <a:r>
+              <a:rPr lang="en-US" dirty="0"/>
+              <a:t>We don’t know the marginal distribution functions exactly.</a:t>
+            </a:r>
+          </a:p>
+          <a:p>
+            <a:pPr marL="0" indent="0">
+              <a:buNone/>
+            </a:pPr>
+            <a:r>
+              <a:rPr lang="en-US" dirty="0"/>
+              <a:t>But we can estimate them with observables.</a:t>
+            </a:r>
+          </a:p>
+          <a:p>
+            <a:pPr marL="0" indent="0">
+              <a:buNone/>
+            </a:pPr>
+            <a:r>
+              <a:rPr lang="en-US" dirty="0"/>
+              <a:t>So, estimate the distribution function with observables, create a uniformly valid confidence interval. </a:t>
+            </a:r>
+          </a:p>
+          <a:p>
+            <a:pPr marL="0" indent="0">
+              <a:buNone/>
+            </a:pPr>
+            <a:r>
+              <a:rPr lang="en-US" dirty="0"/>
+              <a:t>Deduce that if the true marginal distributions are in this band, then the treatment effect distribution is in the constrained step from before.</a:t>
+            </a:r>
+          </a:p>
+          <a:p>
+            <a:pPr marL="0" indent="0">
+              <a:buNone/>
+            </a:pPr>
+            <a:endParaRPr lang="en-US" dirty="0"/>
+          </a:p>
+        </p:txBody>
+      </p:sp>
+      <p:sp>
+        <p:nvSpPr>
+          <p:cNvPr id="5" name="Slide Number Placeholder 4">
+            <a:extLst>
+              <a:ext uri="{FF2B5EF4-FFF2-40B4-BE49-F238E27FC236}">
+                <a16:creationId xmlns:a16="http://schemas.microsoft.com/office/drawing/2014/main" id="{4B1C2E76-156E-E5A5-9E00-C565F5B58C59}"/>
+              </a:ext>
+            </a:extLst>
+          </p:cNvPr>
+          <p:cNvSpPr>
+            <a:spLocks noGrp="1"/>
+          </p:cNvSpPr>
+          <p:nvPr>
+            <p:ph type="sldNum" sz="quarter" idx="12"/>
+          </p:nvPr>
+        </p:nvSpPr>
+        <p:spPr/>
+        <p:txBody>
+          <a:bodyPr/>
+          <a:lstStyle/>
+          <a:p>
+            <a:fld id="{B9021C99-F081-FD4B-9146-F8976D51EC28}" type="slidenum">
+              <a:rPr lang="en-US" smtClean="0"/>
+              <a:t>13</a:t>
+            </a:fld>
+            <a:endParaRPr lang="en-US"/>
+          </a:p>
+        </p:txBody>
+      </p:sp>
+    </p:spTree>
+    <p:extLst>
+      <p:ext uri="{BB962C8B-B14F-4D97-AF65-F5344CB8AC3E}">
+        <p14:creationId xmlns:p14="http://schemas.microsoft.com/office/powerpoint/2010/main" val="3068212310"/>
+      </p:ext>
+    </p:extLst>
+  </p:cSld>
+  <p:clrMapOvr>
+    <a:masterClrMapping/>
+  </p:clrMapOvr>
+</p:sld>
+</file>
+
 <file path=ppt/slides/slide2.xml><?xml version="1.0" encoding="utf-8"?>
 <p:sld xmlns:a="http://schemas.openxmlformats.org/drawingml/2006/main" xmlns:r="http://schemas.openxmlformats.org/officeDocument/2006/relationships" xmlns:p="http://schemas.openxmlformats.org/presentationml/2006/main">
   <p:cSld>
@@ -4083,8 +6466,8 @@
           </a:p>
         </p:txBody>
       </p:sp>
-      <mc:AlternateContent xmlns:mc="http://schemas.openxmlformats.org/markup-compatibility/2006">
-        <mc:Choice xmlns:a14="http://schemas.microsoft.com/office/drawing/2010/main" Requires="a14">
+      <mc:AlternateContent xmlns:mc="http://schemas.openxmlformats.org/markup-compatibility/2006" xmlns:a14="http://schemas.microsoft.com/office/drawing/2010/main">
+        <mc:Choice Requires="a14">
           <p:sp>
             <p:nvSpPr>
               <p:cNvPr id="3" name="Content Placeholder 2">
@@ -4384,7 +6767,7 @@
             </p:txBody>
           </p:sp>
         </mc:Choice>
-        <mc:Fallback>
+        <mc:Fallback xmlns="">
           <p:sp>
             <p:nvSpPr>
               <p:cNvPr id="3" name="Content Placeholder 2">
@@ -4543,8 +6926,8 @@
           </a:p>
         </p:txBody>
       </p:sp>
-      <mc:AlternateContent xmlns:mc="http://schemas.openxmlformats.org/markup-compatibility/2006">
-        <mc:Choice xmlns:a14="http://schemas.microsoft.com/office/drawing/2010/main" Requires="a14">
+      <mc:AlternateContent xmlns:mc="http://schemas.openxmlformats.org/markup-compatibility/2006" xmlns:a14="http://schemas.microsoft.com/office/drawing/2010/main">
+        <mc:Choice Requires="a14">
           <p:graphicFrame>
             <p:nvGraphicFramePr>
               <p:cNvPr id="6" name="Content Placeholder 5">
@@ -5208,7 +7591,7 @@
             </a:graphic>
           </p:graphicFrame>
         </mc:Choice>
-        <mc:Fallback>
+        <mc:Fallback xmlns="">
           <p:graphicFrame>
             <p:nvGraphicFramePr>
               <p:cNvPr id="6" name="Content Placeholder 5">
@@ -5760,8 +8143,8 @@
           </a:p>
         </p:txBody>
       </p:sp>
-      <mc:AlternateContent xmlns:mc="http://schemas.openxmlformats.org/markup-compatibility/2006">
-        <mc:Choice xmlns:a14="http://schemas.microsoft.com/office/drawing/2010/main" Requires="a14">
+      <mc:AlternateContent xmlns:mc="http://schemas.openxmlformats.org/markup-compatibility/2006" xmlns:a14="http://schemas.microsoft.com/office/drawing/2010/main">
+        <mc:Choice Requires="a14">
           <p:sp>
             <p:nvSpPr>
               <p:cNvPr id="8" name="TextBox 7">
@@ -5790,6 +8173,7 @@
               </a:bodyPr>
               <a:lstStyle/>
               <a:p>
+                <a:pPr/>
                 <a14:m>
                   <m:oMathPara xmlns:m="http://schemas.openxmlformats.org/officeDocument/2006/math">
                     <m:oMathParaPr>
@@ -5944,11 +8328,12 @@
                     </m:oMath>
                   </m:oMathPara>
                 </a14:m>
+                <a:endParaRPr/>
               </a:p>
             </p:txBody>
           </p:sp>
         </mc:Choice>
-        <mc:Fallback>
+        <mc:Fallback xmlns="">
           <p:sp>
             <p:nvSpPr>
               <p:cNvPr id="8" name="TextBox 7">
@@ -5993,8 +8378,8 @@
           </p:sp>
         </mc:Fallback>
       </mc:AlternateContent>
-      <mc:AlternateContent xmlns:mc="http://schemas.openxmlformats.org/markup-compatibility/2006">
-        <mc:Choice xmlns:a14="http://schemas.microsoft.com/office/drawing/2010/main" Requires="a14">
+      <mc:AlternateContent xmlns:mc="http://schemas.openxmlformats.org/markup-compatibility/2006" xmlns:a14="http://schemas.microsoft.com/office/drawing/2010/main">
+        <mc:Choice Requires="a14">
           <p:sp>
             <p:nvSpPr>
               <p:cNvPr id="9" name="TextBox 8">
@@ -6073,7 +8458,7 @@
             </p:txBody>
           </p:sp>
         </mc:Choice>
-        <mc:Fallback>
+        <mc:Fallback xmlns="">
           <p:sp>
             <p:nvSpPr>
               <p:cNvPr id="9" name="TextBox 8">
@@ -6176,8 +8561,8 @@
           </a:p>
         </p:txBody>
       </p:sp>
-      <mc:AlternateContent xmlns:mc="http://schemas.openxmlformats.org/markup-compatibility/2006">
-        <mc:Choice xmlns:a14="http://schemas.microsoft.com/office/drawing/2010/main" Requires="a14">
+      <mc:AlternateContent xmlns:mc="http://schemas.openxmlformats.org/markup-compatibility/2006" xmlns:a14="http://schemas.microsoft.com/office/drawing/2010/main">
+        <mc:Choice Requires="a14">
           <p:sp>
             <p:nvSpPr>
               <p:cNvPr id="3" name="Content Placeholder 2">
@@ -6204,7 +8589,7 @@
                 </a:pPr>
                 <a:r>
                   <a:rPr lang="en-US" dirty="0"/>
-                  <a:t>Let’s work with the individual treatment effects:</a:t>
+                  <a:t>Let’s work with the individual treatment effects (ITE):</a:t>
                 </a:r>
               </a:p>
               <a:p>
@@ -6361,24 +8746,815 @@
                 </a:pPr>
                 <a:r>
                   <a:rPr lang="en-US" dirty="0"/>
-                  <a:t>These statistical objects are not identifiable, meaning we cannot know what they are from </a:t>
+                  <a:t>More specifically, we’re going to work with the distribution:</a:t>
                 </a:r>
+              </a:p>
+              <a:p>
+                <a:pPr marL="0" indent="0" algn="ctr">
+                  <a:buNone/>
+                </a:pPr>
+                <a14:m>
+                  <m:oMathPara xmlns:m="http://schemas.openxmlformats.org/officeDocument/2006/math">
+                    <m:oMathParaPr>
+                      <m:jc m:val="centerGroup"/>
+                    </m:oMathParaPr>
+                    <m:oMath xmlns:m="http://schemas.openxmlformats.org/officeDocument/2006/math">
+                      <m:r>
+                        <a:rPr lang="en-US" i="1" dirty="0" smtClean="0">
+                          <a:latin typeface="Cambria Math" panose="02040503050406030204" pitchFamily="18" charset="0"/>
+                        </a:rPr>
+                        <m:t>𝐺</m:t>
+                      </m:r>
+                      <m:d>
+                        <m:dPr>
+                          <m:ctrlPr>
+                            <a:rPr lang="en-US" i="1" dirty="0" smtClean="0">
+                              <a:latin typeface="Cambria Math" panose="02040503050406030204" pitchFamily="18" charset="0"/>
+                            </a:rPr>
+                          </m:ctrlPr>
+                        </m:dPr>
+                        <m:e>
+                          <m:r>
+                            <a:rPr lang="en-US" i="1" dirty="0" smtClean="0">
+                              <a:latin typeface="Cambria Math" panose="02040503050406030204" pitchFamily="18" charset="0"/>
+                            </a:rPr>
+                            <m:t>𝑡</m:t>
+                          </m:r>
+                        </m:e>
+                      </m:d>
+                      <m:r>
+                        <a:rPr lang="en-US" i="1" dirty="0" smtClean="0">
+                          <a:latin typeface="Cambria Math" panose="02040503050406030204" pitchFamily="18" charset="0"/>
+                        </a:rPr>
+                        <m:t>=</m:t>
+                      </m:r>
+                      <m:f>
+                        <m:fPr>
+                          <m:ctrlPr>
+                            <a:rPr lang="en-US" i="1" dirty="0" smtClean="0">
+                              <a:latin typeface="Cambria Math" panose="02040503050406030204" pitchFamily="18" charset="0"/>
+                            </a:rPr>
+                          </m:ctrlPr>
+                        </m:fPr>
+                        <m:num>
+                          <m:r>
+                            <a:rPr lang="en-US" i="1" dirty="0" smtClean="0">
+                              <a:latin typeface="Cambria Math" panose="02040503050406030204" pitchFamily="18" charset="0"/>
+                            </a:rPr>
+                            <m:t>1</m:t>
+                          </m:r>
+                        </m:num>
+                        <m:den>
+                          <m:r>
+                            <a:rPr lang="en-US" i="1" dirty="0" smtClean="0">
+                              <a:latin typeface="Cambria Math" panose="02040503050406030204" pitchFamily="18" charset="0"/>
+                            </a:rPr>
+                            <m:t>𝑛</m:t>
+                          </m:r>
+                        </m:den>
+                      </m:f>
+                      <m:nary>
+                        <m:naryPr>
+                          <m:chr m:val="∑"/>
+                          <m:ctrlPr>
+                            <a:rPr lang="en-US" i="1" dirty="0" smtClean="0">
+                              <a:latin typeface="Cambria Math" panose="02040503050406030204" pitchFamily="18" charset="0"/>
+                            </a:rPr>
+                          </m:ctrlPr>
+                        </m:naryPr>
+                        <m:sub>
+                          <m:r>
+                            <a:rPr lang="en-US" i="1" dirty="0" err="1" smtClean="0">
+                              <a:latin typeface="Cambria Math" panose="02040503050406030204" pitchFamily="18" charset="0"/>
+                            </a:rPr>
+                            <m:t>𝑖</m:t>
+                          </m:r>
+                          <m:r>
+                            <a:rPr lang="en-US" i="1" dirty="0" smtClean="0">
+                              <a:latin typeface="Cambria Math" panose="02040503050406030204" pitchFamily="18" charset="0"/>
+                            </a:rPr>
+                            <m:t>=1</m:t>
+                          </m:r>
+                        </m:sub>
+                        <m:sup>
+                          <m:r>
+                            <a:rPr lang="en-US" i="1" dirty="0" smtClean="0">
+                              <a:latin typeface="Cambria Math" panose="02040503050406030204" pitchFamily="18" charset="0"/>
+                            </a:rPr>
+                            <m:t>𝑛</m:t>
+                          </m:r>
+                        </m:sup>
+                        <m:e>
+                          <m:r>
+                            <a:rPr lang="en-US" i="1" dirty="0" smtClean="0">
+                              <a:latin typeface="Cambria Math" panose="02040503050406030204" pitchFamily="18" charset="0"/>
+                            </a:rPr>
+                            <m:t>1</m:t>
+                          </m:r>
+                          <m:r>
+                            <m:rPr>
+                              <m:lit/>
+                            </m:rPr>
+                            <a:rPr lang="en-US" i="1" dirty="0" smtClean="0">
+                              <a:latin typeface="Cambria Math" panose="02040503050406030204" pitchFamily="18" charset="0"/>
+                            </a:rPr>
+                            <m:t>{</m:t>
+                          </m:r>
+                          <m:sSub>
+                            <m:sSubPr>
+                              <m:ctrlPr>
+                                <a:rPr lang="en-US" i="1" dirty="0" err="1" smtClean="0">
+                                  <a:latin typeface="Cambria Math" panose="02040503050406030204" pitchFamily="18" charset="0"/>
+                                </a:rPr>
+                              </m:ctrlPr>
+                            </m:sSubPr>
+                            <m:e>
+                              <m:r>
+                                <a:rPr lang="en-US" i="1" dirty="0" smtClean="0">
+                                  <a:latin typeface="Cambria Math" panose="02040503050406030204" pitchFamily="18" charset="0"/>
+                                </a:rPr>
+                                <m:t>𝜏</m:t>
+                              </m:r>
+                            </m:e>
+                            <m:sub>
+                              <m:r>
+                                <a:rPr lang="en-US" i="1" dirty="0" err="1" smtClean="0">
+                                  <a:latin typeface="Cambria Math" panose="02040503050406030204" pitchFamily="18" charset="0"/>
+                                </a:rPr>
+                                <m:t>𝑖</m:t>
+                              </m:r>
+                            </m:sub>
+                          </m:sSub>
+                        </m:e>
+                      </m:nary>
+                      <m:r>
+                        <a:rPr lang="en-US" i="1" dirty="0" smtClean="0">
+                          <a:latin typeface="Cambria Math" panose="02040503050406030204" pitchFamily="18" charset="0"/>
+                        </a:rPr>
+                        <m:t>≤</m:t>
+                      </m:r>
+                      <m:r>
+                        <a:rPr lang="en-US" i="1" dirty="0" smtClean="0">
+                          <a:latin typeface="Cambria Math" panose="02040503050406030204" pitchFamily="18" charset="0"/>
+                        </a:rPr>
+                        <m:t>𝑡</m:t>
+                      </m:r>
+                      <m:r>
+                        <m:rPr>
+                          <m:lit/>
+                        </m:rPr>
+                        <a:rPr lang="en-US" i="1" dirty="0">
+                          <a:latin typeface="Cambria Math" panose="02040503050406030204" pitchFamily="18" charset="0"/>
+                        </a:rPr>
+                        <m:t>}</m:t>
+                      </m:r>
+                    </m:oMath>
+                  </m:oMathPara>
+                </a14:m>
+                <a:endParaRPr lang="en-US" dirty="0"/>
+              </a:p>
+              <a:p>
+                <a:pPr marL="0" indent="0">
+                  <a:buNone/>
+                </a:pPr>
                 <a:r>
-                  <a:rPr lang="en-US"/>
-                  <a:t>the observed data.</a:t>
+                  <a:rPr lang="en-US" dirty="0"/>
+                  <a:t>Problem: These ITE are not identifiable, meaning we cannot know what they are from the observed data. </a:t>
                 </a:r>
+              </a:p>
+              <a:p>
+                <a:pPr marL="0" indent="0">
+                  <a:buNone/>
+                </a:pPr>
+                <a:endParaRPr lang="en-US" dirty="0"/>
+              </a:p>
+              <a:p>
+                <a:pPr marL="0" indent="0">
+                  <a:buNone/>
+                </a:pPr>
                 <a:endParaRPr lang="en-US" dirty="0"/>
               </a:p>
             </p:txBody>
           </p:sp>
         </mc:Choice>
-        <mc:Fallback>
+        <mc:Fallback xmlns="">
           <p:sp>
             <p:nvSpPr>
               <p:cNvPr id="3" name="Content Placeholder 2">
                 <a:extLst>
                   <a:ext uri="{FF2B5EF4-FFF2-40B4-BE49-F238E27FC236}">
                     <a16:creationId xmlns:a16="http://schemas.microsoft.com/office/drawing/2014/main" id="{D5D95CDC-4FA0-EDC2-3480-6235F5BA79A7}"/>
+                  </a:ext>
+                </a:extLst>
+              </p:cNvPr>
+              <p:cNvSpPr>
+                <a:spLocks noGrp="1" noRot="1" noChangeAspect="1" noMove="1" noResize="1" noEditPoints="1" noAdjustHandles="1" noChangeArrowheads="1" noChangeShapeType="1" noTextEdit="1"/>
+              </p:cNvSpPr>
+              <p:nvPr>
+                <p:ph idx="1"/>
+              </p:nvPr>
+            </p:nvSpPr>
+            <p:spPr>
+              <a:blipFill>
+                <a:blip r:embed="rId2"/>
+                <a:stretch>
+                  <a:fillRect l="-1206" t="-3779" b="-4360"/>
+                </a:stretch>
+              </a:blipFill>
+            </p:spPr>
+            <p:txBody>
+              <a:bodyPr/>
+              <a:lstStyle/>
+              <a:p>
+                <a:r>
+                  <a:rPr lang="en-US">
+                    <a:noFill/>
+                  </a:rPr>
+                  <a:t> </a:t>
+                </a:r>
+              </a:p>
+            </p:txBody>
+          </p:sp>
+        </mc:Fallback>
+      </mc:AlternateContent>
+      <p:sp>
+        <p:nvSpPr>
+          <p:cNvPr id="5" name="Slide Number Placeholder 4">
+            <a:extLst>
+              <a:ext uri="{FF2B5EF4-FFF2-40B4-BE49-F238E27FC236}">
+                <a16:creationId xmlns:a16="http://schemas.microsoft.com/office/drawing/2014/main" id="{963EC4C2-77BE-EB7C-5D7A-D0F227F7B45B}"/>
+              </a:ext>
+            </a:extLst>
+          </p:cNvPr>
+          <p:cNvSpPr>
+            <a:spLocks noGrp="1"/>
+          </p:cNvSpPr>
+          <p:nvPr>
+            <p:ph type="sldNum" sz="quarter" idx="12"/>
+          </p:nvPr>
+        </p:nvSpPr>
+        <p:spPr/>
+        <p:txBody>
+          <a:bodyPr/>
+          <a:lstStyle/>
+          <a:p>
+            <a:fld id="{B9021C99-F081-FD4B-9146-F8976D51EC28}" type="slidenum">
+              <a:rPr lang="en-US" smtClean="0"/>
+              <a:t>4</a:t>
+            </a:fld>
+            <a:endParaRPr lang="en-US"/>
+          </a:p>
+        </p:txBody>
+      </p:sp>
+    </p:spTree>
+    <p:extLst>
+      <p:ext uri="{BB962C8B-B14F-4D97-AF65-F5344CB8AC3E}">
+        <p14:creationId xmlns:p14="http://schemas.microsoft.com/office/powerpoint/2010/main" val="2440165868"/>
+      </p:ext>
+    </p:extLst>
+  </p:cSld>
+  <p:clrMapOvr>
+    <a:masterClrMapping/>
+  </p:clrMapOvr>
+</p:sld>
+</file>
+
+<file path=ppt/slides/slide5.xml><?xml version="1.0" encoding="utf-8"?>
+<p:sld xmlns:a="http://schemas.openxmlformats.org/drawingml/2006/main" xmlns:r="http://schemas.openxmlformats.org/officeDocument/2006/relationships" xmlns:p="http://schemas.openxmlformats.org/presentationml/2006/main">
+  <p:cSld>
+    <p:spTree>
+      <p:nvGrpSpPr>
+        <p:cNvPr id="1" name=""/>
+        <p:cNvGrpSpPr/>
+        <p:nvPr/>
+      </p:nvGrpSpPr>
+      <p:grpSpPr>
+        <a:xfrm>
+          <a:off x="0" y="0"/>
+          <a:ext cx="0" cy="0"/>
+          <a:chOff x="0" y="0"/>
+          <a:chExt cx="0" cy="0"/>
+        </a:xfrm>
+      </p:grpSpPr>
+      <p:sp>
+        <p:nvSpPr>
+          <p:cNvPr id="2" name="Title 1">
+            <a:extLst>
+              <a:ext uri="{FF2B5EF4-FFF2-40B4-BE49-F238E27FC236}">
+                <a16:creationId xmlns:a16="http://schemas.microsoft.com/office/drawing/2014/main" id="{2D2143D5-30DC-F7E3-9634-8B0060622831}"/>
+              </a:ext>
+            </a:extLst>
+          </p:cNvPr>
+          <p:cNvSpPr>
+            <a:spLocks noGrp="1"/>
+          </p:cNvSpPr>
+          <p:nvPr>
+            <p:ph type="title"/>
+          </p:nvPr>
+        </p:nvSpPr>
+        <p:spPr/>
+        <p:txBody>
+          <a:bodyPr/>
+          <a:lstStyle/>
+          <a:p>
+            <a:r>
+              <a:rPr lang="en-US" dirty="0"/>
+              <a:t>Partial Identification</a:t>
+            </a:r>
+          </a:p>
+        </p:txBody>
+      </p:sp>
+      <p:pic>
+        <p:nvPicPr>
+          <p:cNvPr id="8" name="Content Placeholder 7" descr="A graph of a number of individuals&#10;&#10;AI-generated content may be incorrect.">
+            <a:extLst>
+              <a:ext uri="{FF2B5EF4-FFF2-40B4-BE49-F238E27FC236}">
+                <a16:creationId xmlns:a16="http://schemas.microsoft.com/office/drawing/2014/main" id="{E462F5D7-1731-62E9-5D9E-2921F030990F}"/>
+              </a:ext>
+            </a:extLst>
+          </p:cNvPr>
+          <p:cNvPicPr>
+            <a:picLocks noGrp="1" noChangeAspect="1"/>
+          </p:cNvPicPr>
+          <p:nvPr>
+            <p:ph idx="1"/>
+          </p:nvPr>
+        </p:nvPicPr>
+        <p:blipFill>
+          <a:blip r:embed="rId2"/>
+          <a:srcRect t="9259"/>
+          <a:stretch>
+            <a:fillRect/>
+          </a:stretch>
+        </p:blipFill>
+        <p:spPr>
+          <a:xfrm>
+            <a:off x="6095999" y="1678898"/>
+            <a:ext cx="4621967" cy="4194017"/>
+          </a:xfrm>
+        </p:spPr>
+      </p:pic>
+      <p:sp>
+        <p:nvSpPr>
+          <p:cNvPr id="4" name="Text Placeholder 3">
+            <a:extLst>
+              <a:ext uri="{FF2B5EF4-FFF2-40B4-BE49-F238E27FC236}">
+                <a16:creationId xmlns:a16="http://schemas.microsoft.com/office/drawing/2014/main" id="{026E91AF-5FAE-47EF-4F90-FA15981A0AD7}"/>
+              </a:ext>
+            </a:extLst>
+          </p:cNvPr>
+          <p:cNvSpPr>
+            <a:spLocks noGrp="1"/>
+          </p:cNvSpPr>
+          <p:nvPr>
+            <p:ph type="body" sz="half" idx="2"/>
+          </p:nvPr>
+        </p:nvSpPr>
+        <p:spPr>
+          <a:xfrm>
+            <a:off x="839788" y="2057400"/>
+            <a:ext cx="4621967" cy="3811588"/>
+          </a:xfrm>
+        </p:spPr>
+        <p:txBody>
+          <a:bodyPr>
+            <a:normAutofit/>
+          </a:bodyPr>
+          <a:lstStyle/>
+          <a:p>
+            <a:pPr marL="342900" indent="-342900">
+              <a:buFont typeface="Arial" panose="020B0604020202020204" pitchFamily="34" charset="0"/>
+              <a:buChar char="•"/>
+            </a:pPr>
+            <a:r>
+              <a:rPr lang="en-US" sz="2000" dirty="0"/>
+              <a:t>While we do not know exactly what G(t) is, it cannot be anything.</a:t>
+            </a:r>
+          </a:p>
+          <a:p>
+            <a:pPr marL="342900" indent="-342900">
+              <a:buFont typeface="Arial" panose="020B0604020202020204" pitchFamily="34" charset="0"/>
+              <a:buChar char="•"/>
+            </a:pPr>
+            <a:r>
+              <a:rPr lang="en-US" sz="2000" dirty="0"/>
+              <a:t>We will work toward getting to the figure on the right.</a:t>
+            </a:r>
+          </a:p>
+          <a:p>
+            <a:pPr marL="342900" indent="-342900">
+              <a:buFont typeface="Arial" panose="020B0604020202020204" pitchFamily="34" charset="0"/>
+              <a:buChar char="•"/>
+            </a:pPr>
+            <a:r>
+              <a:rPr lang="en-US" sz="2000" dirty="0"/>
+              <a:t>Black band is the true distribution G(t).</a:t>
+            </a:r>
+          </a:p>
+          <a:p>
+            <a:pPr marL="342900" indent="-342900">
+              <a:buFont typeface="Arial" panose="020B0604020202020204" pitchFamily="34" charset="0"/>
+              <a:buChar char="•"/>
+            </a:pPr>
+            <a:r>
+              <a:rPr lang="en-US" sz="2000" dirty="0"/>
+              <a:t>Red and Blue bands are simultaneous confidence bands for this curve G(t)f.</a:t>
+            </a:r>
+          </a:p>
+        </p:txBody>
+      </p:sp>
+      <p:sp>
+        <p:nvSpPr>
+          <p:cNvPr id="6" name="Slide Number Placeholder 5">
+            <a:extLst>
+              <a:ext uri="{FF2B5EF4-FFF2-40B4-BE49-F238E27FC236}">
+                <a16:creationId xmlns:a16="http://schemas.microsoft.com/office/drawing/2014/main" id="{D201F755-E6EE-56B6-2CF6-440F109B2409}"/>
+              </a:ext>
+            </a:extLst>
+          </p:cNvPr>
+          <p:cNvSpPr>
+            <a:spLocks noGrp="1"/>
+          </p:cNvSpPr>
+          <p:nvPr>
+            <p:ph type="sldNum" sz="quarter" idx="12"/>
+          </p:nvPr>
+        </p:nvSpPr>
+        <p:spPr/>
+        <p:txBody>
+          <a:bodyPr/>
+          <a:lstStyle/>
+          <a:p>
+            <a:fld id="{B9021C99-F081-FD4B-9146-F8976D51EC28}" type="slidenum">
+              <a:rPr lang="en-US" smtClean="0"/>
+              <a:t>5</a:t>
+            </a:fld>
+            <a:endParaRPr lang="en-US"/>
+          </a:p>
+        </p:txBody>
+      </p:sp>
+    </p:spTree>
+    <p:extLst>
+      <p:ext uri="{BB962C8B-B14F-4D97-AF65-F5344CB8AC3E}">
+        <p14:creationId xmlns:p14="http://schemas.microsoft.com/office/powerpoint/2010/main" val="3150005647"/>
+      </p:ext>
+    </p:extLst>
+  </p:cSld>
+  <p:clrMapOvr>
+    <a:masterClrMapping/>
+  </p:clrMapOvr>
+</p:sld>
+</file>
+
+<file path=ppt/slides/slide6.xml><?xml version="1.0" encoding="utf-8"?>
+<p:sld xmlns:a="http://schemas.openxmlformats.org/drawingml/2006/main" xmlns:r="http://schemas.openxmlformats.org/officeDocument/2006/relationships" xmlns:p="http://schemas.openxmlformats.org/presentationml/2006/main">
+  <p:cSld>
+    <p:spTree>
+      <p:nvGrpSpPr>
+        <p:cNvPr id="1" name=""/>
+        <p:cNvGrpSpPr/>
+        <p:nvPr/>
+      </p:nvGrpSpPr>
+      <p:grpSpPr>
+        <a:xfrm>
+          <a:off x="0" y="0"/>
+          <a:ext cx="0" cy="0"/>
+          <a:chOff x="0" y="0"/>
+          <a:chExt cx="0" cy="0"/>
+        </a:xfrm>
+      </p:grpSpPr>
+      <p:sp>
+        <p:nvSpPr>
+          <p:cNvPr id="2" name="Title 1">
+            <a:extLst>
+              <a:ext uri="{FF2B5EF4-FFF2-40B4-BE49-F238E27FC236}">
+                <a16:creationId xmlns:a16="http://schemas.microsoft.com/office/drawing/2014/main" id="{522C33C1-051E-7C72-1037-749CACCD103F}"/>
+              </a:ext>
+            </a:extLst>
+          </p:cNvPr>
+          <p:cNvSpPr>
+            <a:spLocks noGrp="1"/>
+          </p:cNvSpPr>
+          <p:nvPr>
+            <p:ph type="title"/>
+          </p:nvPr>
+        </p:nvSpPr>
+        <p:spPr/>
+        <p:txBody>
+          <a:bodyPr/>
+          <a:lstStyle/>
+          <a:p>
+            <a:r>
+              <a:rPr lang="en-US" dirty="0"/>
+              <a:t>Assumptions For Our Work</a:t>
+            </a:r>
+          </a:p>
+        </p:txBody>
+      </p:sp>
+      <mc:AlternateContent xmlns:mc="http://schemas.openxmlformats.org/markup-compatibility/2006" xmlns:a14="http://schemas.microsoft.com/office/drawing/2010/main">
+        <mc:Choice Requires="a14">
+          <p:sp>
+            <p:nvSpPr>
+              <p:cNvPr id="3" name="Content Placeholder 2">
+                <a:extLst>
+                  <a:ext uri="{FF2B5EF4-FFF2-40B4-BE49-F238E27FC236}">
+                    <a16:creationId xmlns:a16="http://schemas.microsoft.com/office/drawing/2014/main" id="{67358DCD-D762-77A0-4B51-732D1A6D8A8E}"/>
+                  </a:ext>
+                </a:extLst>
+              </p:cNvPr>
+              <p:cNvSpPr>
+                <a:spLocks noGrp="1"/>
+              </p:cNvSpPr>
+              <p:nvPr>
+                <p:ph idx="1"/>
+              </p:nvPr>
+            </p:nvSpPr>
+            <p:spPr/>
+            <p:txBody>
+              <a:bodyPr/>
+              <a:lstStyle/>
+              <a:p>
+                <a:pPr marL="0" indent="0">
+                  <a:buNone/>
+                </a:pPr>
+                <a:r>
+                  <a:rPr lang="en-US" dirty="0"/>
+                  <a:t>SUTVA Assumption</a:t>
+                </a:r>
+              </a:p>
+              <a:p>
+                <a:pPr marL="0" indent="0">
+                  <a:buNone/>
+                </a:pPr>
+                <a:r>
+                  <a:rPr lang="en-US" dirty="0"/>
+                  <a:t>a.) Consistency</a:t>
+                </a:r>
+              </a:p>
+              <a:p>
+                <a:pPr marL="0" indent="0">
+                  <a:buNone/>
+                </a:pPr>
+                <a:r>
+                  <a:rPr lang="en-US" dirty="0"/>
+                  <a:t>b.) No Interference</a:t>
+                </a:r>
+              </a:p>
+              <a:p>
+                <a:pPr marL="0" indent="0">
+                  <a:buNone/>
+                </a:pPr>
+                <a:endParaRPr lang="en-US" dirty="0"/>
+              </a:p>
+              <a:p>
+                <a:pPr marL="0" indent="0">
+                  <a:buNone/>
+                </a:pPr>
+                <a:r>
+                  <a:rPr lang="en-US" dirty="0"/>
+                  <a:t>Independence</a:t>
+                </a:r>
+              </a:p>
+              <a:p>
+                <a:pPr marL="0" indent="0" algn="ctr">
+                  <a:buNone/>
+                </a:pPr>
+                <a14:m>
+                  <m:oMath xmlns:m="http://schemas.openxmlformats.org/officeDocument/2006/math">
+                    <m:sSub>
+                      <m:sSubPr>
+                        <m:ctrlPr>
+                          <a:rPr lang="en-US" i="1" dirty="0" smtClean="0">
+                            <a:latin typeface="Cambria Math" panose="02040503050406030204" pitchFamily="18" charset="0"/>
+                          </a:rPr>
+                        </m:ctrlPr>
+                      </m:sSubPr>
+                      <m:e>
+                        <m:r>
+                          <a:rPr lang="en-US" i="1" dirty="0" smtClean="0">
+                            <a:latin typeface="Cambria Math" panose="02040503050406030204" pitchFamily="18" charset="0"/>
+                          </a:rPr>
+                          <m:t>𝑍</m:t>
+                        </m:r>
+                      </m:e>
+                      <m:sub>
+                        <m:r>
+                          <a:rPr lang="en-US" i="1" dirty="0" smtClean="0">
+                            <a:latin typeface="Cambria Math" panose="02040503050406030204" pitchFamily="18" charset="0"/>
+                          </a:rPr>
+                          <m:t>𝑖</m:t>
+                        </m:r>
+                      </m:sub>
+                    </m:sSub>
+                    <m:r>
+                      <a:rPr lang="en-US" i="1" dirty="0" smtClean="0">
+                        <a:latin typeface="Cambria Math" panose="02040503050406030204" pitchFamily="18" charset="0"/>
+                      </a:rPr>
+                      <m:t>⊥</m:t>
+                    </m:r>
+                    <m:sSub>
+                      <m:sSubPr>
+                        <m:ctrlPr>
+                          <a:rPr lang="en-US" i="1" dirty="0" err="1" smtClean="0">
+                            <a:latin typeface="Cambria Math" panose="02040503050406030204" pitchFamily="18" charset="0"/>
+                          </a:rPr>
+                        </m:ctrlPr>
+                      </m:sSubPr>
+                      <m:e>
+                        <m:r>
+                          <a:rPr lang="en-US" i="1" dirty="0" err="1" smtClean="0">
+                            <a:latin typeface="Cambria Math" panose="02040503050406030204" pitchFamily="18" charset="0"/>
+                          </a:rPr>
+                          <m:t>𝑌</m:t>
+                        </m:r>
+                      </m:e>
+                      <m:sub>
+                        <m:r>
+                          <a:rPr lang="en-US" i="1" dirty="0" err="1" smtClean="0">
+                            <a:latin typeface="Cambria Math" panose="02040503050406030204" pitchFamily="18" charset="0"/>
+                          </a:rPr>
+                          <m:t>𝑖</m:t>
+                        </m:r>
+                      </m:sub>
+                    </m:sSub>
+                    <m:d>
+                      <m:dPr>
+                        <m:ctrlPr>
+                          <a:rPr lang="en-US" i="1" dirty="0" smtClean="0">
+                            <a:latin typeface="Cambria Math" panose="02040503050406030204" pitchFamily="18" charset="0"/>
+                          </a:rPr>
+                        </m:ctrlPr>
+                      </m:dPr>
+                      <m:e>
+                        <m:r>
+                          <a:rPr lang="en-US" i="1" dirty="0" smtClean="0">
+                            <a:latin typeface="Cambria Math" panose="02040503050406030204" pitchFamily="18" charset="0"/>
+                          </a:rPr>
+                          <m:t>0</m:t>
+                        </m:r>
+                      </m:e>
+                    </m:d>
+                    <m:r>
+                      <a:rPr lang="en-US" i="1" dirty="0" smtClean="0">
+                        <a:latin typeface="Cambria Math" panose="02040503050406030204" pitchFamily="18" charset="0"/>
+                      </a:rPr>
+                      <m:t>,</m:t>
+                    </m:r>
+                    <m:sSub>
+                      <m:sSubPr>
+                        <m:ctrlPr>
+                          <a:rPr lang="en-US" i="1" dirty="0" err="1" smtClean="0">
+                            <a:latin typeface="Cambria Math" panose="02040503050406030204" pitchFamily="18" charset="0"/>
+                          </a:rPr>
+                        </m:ctrlPr>
+                      </m:sSubPr>
+                      <m:e>
+                        <m:r>
+                          <a:rPr lang="en-US" i="1" dirty="0" err="1" smtClean="0">
+                            <a:latin typeface="Cambria Math" panose="02040503050406030204" pitchFamily="18" charset="0"/>
+                          </a:rPr>
+                          <m:t>𝑌</m:t>
+                        </m:r>
+                      </m:e>
+                      <m:sub>
+                        <m:r>
+                          <a:rPr lang="en-US" i="1" dirty="0" err="1" smtClean="0">
+                            <a:latin typeface="Cambria Math" panose="02040503050406030204" pitchFamily="18" charset="0"/>
+                          </a:rPr>
+                          <m:t>𝑖</m:t>
+                        </m:r>
+                      </m:sub>
+                    </m:sSub>
+                    <m:d>
+                      <m:dPr>
+                        <m:ctrlPr>
+                          <a:rPr lang="en-US" i="1" dirty="0" smtClean="0">
+                            <a:latin typeface="Cambria Math" panose="02040503050406030204" pitchFamily="18" charset="0"/>
+                          </a:rPr>
+                        </m:ctrlPr>
+                      </m:dPr>
+                      <m:e>
+                        <m:r>
+                          <a:rPr lang="en-US" i="1" dirty="0" smtClean="0">
+                            <a:latin typeface="Cambria Math" panose="02040503050406030204" pitchFamily="18" charset="0"/>
+                          </a:rPr>
+                          <m:t>1</m:t>
+                        </m:r>
+                      </m:e>
+                    </m:d>
+                  </m:oMath>
+                </a14:m>
+                <a:r>
+                  <a:rPr lang="en-US" dirty="0"/>
+                  <a:t>.</a:t>
+                </a:r>
+              </a:p>
+              <a:p>
+                <a:pPr marL="0" indent="0">
+                  <a:buNone/>
+                </a:pPr>
+                <a:r>
+                  <a:rPr lang="en-US" dirty="0"/>
+                  <a:t>Bounded potential outcomes (does not impact efficiency):</a:t>
+                </a:r>
+              </a:p>
+              <a:p>
+                <a:pPr marL="0" indent="0">
+                  <a:buNone/>
+                </a:pPr>
+                <a14:m>
+                  <m:oMathPara xmlns:m="http://schemas.openxmlformats.org/officeDocument/2006/math">
+                    <m:oMathParaPr>
+                      <m:jc m:val="centerGroup"/>
+                    </m:oMathParaPr>
+                    <m:oMath xmlns:m="http://schemas.openxmlformats.org/officeDocument/2006/math">
+                      <m:d>
+                        <m:dPr>
+                          <m:begChr m:val="|"/>
+                          <m:endChr m:val="|"/>
+                          <m:ctrlPr>
+                            <a:rPr lang="en-US" i="1" dirty="0" smtClean="0">
+                              <a:latin typeface="Cambria Math" panose="02040503050406030204" pitchFamily="18" charset="0"/>
+                            </a:rPr>
+                          </m:ctrlPr>
+                        </m:dPr>
+                        <m:e>
+                          <m:sSub>
+                            <m:sSubPr>
+                              <m:ctrlPr>
+                                <a:rPr lang="en-US" i="1" dirty="0" err="1" smtClean="0">
+                                  <a:latin typeface="Cambria Math" panose="02040503050406030204" pitchFamily="18" charset="0"/>
+                                </a:rPr>
+                              </m:ctrlPr>
+                            </m:sSubPr>
+                            <m:e>
+                              <m:r>
+                                <a:rPr lang="en-US" i="1" dirty="0" err="1" smtClean="0">
+                                  <a:latin typeface="Cambria Math" panose="02040503050406030204" pitchFamily="18" charset="0"/>
+                                </a:rPr>
+                                <m:t>𝑌</m:t>
+                              </m:r>
+                            </m:e>
+                            <m:sub>
+                              <m:r>
+                                <a:rPr lang="en-US" i="1" dirty="0" err="1" smtClean="0">
+                                  <a:latin typeface="Cambria Math" panose="02040503050406030204" pitchFamily="18" charset="0"/>
+                                </a:rPr>
+                                <m:t>𝑖</m:t>
+                              </m:r>
+                            </m:sub>
+                          </m:sSub>
+                          <m:d>
+                            <m:dPr>
+                              <m:ctrlPr>
+                                <a:rPr lang="en-US" i="1" dirty="0" smtClean="0">
+                                  <a:latin typeface="Cambria Math" panose="02040503050406030204" pitchFamily="18" charset="0"/>
+                                </a:rPr>
+                              </m:ctrlPr>
+                            </m:dPr>
+                            <m:e>
+                              <m:r>
+                                <a:rPr lang="en-US" i="1" dirty="0" smtClean="0">
+                                  <a:latin typeface="Cambria Math" panose="02040503050406030204" pitchFamily="18" charset="0"/>
+                                </a:rPr>
+                                <m:t>𝑗</m:t>
+                              </m:r>
+                            </m:e>
+                          </m:d>
+                        </m:e>
+                      </m:d>
+                      <m:r>
+                        <a:rPr lang="en-US" i="1" dirty="0" smtClean="0">
+                          <a:latin typeface="Cambria Math" panose="02040503050406030204" pitchFamily="18" charset="0"/>
+                        </a:rPr>
+                        <m:t>&lt;</m:t>
+                      </m:r>
+                      <m:r>
+                        <a:rPr lang="en-US" i="1" dirty="0">
+                          <a:latin typeface="Cambria Math" panose="02040503050406030204" pitchFamily="18" charset="0"/>
+                        </a:rPr>
+                        <m:t>𝐿</m:t>
+                      </m:r>
+                      <m:r>
+                        <a:rPr lang="en-US" b="0" i="1" dirty="0" smtClean="0">
+                          <a:latin typeface="Cambria Math" panose="02040503050406030204" pitchFamily="18" charset="0"/>
+                        </a:rPr>
+                        <m:t> &lt; ∞.</m:t>
+                      </m:r>
+                    </m:oMath>
+                  </m:oMathPara>
+                </a14:m>
+                <a:endParaRPr lang="en-US" dirty="0"/>
+              </a:p>
+            </p:txBody>
+          </p:sp>
+        </mc:Choice>
+        <mc:Fallback xmlns="">
+          <p:sp>
+            <p:nvSpPr>
+              <p:cNvPr id="3" name="Content Placeholder 2">
+                <a:extLst>
+                  <a:ext uri="{FF2B5EF4-FFF2-40B4-BE49-F238E27FC236}">
+                    <a16:creationId xmlns:a16="http://schemas.microsoft.com/office/drawing/2014/main" id="{67358DCD-D762-77A0-4B51-732D1A6D8A8E}"/>
                   </a:ext>
                 </a:extLst>
               </p:cNvPr>
@@ -6414,10 +9590,10 @@
       </mc:AlternateContent>
       <p:sp>
         <p:nvSpPr>
-          <p:cNvPr id="4" name="Footer Placeholder 3">
+          <p:cNvPr id="5" name="Slide Number Placeholder 4">
             <a:extLst>
               <a:ext uri="{FF2B5EF4-FFF2-40B4-BE49-F238E27FC236}">
-                <a16:creationId xmlns:a16="http://schemas.microsoft.com/office/drawing/2014/main" id="{8634002B-6ED2-D7F6-3F0C-3E5DEC5884B9}"/>
+                <a16:creationId xmlns:a16="http://schemas.microsoft.com/office/drawing/2014/main" id="{28FF18B6-53DB-8FAB-528A-3FCAF0583C47}"/>
               </a:ext>
             </a:extLst>
           </p:cNvPr>
@@ -6425,7 +9601,7 @@
             <a:spLocks noGrp="1"/>
           </p:cNvSpPr>
           <p:nvPr>
-            <p:ph type="ftr" sz="quarter" idx="11"/>
+            <p:ph type="sldNum" sz="quarter" idx="12"/>
           </p:nvPr>
         </p:nvSpPr>
         <p:spPr/>
@@ -6433,9 +9609,73 @@
           <a:bodyPr/>
           <a:lstStyle/>
           <a:p>
-            <a:r>
-              <a:rPr lang="en-US"/>
-              <a:t>Myoung-jae Lee (1999). Median treatment effect in randomized trials.</a:t>
+            <a:fld id="{B9021C99-F081-FD4B-9146-F8976D51EC28}" type="slidenum">
+              <a:rPr lang="en-US" smtClean="0"/>
+              <a:t>6</a:t>
+            </a:fld>
+            <a:endParaRPr lang="en-US"/>
+          </a:p>
+        </p:txBody>
+      </p:sp>
+    </p:spTree>
+    <p:extLst>
+      <p:ext uri="{BB962C8B-B14F-4D97-AF65-F5344CB8AC3E}">
+        <p14:creationId xmlns:p14="http://schemas.microsoft.com/office/powerpoint/2010/main" val="3543361574"/>
+      </p:ext>
+    </p:extLst>
+  </p:cSld>
+  <p:clrMapOvr>
+    <a:masterClrMapping/>
+  </p:clrMapOvr>
+</p:sld>
+</file>
+
+<file path=ppt/slides/slide7.xml><?xml version="1.0" encoding="utf-8"?>
+<p:sld xmlns:a="http://schemas.openxmlformats.org/drawingml/2006/main" xmlns:r="http://schemas.openxmlformats.org/officeDocument/2006/relationships" xmlns:p="http://schemas.openxmlformats.org/presentationml/2006/main">
+  <p:cSld>
+    <p:spTree>
+      <p:nvGrpSpPr>
+        <p:cNvPr id="1" name=""/>
+        <p:cNvGrpSpPr/>
+        <p:nvPr/>
+      </p:nvGrpSpPr>
+      <p:grpSpPr>
+        <a:xfrm>
+          <a:off x="0" y="0"/>
+          <a:ext cx="0" cy="0"/>
+          <a:chOff x="0" y="0"/>
+          <a:chExt cx="0" cy="0"/>
+        </a:xfrm>
+      </p:grpSpPr>
+      <p:sp>
+        <p:nvSpPr>
+          <p:cNvPr id="2" name="Title 1">
+            <a:extLst>
+              <a:ext uri="{FF2B5EF4-FFF2-40B4-BE49-F238E27FC236}">
+                <a16:creationId xmlns:a16="http://schemas.microsoft.com/office/drawing/2014/main" id="{50D52107-678B-2262-6C93-4BEE4A9954FF}"/>
+              </a:ext>
+            </a:extLst>
+          </p:cNvPr>
+          <p:cNvSpPr>
+            <a:spLocks noGrp="1"/>
+          </p:cNvSpPr>
+          <p:nvPr>
+            <p:ph type="title"/>
+          </p:nvPr>
+        </p:nvSpPr>
+        <p:spPr>
+          <a:xfrm>
+            <a:off x="838200" y="2862262"/>
+            <a:ext cx="10515600" cy="1133475"/>
+          </a:xfrm>
+        </p:spPr>
+        <p:txBody>
+          <a:bodyPr/>
+          <a:lstStyle/>
+          <a:p>
+            <a:r>
+              <a:rPr lang="en-US" dirty="0"/>
+              <a:t>Related Work &amp; Previous Efforts</a:t>
             </a:r>
           </a:p>
         </p:txBody>
@@ -6445,7 +9685,7 @@
           <p:cNvPr id="5" name="Slide Number Placeholder 4">
             <a:extLst>
               <a:ext uri="{FF2B5EF4-FFF2-40B4-BE49-F238E27FC236}">
-                <a16:creationId xmlns:a16="http://schemas.microsoft.com/office/drawing/2014/main" id="{963EC4C2-77BE-EB7C-5D7A-D0F227F7B45B}"/>
+                <a16:creationId xmlns:a16="http://schemas.microsoft.com/office/drawing/2014/main" id="{D914D73D-1176-E5B8-515C-22DD6CF6D4D9}"/>
               </a:ext>
             </a:extLst>
           </p:cNvPr>
@@ -6463,7 +9703,7 @@
           <a:p>
             <a:fld id="{B9021C99-F081-FD4B-9146-F8976D51EC28}" type="slidenum">
               <a:rPr lang="en-US" smtClean="0"/>
-              <a:t>4</a:t>
+              <a:t>7</a:t>
             </a:fld>
             <a:endParaRPr lang="en-US"/>
           </a:p>
@@ -6472,7 +9712,368 @@
     </p:spTree>
     <p:extLst>
       <p:ext uri="{BB962C8B-B14F-4D97-AF65-F5344CB8AC3E}">
-        <p14:creationId xmlns:p14="http://schemas.microsoft.com/office/powerpoint/2010/main" val="2440165868"/>
+        <p14:creationId xmlns:p14="http://schemas.microsoft.com/office/powerpoint/2010/main" val="396486040"/>
+      </p:ext>
+    </p:extLst>
+  </p:cSld>
+  <p:clrMapOvr>
+    <a:masterClrMapping/>
+  </p:clrMapOvr>
+</p:sld>
+</file>
+
+<file path=ppt/slides/slide8.xml><?xml version="1.0" encoding="utf-8"?>
+<p:sld xmlns:a="http://schemas.openxmlformats.org/drawingml/2006/main" xmlns:r="http://schemas.openxmlformats.org/officeDocument/2006/relationships" xmlns:p="http://schemas.openxmlformats.org/presentationml/2006/main">
+  <p:cSld>
+    <p:spTree>
+      <p:nvGrpSpPr>
+        <p:cNvPr id="1" name=""/>
+        <p:cNvGrpSpPr/>
+        <p:nvPr/>
+      </p:nvGrpSpPr>
+      <p:grpSpPr>
+        <a:xfrm>
+          <a:off x="0" y="0"/>
+          <a:ext cx="0" cy="0"/>
+          <a:chOff x="0" y="0"/>
+          <a:chExt cx="0" cy="0"/>
+        </a:xfrm>
+      </p:grpSpPr>
+      <p:sp>
+        <p:nvSpPr>
+          <p:cNvPr id="2" name="Title 1">
+            <a:extLst>
+              <a:ext uri="{FF2B5EF4-FFF2-40B4-BE49-F238E27FC236}">
+                <a16:creationId xmlns:a16="http://schemas.microsoft.com/office/drawing/2014/main" id="{190B2B80-89FA-5170-18BA-D12862FAF8CE}"/>
+              </a:ext>
+            </a:extLst>
+          </p:cNvPr>
+          <p:cNvSpPr>
+            <a:spLocks noGrp="1"/>
+          </p:cNvSpPr>
+          <p:nvPr>
+            <p:ph type="title"/>
+          </p:nvPr>
+        </p:nvSpPr>
+        <p:spPr/>
+        <p:txBody>
+          <a:bodyPr/>
+          <a:lstStyle/>
+          <a:p>
+            <a:r>
+              <a:rPr lang="en-US" dirty="0"/>
+              <a:t>Randomization Inference </a:t>
+            </a:r>
+            <a:br>
+              <a:rPr lang="en-US" dirty="0"/>
+            </a:br>
+            <a:r>
+              <a:rPr lang="en-US" dirty="0"/>
+              <a:t>(Xinran Li’s Neyman Talk)</a:t>
+            </a:r>
+          </a:p>
+        </p:txBody>
+      </p:sp>
+      <p:sp>
+        <p:nvSpPr>
+          <p:cNvPr id="4" name="Content Placeholder 3">
+            <a:extLst>
+              <a:ext uri="{FF2B5EF4-FFF2-40B4-BE49-F238E27FC236}">
+                <a16:creationId xmlns:a16="http://schemas.microsoft.com/office/drawing/2014/main" id="{D0DE55F9-BADC-12D8-5220-7A005A7DCF00}"/>
+              </a:ext>
+            </a:extLst>
+          </p:cNvPr>
+          <p:cNvSpPr>
+            <a:spLocks noGrp="1"/>
+          </p:cNvSpPr>
+          <p:nvPr>
+            <p:ph sz="half" idx="2"/>
+          </p:nvPr>
+        </p:nvSpPr>
+        <p:spPr/>
+        <p:txBody>
+          <a:bodyPr/>
+          <a:lstStyle/>
+          <a:p>
+            <a:r>
+              <a:rPr lang="en-US" dirty="0"/>
+              <a:t>Use randomization inference</a:t>
+            </a:r>
+          </a:p>
+          <a:p>
+            <a:r>
+              <a:rPr lang="en-US" dirty="0"/>
+              <a:t>Constructive and worst case</a:t>
+            </a:r>
+          </a:p>
+          <a:p>
+            <a:r>
+              <a:rPr lang="en-US" dirty="0"/>
+              <a:t>Many tuning steps</a:t>
+            </a:r>
+          </a:p>
+        </p:txBody>
+      </p:sp>
+      <p:sp>
+        <p:nvSpPr>
+          <p:cNvPr id="5" name="Footer Placeholder 4">
+            <a:extLst>
+              <a:ext uri="{FF2B5EF4-FFF2-40B4-BE49-F238E27FC236}">
+                <a16:creationId xmlns:a16="http://schemas.microsoft.com/office/drawing/2014/main" id="{5F8B1CB5-D38E-C2FA-9AAE-8AEE6A927412}"/>
+              </a:ext>
+            </a:extLst>
+          </p:cNvPr>
+          <p:cNvSpPr>
+            <a:spLocks noGrp="1"/>
+          </p:cNvSpPr>
+          <p:nvPr>
+            <p:ph type="ftr" sz="quarter" idx="11"/>
+          </p:nvPr>
+        </p:nvSpPr>
+        <p:spPr/>
+        <p:txBody>
+          <a:bodyPr/>
+          <a:lstStyle/>
+          <a:p>
+            <a:r>
+              <a:rPr lang="en-US"/>
+              <a:t>Myoung-jae Lee (1999). Median treatment effect in randomized trials.</a:t>
+            </a:r>
+          </a:p>
+        </p:txBody>
+      </p:sp>
+      <p:sp>
+        <p:nvSpPr>
+          <p:cNvPr id="6" name="Slide Number Placeholder 5">
+            <a:extLst>
+              <a:ext uri="{FF2B5EF4-FFF2-40B4-BE49-F238E27FC236}">
+                <a16:creationId xmlns:a16="http://schemas.microsoft.com/office/drawing/2014/main" id="{0EB0454E-8593-C590-2E4B-EA8F14AA61A9}"/>
+              </a:ext>
+            </a:extLst>
+          </p:cNvPr>
+          <p:cNvSpPr>
+            <a:spLocks noGrp="1"/>
+          </p:cNvSpPr>
+          <p:nvPr>
+            <p:ph type="sldNum" sz="quarter" idx="12"/>
+          </p:nvPr>
+        </p:nvSpPr>
+        <p:spPr/>
+        <p:txBody>
+          <a:bodyPr/>
+          <a:lstStyle/>
+          <a:p>
+            <a:fld id="{B9021C99-F081-FD4B-9146-F8976D51EC28}" type="slidenum">
+              <a:rPr lang="en-US" smtClean="0"/>
+              <a:t>8</a:t>
+            </a:fld>
+            <a:endParaRPr lang="en-US"/>
+          </a:p>
+        </p:txBody>
+      </p:sp>
+      <p:pic>
+        <p:nvPicPr>
+          <p:cNvPr id="7" name="Picture 6" descr="A graph of a number of levels&#10;&#10;AI-generated content may be incorrect.">
+            <a:extLst>
+              <a:ext uri="{FF2B5EF4-FFF2-40B4-BE49-F238E27FC236}">
+                <a16:creationId xmlns:a16="http://schemas.microsoft.com/office/drawing/2014/main" id="{C2EDC7F9-3659-D169-BA05-EEEBDF00B076}"/>
+              </a:ext>
+            </a:extLst>
+          </p:cNvPr>
+          <p:cNvPicPr>
+            <a:picLocks noChangeAspect="1"/>
+          </p:cNvPicPr>
+          <p:nvPr/>
+        </p:nvPicPr>
+        <p:blipFill>
+          <a:blip r:embed="rId2"/>
+          <a:srcRect l="6103" t="8046" r="8945"/>
+          <a:stretch>
+            <a:fillRect/>
+          </a:stretch>
+        </p:blipFill>
+        <p:spPr>
+          <a:xfrm>
+            <a:off x="659567" y="1948721"/>
+            <a:ext cx="4482059" cy="4228240"/>
+          </a:xfrm>
+          <a:prstGeom prst="rect">
+            <a:avLst/>
+          </a:prstGeom>
+        </p:spPr>
+      </p:pic>
+    </p:spTree>
+    <p:extLst>
+      <p:ext uri="{BB962C8B-B14F-4D97-AF65-F5344CB8AC3E}">
+        <p14:creationId xmlns:p14="http://schemas.microsoft.com/office/powerpoint/2010/main" val="2029165558"/>
+      </p:ext>
+    </p:extLst>
+  </p:cSld>
+  <p:clrMapOvr>
+    <a:masterClrMapping/>
+  </p:clrMapOvr>
+</p:sld>
+</file>
+
+<file path=ppt/slides/slide9.xml><?xml version="1.0" encoding="utf-8"?>
+<p:sld xmlns:a="http://schemas.openxmlformats.org/drawingml/2006/main" xmlns:r="http://schemas.openxmlformats.org/officeDocument/2006/relationships" xmlns:p="http://schemas.openxmlformats.org/presentationml/2006/main">
+  <p:cSld>
+    <p:spTree>
+      <p:nvGrpSpPr>
+        <p:cNvPr id="1" name=""/>
+        <p:cNvGrpSpPr/>
+        <p:nvPr/>
+      </p:nvGrpSpPr>
+      <p:grpSpPr>
+        <a:xfrm>
+          <a:off x="0" y="0"/>
+          <a:ext cx="0" cy="0"/>
+          <a:chOff x="0" y="0"/>
+          <a:chExt cx="0" cy="0"/>
+        </a:xfrm>
+      </p:grpSpPr>
+      <p:sp>
+        <p:nvSpPr>
+          <p:cNvPr id="2" name="Title 1">
+            <a:extLst>
+              <a:ext uri="{FF2B5EF4-FFF2-40B4-BE49-F238E27FC236}">
+                <a16:creationId xmlns:a16="http://schemas.microsoft.com/office/drawing/2014/main" id="{DEF8DDE0-8261-BA0F-6AE2-BCB6BCA48741}"/>
+              </a:ext>
+            </a:extLst>
+          </p:cNvPr>
+          <p:cNvSpPr>
+            <a:spLocks noGrp="1"/>
+          </p:cNvSpPr>
+          <p:nvPr>
+            <p:ph type="title"/>
+          </p:nvPr>
+        </p:nvSpPr>
+        <p:spPr/>
+        <p:txBody>
+          <a:bodyPr/>
+          <a:lstStyle/>
+          <a:p>
+            <a:r>
+              <a:rPr lang="en-US" dirty="0"/>
+              <a:t>Economics</a:t>
+            </a:r>
+          </a:p>
+        </p:txBody>
+      </p:sp>
+      <p:pic>
+        <p:nvPicPr>
+          <p:cNvPr id="8" name="Content Placeholder 7" descr="A graph of a function&#10;&#10;AI-generated content may be incorrect.">
+            <a:extLst>
+              <a:ext uri="{FF2B5EF4-FFF2-40B4-BE49-F238E27FC236}">
+                <a16:creationId xmlns:a16="http://schemas.microsoft.com/office/drawing/2014/main" id="{E3775E89-A455-296E-384B-543CA5EBDE10}"/>
+              </a:ext>
+            </a:extLst>
+          </p:cNvPr>
+          <p:cNvPicPr>
+            <a:picLocks noGrp="1" noChangeAspect="1"/>
+          </p:cNvPicPr>
+          <p:nvPr>
+            <p:ph sz="half" idx="1"/>
+          </p:nvPr>
+        </p:nvPicPr>
+        <p:blipFill>
+          <a:blip r:embed="rId2"/>
+          <a:stretch>
+            <a:fillRect/>
+          </a:stretch>
+        </p:blipFill>
+        <p:spPr>
+          <a:xfrm>
+            <a:off x="838200" y="2065375"/>
+            <a:ext cx="5181600" cy="3871838"/>
+          </a:xfrm>
+        </p:spPr>
+      </p:pic>
+      <p:sp>
+        <p:nvSpPr>
+          <p:cNvPr id="4" name="Content Placeholder 3">
+            <a:extLst>
+              <a:ext uri="{FF2B5EF4-FFF2-40B4-BE49-F238E27FC236}">
+                <a16:creationId xmlns:a16="http://schemas.microsoft.com/office/drawing/2014/main" id="{A5AE03AC-F3FB-4BF9-5182-BF6925623D20}"/>
+              </a:ext>
+            </a:extLst>
+          </p:cNvPr>
+          <p:cNvSpPr>
+            <a:spLocks noGrp="1"/>
+          </p:cNvSpPr>
+          <p:nvPr>
+            <p:ph sz="half" idx="2"/>
+          </p:nvPr>
+        </p:nvSpPr>
+        <p:spPr/>
+        <p:txBody>
+          <a:bodyPr/>
+          <a:lstStyle/>
+          <a:p>
+            <a:r>
+              <a:rPr lang="en-US" dirty="0" err="1"/>
+              <a:t>Yanqin</a:t>
+            </a:r>
+            <a:r>
+              <a:rPr lang="en-US" dirty="0"/>
+              <a:t> Park &amp; Sang Soo Park</a:t>
+            </a:r>
+          </a:p>
+          <a:p>
+            <a:r>
+              <a:rPr lang="en-US" dirty="0"/>
+              <a:t>Focus on </a:t>
+            </a:r>
+            <a:r>
+              <a:rPr lang="en-US" dirty="0" err="1"/>
+              <a:t>asymptotics</a:t>
+            </a:r>
+            <a:r>
+              <a:rPr lang="en-US" dirty="0"/>
+              <a:t> and parametric assumptions</a:t>
+            </a:r>
+          </a:p>
+          <a:p>
+            <a:r>
+              <a:rPr lang="en-US" dirty="0"/>
+              <a:t>No current finite sample, distribution free, analogues.</a:t>
+            </a:r>
+          </a:p>
+        </p:txBody>
+      </p:sp>
+      <p:sp>
+        <p:nvSpPr>
+          <p:cNvPr id="6" name="Slide Number Placeholder 5">
+            <a:extLst>
+              <a:ext uri="{FF2B5EF4-FFF2-40B4-BE49-F238E27FC236}">
+                <a16:creationId xmlns:a16="http://schemas.microsoft.com/office/drawing/2014/main" id="{CE404068-0DA6-63EF-7A44-21925AA8C22C}"/>
+              </a:ext>
+            </a:extLst>
+          </p:cNvPr>
+          <p:cNvSpPr>
+            <a:spLocks noGrp="1"/>
+          </p:cNvSpPr>
+          <p:nvPr>
+            <p:ph type="sldNum" sz="quarter" idx="12"/>
+          </p:nvPr>
+        </p:nvSpPr>
+        <p:spPr/>
+        <p:txBody>
+          <a:bodyPr/>
+          <a:lstStyle/>
+          <a:p>
+            <a:fld id="{B9021C99-F081-FD4B-9146-F8976D51EC28}" type="slidenum">
+              <a:rPr lang="en-US" smtClean="0"/>
+              <a:t>9</a:t>
+            </a:fld>
+            <a:endParaRPr lang="en-US"/>
+          </a:p>
+        </p:txBody>
+      </p:sp>
+    </p:spTree>
+    <p:extLst>
+      <p:ext uri="{BB962C8B-B14F-4D97-AF65-F5344CB8AC3E}">
+        <p14:creationId xmlns:p14="http://schemas.microsoft.com/office/powerpoint/2010/main" val="842250879"/>
       </p:ext>
     </p:extLst>
   </p:cSld>

--- a/dkw-po-presentation.pptx
+++ b/dkw-po-presentation.pptx
@@ -5,10 +5,10 @@
     <p:sldMasterId id="2147483648" r:id="rId1"/>
   </p:sldMasterIdLst>
   <p:notesMasterIdLst>
-    <p:notesMasterId r:id="rId15"/>
+    <p:notesMasterId r:id="rId22"/>
   </p:notesMasterIdLst>
   <p:handoutMasterIdLst>
-    <p:handoutMasterId r:id="rId16"/>
+    <p:handoutMasterId r:id="rId23"/>
   </p:handoutMasterIdLst>
   <p:sldIdLst>
     <p:sldId id="256" r:id="rId2"/>
@@ -24,6 +24,13 @@
     <p:sldId id="263" r:id="rId12"/>
     <p:sldId id="269" r:id="rId13"/>
     <p:sldId id="270" r:id="rId14"/>
+    <p:sldId id="271" r:id="rId15"/>
+    <p:sldId id="272" r:id="rId16"/>
+    <p:sldId id="277" r:id="rId17"/>
+    <p:sldId id="273" r:id="rId18"/>
+    <p:sldId id="274" r:id="rId19"/>
+    <p:sldId id="276" r:id="rId20"/>
+    <p:sldId id="275" r:id="rId21"/>
   </p:sldIdLst>
   <p:sldSz cx="12192000" cy="6858000"/>
   <p:notesSz cx="6858000" cy="9144000"/>
@@ -6418,6 +6425,2734 @@
   <p:clrMapOvr>
     <a:masterClrMapping/>
   </p:clrMapOvr>
+  <p:timing>
+    <p:tnLst>
+      <p:par>
+        <p:cTn id="1" dur="indefinite" restart="never" nodeType="tmRoot">
+          <p:childTnLst>
+            <p:seq concurrent="1" nextAc="seek">
+              <p:cTn id="2" dur="indefinite" nodeType="mainSeq">
+                <p:childTnLst>
+                  <p:par>
+                    <p:cTn id="3" fill="hold">
+                      <p:stCondLst>
+                        <p:cond delay="indefinite"/>
+                      </p:stCondLst>
+                      <p:childTnLst>
+                        <p:par>
+                          <p:cTn id="4" fill="hold">
+                            <p:stCondLst>
+                              <p:cond delay="0"/>
+                            </p:stCondLst>
+                            <p:childTnLst>
+                              <p:par>
+                                <p:cTn id="5" presetID="1" presetClass="entr" presetSubtype="0" fill="hold" nodeType="clickEffect">
+                                  <p:stCondLst>
+                                    <p:cond delay="0"/>
+                                  </p:stCondLst>
+                                  <p:childTnLst>
+                                    <p:set>
+                                      <p:cBhvr>
+                                        <p:cTn id="6" dur="1" fill="hold">
+                                          <p:stCondLst>
+                                            <p:cond delay="0"/>
+                                          </p:stCondLst>
+                                        </p:cTn>
+                                        <p:tgtEl>
+                                          <p:spTgt spid="3">
+                                            <p:txEl>
+                                              <p:pRg st="0" end="0"/>
+                                            </p:txEl>
+                                          </p:spTgt>
+                                        </p:tgtEl>
+                                        <p:attrNameLst>
+                                          <p:attrName>style.visibility</p:attrName>
+                                        </p:attrNameLst>
+                                      </p:cBhvr>
+                                      <p:to>
+                                        <p:strVal val="visible"/>
+                                      </p:to>
+                                    </p:set>
+                                  </p:childTnLst>
+                                </p:cTn>
+                              </p:par>
+                            </p:childTnLst>
+                          </p:cTn>
+                        </p:par>
+                      </p:childTnLst>
+                    </p:cTn>
+                  </p:par>
+                  <p:par>
+                    <p:cTn id="7" fill="hold">
+                      <p:stCondLst>
+                        <p:cond delay="indefinite"/>
+                      </p:stCondLst>
+                      <p:childTnLst>
+                        <p:par>
+                          <p:cTn id="8" fill="hold">
+                            <p:stCondLst>
+                              <p:cond delay="0"/>
+                            </p:stCondLst>
+                            <p:childTnLst>
+                              <p:par>
+                                <p:cTn id="9" presetID="1" presetClass="entr" presetSubtype="0" fill="hold" nodeType="clickEffect">
+                                  <p:stCondLst>
+                                    <p:cond delay="0"/>
+                                  </p:stCondLst>
+                                  <p:childTnLst>
+                                    <p:set>
+                                      <p:cBhvr>
+                                        <p:cTn id="10" dur="1" fill="hold">
+                                          <p:stCondLst>
+                                            <p:cond delay="0"/>
+                                          </p:stCondLst>
+                                        </p:cTn>
+                                        <p:tgtEl>
+                                          <p:spTgt spid="3">
+                                            <p:txEl>
+                                              <p:pRg st="1" end="1"/>
+                                            </p:txEl>
+                                          </p:spTgt>
+                                        </p:tgtEl>
+                                        <p:attrNameLst>
+                                          <p:attrName>style.visibility</p:attrName>
+                                        </p:attrNameLst>
+                                      </p:cBhvr>
+                                      <p:to>
+                                        <p:strVal val="visible"/>
+                                      </p:to>
+                                    </p:set>
+                                  </p:childTnLst>
+                                </p:cTn>
+                              </p:par>
+                            </p:childTnLst>
+                          </p:cTn>
+                        </p:par>
+                      </p:childTnLst>
+                    </p:cTn>
+                  </p:par>
+                  <p:par>
+                    <p:cTn id="11" fill="hold">
+                      <p:stCondLst>
+                        <p:cond delay="indefinite"/>
+                      </p:stCondLst>
+                      <p:childTnLst>
+                        <p:par>
+                          <p:cTn id="12" fill="hold">
+                            <p:stCondLst>
+                              <p:cond delay="0"/>
+                            </p:stCondLst>
+                            <p:childTnLst>
+                              <p:par>
+                                <p:cTn id="13" presetID="1" presetClass="entr" presetSubtype="0" fill="hold" nodeType="clickEffect">
+                                  <p:stCondLst>
+                                    <p:cond delay="0"/>
+                                  </p:stCondLst>
+                                  <p:childTnLst>
+                                    <p:set>
+                                      <p:cBhvr>
+                                        <p:cTn id="14" dur="1" fill="hold">
+                                          <p:stCondLst>
+                                            <p:cond delay="0"/>
+                                          </p:stCondLst>
+                                        </p:cTn>
+                                        <p:tgtEl>
+                                          <p:spTgt spid="3">
+                                            <p:txEl>
+                                              <p:pRg st="2" end="2"/>
+                                            </p:txEl>
+                                          </p:spTgt>
+                                        </p:tgtEl>
+                                        <p:attrNameLst>
+                                          <p:attrName>style.visibility</p:attrName>
+                                        </p:attrNameLst>
+                                      </p:cBhvr>
+                                      <p:to>
+                                        <p:strVal val="visible"/>
+                                      </p:to>
+                                    </p:set>
+                                  </p:childTnLst>
+                                </p:cTn>
+                              </p:par>
+                            </p:childTnLst>
+                          </p:cTn>
+                        </p:par>
+                      </p:childTnLst>
+                    </p:cTn>
+                  </p:par>
+                  <p:par>
+                    <p:cTn id="15" fill="hold">
+                      <p:stCondLst>
+                        <p:cond delay="indefinite"/>
+                      </p:stCondLst>
+                      <p:childTnLst>
+                        <p:par>
+                          <p:cTn id="16" fill="hold">
+                            <p:stCondLst>
+                              <p:cond delay="0"/>
+                            </p:stCondLst>
+                            <p:childTnLst>
+                              <p:par>
+                                <p:cTn id="17" presetID="1" presetClass="entr" presetSubtype="0" fill="hold" nodeType="clickEffect">
+                                  <p:stCondLst>
+                                    <p:cond delay="0"/>
+                                  </p:stCondLst>
+                                  <p:childTnLst>
+                                    <p:set>
+                                      <p:cBhvr>
+                                        <p:cTn id="18" dur="1" fill="hold">
+                                          <p:stCondLst>
+                                            <p:cond delay="0"/>
+                                          </p:stCondLst>
+                                        </p:cTn>
+                                        <p:tgtEl>
+                                          <p:spTgt spid="3">
+                                            <p:txEl>
+                                              <p:pRg st="3" end="3"/>
+                                            </p:txEl>
+                                          </p:spTgt>
+                                        </p:tgtEl>
+                                        <p:attrNameLst>
+                                          <p:attrName>style.visibility</p:attrName>
+                                        </p:attrNameLst>
+                                      </p:cBhvr>
+                                      <p:to>
+                                        <p:strVal val="visible"/>
+                                      </p:to>
+                                    </p:set>
+                                  </p:childTnLst>
+                                </p:cTn>
+                              </p:par>
+                            </p:childTnLst>
+                          </p:cTn>
+                        </p:par>
+                      </p:childTnLst>
+                    </p:cTn>
+                  </p:par>
+                  <p:par>
+                    <p:cTn id="19" fill="hold">
+                      <p:stCondLst>
+                        <p:cond delay="indefinite"/>
+                      </p:stCondLst>
+                      <p:childTnLst>
+                        <p:par>
+                          <p:cTn id="20" fill="hold">
+                            <p:stCondLst>
+                              <p:cond delay="0"/>
+                            </p:stCondLst>
+                            <p:childTnLst>
+                              <p:par>
+                                <p:cTn id="21" presetID="1" presetClass="entr" presetSubtype="0" fill="hold" nodeType="clickEffect">
+                                  <p:stCondLst>
+                                    <p:cond delay="0"/>
+                                  </p:stCondLst>
+                                  <p:childTnLst>
+                                    <p:set>
+                                      <p:cBhvr>
+                                        <p:cTn id="22" dur="1" fill="hold">
+                                          <p:stCondLst>
+                                            <p:cond delay="0"/>
+                                          </p:stCondLst>
+                                        </p:cTn>
+                                        <p:tgtEl>
+                                          <p:spTgt spid="3">
+                                            <p:txEl>
+                                              <p:pRg st="4" end="4"/>
+                                            </p:txEl>
+                                          </p:spTgt>
+                                        </p:tgtEl>
+                                        <p:attrNameLst>
+                                          <p:attrName>style.visibility</p:attrName>
+                                        </p:attrNameLst>
+                                      </p:cBhvr>
+                                      <p:to>
+                                        <p:strVal val="visible"/>
+                                      </p:to>
+                                    </p:set>
+                                  </p:childTnLst>
+                                </p:cTn>
+                              </p:par>
+                            </p:childTnLst>
+                          </p:cTn>
+                        </p:par>
+                      </p:childTnLst>
+                    </p:cTn>
+                  </p:par>
+                </p:childTnLst>
+              </p:cTn>
+              <p:prevCondLst>
+                <p:cond evt="onPrev" delay="0">
+                  <p:tgtEl>
+                    <p:sldTgt/>
+                  </p:tgtEl>
+                </p:cond>
+              </p:prevCondLst>
+              <p:nextCondLst>
+                <p:cond evt="onNext" delay="0">
+                  <p:tgtEl>
+                    <p:sldTgt/>
+                  </p:tgtEl>
+                </p:cond>
+              </p:nextCondLst>
+            </p:seq>
+          </p:childTnLst>
+        </p:cTn>
+      </p:par>
+    </p:tnLst>
+  </p:timing>
+</p:sld>
+</file>
+
+<file path=ppt/slides/slide14.xml><?xml version="1.0" encoding="utf-8"?>
+<p:sld xmlns:a="http://schemas.openxmlformats.org/drawingml/2006/main" xmlns:r="http://schemas.openxmlformats.org/officeDocument/2006/relationships" xmlns:p="http://schemas.openxmlformats.org/presentationml/2006/main">
+  <p:cSld>
+    <p:spTree>
+      <p:nvGrpSpPr>
+        <p:cNvPr id="1" name=""/>
+        <p:cNvGrpSpPr/>
+        <p:nvPr/>
+      </p:nvGrpSpPr>
+      <p:grpSpPr>
+        <a:xfrm>
+          <a:off x="0" y="0"/>
+          <a:ext cx="0" cy="0"/>
+          <a:chOff x="0" y="0"/>
+          <a:chExt cx="0" cy="0"/>
+        </a:xfrm>
+      </p:grpSpPr>
+      <p:sp>
+        <p:nvSpPr>
+          <p:cNvPr id="2" name="Title 1">
+            <a:extLst>
+              <a:ext uri="{FF2B5EF4-FFF2-40B4-BE49-F238E27FC236}">
+                <a16:creationId xmlns:a16="http://schemas.microsoft.com/office/drawing/2014/main" id="{F2D7A849-16BD-A6C4-D1A7-81CC871102F5}"/>
+              </a:ext>
+            </a:extLst>
+          </p:cNvPr>
+          <p:cNvSpPr>
+            <a:spLocks noGrp="1"/>
+          </p:cNvSpPr>
+          <p:nvPr>
+            <p:ph type="title"/>
+          </p:nvPr>
+        </p:nvSpPr>
+        <p:spPr/>
+        <p:txBody>
+          <a:bodyPr/>
+          <a:lstStyle/>
+          <a:p>
+            <a:r>
+              <a:rPr lang="en-US" dirty="0"/>
+              <a:t>Synthetic Data Experiments</a:t>
+            </a:r>
+          </a:p>
+        </p:txBody>
+      </p:sp>
+      <mc:AlternateContent xmlns:mc="http://schemas.openxmlformats.org/markup-compatibility/2006">
+        <mc:Choice xmlns:a14="http://schemas.microsoft.com/office/drawing/2010/main" Requires="a14">
+          <p:graphicFrame>
+            <p:nvGraphicFramePr>
+              <p:cNvPr id="6" name="Content Placeholder 5">
+                <a:extLst>
+                  <a:ext uri="{FF2B5EF4-FFF2-40B4-BE49-F238E27FC236}">
+                    <a16:creationId xmlns:a16="http://schemas.microsoft.com/office/drawing/2014/main" id="{4B4429C7-214A-BF5B-3F75-7D3A038B6F82}"/>
+                  </a:ext>
+                </a:extLst>
+              </p:cNvPr>
+              <p:cNvGraphicFramePr>
+                <a:graphicFrameLocks noGrp="1"/>
+              </p:cNvGraphicFramePr>
+              <p:nvPr>
+                <p:ph idx="1"/>
+                <p:extLst>
+                  <p:ext uri="{D42A27DB-BD31-4B8C-83A1-F6EECF244321}">
+                    <p14:modId xmlns:p14="http://schemas.microsoft.com/office/powerpoint/2010/main" val="2832712761"/>
+                  </p:ext>
+                </p:extLst>
+              </p:nvPr>
+            </p:nvGraphicFramePr>
+            <p:xfrm>
+              <a:off x="838199" y="1825625"/>
+              <a:ext cx="10639098" cy="2793672"/>
+            </p:xfrm>
+            <a:graphic>
+              <a:graphicData uri="http://schemas.openxmlformats.org/drawingml/2006/table">
+                <a:tbl>
+                  <a:tblPr firstRow="1" bandRow="1">
+                    <a:tableStyleId>{5C22544A-7EE6-4342-B048-85BDC9FD1C3A}</a:tableStyleId>
+                  </a:tblPr>
+                  <a:tblGrid>
+                    <a:gridCol w="5319549">
+                      <a:extLst>
+                        <a:ext uri="{9D8B030D-6E8A-4147-A177-3AD203B41FA5}">
+                          <a16:colId xmlns:a16="http://schemas.microsoft.com/office/drawing/2014/main" val="2418271835"/>
+                        </a:ext>
+                      </a:extLst>
+                    </a:gridCol>
+                    <a:gridCol w="5319549">
+                      <a:extLst>
+                        <a:ext uri="{9D8B030D-6E8A-4147-A177-3AD203B41FA5}">
+                          <a16:colId xmlns:a16="http://schemas.microsoft.com/office/drawing/2014/main" val="3761334250"/>
+                        </a:ext>
+                      </a:extLst>
+                    </a:gridCol>
+                  </a:tblGrid>
+                  <a:tr h="488723">
+                    <a:tc>
+                      <a:txBody>
+                        <a:bodyPr/>
+                        <a:lstStyle/>
+                        <a:p>
+                          <a:r>
+                            <a:rPr lang="en-US" dirty="0"/>
+                            <a:t>Quantity</a:t>
+                          </a:r>
+                        </a:p>
+                      </a:txBody>
+                      <a:tcPr/>
+                    </a:tc>
+                    <a:tc>
+                      <a:txBody>
+                        <a:bodyPr/>
+                        <a:lstStyle/>
+                        <a:p>
+                          <a:r>
+                            <a:rPr lang="en-US" dirty="0"/>
+                            <a:t>Distribution / Definition</a:t>
+                          </a:r>
+                        </a:p>
+                      </a:txBody>
+                      <a:tcPr/>
+                    </a:tc>
+                    <a:extLst>
+                      <a:ext uri="{0D108BD9-81ED-4DB2-BD59-A6C34878D82A}">
+                        <a16:rowId xmlns:a16="http://schemas.microsoft.com/office/drawing/2014/main" val="4222401980"/>
+                      </a:ext>
+                    </a:extLst>
+                  </a:tr>
+                  <a:tr h="488723">
+                    <a:tc>
+                      <a:txBody>
+                        <a:bodyPr/>
+                        <a:lstStyle/>
+                        <a:p>
+                          <a:r>
+                            <a:rPr lang="en-US" dirty="0"/>
+                            <a:t>Population size</a:t>
+                          </a:r>
+                        </a:p>
+                      </a:txBody>
+                      <a:tcPr/>
+                    </a:tc>
+                    <a:tc>
+                      <a:txBody>
+                        <a:bodyPr/>
+                        <a:lstStyle/>
+                        <a:p>
+                          <a:pPr algn="ctr"/>
+                          <a:r>
+                            <a:rPr lang="en-US" dirty="0"/>
+                            <a:t>m (fixed)</a:t>
+                          </a:r>
+                        </a:p>
+                      </a:txBody>
+                      <a:tcPr/>
+                    </a:tc>
+                    <a:extLst>
+                      <a:ext uri="{0D108BD9-81ED-4DB2-BD59-A6C34878D82A}">
+                        <a16:rowId xmlns:a16="http://schemas.microsoft.com/office/drawing/2014/main" val="2934207172"/>
+                      </a:ext>
+                    </a:extLst>
+                  </a:tr>
+                  <a:tr h="488723">
+                    <a:tc>
+                      <a:txBody>
+                        <a:bodyPr/>
+                        <a:lstStyle/>
+                        <a:p>
+                          <a:r>
+                            <a:rPr lang="en-US" dirty="0"/>
+                            <a:t>Treatment Assignment</a:t>
+                          </a:r>
+                        </a:p>
+                      </a:txBody>
+                      <a:tcPr/>
+                    </a:tc>
+                    <a:tc>
+                      <a:txBody>
+                        <a:bodyPr/>
+                        <a:lstStyle/>
+                        <a:p>
+                          <a:pPr algn="ctr"/>
+                          <a14:m>
+                            <m:oMath xmlns:m="http://schemas.openxmlformats.org/officeDocument/2006/math">
+                              <m:sSub>
+                                <m:sSubPr>
+                                  <m:ctrlPr>
+                                    <a:rPr lang="en-US" i="1" dirty="0" smtClean="0">
+                                      <a:latin typeface="Cambria Math" panose="02040503050406030204" pitchFamily="18" charset="0"/>
+                                    </a:rPr>
+                                  </m:ctrlPr>
+                                </m:sSubPr>
+                                <m:e>
+                                  <m:r>
+                                    <a:rPr lang="en-US" i="1" dirty="0" smtClean="0">
+                                      <a:latin typeface="Cambria Math" panose="02040503050406030204" pitchFamily="18" charset="0"/>
+                                    </a:rPr>
+                                    <m:t>𝑍</m:t>
+                                  </m:r>
+                                </m:e>
+                                <m:sub>
+                                  <m:r>
+                                    <a:rPr lang="en-US" i="1" dirty="0" smtClean="0">
+                                      <a:latin typeface="Cambria Math" panose="02040503050406030204" pitchFamily="18" charset="0"/>
+                                    </a:rPr>
+                                    <m:t>𝑖</m:t>
+                                  </m:r>
+                                </m:sub>
+                              </m:sSub>
+                              <m:r>
+                                <a:rPr lang="en-US" i="1" dirty="0" smtClean="0">
+                                  <a:latin typeface="Cambria Math" panose="02040503050406030204" pitchFamily="18" charset="0"/>
+                                </a:rPr>
+                                <m:t>∼</m:t>
+                              </m:r>
+                            </m:oMath>
+                          </a14:m>
+                          <a:r>
+                            <a:rPr lang="en-US" dirty="0"/>
+                            <a:t>Bernoulli(0.5)</a:t>
+                          </a:r>
+                        </a:p>
+                      </a:txBody>
+                      <a:tcPr/>
+                    </a:tc>
+                    <a:extLst>
+                      <a:ext uri="{0D108BD9-81ED-4DB2-BD59-A6C34878D82A}">
+                        <a16:rowId xmlns:a16="http://schemas.microsoft.com/office/drawing/2014/main" val="1723975838"/>
+                      </a:ext>
+                    </a:extLst>
+                  </a:tr>
+                  <a:tr h="838780">
+                    <a:tc>
+                      <a:txBody>
+                        <a:bodyPr/>
+                        <a:lstStyle/>
+                        <a:p>
+                          <a:r>
+                            <a:rPr lang="en-US" dirty="0"/>
+                            <a:t>Potential Outcomes</a:t>
+                          </a:r>
+                        </a:p>
+                      </a:txBody>
+                      <a:tcPr/>
+                    </a:tc>
+                    <a:tc>
+                      <a:txBody>
+                        <a:bodyPr/>
+                        <a:lstStyle/>
+                        <a:p>
+                          <a:pPr/>
+                          <a14:m>
+                            <m:oMathPara xmlns:m="http://schemas.openxmlformats.org/officeDocument/2006/math">
+                              <m:oMathParaPr>
+                                <m:jc m:val="centerGroup"/>
+                              </m:oMathParaPr>
+                              <m:oMath xmlns:m="http://schemas.openxmlformats.org/officeDocument/2006/math">
+                                <m:m>
+                                  <m:mPr>
+                                    <m:plcHide m:val="on"/>
+                                    <m:mcs>
+                                      <m:mc>
+                                        <m:mcPr>
+                                          <m:count m:val="1"/>
+                                          <m:mcJc m:val="center"/>
+                                        </m:mcPr>
+                                      </m:mc>
+                                    </m:mcs>
+                                    <m:ctrlPr>
+                                      <a:rPr lang="en-US" b="0" i="1" smtClean="0">
+                                        <a:latin typeface="Cambria Math" panose="02040503050406030204" pitchFamily="18" charset="0"/>
+                                      </a:rPr>
+                                    </m:ctrlPr>
+                                  </m:mPr>
+                                  <m:mr>
+                                    <m:e>
+                                      <m:sSub>
+                                        <m:sSubPr>
+                                          <m:ctrlPr>
+                                            <a:rPr lang="en-US" b="0" i="1" smtClean="0">
+                                              <a:latin typeface="Cambria Math" panose="02040503050406030204" pitchFamily="18" charset="0"/>
+                                            </a:rPr>
+                                          </m:ctrlPr>
+                                        </m:sSubPr>
+                                        <m:e>
+                                          <m:r>
+                                            <a:rPr lang="en-US" b="0" i="1" smtClean="0">
+                                              <a:latin typeface="Cambria Math" panose="02040503050406030204" pitchFamily="18" charset="0"/>
+                                            </a:rPr>
+                                            <m:t>𝑌</m:t>
+                                          </m:r>
+                                        </m:e>
+                                        <m:sub>
+                                          <m:r>
+                                            <a:rPr lang="en-US" b="0" i="1" smtClean="0">
+                                              <a:latin typeface="Cambria Math" panose="02040503050406030204" pitchFamily="18" charset="0"/>
+                                            </a:rPr>
+                                            <m:t>𝑖</m:t>
+                                          </m:r>
+                                        </m:sub>
+                                      </m:sSub>
+                                      <m:d>
+                                        <m:dPr>
+                                          <m:ctrlPr>
+                                            <a:rPr lang="en-US" b="0" i="1" smtClean="0">
+                                              <a:latin typeface="Cambria Math" panose="02040503050406030204" pitchFamily="18" charset="0"/>
+                                            </a:rPr>
+                                          </m:ctrlPr>
+                                        </m:dPr>
+                                        <m:e>
+                                          <m:r>
+                                            <a:rPr lang="en-US" b="0" i="1" smtClean="0">
+                                              <a:latin typeface="Cambria Math" panose="02040503050406030204" pitchFamily="18" charset="0"/>
+                                            </a:rPr>
+                                            <m:t>0</m:t>
+                                          </m:r>
+                                        </m:e>
+                                      </m:d>
+                                    </m:e>
+                                  </m:mr>
+                                  <m:mr>
+                                    <m:e>
+                                      <m:sSub>
+                                        <m:sSubPr>
+                                          <m:ctrlPr>
+                                            <a:rPr lang="en-US" b="0" i="1" smtClean="0">
+                                              <a:latin typeface="Cambria Math" panose="02040503050406030204" pitchFamily="18" charset="0"/>
+                                            </a:rPr>
+                                          </m:ctrlPr>
+                                        </m:sSubPr>
+                                        <m:e>
+                                          <m:r>
+                                            <a:rPr lang="en-US" b="0" i="1" smtClean="0">
+                                              <a:latin typeface="Cambria Math" panose="02040503050406030204" pitchFamily="18" charset="0"/>
+                                            </a:rPr>
+                                            <m:t>𝑌</m:t>
+                                          </m:r>
+                                        </m:e>
+                                        <m:sub>
+                                          <m:r>
+                                            <a:rPr lang="en-US" b="0" i="1" smtClean="0">
+                                              <a:latin typeface="Cambria Math" panose="02040503050406030204" pitchFamily="18" charset="0"/>
+                                            </a:rPr>
+                                            <m:t>𝑖</m:t>
+                                          </m:r>
+                                        </m:sub>
+                                      </m:sSub>
+                                      <m:d>
+                                        <m:dPr>
+                                          <m:ctrlPr>
+                                            <a:rPr lang="en-US" b="0" i="1" smtClean="0">
+                                              <a:latin typeface="Cambria Math" panose="02040503050406030204" pitchFamily="18" charset="0"/>
+                                            </a:rPr>
+                                          </m:ctrlPr>
+                                        </m:dPr>
+                                        <m:e>
+                                          <m:r>
+                                            <a:rPr lang="en-US" b="0" i="1" smtClean="0">
+                                              <a:latin typeface="Cambria Math" panose="02040503050406030204" pitchFamily="18" charset="0"/>
+                                            </a:rPr>
+                                            <m:t>1</m:t>
+                                          </m:r>
+                                        </m:e>
+                                      </m:d>
+                                    </m:e>
+                                  </m:mr>
+                                </m:m>
+                                <m:r>
+                                  <a:rPr lang="en-US" b="0" i="1" smtClean="0">
+                                    <a:latin typeface="Cambria Math" panose="02040503050406030204" pitchFamily="18" charset="0"/>
+                                  </a:rPr>
+                                  <m:t> ∼ </m:t>
+                                </m:r>
+                                <m:r>
+                                  <m:rPr>
+                                    <m:sty m:val="p"/>
+                                  </m:rPr>
+                                  <a:rPr lang="en-US" b="0" i="1" smtClean="0">
+                                    <a:latin typeface="Cambria Math" panose="02040503050406030204" pitchFamily="18" charset="0"/>
+                                  </a:rPr>
+                                  <m:t>N</m:t>
+                                </m:r>
+                                <m:r>
+                                  <a:rPr lang="en-US" b="0" i="1" smtClean="0">
+                                    <a:latin typeface="Cambria Math" panose="02040503050406030204" pitchFamily="18" charset="0"/>
+                                  </a:rPr>
+                                  <m:t> </m:t>
+                                </m:r>
+                                <m:d>
+                                  <m:dPr>
+                                    <m:ctrlPr>
+                                      <a:rPr lang="en-US" b="0" i="1" smtClean="0">
+                                        <a:latin typeface="Cambria Math" panose="02040503050406030204" pitchFamily="18" charset="0"/>
+                                      </a:rPr>
+                                    </m:ctrlPr>
+                                  </m:dPr>
+                                  <m:e>
+                                    <m:m>
+                                      <m:mPr>
+                                        <m:mcs>
+                                          <m:mc>
+                                            <m:mcPr>
+                                              <m:count m:val="1"/>
+                                              <m:mcJc m:val="center"/>
+                                            </m:mcPr>
+                                          </m:mc>
+                                        </m:mcs>
+                                        <m:ctrlPr>
+                                          <a:rPr lang="en-US" b="0" i="1" smtClean="0">
+                                            <a:latin typeface="Cambria Math" panose="02040503050406030204" pitchFamily="18" charset="0"/>
+                                          </a:rPr>
+                                        </m:ctrlPr>
+                                      </m:mPr>
+                                      <m:mr>
+                                        <m:e>
+                                          <m:r>
+                                            <m:rPr>
+                                              <m:brk m:alnAt="7"/>
+                                            </m:rPr>
+                                            <a:rPr lang="en-US" b="0" i="1" smtClean="0">
+                                              <a:latin typeface="Cambria Math" panose="02040503050406030204" pitchFamily="18" charset="0"/>
+                                            </a:rPr>
+                                            <m:t>0</m:t>
+                                          </m:r>
+                                        </m:e>
+                                      </m:mr>
+                                      <m:mr>
+                                        <m:e>
+                                          <m:sSub>
+                                            <m:sSubPr>
+                                              <m:ctrlPr>
+                                                <a:rPr lang="en-US" b="0" i="1" smtClean="0">
+                                                  <a:latin typeface="Cambria Math" panose="02040503050406030204" pitchFamily="18" charset="0"/>
+                                                </a:rPr>
+                                              </m:ctrlPr>
+                                            </m:sSubPr>
+                                            <m:e>
+                                              <m:r>
+                                                <a:rPr lang="en-US" b="0" i="1" smtClean="0">
+                                                  <a:latin typeface="Cambria Math" panose="02040503050406030204" pitchFamily="18" charset="0"/>
+                                                </a:rPr>
+                                                <m:t>𝜏</m:t>
+                                              </m:r>
+                                            </m:e>
+                                            <m:sub>
+                                              <m:r>
+                                                <a:rPr lang="en-US" b="0" i="1" smtClean="0">
+                                                  <a:latin typeface="Cambria Math" panose="02040503050406030204" pitchFamily="18" charset="0"/>
+                                                </a:rPr>
+                                                <m:t>0</m:t>
+                                              </m:r>
+                                            </m:sub>
+                                          </m:sSub>
+                                        </m:e>
+                                      </m:mr>
+                                    </m:m>
+                                    <m:r>
+                                      <a:rPr lang="en-US" b="0" i="1" smtClean="0">
+                                        <a:latin typeface="Cambria Math" panose="02040503050406030204" pitchFamily="18" charset="0"/>
+                                      </a:rPr>
+                                      <m:t>,</m:t>
+                                    </m:r>
+                                    <m:m>
+                                      <m:mPr>
+                                        <m:mcs>
+                                          <m:mc>
+                                            <m:mcPr>
+                                              <m:count m:val="2"/>
+                                              <m:mcJc m:val="center"/>
+                                            </m:mcPr>
+                                          </m:mc>
+                                        </m:mcs>
+                                        <m:ctrlPr>
+                                          <a:rPr lang="en-US" b="0" i="1" smtClean="0">
+                                            <a:latin typeface="Cambria Math" panose="02040503050406030204" pitchFamily="18" charset="0"/>
+                                          </a:rPr>
+                                        </m:ctrlPr>
+                                      </m:mPr>
+                                      <m:mr>
+                                        <m:e>
+                                          <m:r>
+                                            <m:rPr>
+                                              <m:brk m:alnAt="7"/>
+                                            </m:rPr>
+                                            <a:rPr lang="en-US" b="0" i="1" smtClean="0">
+                                              <a:latin typeface="Cambria Math" panose="02040503050406030204" pitchFamily="18" charset="0"/>
+                                            </a:rPr>
+                                            <m:t>1</m:t>
+                                          </m:r>
+                                        </m:e>
+                                        <m:e>
+                                          <m:r>
+                                            <a:rPr lang="en-US" b="0" i="1" smtClean="0">
+                                              <a:latin typeface="Cambria Math" panose="02040503050406030204" pitchFamily="18" charset="0"/>
+                                            </a:rPr>
+                                            <m:t>𝜌</m:t>
+                                          </m:r>
+                                        </m:e>
+                                      </m:mr>
+                                      <m:mr>
+                                        <m:e>
+                                          <m:r>
+                                            <a:rPr lang="en-US" b="0" i="1" smtClean="0">
+                                              <a:latin typeface="Cambria Math" panose="02040503050406030204" pitchFamily="18" charset="0"/>
+                                            </a:rPr>
+                                            <m:t>𝜌</m:t>
+                                          </m:r>
+                                        </m:e>
+                                        <m:e>
+                                          <m:r>
+                                            <a:rPr lang="en-US" b="0" i="1" smtClean="0">
+                                              <a:latin typeface="Cambria Math" panose="02040503050406030204" pitchFamily="18" charset="0"/>
+                                            </a:rPr>
+                                            <m:t>1</m:t>
+                                          </m:r>
+                                        </m:e>
+                                      </m:mr>
+                                    </m:m>
+                                  </m:e>
+                                </m:d>
+                              </m:oMath>
+                            </m:oMathPara>
+                          </a14:m>
+                        </a:p>
+                      </a:txBody>
+                      <a:tcPr/>
+                    </a:tc>
+                    <a:extLst>
+                      <a:ext uri="{0D108BD9-81ED-4DB2-BD59-A6C34878D82A}">
+                        <a16:rowId xmlns:a16="http://schemas.microsoft.com/office/drawing/2014/main" val="757081235"/>
+                      </a:ext>
+                    </a:extLst>
+                  </a:tr>
+                  <a:tr h="488723">
+                    <a:tc>
+                      <a:txBody>
+                        <a:bodyPr/>
+                        <a:lstStyle/>
+                        <a:p>
+                          <a:r>
+                            <a:rPr lang="en-US" dirty="0"/>
+                            <a:t>Observed Outcome</a:t>
+                          </a:r>
+                        </a:p>
+                      </a:txBody>
+                      <a:tcPr/>
+                    </a:tc>
+                    <a:tc>
+                      <a:txBody>
+                        <a:bodyPr/>
+                        <a:lstStyle/>
+                        <a:p>
+                          <a14:m>
+                            <m:oMathPara xmlns:m="http://schemas.openxmlformats.org/officeDocument/2006/math">
+                              <m:oMathParaPr>
+                                <m:jc m:val="centerGroup"/>
+                              </m:oMathParaPr>
+                              <m:oMath xmlns:m="http://schemas.openxmlformats.org/officeDocument/2006/math">
+                                <m:sSub>
+                                  <m:sSubPr>
+                                    <m:ctrlPr>
+                                      <a:rPr lang="en-US" i="1" dirty="0" smtClean="0">
+                                        <a:latin typeface="Cambria Math" panose="02040503050406030204" pitchFamily="18" charset="0"/>
+                                      </a:rPr>
+                                    </m:ctrlPr>
+                                  </m:sSubPr>
+                                  <m:e>
+                                    <m:r>
+                                      <a:rPr lang="en-US" i="1" dirty="0" smtClean="0">
+                                        <a:latin typeface="Cambria Math" panose="02040503050406030204" pitchFamily="18" charset="0"/>
+                                      </a:rPr>
+                                      <m:t>𝑌</m:t>
+                                    </m:r>
+                                  </m:e>
+                                  <m:sub>
+                                    <m:r>
+                                      <a:rPr lang="en-US" i="1" dirty="0" smtClean="0">
+                                        <a:latin typeface="Cambria Math" panose="02040503050406030204" pitchFamily="18" charset="0"/>
+                                      </a:rPr>
+                                      <m:t>𝑖</m:t>
+                                    </m:r>
+                                  </m:sub>
+                                </m:sSub>
+                                <m:r>
+                                  <a:rPr lang="en-US" i="1" dirty="0" smtClean="0">
+                                    <a:latin typeface="Cambria Math" panose="02040503050406030204" pitchFamily="18" charset="0"/>
+                                  </a:rPr>
+                                  <m:t>=</m:t>
+                                </m:r>
+                                <m:sSub>
+                                  <m:sSubPr>
+                                    <m:ctrlPr>
+                                      <a:rPr lang="en-US" i="1" dirty="0" err="1" smtClean="0">
+                                        <a:latin typeface="Cambria Math" panose="02040503050406030204" pitchFamily="18" charset="0"/>
+                                      </a:rPr>
+                                    </m:ctrlPr>
+                                  </m:sSubPr>
+                                  <m:e>
+                                    <m:r>
+                                      <a:rPr lang="en-US" i="1" dirty="0" err="1" smtClean="0">
+                                        <a:latin typeface="Cambria Math" panose="02040503050406030204" pitchFamily="18" charset="0"/>
+                                      </a:rPr>
+                                      <m:t>𝑌</m:t>
+                                    </m:r>
+                                  </m:e>
+                                  <m:sub>
+                                    <m:r>
+                                      <a:rPr lang="en-US" i="1" dirty="0" err="1" smtClean="0">
+                                        <a:latin typeface="Cambria Math" panose="02040503050406030204" pitchFamily="18" charset="0"/>
+                                      </a:rPr>
+                                      <m:t>𝑖</m:t>
+                                    </m:r>
+                                  </m:sub>
+                                </m:sSub>
+                                <m:d>
+                                  <m:dPr>
+                                    <m:ctrlPr>
+                                      <a:rPr lang="en-US" i="1" dirty="0" smtClean="0">
+                                        <a:latin typeface="Cambria Math" panose="02040503050406030204" pitchFamily="18" charset="0"/>
+                                      </a:rPr>
+                                    </m:ctrlPr>
+                                  </m:dPr>
+                                  <m:e>
+                                    <m:r>
+                                      <a:rPr lang="en-US" i="1" dirty="0" smtClean="0">
+                                        <a:latin typeface="Cambria Math" panose="02040503050406030204" pitchFamily="18" charset="0"/>
+                                      </a:rPr>
+                                      <m:t>1</m:t>
+                                    </m:r>
+                                  </m:e>
+                                </m:d>
+                                <m:sSub>
+                                  <m:sSubPr>
+                                    <m:ctrlPr>
+                                      <a:rPr lang="en-US" i="1" dirty="0" err="1" smtClean="0">
+                                        <a:latin typeface="Cambria Math" panose="02040503050406030204" pitchFamily="18" charset="0"/>
+                                      </a:rPr>
+                                    </m:ctrlPr>
+                                  </m:sSubPr>
+                                  <m:e>
+                                    <m:r>
+                                      <a:rPr lang="en-US" i="1" dirty="0" err="1" smtClean="0">
+                                        <a:latin typeface="Cambria Math" panose="02040503050406030204" pitchFamily="18" charset="0"/>
+                                      </a:rPr>
+                                      <m:t>𝑍</m:t>
+                                    </m:r>
+                                  </m:e>
+                                  <m:sub>
+                                    <m:r>
+                                      <a:rPr lang="en-US" i="1" dirty="0" err="1" smtClean="0">
+                                        <a:latin typeface="Cambria Math" panose="02040503050406030204" pitchFamily="18" charset="0"/>
+                                      </a:rPr>
+                                      <m:t>𝑖</m:t>
+                                    </m:r>
+                                  </m:sub>
+                                </m:sSub>
+                                <m:r>
+                                  <a:rPr lang="en-US" i="1" dirty="0" smtClean="0">
+                                    <a:latin typeface="Cambria Math" panose="02040503050406030204" pitchFamily="18" charset="0"/>
+                                  </a:rPr>
+                                  <m:t>+</m:t>
+                                </m:r>
+                                <m:sSub>
+                                  <m:sSubPr>
+                                    <m:ctrlPr>
+                                      <a:rPr lang="en-US" i="1" dirty="0" err="1" smtClean="0">
+                                        <a:latin typeface="Cambria Math" panose="02040503050406030204" pitchFamily="18" charset="0"/>
+                                      </a:rPr>
+                                    </m:ctrlPr>
+                                  </m:sSubPr>
+                                  <m:e>
+                                    <m:r>
+                                      <a:rPr lang="en-US" i="1" dirty="0" err="1" smtClean="0">
+                                        <a:latin typeface="Cambria Math" panose="02040503050406030204" pitchFamily="18" charset="0"/>
+                                      </a:rPr>
+                                      <m:t>𝑌</m:t>
+                                    </m:r>
+                                  </m:e>
+                                  <m:sub>
+                                    <m:r>
+                                      <a:rPr lang="en-US" i="1" dirty="0" err="1" smtClean="0">
+                                        <a:latin typeface="Cambria Math" panose="02040503050406030204" pitchFamily="18" charset="0"/>
+                                      </a:rPr>
+                                      <m:t>𝑖</m:t>
+                                    </m:r>
+                                  </m:sub>
+                                </m:sSub>
+                                <m:d>
+                                  <m:dPr>
+                                    <m:ctrlPr>
+                                      <a:rPr lang="en-US" i="1" dirty="0" smtClean="0">
+                                        <a:latin typeface="Cambria Math" panose="02040503050406030204" pitchFamily="18" charset="0"/>
+                                      </a:rPr>
+                                    </m:ctrlPr>
+                                  </m:dPr>
+                                  <m:e>
+                                    <m:r>
+                                      <a:rPr lang="en-US" i="1" dirty="0" smtClean="0">
+                                        <a:latin typeface="Cambria Math" panose="02040503050406030204" pitchFamily="18" charset="0"/>
+                                      </a:rPr>
+                                      <m:t>0</m:t>
+                                    </m:r>
+                                  </m:e>
+                                </m:d>
+                                <m:d>
+                                  <m:dPr>
+                                    <m:ctrlPr>
+                                      <a:rPr lang="en-US" i="1" dirty="0" smtClean="0">
+                                        <a:latin typeface="Cambria Math" panose="02040503050406030204" pitchFamily="18" charset="0"/>
+                                      </a:rPr>
+                                    </m:ctrlPr>
+                                  </m:dPr>
+                                  <m:e>
+                                    <m:r>
+                                      <a:rPr lang="en-US" i="1" dirty="0" smtClean="0">
+                                        <a:latin typeface="Cambria Math" panose="02040503050406030204" pitchFamily="18" charset="0"/>
+                                      </a:rPr>
+                                      <m:t>1−</m:t>
+                                    </m:r>
+                                    <m:sSub>
+                                      <m:sSubPr>
+                                        <m:ctrlPr>
+                                          <a:rPr lang="en-US" i="1" dirty="0" smtClean="0">
+                                            <a:latin typeface="Cambria Math" panose="02040503050406030204" pitchFamily="18" charset="0"/>
+                                          </a:rPr>
+                                        </m:ctrlPr>
+                                      </m:sSubPr>
+                                      <m:e>
+                                        <m:r>
+                                          <a:rPr lang="en-US" i="1" dirty="0" smtClean="0">
+                                            <a:latin typeface="Cambria Math" panose="02040503050406030204" pitchFamily="18" charset="0"/>
+                                          </a:rPr>
+                                          <m:t>𝑍</m:t>
+                                        </m:r>
+                                      </m:e>
+                                      <m:sub>
+                                        <m:r>
+                                          <a:rPr lang="en-US" i="1" dirty="0" smtClean="0">
+                                            <a:latin typeface="Cambria Math" panose="02040503050406030204" pitchFamily="18" charset="0"/>
+                                          </a:rPr>
+                                          <m:t>𝑖</m:t>
+                                        </m:r>
+                                      </m:sub>
+                                    </m:sSub>
+                                  </m:e>
+                                </m:d>
+                              </m:oMath>
+                            </m:oMathPara>
+                          </a14:m>
+                        </a:p>
+                      </a:txBody>
+                      <a:tcPr/>
+                    </a:tc>
+                    <a:extLst>
+                      <a:ext uri="{0D108BD9-81ED-4DB2-BD59-A6C34878D82A}">
+                        <a16:rowId xmlns:a16="http://schemas.microsoft.com/office/drawing/2014/main" val="3172079154"/>
+                      </a:ext>
+                    </a:extLst>
+                  </a:tr>
+                </a:tbl>
+              </a:graphicData>
+            </a:graphic>
+          </p:graphicFrame>
+        </mc:Choice>
+        <mc:Fallback>
+          <p:graphicFrame>
+            <p:nvGraphicFramePr>
+              <p:cNvPr id="6" name="Content Placeholder 5">
+                <a:extLst>
+                  <a:ext uri="{FF2B5EF4-FFF2-40B4-BE49-F238E27FC236}">
+                    <a16:creationId xmlns:a16="http://schemas.microsoft.com/office/drawing/2014/main" id="{4B4429C7-214A-BF5B-3F75-7D3A038B6F82}"/>
+                  </a:ext>
+                </a:extLst>
+              </p:cNvPr>
+              <p:cNvGraphicFramePr>
+                <a:graphicFrameLocks noGrp="1"/>
+              </p:cNvGraphicFramePr>
+              <p:nvPr>
+                <p:ph idx="1"/>
+                <p:extLst>
+                  <p:ext uri="{D42A27DB-BD31-4B8C-83A1-F6EECF244321}">
+                    <p14:modId xmlns:p14="http://schemas.microsoft.com/office/powerpoint/2010/main" val="2832712761"/>
+                  </p:ext>
+                </p:extLst>
+              </p:nvPr>
+            </p:nvGraphicFramePr>
+            <p:xfrm>
+              <a:off x="838199" y="1825625"/>
+              <a:ext cx="10639098" cy="2793672"/>
+            </p:xfrm>
+            <a:graphic>
+              <a:graphicData uri="http://schemas.openxmlformats.org/drawingml/2006/table">
+                <a:tbl>
+                  <a:tblPr firstRow="1" bandRow="1">
+                    <a:tableStyleId>{5C22544A-7EE6-4342-B048-85BDC9FD1C3A}</a:tableStyleId>
+                  </a:tblPr>
+                  <a:tblGrid>
+                    <a:gridCol w="5319549">
+                      <a:extLst>
+                        <a:ext uri="{9D8B030D-6E8A-4147-A177-3AD203B41FA5}">
+                          <a16:colId xmlns:a16="http://schemas.microsoft.com/office/drawing/2014/main" val="2418271835"/>
+                        </a:ext>
+                      </a:extLst>
+                    </a:gridCol>
+                    <a:gridCol w="5319549">
+                      <a:extLst>
+                        <a:ext uri="{9D8B030D-6E8A-4147-A177-3AD203B41FA5}">
+                          <a16:colId xmlns:a16="http://schemas.microsoft.com/office/drawing/2014/main" val="3761334250"/>
+                        </a:ext>
+                      </a:extLst>
+                    </a:gridCol>
+                  </a:tblGrid>
+                  <a:tr h="488723">
+                    <a:tc>
+                      <a:txBody>
+                        <a:bodyPr/>
+                        <a:lstStyle/>
+                        <a:p>
+                          <a:r>
+                            <a:rPr lang="en-US" dirty="0"/>
+                            <a:t>Quantity</a:t>
+                          </a:r>
+                        </a:p>
+                      </a:txBody>
+                      <a:tcPr/>
+                    </a:tc>
+                    <a:tc>
+                      <a:txBody>
+                        <a:bodyPr/>
+                        <a:lstStyle/>
+                        <a:p>
+                          <a:r>
+                            <a:rPr lang="en-US" dirty="0"/>
+                            <a:t>Distribution / Definition</a:t>
+                          </a:r>
+                        </a:p>
+                      </a:txBody>
+                      <a:tcPr/>
+                    </a:tc>
+                    <a:extLst>
+                      <a:ext uri="{0D108BD9-81ED-4DB2-BD59-A6C34878D82A}">
+                        <a16:rowId xmlns:a16="http://schemas.microsoft.com/office/drawing/2014/main" val="4222401980"/>
+                      </a:ext>
+                    </a:extLst>
+                  </a:tr>
+                  <a:tr h="488723">
+                    <a:tc>
+                      <a:txBody>
+                        <a:bodyPr/>
+                        <a:lstStyle/>
+                        <a:p>
+                          <a:r>
+                            <a:rPr lang="en-US" dirty="0"/>
+                            <a:t>Population size</a:t>
+                          </a:r>
+                        </a:p>
+                      </a:txBody>
+                      <a:tcPr/>
+                    </a:tc>
+                    <a:tc>
+                      <a:txBody>
+                        <a:bodyPr/>
+                        <a:lstStyle/>
+                        <a:p>
+                          <a:pPr algn="ctr"/>
+                          <a:r>
+                            <a:rPr lang="en-US" dirty="0"/>
+                            <a:t>m (fixed)</a:t>
+                          </a:r>
+                        </a:p>
+                      </a:txBody>
+                      <a:tcPr/>
+                    </a:tc>
+                    <a:extLst>
+                      <a:ext uri="{0D108BD9-81ED-4DB2-BD59-A6C34878D82A}">
+                        <a16:rowId xmlns:a16="http://schemas.microsoft.com/office/drawing/2014/main" val="2934207172"/>
+                      </a:ext>
+                    </a:extLst>
+                  </a:tr>
+                  <a:tr h="488723">
+                    <a:tc>
+                      <a:txBody>
+                        <a:bodyPr/>
+                        <a:lstStyle/>
+                        <a:p>
+                          <a:r>
+                            <a:rPr lang="en-US" dirty="0"/>
+                            <a:t>Treatment Assignment</a:t>
+                          </a:r>
+                        </a:p>
+                      </a:txBody>
+                      <a:tcPr/>
+                    </a:tc>
+                    <a:tc>
+                      <a:txBody>
+                        <a:bodyPr/>
+                        <a:lstStyle/>
+                        <a:p>
+                          <a:endParaRPr lang="en-US"/>
+                        </a:p>
+                      </a:txBody>
+                      <a:tcPr>
+                        <a:blipFill>
+                          <a:blip r:embed="rId2"/>
+                          <a:stretch>
+                            <a:fillRect l="-100239" t="-202564" r="-477" b="-271795"/>
+                          </a:stretch>
+                        </a:blipFill>
+                      </a:tcPr>
+                    </a:tc>
+                    <a:extLst>
+                      <a:ext uri="{0D108BD9-81ED-4DB2-BD59-A6C34878D82A}">
+                        <a16:rowId xmlns:a16="http://schemas.microsoft.com/office/drawing/2014/main" val="1723975838"/>
+                      </a:ext>
+                    </a:extLst>
+                  </a:tr>
+                  <a:tr h="838780">
+                    <a:tc>
+                      <a:txBody>
+                        <a:bodyPr/>
+                        <a:lstStyle/>
+                        <a:p>
+                          <a:r>
+                            <a:rPr lang="en-US" dirty="0"/>
+                            <a:t>Potential Outcomes</a:t>
+                          </a:r>
+                        </a:p>
+                      </a:txBody>
+                      <a:tcPr/>
+                    </a:tc>
+                    <a:tc>
+                      <a:txBody>
+                        <a:bodyPr/>
+                        <a:lstStyle/>
+                        <a:p>
+                          <a:endParaRPr lang="en-US"/>
+                        </a:p>
+                      </a:txBody>
+                      <a:tcPr>
+                        <a:blipFill>
+                          <a:blip r:embed="rId2"/>
+                          <a:stretch>
+                            <a:fillRect l="-100239" t="-178788" r="-477" b="-60606"/>
+                          </a:stretch>
+                        </a:blipFill>
+                      </a:tcPr>
+                    </a:tc>
+                    <a:extLst>
+                      <a:ext uri="{0D108BD9-81ED-4DB2-BD59-A6C34878D82A}">
+                        <a16:rowId xmlns:a16="http://schemas.microsoft.com/office/drawing/2014/main" val="757081235"/>
+                      </a:ext>
+                    </a:extLst>
+                  </a:tr>
+                  <a:tr h="488723">
+                    <a:tc>
+                      <a:txBody>
+                        <a:bodyPr/>
+                        <a:lstStyle/>
+                        <a:p>
+                          <a:r>
+                            <a:rPr lang="en-US" dirty="0"/>
+                            <a:t>Observed Outcome</a:t>
+                          </a:r>
+                        </a:p>
+                      </a:txBody>
+                      <a:tcPr/>
+                    </a:tc>
+                    <a:tc>
+                      <a:txBody>
+                        <a:bodyPr/>
+                        <a:lstStyle/>
+                        <a:p>
+                          <a:endParaRPr lang="en-US"/>
+                        </a:p>
+                      </a:txBody>
+                      <a:tcPr>
+                        <a:blipFill>
+                          <a:blip r:embed="rId2"/>
+                          <a:stretch>
+                            <a:fillRect l="-100239" t="-471795" r="-477" b="-2564"/>
+                          </a:stretch>
+                        </a:blipFill>
+                      </a:tcPr>
+                    </a:tc>
+                    <a:extLst>
+                      <a:ext uri="{0D108BD9-81ED-4DB2-BD59-A6C34878D82A}">
+                        <a16:rowId xmlns:a16="http://schemas.microsoft.com/office/drawing/2014/main" val="3172079154"/>
+                      </a:ext>
+                    </a:extLst>
+                  </a:tr>
+                </a:tbl>
+              </a:graphicData>
+            </a:graphic>
+          </p:graphicFrame>
+        </mc:Fallback>
+      </mc:AlternateContent>
+      <p:sp>
+        <p:nvSpPr>
+          <p:cNvPr id="5" name="Slide Number Placeholder 4">
+            <a:extLst>
+              <a:ext uri="{FF2B5EF4-FFF2-40B4-BE49-F238E27FC236}">
+                <a16:creationId xmlns:a16="http://schemas.microsoft.com/office/drawing/2014/main" id="{5170B309-5AF5-DFE6-8D4D-5091FE9C556D}"/>
+              </a:ext>
+            </a:extLst>
+          </p:cNvPr>
+          <p:cNvSpPr>
+            <a:spLocks noGrp="1"/>
+          </p:cNvSpPr>
+          <p:nvPr>
+            <p:ph type="sldNum" sz="quarter" idx="12"/>
+          </p:nvPr>
+        </p:nvSpPr>
+        <p:spPr/>
+        <p:txBody>
+          <a:bodyPr/>
+          <a:lstStyle/>
+          <a:p>
+            <a:fld id="{B9021C99-F081-FD4B-9146-F8976D51EC28}" type="slidenum">
+              <a:rPr lang="en-US" smtClean="0"/>
+              <a:t>14</a:t>
+            </a:fld>
+            <a:endParaRPr lang="en-US"/>
+          </a:p>
+        </p:txBody>
+      </p:sp>
+    </p:spTree>
+    <p:extLst>
+      <p:ext uri="{BB962C8B-B14F-4D97-AF65-F5344CB8AC3E}">
+        <p14:creationId xmlns:p14="http://schemas.microsoft.com/office/powerpoint/2010/main" val="66083419"/>
+      </p:ext>
+    </p:extLst>
+  </p:cSld>
+  <p:clrMapOvr>
+    <a:masterClrMapping/>
+  </p:clrMapOvr>
+</p:sld>
+</file>
+
+<file path=ppt/slides/slide15.xml><?xml version="1.0" encoding="utf-8"?>
+<p:sld xmlns:a="http://schemas.openxmlformats.org/drawingml/2006/main" xmlns:r="http://schemas.openxmlformats.org/officeDocument/2006/relationships" xmlns:p="http://schemas.openxmlformats.org/presentationml/2006/main">
+  <p:cSld>
+    <p:spTree>
+      <p:nvGrpSpPr>
+        <p:cNvPr id="1" name=""/>
+        <p:cNvGrpSpPr/>
+        <p:nvPr/>
+      </p:nvGrpSpPr>
+      <p:grpSpPr>
+        <a:xfrm>
+          <a:off x="0" y="0"/>
+          <a:ext cx="0" cy="0"/>
+          <a:chOff x="0" y="0"/>
+          <a:chExt cx="0" cy="0"/>
+        </a:xfrm>
+      </p:grpSpPr>
+      <p:sp>
+        <p:nvSpPr>
+          <p:cNvPr id="2" name="Title 1">
+            <a:extLst>
+              <a:ext uri="{FF2B5EF4-FFF2-40B4-BE49-F238E27FC236}">
+                <a16:creationId xmlns:a16="http://schemas.microsoft.com/office/drawing/2014/main" id="{7711AC8F-39EF-9E2A-FCF3-007AA722CC6E}"/>
+              </a:ext>
+            </a:extLst>
+          </p:cNvPr>
+          <p:cNvSpPr>
+            <a:spLocks noGrp="1"/>
+          </p:cNvSpPr>
+          <p:nvPr>
+            <p:ph type="title"/>
+          </p:nvPr>
+        </p:nvSpPr>
+        <p:spPr/>
+        <p:txBody>
+          <a:bodyPr/>
+          <a:lstStyle/>
+          <a:p>
+            <a:r>
+              <a:rPr lang="en-US" dirty="0"/>
+              <a:t>Confidence Bands</a:t>
+            </a:r>
+          </a:p>
+        </p:txBody>
+      </p:sp>
+      <p:pic>
+        <p:nvPicPr>
+          <p:cNvPr id="7" name="Content Placeholder 6" descr="A graph of a function&#10;&#10;AI-generated content may be incorrect.">
+            <a:extLst>
+              <a:ext uri="{FF2B5EF4-FFF2-40B4-BE49-F238E27FC236}">
+                <a16:creationId xmlns:a16="http://schemas.microsoft.com/office/drawing/2014/main" id="{F13D0221-329B-3B3B-BDC7-1AF1905A8D7F}"/>
+              </a:ext>
+            </a:extLst>
+          </p:cNvPr>
+          <p:cNvPicPr>
+            <a:picLocks noGrp="1" noChangeAspect="1"/>
+          </p:cNvPicPr>
+          <p:nvPr>
+            <p:ph idx="1"/>
+          </p:nvPr>
+        </p:nvPicPr>
+        <p:blipFill>
+          <a:blip r:embed="rId2"/>
+          <a:stretch>
+            <a:fillRect/>
+          </a:stretch>
+        </p:blipFill>
+        <p:spPr>
+          <a:xfrm>
+            <a:off x="8175733" y="1905000"/>
+            <a:ext cx="3742998" cy="3742998"/>
+          </a:xfrm>
+        </p:spPr>
+      </p:pic>
+      <p:sp>
+        <p:nvSpPr>
+          <p:cNvPr id="5" name="Slide Number Placeholder 4">
+            <a:extLst>
+              <a:ext uri="{FF2B5EF4-FFF2-40B4-BE49-F238E27FC236}">
+                <a16:creationId xmlns:a16="http://schemas.microsoft.com/office/drawing/2014/main" id="{E8FF79F6-AF11-7928-A6D9-3AF441DFD1CF}"/>
+              </a:ext>
+            </a:extLst>
+          </p:cNvPr>
+          <p:cNvSpPr>
+            <a:spLocks noGrp="1"/>
+          </p:cNvSpPr>
+          <p:nvPr>
+            <p:ph type="sldNum" sz="quarter" idx="12"/>
+          </p:nvPr>
+        </p:nvSpPr>
+        <p:spPr/>
+        <p:txBody>
+          <a:bodyPr/>
+          <a:lstStyle/>
+          <a:p>
+            <a:fld id="{B9021C99-F081-FD4B-9146-F8976D51EC28}" type="slidenum">
+              <a:rPr lang="en-US" smtClean="0"/>
+              <a:t>15</a:t>
+            </a:fld>
+            <a:endParaRPr lang="en-US"/>
+          </a:p>
+        </p:txBody>
+      </p:sp>
+      <p:pic>
+        <p:nvPicPr>
+          <p:cNvPr id="9" name="Picture 8" descr="A graph of a number of individuals&#10;&#10;AI-generated content may be incorrect.">
+            <a:extLst>
+              <a:ext uri="{FF2B5EF4-FFF2-40B4-BE49-F238E27FC236}">
+                <a16:creationId xmlns:a16="http://schemas.microsoft.com/office/drawing/2014/main" id="{9FD4D8CE-DE32-E3DA-8A1F-2143FECE41D9}"/>
+              </a:ext>
+            </a:extLst>
+          </p:cNvPr>
+          <p:cNvPicPr>
+            <a:picLocks noChangeAspect="1"/>
+          </p:cNvPicPr>
+          <p:nvPr/>
+        </p:nvPicPr>
+        <p:blipFill>
+          <a:blip r:embed="rId3"/>
+          <a:stretch>
+            <a:fillRect/>
+          </a:stretch>
+        </p:blipFill>
+        <p:spPr>
+          <a:xfrm>
+            <a:off x="4571999" y="1904999"/>
+            <a:ext cx="3742997" cy="3742997"/>
+          </a:xfrm>
+          <a:prstGeom prst="rect">
+            <a:avLst/>
+          </a:prstGeom>
+        </p:spPr>
+      </p:pic>
+      <p:pic>
+        <p:nvPicPr>
+          <p:cNvPr id="11" name="Picture 10" descr="A graph of a number of individuals&#10;&#10;AI-generated content may be incorrect.">
+            <a:extLst>
+              <a:ext uri="{FF2B5EF4-FFF2-40B4-BE49-F238E27FC236}">
+                <a16:creationId xmlns:a16="http://schemas.microsoft.com/office/drawing/2014/main" id="{23E48D54-42A0-2150-7CC0-39D77876A349}"/>
+              </a:ext>
+            </a:extLst>
+          </p:cNvPr>
+          <p:cNvPicPr>
+            <a:picLocks noChangeAspect="1"/>
+          </p:cNvPicPr>
+          <p:nvPr/>
+        </p:nvPicPr>
+        <p:blipFill>
+          <a:blip r:embed="rId4"/>
+          <a:stretch>
+            <a:fillRect/>
+          </a:stretch>
+        </p:blipFill>
+        <p:spPr>
+          <a:xfrm>
+            <a:off x="838200" y="1905000"/>
+            <a:ext cx="3859924" cy="3859924"/>
+          </a:xfrm>
+          <a:prstGeom prst="rect">
+            <a:avLst/>
+          </a:prstGeom>
+        </p:spPr>
+      </p:pic>
+    </p:spTree>
+    <p:extLst>
+      <p:ext uri="{BB962C8B-B14F-4D97-AF65-F5344CB8AC3E}">
+        <p14:creationId xmlns:p14="http://schemas.microsoft.com/office/powerpoint/2010/main" val="2654469095"/>
+      </p:ext>
+    </p:extLst>
+  </p:cSld>
+  <p:clrMapOvr>
+    <a:masterClrMapping/>
+  </p:clrMapOvr>
+</p:sld>
+</file>
+
+<file path=ppt/slides/slide16.xml><?xml version="1.0" encoding="utf-8"?>
+<p:sld xmlns:a="http://schemas.openxmlformats.org/drawingml/2006/main" xmlns:r="http://schemas.openxmlformats.org/officeDocument/2006/relationships" xmlns:p="http://schemas.openxmlformats.org/presentationml/2006/main">
+  <p:cSld>
+    <p:spTree>
+      <p:nvGrpSpPr>
+        <p:cNvPr id="1" name="">
+          <a:extLst>
+            <a:ext uri="{FF2B5EF4-FFF2-40B4-BE49-F238E27FC236}">
+              <a16:creationId xmlns:a16="http://schemas.microsoft.com/office/drawing/2014/main" id="{76A9DAEF-5E75-DBBE-4C6D-2E58D6FBC2C6}"/>
+            </a:ext>
+          </a:extLst>
+        </p:cNvPr>
+        <p:cNvGrpSpPr/>
+        <p:nvPr/>
+      </p:nvGrpSpPr>
+      <p:grpSpPr>
+        <a:xfrm>
+          <a:off x="0" y="0"/>
+          <a:ext cx="0" cy="0"/>
+          <a:chOff x="0" y="0"/>
+          <a:chExt cx="0" cy="0"/>
+        </a:xfrm>
+      </p:grpSpPr>
+      <p:sp>
+        <p:nvSpPr>
+          <p:cNvPr id="2" name="Title 1">
+            <a:extLst>
+              <a:ext uri="{FF2B5EF4-FFF2-40B4-BE49-F238E27FC236}">
+                <a16:creationId xmlns:a16="http://schemas.microsoft.com/office/drawing/2014/main" id="{440E2A95-7D2C-65E6-3818-EDD22E227F3A}"/>
+              </a:ext>
+            </a:extLst>
+          </p:cNvPr>
+          <p:cNvSpPr>
+            <a:spLocks noGrp="1"/>
+          </p:cNvSpPr>
+          <p:nvPr>
+            <p:ph type="title"/>
+          </p:nvPr>
+        </p:nvSpPr>
+        <p:spPr/>
+        <p:txBody>
+          <a:bodyPr/>
+          <a:lstStyle/>
+          <a:p>
+            <a:r>
+              <a:rPr lang="en-US" dirty="0"/>
+              <a:t>Comparing with </a:t>
+            </a:r>
+            <a:r>
+              <a:rPr lang="en-US" dirty="0" err="1"/>
+              <a:t>Randomisation</a:t>
+            </a:r>
+            <a:r>
+              <a:rPr lang="en-US"/>
+              <a:t> Inference (RI)</a:t>
+            </a:r>
+            <a:endParaRPr lang="en-US" dirty="0"/>
+          </a:p>
+        </p:txBody>
+      </p:sp>
+      <p:sp>
+        <p:nvSpPr>
+          <p:cNvPr id="3" name="Content Placeholder 2">
+            <a:extLst>
+              <a:ext uri="{FF2B5EF4-FFF2-40B4-BE49-F238E27FC236}">
+                <a16:creationId xmlns:a16="http://schemas.microsoft.com/office/drawing/2014/main" id="{1B84A46A-60A1-3E04-D117-CC238B873B6E}"/>
+              </a:ext>
+            </a:extLst>
+          </p:cNvPr>
+          <p:cNvSpPr>
+            <a:spLocks noGrp="1"/>
+          </p:cNvSpPr>
+          <p:nvPr>
+            <p:ph idx="1"/>
+          </p:nvPr>
+        </p:nvSpPr>
+        <p:spPr/>
+        <p:txBody>
+          <a:bodyPr/>
+          <a:lstStyle/>
+          <a:p>
+            <a:endParaRPr lang="en-US"/>
+          </a:p>
+        </p:txBody>
+      </p:sp>
+      <p:sp>
+        <p:nvSpPr>
+          <p:cNvPr id="4" name="Footer Placeholder 3">
+            <a:extLst>
+              <a:ext uri="{FF2B5EF4-FFF2-40B4-BE49-F238E27FC236}">
+                <a16:creationId xmlns:a16="http://schemas.microsoft.com/office/drawing/2014/main" id="{751303A3-1126-DE17-68FF-FF83691B83B5}"/>
+              </a:ext>
+            </a:extLst>
+          </p:cNvPr>
+          <p:cNvSpPr>
+            <a:spLocks noGrp="1"/>
+          </p:cNvSpPr>
+          <p:nvPr>
+            <p:ph type="ftr" sz="quarter" idx="11"/>
+          </p:nvPr>
+        </p:nvSpPr>
+        <p:spPr/>
+        <p:txBody>
+          <a:bodyPr/>
+          <a:lstStyle/>
+          <a:p>
+            <a:r>
+              <a:rPr lang="en-US"/>
+              <a:t>Myoung-jae Lee (1999). Median treatment effect in randomized trials.</a:t>
+            </a:r>
+          </a:p>
+        </p:txBody>
+      </p:sp>
+      <p:sp>
+        <p:nvSpPr>
+          <p:cNvPr id="5" name="Slide Number Placeholder 4">
+            <a:extLst>
+              <a:ext uri="{FF2B5EF4-FFF2-40B4-BE49-F238E27FC236}">
+                <a16:creationId xmlns:a16="http://schemas.microsoft.com/office/drawing/2014/main" id="{FEBD7BDF-F20D-BABD-16E1-87CFB0EEF1B4}"/>
+              </a:ext>
+            </a:extLst>
+          </p:cNvPr>
+          <p:cNvSpPr>
+            <a:spLocks noGrp="1"/>
+          </p:cNvSpPr>
+          <p:nvPr>
+            <p:ph type="sldNum" sz="quarter" idx="12"/>
+          </p:nvPr>
+        </p:nvSpPr>
+        <p:spPr/>
+        <p:txBody>
+          <a:bodyPr/>
+          <a:lstStyle/>
+          <a:p>
+            <a:fld id="{B9021C99-F081-FD4B-9146-F8976D51EC28}" type="slidenum">
+              <a:rPr lang="en-US" smtClean="0"/>
+              <a:t>16</a:t>
+            </a:fld>
+            <a:endParaRPr lang="en-US"/>
+          </a:p>
+        </p:txBody>
+      </p:sp>
+    </p:spTree>
+    <p:extLst>
+      <p:ext uri="{BB962C8B-B14F-4D97-AF65-F5344CB8AC3E}">
+        <p14:creationId xmlns:p14="http://schemas.microsoft.com/office/powerpoint/2010/main" val="2695608197"/>
+      </p:ext>
+    </p:extLst>
+  </p:cSld>
+  <p:clrMapOvr>
+    <a:masterClrMapping/>
+  </p:clrMapOvr>
+</p:sld>
+</file>
+
+<file path=ppt/slides/slide17.xml><?xml version="1.0" encoding="utf-8"?>
+<p:sld xmlns:a="http://schemas.openxmlformats.org/drawingml/2006/main" xmlns:r="http://schemas.openxmlformats.org/officeDocument/2006/relationships" xmlns:p="http://schemas.openxmlformats.org/presentationml/2006/main">
+  <p:cSld>
+    <p:spTree>
+      <p:nvGrpSpPr>
+        <p:cNvPr id="1" name=""/>
+        <p:cNvGrpSpPr/>
+        <p:nvPr/>
+      </p:nvGrpSpPr>
+      <p:grpSpPr>
+        <a:xfrm>
+          <a:off x="0" y="0"/>
+          <a:ext cx="0" cy="0"/>
+          <a:chOff x="0" y="0"/>
+          <a:chExt cx="0" cy="0"/>
+        </a:xfrm>
+      </p:grpSpPr>
+      <p:sp>
+        <p:nvSpPr>
+          <p:cNvPr id="2" name="Title 1">
+            <a:extLst>
+              <a:ext uri="{FF2B5EF4-FFF2-40B4-BE49-F238E27FC236}">
+                <a16:creationId xmlns:a16="http://schemas.microsoft.com/office/drawing/2014/main" id="{D7F83559-BEDF-C8B6-A264-82130346AA32}"/>
+              </a:ext>
+            </a:extLst>
+          </p:cNvPr>
+          <p:cNvSpPr>
+            <a:spLocks noGrp="1"/>
+          </p:cNvSpPr>
+          <p:nvPr>
+            <p:ph type="title"/>
+          </p:nvPr>
+        </p:nvSpPr>
+        <p:spPr/>
+        <p:txBody>
+          <a:bodyPr/>
+          <a:lstStyle/>
+          <a:p>
+            <a:r>
+              <a:rPr lang="en-US" dirty="0"/>
+              <a:t>Conjecture With Tight Bounds</a:t>
+            </a:r>
+          </a:p>
+        </p:txBody>
+      </p:sp>
+      <mc:AlternateContent xmlns:mc="http://schemas.openxmlformats.org/markup-compatibility/2006">
+        <mc:Choice xmlns:a14="http://schemas.microsoft.com/office/drawing/2010/main" Requires="a14">
+          <p:sp>
+            <p:nvSpPr>
+              <p:cNvPr id="3" name="Content Placeholder 2">
+                <a:extLst>
+                  <a:ext uri="{FF2B5EF4-FFF2-40B4-BE49-F238E27FC236}">
+                    <a16:creationId xmlns:a16="http://schemas.microsoft.com/office/drawing/2014/main" id="{0CC6E971-102B-A2E1-7381-5764B48B5FBB}"/>
+                  </a:ext>
+                </a:extLst>
+              </p:cNvPr>
+              <p:cNvSpPr>
+                <a:spLocks noGrp="1"/>
+              </p:cNvSpPr>
+              <p:nvPr>
+                <p:ph idx="1"/>
+              </p:nvPr>
+            </p:nvSpPr>
+            <p:spPr/>
+            <p:txBody>
+              <a:bodyPr/>
+              <a:lstStyle/>
+              <a:p>
+                <a:pPr marL="0" indent="0">
+                  <a:buNone/>
+                </a:pPr>
+                <a:r>
+                  <a:rPr lang="en-US" dirty="0"/>
+                  <a:t>For our proof technique, we get this inequality without the tightest bounds</a:t>
+                </a:r>
+              </a:p>
+              <a:p>
+                <a:pPr marL="0" indent="0" algn="ctr">
+                  <a:buNone/>
+                </a:pPr>
+                <a14:m>
+                  <m:oMathPara xmlns:m="http://schemas.openxmlformats.org/officeDocument/2006/math">
+                    <m:oMathParaPr>
+                      <m:jc m:val="centerGroup"/>
+                    </m:oMathParaPr>
+                    <m:oMath xmlns:m="http://schemas.openxmlformats.org/officeDocument/2006/math">
+                      <m:func>
+                        <m:funcPr>
+                          <m:ctrlPr>
+                            <a:rPr lang="en-US" i="1" dirty="0" smtClean="0">
+                              <a:latin typeface="Cambria Math" panose="02040503050406030204" pitchFamily="18" charset="0"/>
+                            </a:rPr>
+                          </m:ctrlPr>
+                        </m:funcPr>
+                        <m:fName>
+                          <m:r>
+                            <m:rPr>
+                              <m:sty m:val="p"/>
+                            </m:rPr>
+                            <a:rPr lang="en-US" dirty="0" err="1">
+                              <a:latin typeface="Cambria Math" panose="02040503050406030204" pitchFamily="18" charset="0"/>
+                            </a:rPr>
+                            <m:t>Pr</m:t>
+                          </m:r>
+                        </m:fName>
+                        <m:e>
+                          <m:func>
+                            <m:funcPr>
+                              <m:ctrlPr>
+                                <a:rPr lang="en-US" i="1" dirty="0">
+                                  <a:latin typeface="Cambria Math" panose="02040503050406030204" pitchFamily="18" charset="0"/>
+                                </a:rPr>
+                              </m:ctrlPr>
+                            </m:funcPr>
+                            <m:fName>
+                              <m:limLow>
+                                <m:limLowPr>
+                                  <m:ctrlPr>
+                                    <a:rPr lang="en-US" i="1" dirty="0">
+                                      <a:latin typeface="Cambria Math" panose="02040503050406030204" pitchFamily="18" charset="0"/>
+                                    </a:rPr>
+                                  </m:ctrlPr>
+                                </m:limLowPr>
+                                <m:e>
+                                  <m:r>
+                                    <m:rPr>
+                                      <m:sty m:val="p"/>
+                                    </m:rPr>
+                                    <a:rPr lang="en-US" dirty="0">
+                                      <a:latin typeface="Cambria Math" panose="02040503050406030204" pitchFamily="18" charset="0"/>
+                                    </a:rPr>
+                                    <m:t>sup</m:t>
+                                  </m:r>
+                                </m:e>
+                                <m:lim>
+                                  <m:r>
+                                    <a:rPr lang="en-US" i="1" dirty="0">
+                                      <a:latin typeface="Cambria Math" panose="02040503050406030204" pitchFamily="18" charset="0"/>
+                                    </a:rPr>
+                                    <m:t>𝑥</m:t>
+                                  </m:r>
+                                  <m:r>
+                                    <a:rPr lang="en-US" i="1" dirty="0">
+                                      <a:latin typeface="Cambria Math" panose="02040503050406030204" pitchFamily="18" charset="0"/>
+                                    </a:rPr>
+                                    <m:t>∈</m:t>
+                                  </m:r>
+                                  <m:r>
+                                    <a:rPr lang="en-US" i="1" dirty="0">
+                                      <a:latin typeface="Cambria Math" panose="02040503050406030204" pitchFamily="18" charset="0"/>
+                                    </a:rPr>
+                                    <m:t>𝑅</m:t>
+                                  </m:r>
+                                </m:lim>
+                              </m:limLow>
+                            </m:fName>
+                            <m:e>
+                              <m:d>
+                                <m:dPr>
+                                  <m:begChr m:val="|"/>
+                                  <m:endChr m:val="|"/>
+                                  <m:ctrlPr>
+                                    <a:rPr lang="en-US" i="1" dirty="0">
+                                      <a:latin typeface="Cambria Math" panose="02040503050406030204" pitchFamily="18" charset="0"/>
+                                    </a:rPr>
+                                  </m:ctrlPr>
+                                </m:dPr>
+                                <m:e>
+                                  <m:acc>
+                                    <m:accPr>
+                                      <m:chr m:val="̂"/>
+                                      <m:ctrlPr>
+                                        <a:rPr lang="en-US" i="1" dirty="0">
+                                          <a:latin typeface="Cambria Math" panose="02040503050406030204" pitchFamily="18" charset="0"/>
+                                        </a:rPr>
+                                      </m:ctrlPr>
+                                    </m:accPr>
+                                    <m:e>
+                                      <m:r>
+                                        <a:rPr lang="en-US" i="1" dirty="0">
+                                          <a:latin typeface="Cambria Math" panose="02040503050406030204" pitchFamily="18" charset="0"/>
+                                        </a:rPr>
+                                        <m:t>𝐹</m:t>
+                                      </m:r>
+                                    </m:e>
+                                  </m:acc>
+                                  <m:d>
+                                    <m:dPr>
+                                      <m:ctrlPr>
+                                        <a:rPr lang="en-US" i="1" dirty="0">
+                                          <a:latin typeface="Cambria Math" panose="02040503050406030204" pitchFamily="18" charset="0"/>
+                                        </a:rPr>
+                                      </m:ctrlPr>
+                                    </m:dPr>
+                                    <m:e>
+                                      <m:r>
+                                        <a:rPr lang="en-US" i="1" dirty="0">
+                                          <a:latin typeface="Cambria Math" panose="02040503050406030204" pitchFamily="18" charset="0"/>
+                                        </a:rPr>
+                                        <m:t>𝑥</m:t>
+                                      </m:r>
+                                    </m:e>
+                                  </m:d>
+                                  <m:r>
+                                    <a:rPr lang="en-US" i="1" dirty="0">
+                                      <a:latin typeface="Cambria Math" panose="02040503050406030204" pitchFamily="18" charset="0"/>
+                                    </a:rPr>
+                                    <m:t>−</m:t>
+                                  </m:r>
+                                  <m:r>
+                                    <a:rPr lang="en-US" i="1" dirty="0">
+                                      <a:latin typeface="Cambria Math" panose="02040503050406030204" pitchFamily="18" charset="0"/>
+                                    </a:rPr>
+                                    <m:t>𝐹</m:t>
+                                  </m:r>
+                                  <m:d>
+                                    <m:dPr>
+                                      <m:ctrlPr>
+                                        <a:rPr lang="en-US" i="1" dirty="0">
+                                          <a:latin typeface="Cambria Math" panose="02040503050406030204" pitchFamily="18" charset="0"/>
+                                        </a:rPr>
+                                      </m:ctrlPr>
+                                    </m:dPr>
+                                    <m:e>
+                                      <m:r>
+                                        <a:rPr lang="en-US" i="1" dirty="0">
+                                          <a:latin typeface="Cambria Math" panose="02040503050406030204" pitchFamily="18" charset="0"/>
+                                        </a:rPr>
+                                        <m:t>𝑥</m:t>
+                                      </m:r>
+                                    </m:e>
+                                  </m:d>
+                                </m:e>
+                              </m:d>
+                            </m:e>
+                          </m:func>
+                          <m:r>
+                            <a:rPr lang="en-US" i="1" dirty="0">
+                              <a:latin typeface="Cambria Math" panose="02040503050406030204" pitchFamily="18" charset="0"/>
+                            </a:rPr>
+                            <m:t>&gt;</m:t>
+                          </m:r>
+                          <m:r>
+                            <a:rPr lang="en-US" i="1" dirty="0">
+                              <a:latin typeface="Cambria Math" panose="02040503050406030204" pitchFamily="18" charset="0"/>
+                            </a:rPr>
+                            <m:t>𝜖</m:t>
+                          </m:r>
+                        </m:e>
+                      </m:func>
+                      <m:r>
+                        <a:rPr lang="en-US" i="1" dirty="0">
+                          <a:latin typeface="Cambria Math" panose="02040503050406030204" pitchFamily="18" charset="0"/>
+                        </a:rPr>
+                        <m:t>≤</m:t>
+                      </m:r>
+                      <m:r>
+                        <a:rPr lang="en-US" b="0" i="1" dirty="0" smtClean="0">
+                          <a:latin typeface="Cambria Math" panose="02040503050406030204" pitchFamily="18" charset="0"/>
+                        </a:rPr>
+                        <m:t>4</m:t>
+                      </m:r>
+                      <m:r>
+                        <a:rPr lang="en-US" i="1" dirty="0">
+                          <a:latin typeface="Cambria Math" panose="02040503050406030204" pitchFamily="18" charset="0"/>
+                        </a:rPr>
+                        <m:t>𝑒𝑥𝑝</m:t>
+                      </m:r>
+                      <m:d>
+                        <m:dPr>
+                          <m:ctrlPr>
+                            <a:rPr lang="en-US" b="0" i="1" dirty="0" smtClean="0">
+                              <a:latin typeface="Cambria Math" panose="02040503050406030204" pitchFamily="18" charset="0"/>
+                            </a:rPr>
+                          </m:ctrlPr>
+                        </m:dPr>
+                        <m:e>
+                          <m:r>
+                            <a:rPr lang="en-US" i="1" dirty="0">
+                              <a:latin typeface="Cambria Math" panose="02040503050406030204" pitchFamily="18" charset="0"/>
+                            </a:rPr>
+                            <m:t>−</m:t>
+                          </m:r>
+                          <m:f>
+                            <m:fPr>
+                              <m:ctrlPr>
+                                <a:rPr lang="en-US" i="1" dirty="0" smtClean="0">
+                                  <a:latin typeface="Cambria Math" panose="02040503050406030204" pitchFamily="18" charset="0"/>
+                                </a:rPr>
+                              </m:ctrlPr>
+                            </m:fPr>
+                            <m:num>
+                              <m:r>
+                                <a:rPr lang="en-US" b="0" i="1" dirty="0" smtClean="0">
+                                  <a:latin typeface="Cambria Math" panose="02040503050406030204" pitchFamily="18" charset="0"/>
+                                </a:rPr>
+                                <m:t>1</m:t>
+                              </m:r>
+                            </m:num>
+                            <m:den>
+                              <m:r>
+                                <a:rPr lang="en-US" b="0" i="1" dirty="0" smtClean="0">
+                                  <a:latin typeface="Cambria Math" panose="02040503050406030204" pitchFamily="18" charset="0"/>
+                                </a:rPr>
+                                <m:t>8</m:t>
+                              </m:r>
+                            </m:den>
+                          </m:f>
+                          <m:r>
+                            <a:rPr lang="en-US" i="1" dirty="0">
+                              <a:latin typeface="Cambria Math" panose="02040503050406030204" pitchFamily="18" charset="0"/>
+                            </a:rPr>
+                            <m:t>𝑛</m:t>
+                          </m:r>
+                          <m:sSup>
+                            <m:sSupPr>
+                              <m:ctrlPr>
+                                <a:rPr lang="en-US" i="1" dirty="0">
+                                  <a:latin typeface="Cambria Math" panose="02040503050406030204" pitchFamily="18" charset="0"/>
+                                </a:rPr>
+                              </m:ctrlPr>
+                            </m:sSupPr>
+                            <m:e>
+                              <m:r>
+                                <a:rPr lang="en-US" i="1" dirty="0">
+                                  <a:latin typeface="Cambria Math" panose="02040503050406030204" pitchFamily="18" charset="0"/>
+                                </a:rPr>
+                                <m:t>𝜖</m:t>
+                              </m:r>
+                            </m:e>
+                            <m:sup>
+                              <m:r>
+                                <a:rPr lang="en-US" i="1" dirty="0">
+                                  <a:latin typeface="Cambria Math" panose="02040503050406030204" pitchFamily="18" charset="0"/>
+                                </a:rPr>
+                                <m:t>2</m:t>
+                              </m:r>
+                            </m:sup>
+                          </m:sSup>
+                        </m:e>
+                      </m:d>
+                      <m:r>
+                        <a:rPr lang="en-US" b="0" i="1" dirty="0" smtClean="0">
+                          <a:latin typeface="Cambria Math" panose="02040503050406030204" pitchFamily="18" charset="0"/>
+                        </a:rPr>
+                        <m:t>.</m:t>
+                      </m:r>
+                    </m:oMath>
+                  </m:oMathPara>
+                </a14:m>
+                <a:endParaRPr lang="en-US" b="0" i="1" dirty="0">
+                  <a:latin typeface="Cambria Math" panose="02040503050406030204" pitchFamily="18" charset="0"/>
+                </a:endParaRPr>
+              </a:p>
+              <a:p>
+                <a:pPr marL="0" indent="0">
+                  <a:buNone/>
+                </a:pPr>
+                <a:r>
+                  <a:rPr lang="en-US" dirty="0"/>
+                  <a:t>Modern proof techniques are harder to adapt, but we conjecture we can get </a:t>
+                </a:r>
+              </a:p>
+              <a:p>
+                <a:pPr marL="0" indent="0" algn="ctr">
+                  <a:buNone/>
+                </a:pPr>
+                <a14:m>
+                  <m:oMath xmlns:m="http://schemas.openxmlformats.org/officeDocument/2006/math">
+                    <m:func>
+                      <m:funcPr>
+                        <m:ctrlPr>
+                          <a:rPr lang="en-US" i="1" dirty="0">
+                            <a:latin typeface="Cambria Math" panose="02040503050406030204" pitchFamily="18" charset="0"/>
+                          </a:rPr>
+                        </m:ctrlPr>
+                      </m:funcPr>
+                      <m:fName>
+                        <m:r>
+                          <m:rPr>
+                            <m:sty m:val="p"/>
+                          </m:rPr>
+                          <a:rPr lang="en-US" dirty="0" err="1">
+                            <a:latin typeface="Cambria Math" panose="02040503050406030204" pitchFamily="18" charset="0"/>
+                          </a:rPr>
+                          <m:t>Pr</m:t>
+                        </m:r>
+                      </m:fName>
+                      <m:e>
+                        <m:func>
+                          <m:funcPr>
+                            <m:ctrlPr>
+                              <a:rPr lang="en-US" i="1" dirty="0">
+                                <a:latin typeface="Cambria Math" panose="02040503050406030204" pitchFamily="18" charset="0"/>
+                              </a:rPr>
+                            </m:ctrlPr>
+                          </m:funcPr>
+                          <m:fName>
+                            <m:limLow>
+                              <m:limLowPr>
+                                <m:ctrlPr>
+                                  <a:rPr lang="en-US" i="1" dirty="0">
+                                    <a:latin typeface="Cambria Math" panose="02040503050406030204" pitchFamily="18" charset="0"/>
+                                  </a:rPr>
+                                </m:ctrlPr>
+                              </m:limLowPr>
+                              <m:e>
+                                <m:r>
+                                  <m:rPr>
+                                    <m:sty m:val="p"/>
+                                  </m:rPr>
+                                  <a:rPr lang="en-US" dirty="0">
+                                    <a:latin typeface="Cambria Math" panose="02040503050406030204" pitchFamily="18" charset="0"/>
+                                  </a:rPr>
+                                  <m:t>sup</m:t>
+                                </m:r>
+                              </m:e>
+                              <m:lim>
+                                <m:r>
+                                  <a:rPr lang="en-US" i="1" dirty="0">
+                                    <a:latin typeface="Cambria Math" panose="02040503050406030204" pitchFamily="18" charset="0"/>
+                                  </a:rPr>
+                                  <m:t>𝑥</m:t>
+                                </m:r>
+                                <m:r>
+                                  <a:rPr lang="en-US" i="1" dirty="0">
+                                    <a:latin typeface="Cambria Math" panose="02040503050406030204" pitchFamily="18" charset="0"/>
+                                  </a:rPr>
+                                  <m:t>∈</m:t>
+                                </m:r>
+                                <m:r>
+                                  <a:rPr lang="en-US" i="1" dirty="0">
+                                    <a:latin typeface="Cambria Math" panose="02040503050406030204" pitchFamily="18" charset="0"/>
+                                  </a:rPr>
+                                  <m:t>𝑅</m:t>
+                                </m:r>
+                              </m:lim>
+                            </m:limLow>
+                          </m:fName>
+                          <m:e>
+                            <m:d>
+                              <m:dPr>
+                                <m:begChr m:val="|"/>
+                                <m:endChr m:val="|"/>
+                                <m:ctrlPr>
+                                  <a:rPr lang="en-US" i="1" dirty="0">
+                                    <a:latin typeface="Cambria Math" panose="02040503050406030204" pitchFamily="18" charset="0"/>
+                                  </a:rPr>
+                                </m:ctrlPr>
+                              </m:dPr>
+                              <m:e>
+                                <m:acc>
+                                  <m:accPr>
+                                    <m:chr m:val="̂"/>
+                                    <m:ctrlPr>
+                                      <a:rPr lang="en-US" i="1" dirty="0">
+                                        <a:latin typeface="Cambria Math" panose="02040503050406030204" pitchFamily="18" charset="0"/>
+                                      </a:rPr>
+                                    </m:ctrlPr>
+                                  </m:accPr>
+                                  <m:e>
+                                    <m:r>
+                                      <a:rPr lang="en-US" i="1" dirty="0">
+                                        <a:latin typeface="Cambria Math" panose="02040503050406030204" pitchFamily="18" charset="0"/>
+                                      </a:rPr>
+                                      <m:t>𝐹</m:t>
+                                    </m:r>
+                                  </m:e>
+                                </m:acc>
+                                <m:d>
+                                  <m:dPr>
+                                    <m:ctrlPr>
+                                      <a:rPr lang="en-US" i="1" dirty="0">
+                                        <a:latin typeface="Cambria Math" panose="02040503050406030204" pitchFamily="18" charset="0"/>
+                                      </a:rPr>
+                                    </m:ctrlPr>
+                                  </m:dPr>
+                                  <m:e>
+                                    <m:r>
+                                      <a:rPr lang="en-US" i="1" dirty="0">
+                                        <a:latin typeface="Cambria Math" panose="02040503050406030204" pitchFamily="18" charset="0"/>
+                                      </a:rPr>
+                                      <m:t>𝑥</m:t>
+                                    </m:r>
+                                  </m:e>
+                                </m:d>
+                                <m:r>
+                                  <a:rPr lang="en-US" i="1" dirty="0">
+                                    <a:latin typeface="Cambria Math" panose="02040503050406030204" pitchFamily="18" charset="0"/>
+                                  </a:rPr>
+                                  <m:t>−</m:t>
+                                </m:r>
+                                <m:r>
+                                  <a:rPr lang="en-US" i="1" dirty="0">
+                                    <a:latin typeface="Cambria Math" panose="02040503050406030204" pitchFamily="18" charset="0"/>
+                                  </a:rPr>
+                                  <m:t>𝐹</m:t>
+                                </m:r>
+                                <m:d>
+                                  <m:dPr>
+                                    <m:ctrlPr>
+                                      <a:rPr lang="en-US" i="1" dirty="0">
+                                        <a:latin typeface="Cambria Math" panose="02040503050406030204" pitchFamily="18" charset="0"/>
+                                      </a:rPr>
+                                    </m:ctrlPr>
+                                  </m:dPr>
+                                  <m:e>
+                                    <m:r>
+                                      <a:rPr lang="en-US" i="1" dirty="0">
+                                        <a:latin typeface="Cambria Math" panose="02040503050406030204" pitchFamily="18" charset="0"/>
+                                      </a:rPr>
+                                      <m:t>𝑥</m:t>
+                                    </m:r>
+                                  </m:e>
+                                </m:d>
+                              </m:e>
+                            </m:d>
+                          </m:e>
+                        </m:func>
+                        <m:r>
+                          <a:rPr lang="en-US" i="1" dirty="0">
+                            <a:latin typeface="Cambria Math" panose="02040503050406030204" pitchFamily="18" charset="0"/>
+                          </a:rPr>
+                          <m:t>&gt;</m:t>
+                        </m:r>
+                        <m:r>
+                          <a:rPr lang="en-US" i="1" dirty="0">
+                            <a:latin typeface="Cambria Math" panose="02040503050406030204" pitchFamily="18" charset="0"/>
+                          </a:rPr>
+                          <m:t>𝜖</m:t>
+                        </m:r>
+                      </m:e>
+                    </m:func>
+                    <m:r>
+                      <a:rPr lang="en-US" i="1" dirty="0">
+                        <a:latin typeface="Cambria Math" panose="02040503050406030204" pitchFamily="18" charset="0"/>
+                      </a:rPr>
+                      <m:t>≤</m:t>
+                    </m:r>
+                    <m:r>
+                      <a:rPr lang="en-US" b="0" i="1" dirty="0" smtClean="0">
+                        <a:latin typeface="Cambria Math" panose="02040503050406030204" pitchFamily="18" charset="0"/>
+                      </a:rPr>
+                      <m:t>2</m:t>
+                    </m:r>
+                    <m:r>
+                      <a:rPr lang="en-US" i="1" dirty="0">
+                        <a:latin typeface="Cambria Math" panose="02040503050406030204" pitchFamily="18" charset="0"/>
+                      </a:rPr>
+                      <m:t>𝑒𝑥𝑝</m:t>
+                    </m:r>
+                    <m:d>
+                      <m:dPr>
+                        <m:ctrlPr>
+                          <a:rPr lang="en-US" i="1" dirty="0">
+                            <a:latin typeface="Cambria Math" panose="02040503050406030204" pitchFamily="18" charset="0"/>
+                          </a:rPr>
+                        </m:ctrlPr>
+                      </m:dPr>
+                      <m:e>
+                        <m:r>
+                          <a:rPr lang="en-US" i="1" dirty="0">
+                            <a:latin typeface="Cambria Math" panose="02040503050406030204" pitchFamily="18" charset="0"/>
+                          </a:rPr>
+                          <m:t>−</m:t>
+                        </m:r>
+                        <m:r>
+                          <a:rPr lang="en-US" b="0" i="1" dirty="0" smtClean="0">
+                            <a:latin typeface="Cambria Math" panose="02040503050406030204" pitchFamily="18" charset="0"/>
+                          </a:rPr>
+                          <m:t>2</m:t>
+                        </m:r>
+                        <m:r>
+                          <a:rPr lang="en-US" i="1" dirty="0">
+                            <a:latin typeface="Cambria Math" panose="02040503050406030204" pitchFamily="18" charset="0"/>
+                          </a:rPr>
+                          <m:t>𝑛</m:t>
+                        </m:r>
+                        <m:sSup>
+                          <m:sSupPr>
+                            <m:ctrlPr>
+                              <a:rPr lang="en-US" i="1" dirty="0">
+                                <a:latin typeface="Cambria Math" panose="02040503050406030204" pitchFamily="18" charset="0"/>
+                              </a:rPr>
+                            </m:ctrlPr>
+                          </m:sSupPr>
+                          <m:e>
+                            <m:r>
+                              <a:rPr lang="en-US" i="1" dirty="0">
+                                <a:latin typeface="Cambria Math" panose="02040503050406030204" pitchFamily="18" charset="0"/>
+                              </a:rPr>
+                              <m:t>𝜖</m:t>
+                            </m:r>
+                          </m:e>
+                          <m:sup>
+                            <m:r>
+                              <a:rPr lang="en-US" i="1" dirty="0">
+                                <a:latin typeface="Cambria Math" panose="02040503050406030204" pitchFamily="18" charset="0"/>
+                              </a:rPr>
+                              <m:t>2</m:t>
+                            </m:r>
+                          </m:sup>
+                        </m:sSup>
+                      </m:e>
+                    </m:d>
+                  </m:oMath>
+                </a14:m>
+                <a:r>
+                  <a:rPr lang="en-US" dirty="0"/>
+                  <a:t>.</a:t>
+                </a:r>
+              </a:p>
+              <a:p>
+                <a:pPr marL="0" indent="0">
+                  <a:buNone/>
+                </a:pPr>
+                <a:r>
+                  <a:rPr lang="en-US" dirty="0"/>
+                  <a:t>With this tighter bounds, we get much better performance.</a:t>
+                </a:r>
+              </a:p>
+            </p:txBody>
+          </p:sp>
+        </mc:Choice>
+        <mc:Fallback>
+          <p:sp>
+            <p:nvSpPr>
+              <p:cNvPr id="3" name="Content Placeholder 2">
+                <a:extLst>
+                  <a:ext uri="{FF2B5EF4-FFF2-40B4-BE49-F238E27FC236}">
+                    <a16:creationId xmlns:a16="http://schemas.microsoft.com/office/drawing/2014/main" id="{0CC6E971-102B-A2E1-7381-5764B48B5FBB}"/>
+                  </a:ext>
+                </a:extLst>
+              </p:cNvPr>
+              <p:cNvSpPr>
+                <a:spLocks noGrp="1" noRot="1" noChangeAspect="1" noMove="1" noResize="1" noEditPoints="1" noAdjustHandles="1" noChangeArrowheads="1" noChangeShapeType="1" noTextEdit="1"/>
+              </p:cNvSpPr>
+              <p:nvPr>
+                <p:ph idx="1"/>
+              </p:nvPr>
+            </p:nvSpPr>
+            <p:spPr>
+              <a:blipFill>
+                <a:blip r:embed="rId2"/>
+                <a:stretch>
+                  <a:fillRect l="-1206" t="-2326" r="-1448"/>
+                </a:stretch>
+              </a:blipFill>
+            </p:spPr>
+            <p:txBody>
+              <a:bodyPr/>
+              <a:lstStyle/>
+              <a:p>
+                <a:r>
+                  <a:rPr lang="en-US">
+                    <a:noFill/>
+                  </a:rPr>
+                  <a:t> </a:t>
+                </a:r>
+              </a:p>
+            </p:txBody>
+          </p:sp>
+        </mc:Fallback>
+      </mc:AlternateContent>
+      <p:sp>
+        <p:nvSpPr>
+          <p:cNvPr id="4" name="Footer Placeholder 3">
+            <a:extLst>
+              <a:ext uri="{FF2B5EF4-FFF2-40B4-BE49-F238E27FC236}">
+                <a16:creationId xmlns:a16="http://schemas.microsoft.com/office/drawing/2014/main" id="{0F4A4634-8B38-3BBB-EE25-3AB1ED1E735B}"/>
+              </a:ext>
+            </a:extLst>
+          </p:cNvPr>
+          <p:cNvSpPr>
+            <a:spLocks noGrp="1"/>
+          </p:cNvSpPr>
+          <p:nvPr>
+            <p:ph type="ftr" sz="quarter" idx="11"/>
+          </p:nvPr>
+        </p:nvSpPr>
+        <p:spPr/>
+        <p:txBody>
+          <a:bodyPr/>
+          <a:lstStyle/>
+          <a:p>
+            <a:r>
+              <a:rPr lang="en-US"/>
+              <a:t>Myoung-jae Lee (1999). Median treatment effect in randomized trials.</a:t>
+            </a:r>
+          </a:p>
+        </p:txBody>
+      </p:sp>
+      <p:sp>
+        <p:nvSpPr>
+          <p:cNvPr id="5" name="Slide Number Placeholder 4">
+            <a:extLst>
+              <a:ext uri="{FF2B5EF4-FFF2-40B4-BE49-F238E27FC236}">
+                <a16:creationId xmlns:a16="http://schemas.microsoft.com/office/drawing/2014/main" id="{4B4A599C-CE37-6BA1-1CF6-8E6FB91E90F3}"/>
+              </a:ext>
+            </a:extLst>
+          </p:cNvPr>
+          <p:cNvSpPr>
+            <a:spLocks noGrp="1"/>
+          </p:cNvSpPr>
+          <p:nvPr>
+            <p:ph type="sldNum" sz="quarter" idx="12"/>
+          </p:nvPr>
+        </p:nvSpPr>
+        <p:spPr/>
+        <p:txBody>
+          <a:bodyPr/>
+          <a:lstStyle/>
+          <a:p>
+            <a:fld id="{B9021C99-F081-FD4B-9146-F8976D51EC28}" type="slidenum">
+              <a:rPr lang="en-US" smtClean="0"/>
+              <a:t>17</a:t>
+            </a:fld>
+            <a:endParaRPr lang="en-US"/>
+          </a:p>
+        </p:txBody>
+      </p:sp>
+    </p:spTree>
+    <p:extLst>
+      <p:ext uri="{BB962C8B-B14F-4D97-AF65-F5344CB8AC3E}">
+        <p14:creationId xmlns:p14="http://schemas.microsoft.com/office/powerpoint/2010/main" val="2949026671"/>
+      </p:ext>
+    </p:extLst>
+  </p:cSld>
+  <p:clrMapOvr>
+    <a:masterClrMapping/>
+  </p:clrMapOvr>
+</p:sld>
+</file>
+
+<file path=ppt/slides/slide18.xml><?xml version="1.0" encoding="utf-8"?>
+<p:sld xmlns:a="http://schemas.openxmlformats.org/drawingml/2006/main" xmlns:r="http://schemas.openxmlformats.org/officeDocument/2006/relationships" xmlns:p="http://schemas.openxmlformats.org/presentationml/2006/main">
+  <p:cSld>
+    <p:spTree>
+      <p:nvGrpSpPr>
+        <p:cNvPr id="1" name=""/>
+        <p:cNvGrpSpPr/>
+        <p:nvPr/>
+      </p:nvGrpSpPr>
+      <p:grpSpPr>
+        <a:xfrm>
+          <a:off x="0" y="0"/>
+          <a:ext cx="0" cy="0"/>
+          <a:chOff x="0" y="0"/>
+          <a:chExt cx="0" cy="0"/>
+        </a:xfrm>
+      </p:grpSpPr>
+      <p:sp>
+        <p:nvSpPr>
+          <p:cNvPr id="2" name="Title 1">
+            <a:extLst>
+              <a:ext uri="{FF2B5EF4-FFF2-40B4-BE49-F238E27FC236}">
+                <a16:creationId xmlns:a16="http://schemas.microsoft.com/office/drawing/2014/main" id="{EE6C86FF-8F11-D3BC-24C2-1ABE71FC8E56}"/>
+              </a:ext>
+            </a:extLst>
+          </p:cNvPr>
+          <p:cNvSpPr>
+            <a:spLocks noGrp="1"/>
+          </p:cNvSpPr>
+          <p:nvPr>
+            <p:ph type="title"/>
+          </p:nvPr>
+        </p:nvSpPr>
+        <p:spPr/>
+        <p:txBody>
+          <a:bodyPr/>
+          <a:lstStyle/>
+          <a:p>
+            <a:r>
+              <a:rPr lang="en-US" dirty="0"/>
+              <a:t>Tighter Confidence Bands</a:t>
+            </a:r>
+          </a:p>
+        </p:txBody>
+      </p:sp>
+      <p:pic>
+        <p:nvPicPr>
+          <p:cNvPr id="7" name="Content Placeholder 6" descr="A graph of a graph&#10;&#10;AI-generated content may be incorrect.">
+            <a:extLst>
+              <a:ext uri="{FF2B5EF4-FFF2-40B4-BE49-F238E27FC236}">
+                <a16:creationId xmlns:a16="http://schemas.microsoft.com/office/drawing/2014/main" id="{B9E82405-0BCE-7BA4-233D-52680DCF3300}"/>
+              </a:ext>
+            </a:extLst>
+          </p:cNvPr>
+          <p:cNvPicPr>
+            <a:picLocks noGrp="1" noChangeAspect="1"/>
+          </p:cNvPicPr>
+          <p:nvPr>
+            <p:ph idx="1"/>
+          </p:nvPr>
+        </p:nvPicPr>
+        <p:blipFill>
+          <a:blip r:embed="rId2"/>
+          <a:stretch>
+            <a:fillRect/>
+          </a:stretch>
+        </p:blipFill>
+        <p:spPr>
+          <a:xfrm>
+            <a:off x="509754" y="1698570"/>
+            <a:ext cx="3528846" cy="3528846"/>
+          </a:xfrm>
+        </p:spPr>
+      </p:pic>
+      <p:sp>
+        <p:nvSpPr>
+          <p:cNvPr id="5" name="Slide Number Placeholder 4">
+            <a:extLst>
+              <a:ext uri="{FF2B5EF4-FFF2-40B4-BE49-F238E27FC236}">
+                <a16:creationId xmlns:a16="http://schemas.microsoft.com/office/drawing/2014/main" id="{8A30785E-84BE-720C-22A0-FADE809128B1}"/>
+              </a:ext>
+            </a:extLst>
+          </p:cNvPr>
+          <p:cNvSpPr>
+            <a:spLocks noGrp="1"/>
+          </p:cNvSpPr>
+          <p:nvPr>
+            <p:ph type="sldNum" sz="quarter" idx="12"/>
+          </p:nvPr>
+        </p:nvSpPr>
+        <p:spPr/>
+        <p:txBody>
+          <a:bodyPr/>
+          <a:lstStyle/>
+          <a:p>
+            <a:fld id="{B9021C99-F081-FD4B-9146-F8976D51EC28}" type="slidenum">
+              <a:rPr lang="en-US" smtClean="0"/>
+              <a:t>18</a:t>
+            </a:fld>
+            <a:endParaRPr lang="en-US"/>
+          </a:p>
+        </p:txBody>
+      </p:sp>
+      <p:pic>
+        <p:nvPicPr>
+          <p:cNvPr id="9" name="Picture 8" descr="A graph of a graph&#10;&#10;AI-generated content may be incorrect.">
+            <a:extLst>
+              <a:ext uri="{FF2B5EF4-FFF2-40B4-BE49-F238E27FC236}">
+                <a16:creationId xmlns:a16="http://schemas.microsoft.com/office/drawing/2014/main" id="{842A241E-FE87-1B9F-DCCA-16E16832C610}"/>
+              </a:ext>
+            </a:extLst>
+          </p:cNvPr>
+          <p:cNvPicPr>
+            <a:picLocks noChangeAspect="1"/>
+          </p:cNvPicPr>
+          <p:nvPr/>
+        </p:nvPicPr>
+        <p:blipFill>
+          <a:blip r:embed="rId3"/>
+          <a:stretch>
+            <a:fillRect/>
+          </a:stretch>
+        </p:blipFill>
+        <p:spPr>
+          <a:xfrm>
+            <a:off x="4539811" y="1720904"/>
+            <a:ext cx="3528846" cy="3528846"/>
+          </a:xfrm>
+          <a:prstGeom prst="rect">
+            <a:avLst/>
+          </a:prstGeom>
+        </p:spPr>
+      </p:pic>
+      <p:pic>
+        <p:nvPicPr>
+          <p:cNvPr id="11" name="Picture 10" descr="A graph of a number of individuals&#10;&#10;AI-generated content may be incorrect.">
+            <a:extLst>
+              <a:ext uri="{FF2B5EF4-FFF2-40B4-BE49-F238E27FC236}">
+                <a16:creationId xmlns:a16="http://schemas.microsoft.com/office/drawing/2014/main" id="{21C4FF91-0662-1E31-28C7-EA5EEF0C2AAA}"/>
+              </a:ext>
+            </a:extLst>
+          </p:cNvPr>
+          <p:cNvPicPr>
+            <a:picLocks noChangeAspect="1"/>
+          </p:cNvPicPr>
+          <p:nvPr/>
+        </p:nvPicPr>
+        <p:blipFill>
+          <a:blip r:embed="rId4"/>
+          <a:stretch>
+            <a:fillRect/>
+          </a:stretch>
+        </p:blipFill>
+        <p:spPr>
+          <a:xfrm>
+            <a:off x="8153400" y="1698570"/>
+            <a:ext cx="3528846" cy="3528846"/>
+          </a:xfrm>
+          <a:prstGeom prst="rect">
+            <a:avLst/>
+          </a:prstGeom>
+        </p:spPr>
+      </p:pic>
+      <p:sp>
+        <p:nvSpPr>
+          <p:cNvPr id="12" name="TextBox 11">
+            <a:extLst>
+              <a:ext uri="{FF2B5EF4-FFF2-40B4-BE49-F238E27FC236}">
+                <a16:creationId xmlns:a16="http://schemas.microsoft.com/office/drawing/2014/main" id="{597E0142-5C47-2D5A-8405-765E59156D75}"/>
+              </a:ext>
+            </a:extLst>
+          </p:cNvPr>
+          <p:cNvSpPr txBox="1"/>
+          <p:nvPr/>
+        </p:nvSpPr>
+        <p:spPr>
+          <a:xfrm>
+            <a:off x="838200" y="5249750"/>
+            <a:ext cx="9046779" cy="369332"/>
+          </a:xfrm>
+          <a:prstGeom prst="rect">
+            <a:avLst/>
+          </a:prstGeom>
+          <a:noFill/>
+        </p:spPr>
+        <p:txBody>
+          <a:bodyPr wrap="square" rtlCol="0">
+            <a:spAutoFit/>
+          </a:bodyPr>
+          <a:lstStyle/>
+          <a:p>
+            <a:r>
+              <a:rPr lang="en-US" dirty="0"/>
+              <a:t>Better widths for much less sample size m = 100, 500, and 1000.</a:t>
+            </a:r>
+          </a:p>
+        </p:txBody>
+      </p:sp>
+    </p:spTree>
+    <p:extLst>
+      <p:ext uri="{BB962C8B-B14F-4D97-AF65-F5344CB8AC3E}">
+        <p14:creationId xmlns:p14="http://schemas.microsoft.com/office/powerpoint/2010/main" val="3703705853"/>
+      </p:ext>
+    </p:extLst>
+  </p:cSld>
+  <p:clrMapOvr>
+    <a:masterClrMapping/>
+  </p:clrMapOvr>
+</p:sld>
+</file>
+
+<file path=ppt/slides/slide19.xml><?xml version="1.0" encoding="utf-8"?>
+<p:sld xmlns:a="http://schemas.openxmlformats.org/drawingml/2006/main" xmlns:r="http://schemas.openxmlformats.org/officeDocument/2006/relationships" xmlns:p="http://schemas.openxmlformats.org/presentationml/2006/main">
+  <p:cSld>
+    <p:spTree>
+      <p:nvGrpSpPr>
+        <p:cNvPr id="1" name=""/>
+        <p:cNvGrpSpPr/>
+        <p:nvPr/>
+      </p:nvGrpSpPr>
+      <p:grpSpPr>
+        <a:xfrm>
+          <a:off x="0" y="0"/>
+          <a:ext cx="0" cy="0"/>
+          <a:chOff x="0" y="0"/>
+          <a:chExt cx="0" cy="0"/>
+        </a:xfrm>
+      </p:grpSpPr>
+      <p:sp>
+        <p:nvSpPr>
+          <p:cNvPr id="2" name="Title 1">
+            <a:extLst>
+              <a:ext uri="{FF2B5EF4-FFF2-40B4-BE49-F238E27FC236}">
+                <a16:creationId xmlns:a16="http://schemas.microsoft.com/office/drawing/2014/main" id="{62D080C4-FE9A-DB17-6DE1-0D12AD0B98D4}"/>
+              </a:ext>
+            </a:extLst>
+          </p:cNvPr>
+          <p:cNvSpPr>
+            <a:spLocks noGrp="1"/>
+          </p:cNvSpPr>
+          <p:nvPr>
+            <p:ph type="title"/>
+          </p:nvPr>
+        </p:nvSpPr>
+        <p:spPr/>
+        <p:txBody>
+          <a:bodyPr/>
+          <a:lstStyle/>
+          <a:p>
+            <a:r>
+              <a:rPr lang="en-US" dirty="0"/>
+              <a:t>Comparing with RI (Tighter Bounds)</a:t>
+            </a:r>
+          </a:p>
+        </p:txBody>
+      </p:sp>
+      <p:sp>
+        <p:nvSpPr>
+          <p:cNvPr id="3" name="Content Placeholder 2">
+            <a:extLst>
+              <a:ext uri="{FF2B5EF4-FFF2-40B4-BE49-F238E27FC236}">
+                <a16:creationId xmlns:a16="http://schemas.microsoft.com/office/drawing/2014/main" id="{B414D836-A42C-EE37-9B8A-C440D3B08CA3}"/>
+              </a:ext>
+            </a:extLst>
+          </p:cNvPr>
+          <p:cNvSpPr>
+            <a:spLocks noGrp="1"/>
+          </p:cNvSpPr>
+          <p:nvPr>
+            <p:ph idx="1"/>
+          </p:nvPr>
+        </p:nvSpPr>
+        <p:spPr/>
+        <p:txBody>
+          <a:bodyPr/>
+          <a:lstStyle/>
+          <a:p>
+            <a:endParaRPr lang="en-US"/>
+          </a:p>
+        </p:txBody>
+      </p:sp>
+      <p:sp>
+        <p:nvSpPr>
+          <p:cNvPr id="4" name="Footer Placeholder 3">
+            <a:extLst>
+              <a:ext uri="{FF2B5EF4-FFF2-40B4-BE49-F238E27FC236}">
+                <a16:creationId xmlns:a16="http://schemas.microsoft.com/office/drawing/2014/main" id="{FF077462-373B-30E9-F3A8-0B90EE49423A}"/>
+              </a:ext>
+            </a:extLst>
+          </p:cNvPr>
+          <p:cNvSpPr>
+            <a:spLocks noGrp="1"/>
+          </p:cNvSpPr>
+          <p:nvPr>
+            <p:ph type="ftr" sz="quarter" idx="11"/>
+          </p:nvPr>
+        </p:nvSpPr>
+        <p:spPr/>
+        <p:txBody>
+          <a:bodyPr/>
+          <a:lstStyle/>
+          <a:p>
+            <a:r>
+              <a:rPr lang="en-US"/>
+              <a:t>Myoung-jae Lee (1999). Median treatment effect in randomized trials.</a:t>
+            </a:r>
+          </a:p>
+        </p:txBody>
+      </p:sp>
+      <p:sp>
+        <p:nvSpPr>
+          <p:cNvPr id="5" name="Slide Number Placeholder 4">
+            <a:extLst>
+              <a:ext uri="{FF2B5EF4-FFF2-40B4-BE49-F238E27FC236}">
+                <a16:creationId xmlns:a16="http://schemas.microsoft.com/office/drawing/2014/main" id="{1F3445B9-2D0E-1AD4-4FB6-DA0701D0B5EB}"/>
+              </a:ext>
+            </a:extLst>
+          </p:cNvPr>
+          <p:cNvSpPr>
+            <a:spLocks noGrp="1"/>
+          </p:cNvSpPr>
+          <p:nvPr>
+            <p:ph type="sldNum" sz="quarter" idx="12"/>
+          </p:nvPr>
+        </p:nvSpPr>
+        <p:spPr/>
+        <p:txBody>
+          <a:bodyPr/>
+          <a:lstStyle/>
+          <a:p>
+            <a:fld id="{B9021C99-F081-FD4B-9146-F8976D51EC28}" type="slidenum">
+              <a:rPr lang="en-US" smtClean="0"/>
+              <a:t>19</a:t>
+            </a:fld>
+            <a:endParaRPr lang="en-US"/>
+          </a:p>
+        </p:txBody>
+      </p:sp>
+    </p:spTree>
+    <p:extLst>
+      <p:ext uri="{BB962C8B-B14F-4D97-AF65-F5344CB8AC3E}">
+        <p14:creationId xmlns:p14="http://schemas.microsoft.com/office/powerpoint/2010/main" val="4198159789"/>
+      </p:ext>
+    </p:extLst>
+  </p:cSld>
+  <p:clrMapOvr>
+    <a:masterClrMapping/>
+  </p:clrMapOvr>
 </p:sld>
 </file>
 
@@ -6872,6 +9607,194 @@
     <p:extLst>
       <p:ext uri="{BB962C8B-B14F-4D97-AF65-F5344CB8AC3E}">
         <p14:creationId xmlns:p14="http://schemas.microsoft.com/office/powerpoint/2010/main" val="73136900"/>
+      </p:ext>
+    </p:extLst>
+  </p:cSld>
+  <p:clrMapOvr>
+    <a:masterClrMapping/>
+  </p:clrMapOvr>
+</p:sld>
+</file>
+
+<file path=ppt/slides/slide20.xml><?xml version="1.0" encoding="utf-8"?>
+<p:sld xmlns:a="http://schemas.openxmlformats.org/drawingml/2006/main" xmlns:r="http://schemas.openxmlformats.org/officeDocument/2006/relationships" xmlns:p="http://schemas.openxmlformats.org/presentationml/2006/main">
+  <p:cSld>
+    <p:spTree>
+      <p:nvGrpSpPr>
+        <p:cNvPr id="1" name=""/>
+        <p:cNvGrpSpPr/>
+        <p:nvPr/>
+      </p:nvGrpSpPr>
+      <p:grpSpPr>
+        <a:xfrm>
+          <a:off x="0" y="0"/>
+          <a:ext cx="0" cy="0"/>
+          <a:chOff x="0" y="0"/>
+          <a:chExt cx="0" cy="0"/>
+        </a:xfrm>
+      </p:grpSpPr>
+      <p:sp>
+        <p:nvSpPr>
+          <p:cNvPr id="2" name="Title 1">
+            <a:extLst>
+              <a:ext uri="{FF2B5EF4-FFF2-40B4-BE49-F238E27FC236}">
+                <a16:creationId xmlns:a16="http://schemas.microsoft.com/office/drawing/2014/main" id="{F1D10985-3873-56D6-AC64-D094C127F2A1}"/>
+              </a:ext>
+            </a:extLst>
+          </p:cNvPr>
+          <p:cNvSpPr>
+            <a:spLocks noGrp="1"/>
+          </p:cNvSpPr>
+          <p:nvPr>
+            <p:ph type="title"/>
+          </p:nvPr>
+        </p:nvSpPr>
+        <p:spPr/>
+        <p:txBody>
+          <a:bodyPr/>
+          <a:lstStyle/>
+          <a:p>
+            <a:r>
+              <a:rPr lang="en-US" dirty="0"/>
+              <a:t>Conclusion</a:t>
+            </a:r>
+          </a:p>
+        </p:txBody>
+      </p:sp>
+      <p:sp>
+        <p:nvSpPr>
+          <p:cNvPr id="3" name="Content Placeholder 2">
+            <a:extLst>
+              <a:ext uri="{FF2B5EF4-FFF2-40B4-BE49-F238E27FC236}">
+                <a16:creationId xmlns:a16="http://schemas.microsoft.com/office/drawing/2014/main" id="{40B11FB5-A3A4-75C0-BDEA-F7F15B210A2C}"/>
+              </a:ext>
+            </a:extLst>
+          </p:cNvPr>
+          <p:cNvSpPr>
+            <a:spLocks noGrp="1"/>
+          </p:cNvSpPr>
+          <p:nvPr>
+            <p:ph idx="1"/>
+          </p:nvPr>
+        </p:nvSpPr>
+        <p:spPr/>
+        <p:txBody>
+          <a:bodyPr/>
+          <a:lstStyle/>
+          <a:p>
+            <a:pPr marL="0" indent="0">
+              <a:buNone/>
+            </a:pPr>
+            <a:r>
+              <a:rPr lang="en-US" dirty="0"/>
+              <a:t>In this presentation we</a:t>
+            </a:r>
+          </a:p>
+          <a:p>
+            <a:r>
+              <a:rPr lang="en-US" dirty="0"/>
+              <a:t>Confidence regions for distribution of ITE that are</a:t>
+            </a:r>
+          </a:p>
+          <a:p>
+            <a:pPr lvl="1"/>
+            <a:r>
+              <a:rPr lang="en-US" dirty="0"/>
+              <a:t>Finite sample exact</a:t>
+            </a:r>
+          </a:p>
+          <a:p>
+            <a:pPr lvl="1"/>
+            <a:r>
+              <a:rPr lang="en-US" dirty="0"/>
+              <a:t>Closed form</a:t>
+            </a:r>
+          </a:p>
+          <a:p>
+            <a:pPr lvl="1"/>
+            <a:r>
+              <a:rPr lang="en-US" dirty="0"/>
+              <a:t>Stronger than previous efforts in randomization inference</a:t>
+            </a:r>
+          </a:p>
+          <a:p>
+            <a:r>
+              <a:rPr lang="en-US" dirty="0"/>
+              <a:t>A stronger tool for inference of ITE helps with analysis of heterogeneous treatments.</a:t>
+            </a:r>
+          </a:p>
+          <a:p>
+            <a:r>
+              <a:rPr lang="en-US" dirty="0"/>
+              <a:t>Work on strengthening the DKW bound for stronger inference.</a:t>
+            </a:r>
+          </a:p>
+          <a:p>
+            <a:endParaRPr lang="en-US" dirty="0"/>
+          </a:p>
+        </p:txBody>
+      </p:sp>
+      <p:sp>
+        <p:nvSpPr>
+          <p:cNvPr id="4" name="Footer Placeholder 3">
+            <a:extLst>
+              <a:ext uri="{FF2B5EF4-FFF2-40B4-BE49-F238E27FC236}">
+                <a16:creationId xmlns:a16="http://schemas.microsoft.com/office/drawing/2014/main" id="{130E81B8-2208-29C1-58F8-3B91D6E1F818}"/>
+              </a:ext>
+            </a:extLst>
+          </p:cNvPr>
+          <p:cNvSpPr>
+            <a:spLocks noGrp="1"/>
+          </p:cNvSpPr>
+          <p:nvPr>
+            <p:ph type="ftr" sz="quarter" idx="11"/>
+          </p:nvPr>
+        </p:nvSpPr>
+        <p:spPr/>
+        <p:txBody>
+          <a:bodyPr/>
+          <a:lstStyle/>
+          <a:p>
+            <a:r>
+              <a:rPr lang="en-US"/>
+              <a:t>Myoung-jae Lee (1999). Median treatment effect in randomized trials.</a:t>
+            </a:r>
+          </a:p>
+        </p:txBody>
+      </p:sp>
+      <p:sp>
+        <p:nvSpPr>
+          <p:cNvPr id="5" name="Slide Number Placeholder 4">
+            <a:extLst>
+              <a:ext uri="{FF2B5EF4-FFF2-40B4-BE49-F238E27FC236}">
+                <a16:creationId xmlns:a16="http://schemas.microsoft.com/office/drawing/2014/main" id="{33A09571-5E74-35F9-E57E-D3B61E573F54}"/>
+              </a:ext>
+            </a:extLst>
+          </p:cNvPr>
+          <p:cNvSpPr>
+            <a:spLocks noGrp="1"/>
+          </p:cNvSpPr>
+          <p:nvPr>
+            <p:ph type="sldNum" sz="quarter" idx="12"/>
+          </p:nvPr>
+        </p:nvSpPr>
+        <p:spPr/>
+        <p:txBody>
+          <a:bodyPr/>
+          <a:lstStyle/>
+          <a:p>
+            <a:fld id="{B9021C99-F081-FD4B-9146-F8976D51EC28}" type="slidenum">
+              <a:rPr lang="en-US" smtClean="0"/>
+              <a:t>20</a:t>
+            </a:fld>
+            <a:endParaRPr lang="en-US"/>
+          </a:p>
+        </p:txBody>
+      </p:sp>
+    </p:spTree>
+    <p:extLst>
+      <p:ext uri="{BB962C8B-B14F-4D97-AF65-F5344CB8AC3E}">
+        <p14:creationId xmlns:p14="http://schemas.microsoft.com/office/powerpoint/2010/main" val="741735840"/>
       </p:ext>
     </p:extLst>
   </p:cSld>
